--- a/docs/final presentation.pptx
+++ b/docs/final presentation.pptx
@@ -267,7 +267,7 @@
           <a:p>
             <a:fld id="{C8C63B6A-6BCC-454B-8859-8F44071057AF}" type="datetimeFigureOut">
               <a:rPr lang="en-GB" smtClean="0"/>
-              <a:t>19/04/2026</a:t>
+              <a:t>28/04/2026</a:t>
             </a:fld>
             <a:endParaRPr lang="en-GB"/>
           </a:p>
@@ -467,7 +467,7 @@
           <a:p>
             <a:fld id="{C8C63B6A-6BCC-454B-8859-8F44071057AF}" type="datetimeFigureOut">
               <a:rPr lang="en-GB" smtClean="0"/>
-              <a:t>19/04/2026</a:t>
+              <a:t>28/04/2026</a:t>
             </a:fld>
             <a:endParaRPr lang="en-GB"/>
           </a:p>
@@ -677,7 +677,7 @@
           <a:p>
             <a:fld id="{C8C63B6A-6BCC-454B-8859-8F44071057AF}" type="datetimeFigureOut">
               <a:rPr lang="en-GB" smtClean="0"/>
-              <a:t>19/04/2026</a:t>
+              <a:t>28/04/2026</a:t>
             </a:fld>
             <a:endParaRPr lang="en-GB"/>
           </a:p>
@@ -877,7 +877,7 @@
           <a:p>
             <a:fld id="{C8C63B6A-6BCC-454B-8859-8F44071057AF}" type="datetimeFigureOut">
               <a:rPr lang="en-GB" smtClean="0"/>
-              <a:t>19/04/2026</a:t>
+              <a:t>28/04/2026</a:t>
             </a:fld>
             <a:endParaRPr lang="en-GB"/>
           </a:p>
@@ -1153,7 +1153,7 @@
           <a:p>
             <a:fld id="{C8C63B6A-6BCC-454B-8859-8F44071057AF}" type="datetimeFigureOut">
               <a:rPr lang="en-GB" smtClean="0"/>
-              <a:t>19/04/2026</a:t>
+              <a:t>28/04/2026</a:t>
             </a:fld>
             <a:endParaRPr lang="en-GB"/>
           </a:p>
@@ -1421,7 +1421,7 @@
           <a:p>
             <a:fld id="{C8C63B6A-6BCC-454B-8859-8F44071057AF}" type="datetimeFigureOut">
               <a:rPr lang="en-GB" smtClean="0"/>
-              <a:t>19/04/2026</a:t>
+              <a:t>28/04/2026</a:t>
             </a:fld>
             <a:endParaRPr lang="en-GB"/>
           </a:p>
@@ -1836,7 +1836,7 @@
           <a:p>
             <a:fld id="{C8C63B6A-6BCC-454B-8859-8F44071057AF}" type="datetimeFigureOut">
               <a:rPr lang="en-GB" smtClean="0"/>
-              <a:t>19/04/2026</a:t>
+              <a:t>28/04/2026</a:t>
             </a:fld>
             <a:endParaRPr lang="en-GB"/>
           </a:p>
@@ -1978,7 +1978,7 @@
           <a:p>
             <a:fld id="{C8C63B6A-6BCC-454B-8859-8F44071057AF}" type="datetimeFigureOut">
               <a:rPr lang="en-GB" smtClean="0"/>
-              <a:t>19/04/2026</a:t>
+              <a:t>28/04/2026</a:t>
             </a:fld>
             <a:endParaRPr lang="en-GB"/>
           </a:p>
@@ -2091,7 +2091,7 @@
           <a:p>
             <a:fld id="{C8C63B6A-6BCC-454B-8859-8F44071057AF}" type="datetimeFigureOut">
               <a:rPr lang="en-GB" smtClean="0"/>
-              <a:t>19/04/2026</a:t>
+              <a:t>28/04/2026</a:t>
             </a:fld>
             <a:endParaRPr lang="en-GB"/>
           </a:p>
@@ -2404,7 +2404,7 @@
           <a:p>
             <a:fld id="{C8C63B6A-6BCC-454B-8859-8F44071057AF}" type="datetimeFigureOut">
               <a:rPr lang="en-GB" smtClean="0"/>
-              <a:t>19/04/2026</a:t>
+              <a:t>28/04/2026</a:t>
             </a:fld>
             <a:endParaRPr lang="en-GB"/>
           </a:p>
@@ -2693,7 +2693,7 @@
           <a:p>
             <a:fld id="{C8C63B6A-6BCC-454B-8859-8F44071057AF}" type="datetimeFigureOut">
               <a:rPr lang="en-GB" smtClean="0"/>
-              <a:t>19/04/2026</a:t>
+              <a:t>28/04/2026</a:t>
             </a:fld>
             <a:endParaRPr lang="en-GB"/>
           </a:p>
@@ -2936,7 +2936,7 @@
           <a:p>
             <a:fld id="{C8C63B6A-6BCC-454B-8859-8F44071057AF}" type="datetimeFigureOut">
               <a:rPr lang="en-GB" smtClean="0"/>
-              <a:t>19/04/2026</a:t>
+              <a:t>28/04/2026</a:t>
             </a:fld>
             <a:endParaRPr lang="en-GB"/>
           </a:p>
@@ -3549,14 +3549,215 @@
         <p:spPr>
           <a:xfrm>
             <a:off x="742950" y="559952"/>
-            <a:ext cx="5353050" cy="5860750"/>
+            <a:ext cx="6007654" cy="5860750"/>
           </a:xfrm>
         </p:spPr>
         <p:txBody>
           <a:bodyPr>
-            <a:normAutofit/>
+            <a:normAutofit fontScale="92500" lnSpcReduction="10000"/>
           </a:bodyPr>
           <a:lstStyle/>
+          <a:p>
+            <a:pPr marL="0" indent="0">
+              <a:buNone/>
+              <a:defRPr/>
+            </a:pPr>
+            <a:r>
+              <a:rPr lang="en-GB" sz="1600" dirty="0">
+                <a:solidFill>
+                  <a:prstClr val="black"/>
+                </a:solidFill>
+                <a:latin typeface="JetBrains Mono" panose="02000009000000000000" pitchFamily="49" charset="0"/>
+                <a:ea typeface="JetBrains Mono" panose="02000009000000000000" pitchFamily="49" charset="0"/>
+                <a:cs typeface="JetBrains Mono" panose="02000009000000000000" pitchFamily="49" charset="0"/>
+              </a:rPr>
+              <a:t>RV32I base integer instructions (majority)</a:t>
+            </a:r>
+          </a:p>
+          <a:p>
+            <a:pPr marL="457200" lvl="1" indent="0">
+              <a:buNone/>
+              <a:defRPr/>
+            </a:pPr>
+            <a:r>
+              <a:rPr lang="en-GB" sz="1100" dirty="0">
+                <a:solidFill>
+                  <a:prstClr val="black"/>
+                </a:solidFill>
+                <a:latin typeface="JetBrains Mono" panose="02000009000000000000" pitchFamily="49" charset="0"/>
+                <a:ea typeface="JetBrains Mono" panose="02000009000000000000" pitchFamily="49" charset="0"/>
+                <a:cs typeface="JetBrains Mono" panose="02000009000000000000" pitchFamily="49" charset="0"/>
+              </a:rPr>
+              <a:t>no </a:t>
+            </a:r>
+            <a:r>
+              <a:rPr lang="en-GB" sz="1100" dirty="0" err="1">
+                <a:solidFill>
+                  <a:prstClr val="black"/>
+                </a:solidFill>
+                <a:latin typeface="JetBrains Mono" panose="02000009000000000000" pitchFamily="49" charset="0"/>
+                <a:ea typeface="JetBrains Mono" panose="02000009000000000000" pitchFamily="49" charset="0"/>
+                <a:cs typeface="JetBrains Mono" panose="02000009000000000000" pitchFamily="49" charset="0"/>
+              </a:rPr>
+              <a:t>ebreak</a:t>
+            </a:r>
+            <a:r>
+              <a:rPr lang="en-GB" sz="1100" dirty="0">
+                <a:solidFill>
+                  <a:prstClr val="black"/>
+                </a:solidFill>
+                <a:latin typeface="JetBrains Mono" panose="02000009000000000000" pitchFamily="49" charset="0"/>
+                <a:ea typeface="JetBrains Mono" panose="02000009000000000000" pitchFamily="49" charset="0"/>
+                <a:cs typeface="JetBrains Mono" panose="02000009000000000000" pitchFamily="49" charset="0"/>
+              </a:rPr>
+              <a:t>/</a:t>
+            </a:r>
+            <a:r>
+              <a:rPr lang="en-GB" sz="1100" dirty="0" err="1">
+                <a:solidFill>
+                  <a:prstClr val="black"/>
+                </a:solidFill>
+                <a:latin typeface="JetBrains Mono" panose="02000009000000000000" pitchFamily="49" charset="0"/>
+                <a:ea typeface="JetBrains Mono" panose="02000009000000000000" pitchFamily="49" charset="0"/>
+                <a:cs typeface="JetBrains Mono" panose="02000009000000000000" pitchFamily="49" charset="0"/>
+              </a:rPr>
+              <a:t>ecall</a:t>
+            </a:r>
+            <a:r>
+              <a:rPr lang="en-GB" sz="1100" dirty="0">
+                <a:solidFill>
+                  <a:prstClr val="black"/>
+                </a:solidFill>
+                <a:latin typeface="JetBrains Mono" panose="02000009000000000000" pitchFamily="49" charset="0"/>
+                <a:ea typeface="JetBrains Mono" panose="02000009000000000000" pitchFamily="49" charset="0"/>
+                <a:cs typeface="JetBrains Mono" panose="02000009000000000000" pitchFamily="49" charset="0"/>
+              </a:rPr>
+              <a:t>/fence/</a:t>
+            </a:r>
+            <a:r>
+              <a:rPr lang="en-GB" sz="1100" dirty="0" err="1">
+                <a:solidFill>
+                  <a:prstClr val="black"/>
+                </a:solidFill>
+                <a:latin typeface="JetBrains Mono" panose="02000009000000000000" pitchFamily="49" charset="0"/>
+                <a:ea typeface="JetBrains Mono" panose="02000009000000000000" pitchFamily="49" charset="0"/>
+                <a:cs typeface="JetBrains Mono" panose="02000009000000000000" pitchFamily="49" charset="0"/>
+              </a:rPr>
+              <a:t>csr</a:t>
+            </a:r>
+            <a:endParaRPr lang="en-GB" sz="1100" dirty="0">
+              <a:solidFill>
+                <a:prstClr val="black"/>
+              </a:solidFill>
+              <a:latin typeface="JetBrains Mono" panose="02000009000000000000" pitchFamily="49" charset="0"/>
+              <a:ea typeface="JetBrains Mono" panose="02000009000000000000" pitchFamily="49" charset="0"/>
+              <a:cs typeface="JetBrains Mono" panose="02000009000000000000" pitchFamily="49" charset="0"/>
+            </a:endParaRPr>
+          </a:p>
+          <a:p>
+            <a:pPr marL="0" lvl="0" indent="0">
+              <a:buNone/>
+              <a:defRPr/>
+            </a:pPr>
+            <a:r>
+              <a:rPr lang="en-GB" sz="1600" dirty="0">
+                <a:solidFill>
+                  <a:prstClr val="black"/>
+                </a:solidFill>
+                <a:latin typeface="JetBrains Mono" panose="02000009000000000000" pitchFamily="49" charset="0"/>
+                <a:ea typeface="JetBrains Mono" panose="02000009000000000000" pitchFamily="49" charset="0"/>
+                <a:cs typeface="JetBrains Mono" panose="02000009000000000000" pitchFamily="49" charset="0"/>
+              </a:rPr>
+              <a:t>RV32M multiply/divide extension (full)</a:t>
+            </a:r>
+          </a:p>
+          <a:p>
+            <a:pPr marL="0" indent="0">
+              <a:buNone/>
+              <a:defRPr/>
+            </a:pPr>
+            <a:r>
+              <a:rPr lang="en-GB" sz="1600" dirty="0">
+                <a:solidFill>
+                  <a:prstClr val="black"/>
+                </a:solidFill>
+                <a:latin typeface="JetBrains Mono" panose="02000009000000000000" pitchFamily="49" charset="0"/>
+                <a:ea typeface="JetBrains Mono" panose="02000009000000000000" pitchFamily="49" charset="0"/>
+                <a:cs typeface="JetBrains Mono" panose="02000009000000000000" pitchFamily="49" charset="0"/>
+              </a:rPr>
+              <a:t>RV32F floating-point extension (majority)</a:t>
+            </a:r>
+          </a:p>
+          <a:p>
+            <a:pPr marL="457200" lvl="1" indent="0">
+              <a:buNone/>
+              <a:defRPr/>
+            </a:pPr>
+            <a:r>
+              <a:rPr lang="en-GB" sz="1100" dirty="0">
+                <a:solidFill>
+                  <a:prstClr val="black"/>
+                </a:solidFill>
+                <a:latin typeface="JetBrains Mono" panose="02000009000000000000" pitchFamily="49" charset="0"/>
+                <a:ea typeface="JetBrains Mono" panose="02000009000000000000" pitchFamily="49" charset="0"/>
+                <a:cs typeface="JetBrains Mono" panose="02000009000000000000" pitchFamily="49" charset="0"/>
+              </a:rPr>
+              <a:t>no flags/</a:t>
+            </a:r>
+            <a:r>
+              <a:rPr lang="en-GB" sz="1100" dirty="0" err="1">
+                <a:solidFill>
+                  <a:prstClr val="black"/>
+                </a:solidFill>
+                <a:latin typeface="JetBrains Mono" panose="02000009000000000000" pitchFamily="49" charset="0"/>
+                <a:ea typeface="JetBrains Mono" panose="02000009000000000000" pitchFamily="49" charset="0"/>
+                <a:cs typeface="JetBrains Mono" panose="02000009000000000000" pitchFamily="49" charset="0"/>
+              </a:rPr>
+              <a:t>fcsr</a:t>
+            </a:r>
+            <a:endParaRPr lang="en-GB" sz="1100" dirty="0">
+              <a:solidFill>
+                <a:prstClr val="black"/>
+              </a:solidFill>
+              <a:latin typeface="JetBrains Mono" panose="02000009000000000000" pitchFamily="49" charset="0"/>
+              <a:ea typeface="JetBrains Mono" panose="02000009000000000000" pitchFamily="49" charset="0"/>
+              <a:cs typeface="JetBrains Mono" panose="02000009000000000000" pitchFamily="49" charset="0"/>
+            </a:endParaRPr>
+          </a:p>
+          <a:p>
+            <a:pPr marL="0" indent="0">
+              <a:buNone/>
+              <a:defRPr/>
+            </a:pPr>
+            <a:r>
+              <a:rPr lang="en-GB" sz="1600" dirty="0">
+                <a:solidFill>
+                  <a:prstClr val="black"/>
+                </a:solidFill>
+                <a:latin typeface="JetBrains Mono" panose="02000009000000000000" pitchFamily="49" charset="0"/>
+                <a:ea typeface="JetBrains Mono" panose="02000009000000000000" pitchFamily="49" charset="0"/>
+                <a:cs typeface="JetBrains Mono" panose="02000009000000000000" pitchFamily="49" charset="0"/>
+              </a:rPr>
+              <a:t>RV32V vector extension (limited)</a:t>
+            </a:r>
+          </a:p>
+          <a:p>
+            <a:pPr marL="457200" lvl="1" indent="0">
+              <a:buNone/>
+              <a:defRPr/>
+            </a:pPr>
+            <a:r>
+              <a:rPr lang="en-GB" sz="1100" dirty="0">
+                <a:solidFill>
+                  <a:prstClr val="black"/>
+                </a:solidFill>
+                <a:latin typeface="JetBrains Mono" panose="02000009000000000000" pitchFamily="49" charset="0"/>
+                <a:ea typeface="JetBrains Mono" panose="02000009000000000000" pitchFamily="49" charset="0"/>
+                <a:cs typeface="JetBrains Mono" panose="02000009000000000000" pitchFamily="49" charset="0"/>
+              </a:rPr>
+              <a:t>LMUL 1, ELEN 32, VLEN 128/256/512</a:t>
+            </a:r>
+          </a:p>
           <a:p>
             <a:pPr marL="0" indent="0">
               <a:buNone/>
@@ -3567,7 +3768,7 @@
                 <a:ea typeface="JetBrains Mono" panose="02000009000000000000" pitchFamily="49" charset="0"/>
                 <a:cs typeface="JetBrains Mono" panose="02000009000000000000" pitchFamily="49" charset="0"/>
               </a:rPr>
-              <a:t>seven-stage pipeline</a:t>
+              <a:t>Seven-stage pipeline:</a:t>
             </a:r>
           </a:p>
           <a:p>
@@ -3575,28 +3776,34 @@
               <a:buNone/>
             </a:pPr>
             <a:r>
-              <a:rPr lang="en-GB" sz="1000" dirty="0">
+              <a:rPr lang="en-GB" sz="1100" dirty="0">
                 <a:latin typeface="JetBrains Mono" panose="02000009000000000000" pitchFamily="49" charset="0"/>
                 <a:ea typeface="JetBrains Mono" panose="02000009000000000000" pitchFamily="49" charset="0"/>
                 <a:cs typeface="JetBrains Mono" panose="02000009000000000000" pitchFamily="49" charset="0"/>
               </a:rPr>
-              <a:t>fetch -&gt; decode -&gt; dispatch -&gt; issue</a:t>
-            </a:r>
-            <a:br>
-              <a:rPr lang="en-GB" sz="1000" dirty="0">
+              <a:t>fetch -&gt; decode -&gt; dispatch -&gt; issue -&gt; execute -&gt; writeback -&gt; commit</a:t>
+            </a:r>
+          </a:p>
+          <a:p>
+            <a:pPr marL="0" indent="0">
+              <a:buNone/>
+            </a:pPr>
+            <a:r>
+              <a:rPr lang="en-GB" sz="1600" dirty="0">
+                <a:solidFill>
+                  <a:prstClr val="black"/>
+                </a:solidFill>
                 <a:latin typeface="JetBrains Mono" panose="02000009000000000000" pitchFamily="49" charset="0"/>
                 <a:ea typeface="JetBrains Mono" panose="02000009000000000000" pitchFamily="49" charset="0"/>
                 <a:cs typeface="JetBrains Mono" panose="02000009000000000000" pitchFamily="49" charset="0"/>
               </a:rPr>
-            </a:br>
-            <a:r>
-              <a:rPr lang="en-GB" sz="1000" dirty="0">
-                <a:latin typeface="JetBrains Mono" panose="02000009000000000000" pitchFamily="49" charset="0"/>
-                <a:ea typeface="JetBrains Mono" panose="02000009000000000000" pitchFamily="49" charset="0"/>
-                <a:cs typeface="JetBrains Mono" panose="02000009000000000000" pitchFamily="49" charset="0"/>
-              </a:rPr>
-              <a:t>-&gt; execute -&gt; writeback -&gt; commit</a:t>
-            </a:r>
+              <a:t>32-wide integer, float and vector register files</a:t>
+            </a:r>
+            <a:endParaRPr lang="en-GB" sz="1600" dirty="0">
+              <a:latin typeface="JetBrains Mono" panose="02000009000000000000" pitchFamily="49" charset="0"/>
+              <a:ea typeface="JetBrains Mono" panose="02000009000000000000" pitchFamily="49" charset="0"/>
+              <a:cs typeface="JetBrains Mono" panose="02000009000000000000" pitchFamily="49" charset="0"/>
+            </a:endParaRPr>
           </a:p>
           <a:p>
             <a:pPr marL="0" indent="0">
@@ -3608,7 +3815,7 @@
                 <a:ea typeface="JetBrains Mono" panose="02000009000000000000" pitchFamily="49" charset="0"/>
                 <a:cs typeface="JetBrains Mono" panose="02000009000000000000" pitchFamily="49" charset="0"/>
               </a:rPr>
-              <a:t>configurable fetch/issue/commit widths</a:t>
+              <a:t>Out-of-order issue via reservation stations</a:t>
             </a:r>
           </a:p>
           <a:p>
@@ -3621,7 +3828,7 @@
                 <a:ea typeface="JetBrains Mono" panose="02000009000000000000" pitchFamily="49" charset="0"/>
                 <a:cs typeface="JetBrains Mono" panose="02000009000000000000" pitchFamily="49" charset="0"/>
               </a:rPr>
-              <a:t>configurable number of execution units</a:t>
+              <a:t>In-order commit via 64-wide re-order buffer</a:t>
             </a:r>
           </a:p>
           <a:p>
@@ -3634,7 +3841,7 @@
                 <a:ea typeface="JetBrains Mono" panose="02000009000000000000" pitchFamily="49" charset="0"/>
                 <a:cs typeface="JetBrains Mono" panose="02000009000000000000" pitchFamily="49" charset="0"/>
               </a:rPr>
-              <a:t>in-order issue to reservation stations</a:t>
+              <a:t>Renaming via tag-based register alias tables</a:t>
             </a:r>
           </a:p>
           <a:p>
@@ -3647,7 +3854,7 @@
                 <a:ea typeface="JetBrains Mono" panose="02000009000000000000" pitchFamily="49" charset="0"/>
                 <a:cs typeface="JetBrains Mono" panose="02000009000000000000" pitchFamily="49" charset="0"/>
               </a:rPr>
-              <a:t>in-order commit via re-order buffer</a:t>
+              <a:t>Configurable fetch/issue/commit widths</a:t>
             </a:r>
           </a:p>
           <a:p>
@@ -3660,7 +3867,7 @@
                 <a:ea typeface="JetBrains Mono" panose="02000009000000000000" pitchFamily="49" charset="0"/>
                 <a:cs typeface="JetBrains Mono" panose="02000009000000000000" pitchFamily="49" charset="0"/>
               </a:rPr>
-              <a:t>integer, float and vector register files</a:t>
+              <a:t>Configurable number of execution units</a:t>
             </a:r>
           </a:p>
           <a:p>
@@ -3673,7 +3880,59 @@
                 <a:ea typeface="JetBrains Mono" panose="02000009000000000000" pitchFamily="49" charset="0"/>
                 <a:cs typeface="JetBrains Mono" panose="02000009000000000000" pitchFamily="49" charset="0"/>
               </a:rPr>
-              <a:t>tag-based register alias tables</a:t>
+              <a:t>Multiple branch prediction policies:</a:t>
+            </a:r>
+          </a:p>
+          <a:p>
+            <a:pPr marL="457200" lvl="1" indent="0">
+              <a:buNone/>
+            </a:pPr>
+            <a:r>
+              <a:rPr lang="en-GB" sz="1100" dirty="0">
+                <a:latin typeface="JetBrains Mono" panose="02000009000000000000" pitchFamily="49" charset="0"/>
+                <a:ea typeface="JetBrains Mono" panose="02000009000000000000" pitchFamily="49" charset="0"/>
+                <a:cs typeface="JetBrains Mono" panose="02000009000000000000" pitchFamily="49" charset="0"/>
+              </a:rPr>
+              <a:t>static taken</a:t>
+            </a:r>
+          </a:p>
+          <a:p>
+            <a:pPr marL="457200" lvl="1" indent="0">
+              <a:buNone/>
+            </a:pPr>
+            <a:r>
+              <a:rPr lang="en-GB" sz="1100" dirty="0">
+                <a:latin typeface="JetBrains Mono" panose="02000009000000000000" pitchFamily="49" charset="0"/>
+                <a:ea typeface="JetBrains Mono" panose="02000009000000000000" pitchFamily="49" charset="0"/>
+                <a:cs typeface="JetBrains Mono" panose="02000009000000000000" pitchFamily="49" charset="0"/>
+              </a:rPr>
+              <a:t>static not taken</a:t>
+            </a:r>
+          </a:p>
+          <a:p>
+            <a:pPr marL="457200" lvl="1" indent="0">
+              <a:buNone/>
+            </a:pPr>
+            <a:r>
+              <a:rPr lang="en-GB" sz="1100" dirty="0">
+                <a:latin typeface="JetBrains Mono" panose="02000009000000000000" pitchFamily="49" charset="0"/>
+                <a:ea typeface="JetBrains Mono" panose="02000009000000000000" pitchFamily="49" charset="0"/>
+                <a:cs typeface="JetBrains Mono" panose="02000009000000000000" pitchFamily="49" charset="0"/>
+              </a:rPr>
+              <a:t>static backward taken forward not taken</a:t>
+            </a:r>
+          </a:p>
+          <a:p>
+            <a:pPr marL="457200" lvl="1" indent="0">
+              <a:buNone/>
+            </a:pPr>
+            <a:r>
+              <a:rPr lang="en-GB" sz="1100" dirty="0">
+                <a:latin typeface="JetBrains Mono" panose="02000009000000000000" pitchFamily="49" charset="0"/>
+                <a:ea typeface="JetBrains Mono" panose="02000009000000000000" pitchFamily="49" charset="0"/>
+                <a:cs typeface="JetBrains Mono" panose="02000009000000000000" pitchFamily="49" charset="0"/>
+              </a:rPr>
+              <a:t>dynamic two-bit saturating counter</a:t>
             </a:r>
           </a:p>
           <a:p>
@@ -3686,7 +3945,7 @@
                 <a:ea typeface="JetBrains Mono" panose="02000009000000000000" pitchFamily="49" charset="0"/>
                 <a:cs typeface="JetBrains Mono" panose="02000009000000000000" pitchFamily="49" charset="0"/>
               </a:rPr>
-              <a:t>multiple branch prediction policies</a:t>
+              <a:t>Relaxed memory policy:</a:t>
             </a:r>
           </a:p>
           <a:p>
@@ -3694,12 +3953,12 @@
               <a:buNone/>
             </a:pPr>
             <a:r>
-              <a:rPr lang="en-GB" sz="1000" dirty="0">
+              <a:rPr lang="en-GB" sz="1100" dirty="0">
                 <a:latin typeface="JetBrains Mono" panose="02000009000000000000" pitchFamily="49" charset="0"/>
                 <a:ea typeface="JetBrains Mono" panose="02000009000000000000" pitchFamily="49" charset="0"/>
                 <a:cs typeface="JetBrains Mono" panose="02000009000000000000" pitchFamily="49" charset="0"/>
               </a:rPr>
-              <a:t>static taken</a:t>
+              <a:t>non-overlapping loads bypass pending older stores</a:t>
             </a:r>
           </a:p>
           <a:p>
@@ -3707,82 +3966,12 @@
               <a:buNone/>
             </a:pPr>
             <a:r>
-              <a:rPr lang="en-GB" sz="1000" dirty="0">
+              <a:rPr lang="en-GB" sz="1100" dirty="0">
                 <a:latin typeface="JetBrains Mono" panose="02000009000000000000" pitchFamily="49" charset="0"/>
                 <a:ea typeface="JetBrains Mono" panose="02000009000000000000" pitchFamily="49" charset="0"/>
                 <a:cs typeface="JetBrains Mono" panose="02000009000000000000" pitchFamily="49" charset="0"/>
               </a:rPr>
-              <a:t>static not taken</a:t>
-            </a:r>
-          </a:p>
-          <a:p>
-            <a:pPr marL="457200" lvl="1" indent="0">
-              <a:buNone/>
-            </a:pPr>
-            <a:r>
-              <a:rPr lang="en-GB" sz="1000" dirty="0">
-                <a:latin typeface="JetBrains Mono" panose="02000009000000000000" pitchFamily="49" charset="0"/>
-                <a:ea typeface="JetBrains Mono" panose="02000009000000000000" pitchFamily="49" charset="0"/>
-                <a:cs typeface="JetBrains Mono" panose="02000009000000000000" pitchFamily="49" charset="0"/>
-              </a:rPr>
-              <a:t>one-bit saturating counter</a:t>
-            </a:r>
-          </a:p>
-          <a:p>
-            <a:pPr marL="457200" lvl="1" indent="0">
-              <a:buNone/>
-            </a:pPr>
-            <a:r>
-              <a:rPr lang="en-GB" sz="1000" dirty="0">
-                <a:latin typeface="JetBrains Mono" panose="02000009000000000000" pitchFamily="49" charset="0"/>
-                <a:ea typeface="JetBrains Mono" panose="02000009000000000000" pitchFamily="49" charset="0"/>
-                <a:cs typeface="JetBrains Mono" panose="02000009000000000000" pitchFamily="49" charset="0"/>
-              </a:rPr>
-              <a:t>two-bit saturating counter</a:t>
-            </a:r>
-            <a:endParaRPr lang="en-GB" sz="1600" dirty="0">
-              <a:latin typeface="JetBrains Mono" panose="02000009000000000000" pitchFamily="49" charset="0"/>
-              <a:ea typeface="JetBrains Mono" panose="02000009000000000000" pitchFamily="49" charset="0"/>
-              <a:cs typeface="JetBrains Mono" panose="02000009000000000000" pitchFamily="49" charset="0"/>
-            </a:endParaRPr>
-          </a:p>
-          <a:p>
-            <a:pPr marL="0" indent="0">
-              <a:buNone/>
-            </a:pPr>
-            <a:r>
-              <a:rPr lang="en-GB" sz="1600" dirty="0">
-                <a:latin typeface="JetBrains Mono" panose="02000009000000000000" pitchFamily="49" charset="0"/>
-                <a:ea typeface="JetBrains Mono" panose="02000009000000000000" pitchFamily="49" charset="0"/>
-                <a:cs typeface="JetBrains Mono" panose="02000009000000000000" pitchFamily="49" charset="0"/>
-              </a:rPr>
-              <a:t>memory policy:</a:t>
-            </a:r>
-          </a:p>
-          <a:p>
-            <a:pPr marL="457200" lvl="1" indent="0">
-              <a:buNone/>
-            </a:pPr>
-            <a:r>
-              <a:rPr lang="en-GB" sz="1000" dirty="0">
-                <a:latin typeface="JetBrains Mono" panose="02000009000000000000" pitchFamily="49" charset="0"/>
-                <a:ea typeface="JetBrains Mono" panose="02000009000000000000" pitchFamily="49" charset="0"/>
-                <a:cs typeface="JetBrains Mono" panose="02000009000000000000" pitchFamily="49" charset="0"/>
-              </a:rPr>
-              <a:t>non-overlapping loads bypass pending stores</a:t>
-            </a:r>
-          </a:p>
-          <a:p>
-            <a:pPr marL="457200" lvl="1" indent="0">
-              <a:buNone/>
-            </a:pPr>
-            <a:r>
-              <a:rPr lang="en-GB" sz="1000" dirty="0">
-                <a:latin typeface="JetBrains Mono" panose="02000009000000000000" pitchFamily="49" charset="0"/>
-                <a:ea typeface="JetBrains Mono" panose="02000009000000000000" pitchFamily="49" charset="0"/>
-                <a:cs typeface="JetBrains Mono" panose="02000009000000000000" pitchFamily="49" charset="0"/>
-              </a:rPr>
-              <a:t>pending stores with known values are forwarded</a:t>
+              <a:t>overlapping loads have older stores forwarded at byte level</a:t>
             </a:r>
           </a:p>
         </p:txBody>
@@ -3979,38 +4168,288 @@
             </a:lvl9pPr>
           </a:lstStyle>
           <a:p>
-            <a:pPr marL="0" marR="0" lvl="0" indent="0" algn="l" defTabSz="914400" rtl="0" eaLnBrk="1" fontAlgn="auto" latinLnBrk="0" hangingPunct="1">
+            <a:pPr marL="0" indent="0">
+              <a:buNone/>
+              <a:defRPr/>
+            </a:pPr>
+            <a:endParaRPr kumimoji="0" lang="en-GB" sz="1600" b="0" i="0" u="none" strike="noStrike" kern="1200" cap="none" spc="0" normalizeH="0" baseline="0" noProof="0" dirty="0">
+              <a:ln>
+                <a:noFill/>
+              </a:ln>
+              <a:solidFill>
+                <a:prstClr val="black"/>
+              </a:solidFill>
+              <a:effectLst/>
+              <a:uLnTx/>
+              <a:uFillTx/>
+              <a:latin typeface="JetBrains Mono" panose="02000009000000000000" pitchFamily="49" charset="0"/>
+              <a:ea typeface="JetBrains Mono" panose="02000009000000000000" pitchFamily="49" charset="0"/>
+              <a:cs typeface="JetBrains Mono" panose="02000009000000000000" pitchFamily="49" charset="0"/>
+            </a:endParaRPr>
+          </a:p>
+        </p:txBody>
+      </p:sp>
+      <p:sp>
+        <p:nvSpPr>
+          <p:cNvPr id="2" name="Content Placeholder 2">
+            <a:extLst>
+              <a:ext uri="{FF2B5EF4-FFF2-40B4-BE49-F238E27FC236}">
+                <a16:creationId xmlns:a16="http://schemas.microsoft.com/office/drawing/2014/main" id="{28B1C536-722D-D79D-082E-72655AE2D13F}"/>
+              </a:ext>
+            </a:extLst>
+          </p:cNvPr>
+          <p:cNvSpPr txBox="1">
+            <a:spLocks/>
+          </p:cNvSpPr>
+          <p:nvPr/>
+        </p:nvSpPr>
+        <p:spPr>
+          <a:xfrm>
+            <a:off x="6750604" y="559952"/>
+            <a:ext cx="4698446" cy="5860750"/>
+          </a:xfrm>
+          <a:prstGeom prst="rect">
+            <a:avLst/>
+          </a:prstGeom>
+        </p:spPr>
+        <p:txBody>
+          <a:bodyPr vert="horz" lIns="91440" tIns="45720" rIns="91440" bIns="45720" rtlCol="0">
+            <a:normAutofit/>
+          </a:bodyPr>
+          <a:lstStyle>
+            <a:lvl1pPr marL="228600" indent="-228600" algn="l" defTabSz="914400" rtl="0" eaLnBrk="1" latinLnBrk="0" hangingPunct="1">
               <a:lnSpc>
                 <a:spcPct val="90000"/>
               </a:lnSpc>
               <a:spcBef>
                 <a:spcPts val="1000"/>
               </a:spcBef>
-              <a:spcAft>
-                <a:spcPts val="0"/>
-              </a:spcAft>
-              <a:buClrTx/>
-              <a:buSzTx/>
-              <a:buNone/>
-              <a:tabLst/>
+              <a:buFont typeface="Arial" panose="020B0604020202020204" pitchFamily="34" charset="0"/>
+              <a:buChar char="•"/>
+              <a:defRPr sz="2800" kern="1200">
+                <a:solidFill>
+                  <a:schemeClr val="tx1"/>
+                </a:solidFill>
+                <a:latin typeface="+mn-lt"/>
+                <a:ea typeface="+mn-ea"/>
+                <a:cs typeface="+mn-cs"/>
+              </a:defRPr>
+            </a:lvl1pPr>
+            <a:lvl2pPr marL="685800" indent="-228600" algn="l" defTabSz="914400" rtl="0" eaLnBrk="1" latinLnBrk="0" hangingPunct="1">
+              <a:lnSpc>
+                <a:spcPct val="90000"/>
+              </a:lnSpc>
+              <a:spcBef>
+                <a:spcPts val="500"/>
+              </a:spcBef>
+              <a:buFont typeface="Arial" panose="020B0604020202020204" pitchFamily="34" charset="0"/>
+              <a:buChar char="•"/>
+              <a:defRPr sz="2400" kern="1200">
+                <a:solidFill>
+                  <a:schemeClr val="tx1"/>
+                </a:solidFill>
+                <a:latin typeface="+mn-lt"/>
+                <a:ea typeface="+mn-ea"/>
+                <a:cs typeface="+mn-cs"/>
+              </a:defRPr>
+            </a:lvl2pPr>
+            <a:lvl3pPr marL="1143000" indent="-228600" algn="l" defTabSz="914400" rtl="0" eaLnBrk="1" latinLnBrk="0" hangingPunct="1">
+              <a:lnSpc>
+                <a:spcPct val="90000"/>
+              </a:lnSpc>
+              <a:spcBef>
+                <a:spcPts val="500"/>
+              </a:spcBef>
+              <a:buFont typeface="Arial" panose="020B0604020202020204" pitchFamily="34" charset="0"/>
+              <a:buChar char="•"/>
+              <a:defRPr sz="2000" kern="1200">
+                <a:solidFill>
+                  <a:schemeClr val="tx1"/>
+                </a:solidFill>
+                <a:latin typeface="+mn-lt"/>
+                <a:ea typeface="+mn-ea"/>
+                <a:cs typeface="+mn-cs"/>
+              </a:defRPr>
+            </a:lvl3pPr>
+            <a:lvl4pPr marL="1600200" indent="-228600" algn="l" defTabSz="914400" rtl="0" eaLnBrk="1" latinLnBrk="0" hangingPunct="1">
+              <a:lnSpc>
+                <a:spcPct val="90000"/>
+              </a:lnSpc>
+              <a:spcBef>
+                <a:spcPts val="500"/>
+              </a:spcBef>
+              <a:buFont typeface="Arial" panose="020B0604020202020204" pitchFamily="34" charset="0"/>
+              <a:buChar char="•"/>
+              <a:defRPr sz="1800" kern="1200">
+                <a:solidFill>
+                  <a:schemeClr val="tx1"/>
+                </a:solidFill>
+                <a:latin typeface="+mn-lt"/>
+                <a:ea typeface="+mn-ea"/>
+                <a:cs typeface="+mn-cs"/>
+              </a:defRPr>
+            </a:lvl4pPr>
+            <a:lvl5pPr marL="2057400" indent="-228600" algn="l" defTabSz="914400" rtl="0" eaLnBrk="1" latinLnBrk="0" hangingPunct="1">
+              <a:lnSpc>
+                <a:spcPct val="90000"/>
+              </a:lnSpc>
+              <a:spcBef>
+                <a:spcPts val="500"/>
+              </a:spcBef>
+              <a:buFont typeface="Arial" panose="020B0604020202020204" pitchFamily="34" charset="0"/>
+              <a:buChar char="•"/>
+              <a:defRPr sz="1800" kern="1200">
+                <a:solidFill>
+                  <a:schemeClr val="tx1"/>
+                </a:solidFill>
+                <a:latin typeface="+mn-lt"/>
+                <a:ea typeface="+mn-ea"/>
+                <a:cs typeface="+mn-cs"/>
+              </a:defRPr>
+            </a:lvl5pPr>
+            <a:lvl6pPr marL="2514600" indent="-228600" algn="l" defTabSz="914400" rtl="0" eaLnBrk="1" latinLnBrk="0" hangingPunct="1">
+              <a:lnSpc>
+                <a:spcPct val="90000"/>
+              </a:lnSpc>
+              <a:spcBef>
+                <a:spcPts val="500"/>
+              </a:spcBef>
+              <a:buFont typeface="Arial" panose="020B0604020202020204" pitchFamily="34" charset="0"/>
+              <a:buChar char="•"/>
+              <a:defRPr sz="1800" kern="1200">
+                <a:solidFill>
+                  <a:schemeClr val="tx1"/>
+                </a:solidFill>
+                <a:latin typeface="+mn-lt"/>
+                <a:ea typeface="+mn-ea"/>
+                <a:cs typeface="+mn-cs"/>
+              </a:defRPr>
+            </a:lvl6pPr>
+            <a:lvl7pPr marL="2971800" indent="-228600" algn="l" defTabSz="914400" rtl="0" eaLnBrk="1" latinLnBrk="0" hangingPunct="1">
+              <a:lnSpc>
+                <a:spcPct val="90000"/>
+              </a:lnSpc>
+              <a:spcBef>
+                <a:spcPts val="500"/>
+              </a:spcBef>
+              <a:buFont typeface="Arial" panose="020B0604020202020204" pitchFamily="34" charset="0"/>
+              <a:buChar char="•"/>
+              <a:defRPr sz="1800" kern="1200">
+                <a:solidFill>
+                  <a:schemeClr val="tx1"/>
+                </a:solidFill>
+                <a:latin typeface="+mn-lt"/>
+                <a:ea typeface="+mn-ea"/>
+                <a:cs typeface="+mn-cs"/>
+              </a:defRPr>
+            </a:lvl7pPr>
+            <a:lvl8pPr marL="3429000" indent="-228600" algn="l" defTabSz="914400" rtl="0" eaLnBrk="1" latinLnBrk="0" hangingPunct="1">
+              <a:lnSpc>
+                <a:spcPct val="90000"/>
+              </a:lnSpc>
+              <a:spcBef>
+                <a:spcPts val="500"/>
+              </a:spcBef>
+              <a:buFont typeface="Arial" panose="020B0604020202020204" pitchFamily="34" charset="0"/>
+              <a:buChar char="•"/>
+              <a:defRPr sz="1800" kern="1200">
+                <a:solidFill>
+                  <a:schemeClr val="tx1"/>
+                </a:solidFill>
+                <a:latin typeface="+mn-lt"/>
+                <a:ea typeface="+mn-ea"/>
+                <a:cs typeface="+mn-cs"/>
+              </a:defRPr>
+            </a:lvl8pPr>
+            <a:lvl9pPr marL="3886200" indent="-228600" algn="l" defTabSz="914400" rtl="0" eaLnBrk="1" latinLnBrk="0" hangingPunct="1">
+              <a:lnSpc>
+                <a:spcPct val="90000"/>
+              </a:lnSpc>
+              <a:spcBef>
+                <a:spcPts val="500"/>
+              </a:spcBef>
+              <a:buFont typeface="Arial" panose="020B0604020202020204" pitchFamily="34" charset="0"/>
+              <a:buChar char="•"/>
+              <a:defRPr sz="1800" kern="1200">
+                <a:solidFill>
+                  <a:schemeClr val="tx1"/>
+                </a:solidFill>
+                <a:latin typeface="+mn-lt"/>
+                <a:ea typeface="+mn-ea"/>
+                <a:cs typeface="+mn-cs"/>
+              </a:defRPr>
+            </a:lvl9pPr>
+          </a:lstStyle>
+          <a:p>
+            <a:pPr marL="0" indent="0">
+              <a:buFont typeface="Arial" panose="020B0604020202020204" pitchFamily="34" charset="0"/>
+              <a:buNone/>
               <a:defRPr/>
             </a:pPr>
             <a:r>
-              <a:rPr kumimoji="0" lang="en-GB" sz="1600" b="0" i="0" u="none" strike="noStrike" kern="1200" cap="none" spc="0" normalizeH="0" baseline="0" noProof="0" dirty="0">
-                <a:ln>
-                  <a:noFill/>
-                </a:ln>
+              <a:rPr lang="en-GB" sz="1500" dirty="0">
                 <a:solidFill>
                   <a:prstClr val="black"/>
                 </a:solidFill>
-                <a:effectLst/>
-                <a:uLnTx/>
-                <a:uFillTx/>
                 <a:latin typeface="JetBrains Mono" panose="02000009000000000000" pitchFamily="49" charset="0"/>
                 <a:ea typeface="JetBrains Mono" panose="02000009000000000000" pitchFamily="49" charset="0"/>
                 <a:cs typeface="JetBrains Mono" panose="02000009000000000000" pitchFamily="49" charset="0"/>
               </a:rPr>
-              <a:t>minimal rv32imf_v... ISA</a:t>
+              <a:t>Interactive terminal UI</a:t>
+            </a:r>
+          </a:p>
+          <a:p>
+            <a:pPr marL="457200" lvl="1" indent="0">
+              <a:buFont typeface="Arial" panose="020B0604020202020204" pitchFamily="34" charset="0"/>
+              <a:buNone/>
+              <a:defRPr/>
+            </a:pPr>
+            <a:r>
+              <a:rPr lang="en-GB" sz="1000" dirty="0">
+                <a:solidFill>
+                  <a:prstClr val="black"/>
+                </a:solidFill>
+                <a:latin typeface="JetBrains Mono" panose="02000009000000000000" pitchFamily="49" charset="0"/>
+                <a:ea typeface="JetBrains Mono" panose="02000009000000000000" pitchFamily="49" charset="0"/>
+                <a:cs typeface="JetBrains Mono" panose="02000009000000000000" pitchFamily="49" charset="0"/>
+              </a:rPr>
+              <a:t>step/run, headless mode</a:t>
+            </a:r>
+          </a:p>
+          <a:p>
+            <a:pPr marL="457200" lvl="1" indent="0">
+              <a:buFont typeface="Arial" panose="020B0604020202020204" pitchFamily="34" charset="0"/>
+              <a:buNone/>
+              <a:defRPr/>
+            </a:pPr>
+            <a:r>
+              <a:rPr lang="en-GB" sz="1000" dirty="0">
+                <a:solidFill>
+                  <a:prstClr val="black"/>
+                </a:solidFill>
+                <a:latin typeface="JetBrains Mono" panose="02000009000000000000" pitchFamily="49" charset="0"/>
+                <a:ea typeface="JetBrains Mono" panose="02000009000000000000" pitchFamily="49" charset="0"/>
+                <a:cs typeface="JetBrains Mono" panose="02000009000000000000" pitchFamily="49" charset="0"/>
+              </a:rPr>
+              <a:t>registers, stack</a:t>
+            </a:r>
+          </a:p>
+          <a:p>
+            <a:pPr marL="0" indent="0">
+              <a:buFont typeface="Arial" panose="020B0604020202020204" pitchFamily="34" charset="0"/>
+              <a:buNone/>
+              <a:defRPr/>
+            </a:pPr>
+            <a:r>
+              <a:rPr lang="en-GB" sz="1500" dirty="0">
+                <a:solidFill>
+                  <a:prstClr val="black"/>
+                </a:solidFill>
+                <a:latin typeface="JetBrains Mono" panose="02000009000000000000" pitchFamily="49" charset="0"/>
+                <a:ea typeface="JetBrains Mono" panose="02000009000000000000" pitchFamily="49" charset="0"/>
+                <a:cs typeface="JetBrains Mono" panose="02000009000000000000" pitchFamily="49" charset="0"/>
+              </a:rPr>
+              <a:t>Stack handling, function calls</a:t>
             </a:r>
           </a:p>
         </p:txBody>

--- a/docs/final presentation.pptx
+++ b/docs/final presentation.pptx
@@ -3339,6 +3339,14 @@
 <file path=ppt/slides/slide1.xml><?xml version="1.0" encoding="utf-8"?>
 <p:sld xmlns:a="http://schemas.openxmlformats.org/drawingml/2006/main" xmlns:r="http://schemas.openxmlformats.org/officeDocument/2006/relationships" xmlns:p="http://schemas.openxmlformats.org/presentationml/2006/main">
   <p:cSld>
+    <p:bg>
+      <p:bgPr>
+        <a:solidFill>
+          <a:srgbClr val="181825"/>
+        </a:solidFill>
+        <a:effectLst/>
+      </p:bgPr>
+    </p:bg>
     <p:spTree>
       <p:nvGrpSpPr>
         <p:cNvPr id="1" name=""/>
@@ -3378,6 +3386,9 @@
           <a:p>
             <a:r>
               <a:rPr lang="en-GB" sz="4800" dirty="0">
+                <a:solidFill>
+                  <a:schemeClr val="bg1"/>
+                </a:solidFill>
                 <a:latin typeface="JetBrains Mono" panose="02000009000000000000" pitchFamily="49" charset="0"/>
                 <a:ea typeface="JetBrains Mono" panose="02000009000000000000" pitchFamily="49" charset="0"/>
                 <a:cs typeface="JetBrains Mono" panose="02000009000000000000" pitchFamily="49" charset="0"/>
@@ -3386,6 +3397,9 @@
             </a:r>
             <a:br>
               <a:rPr lang="en-GB" sz="4800" dirty="0">
+                <a:solidFill>
+                  <a:schemeClr val="bg1"/>
+                </a:solidFill>
                 <a:latin typeface="JetBrains Mono" panose="02000009000000000000" pitchFamily="49" charset="0"/>
                 <a:ea typeface="JetBrains Mono" panose="02000009000000000000" pitchFamily="49" charset="0"/>
                 <a:cs typeface="JetBrains Mono" panose="02000009000000000000" pitchFamily="49" charset="0"/>
@@ -3393,6 +3407,9 @@
             </a:br>
             <a:r>
               <a:rPr lang="en-GB" sz="4800" dirty="0">
+                <a:solidFill>
+                  <a:schemeClr val="bg1"/>
+                </a:solidFill>
                 <a:latin typeface="JetBrains Mono" panose="02000009000000000000" pitchFamily="49" charset="0"/>
                 <a:ea typeface="JetBrains Mono" panose="02000009000000000000" pitchFamily="49" charset="0"/>
                 <a:cs typeface="JetBrains Mono" panose="02000009000000000000" pitchFamily="49" charset="0"/>
@@ -3425,6 +3442,9 @@
           <a:p>
             <a:r>
               <a:rPr lang="en-GB" dirty="0">
+                <a:solidFill>
+                  <a:schemeClr val="bg1"/>
+                </a:solidFill>
                 <a:latin typeface="JetBrains Mono" panose="02000009000000000000" pitchFamily="49" charset="0"/>
                 <a:ea typeface="JetBrains Mono" panose="02000009000000000000" pitchFamily="49" charset="0"/>
                 <a:cs typeface="JetBrains Mono" panose="02000009000000000000" pitchFamily="49" charset="0"/>
@@ -3450,6 +3470,14 @@
 <file path=ppt/slides/slide2.xml><?xml version="1.0" encoding="utf-8"?>
 <p:sld xmlns:a="http://schemas.openxmlformats.org/drawingml/2006/main" xmlns:r="http://schemas.openxmlformats.org/officeDocument/2006/relationships" xmlns:p="http://schemas.openxmlformats.org/presentationml/2006/main">
   <p:cSld>
+    <p:bg>
+      <p:bgPr>
+        <a:solidFill>
+          <a:srgbClr val="181825"/>
+        </a:solidFill>
+        <a:effectLst/>
+      </p:bgPr>
+    </p:bg>
     <p:spTree>
       <p:nvGrpSpPr>
         <p:cNvPr id="1" name=""/>
@@ -3466,10 +3494,10 @@
       </p:grpSpPr>
       <p:pic>
         <p:nvPicPr>
-          <p:cNvPr id="6" name="Graphic 5">
-            <a:extLst>
-              <a:ext uri="{FF2B5EF4-FFF2-40B4-BE49-F238E27FC236}">
-                <a16:creationId xmlns:a16="http://schemas.microsoft.com/office/drawing/2014/main" id="{DFE8C399-B5CD-9F7C-505B-043F73CE9565}"/>
+          <p:cNvPr id="14" name="Graphic 13">
+            <a:extLst>
+              <a:ext uri="{FF2B5EF4-FFF2-40B4-BE49-F238E27FC236}">
+                <a16:creationId xmlns:a16="http://schemas.microsoft.com/office/drawing/2014/main" id="{CBF0816E-43F8-F541-9E27-91B54BC884FD}"/>
               </a:ext>
             </a:extLst>
           </p:cNvPr>
@@ -3492,8 +3520,8 @@
         </p:blipFill>
         <p:spPr>
           <a:xfrm>
-            <a:off x="904875" y="338137"/>
-            <a:ext cx="10382250" cy="6181725"/>
+            <a:off x="823912" y="623887"/>
+            <a:ext cx="10544175" cy="5610225"/>
           </a:xfrm>
           <a:prstGeom prst="rect">
             <a:avLst/>
@@ -3516,6 +3544,14 @@
 <file path=ppt/slides/slide3.xml><?xml version="1.0" encoding="utf-8"?>
 <p:sld xmlns:a="http://schemas.openxmlformats.org/drawingml/2006/main" xmlns:r="http://schemas.openxmlformats.org/officeDocument/2006/relationships" xmlns:p="http://schemas.openxmlformats.org/presentationml/2006/main">
   <p:cSld>
+    <p:bg>
+      <p:bgPr>
+        <a:solidFill>
+          <a:srgbClr val="181825"/>
+        </a:solidFill>
+        <a:effectLst/>
+      </p:bgPr>
+    </p:bg>
     <p:spTree>
       <p:nvGrpSpPr>
         <p:cNvPr id="1" name=""/>
@@ -3565,7 +3601,7 @@
             <a:r>
               <a:rPr lang="en-GB" sz="1600" dirty="0">
                 <a:solidFill>
-                  <a:prstClr val="black"/>
+                  <a:schemeClr val="bg1"/>
                 </a:solidFill>
                 <a:latin typeface="JetBrains Mono" panose="02000009000000000000" pitchFamily="49" charset="0"/>
                 <a:ea typeface="JetBrains Mono" panose="02000009000000000000" pitchFamily="49" charset="0"/>
@@ -3582,7 +3618,7 @@
             <a:r>
               <a:rPr lang="en-GB" sz="1100" dirty="0">
                 <a:solidFill>
-                  <a:prstClr val="black"/>
+                  <a:schemeClr val="bg1"/>
                 </a:solidFill>
                 <a:latin typeface="JetBrains Mono" panose="02000009000000000000" pitchFamily="49" charset="0"/>
                 <a:ea typeface="JetBrains Mono" panose="02000009000000000000" pitchFamily="49" charset="0"/>
@@ -3593,7 +3629,7 @@
             <a:r>
               <a:rPr lang="en-GB" sz="1100" dirty="0" err="1">
                 <a:solidFill>
-                  <a:prstClr val="black"/>
+                  <a:schemeClr val="bg1"/>
                 </a:solidFill>
                 <a:latin typeface="JetBrains Mono" panose="02000009000000000000" pitchFamily="49" charset="0"/>
                 <a:ea typeface="JetBrains Mono" panose="02000009000000000000" pitchFamily="49" charset="0"/>
@@ -3604,7 +3640,7 @@
             <a:r>
               <a:rPr lang="en-GB" sz="1100" dirty="0">
                 <a:solidFill>
-                  <a:prstClr val="black"/>
+                  <a:schemeClr val="bg1"/>
                 </a:solidFill>
                 <a:latin typeface="JetBrains Mono" panose="02000009000000000000" pitchFamily="49" charset="0"/>
                 <a:ea typeface="JetBrains Mono" panose="02000009000000000000" pitchFamily="49" charset="0"/>
@@ -3615,7 +3651,7 @@
             <a:r>
               <a:rPr lang="en-GB" sz="1100" dirty="0" err="1">
                 <a:solidFill>
-                  <a:prstClr val="black"/>
+                  <a:schemeClr val="bg1"/>
                 </a:solidFill>
                 <a:latin typeface="JetBrains Mono" panose="02000009000000000000" pitchFamily="49" charset="0"/>
                 <a:ea typeface="JetBrains Mono" panose="02000009000000000000" pitchFamily="49" charset="0"/>
@@ -3626,7 +3662,7 @@
             <a:r>
               <a:rPr lang="en-GB" sz="1100" dirty="0">
                 <a:solidFill>
-                  <a:prstClr val="black"/>
+                  <a:schemeClr val="bg1"/>
                 </a:solidFill>
                 <a:latin typeface="JetBrains Mono" panose="02000009000000000000" pitchFamily="49" charset="0"/>
                 <a:ea typeface="JetBrains Mono" panose="02000009000000000000" pitchFamily="49" charset="0"/>
@@ -3637,7 +3673,7 @@
             <a:r>
               <a:rPr lang="en-GB" sz="1100" dirty="0" err="1">
                 <a:solidFill>
-                  <a:prstClr val="black"/>
+                  <a:schemeClr val="bg1"/>
                 </a:solidFill>
                 <a:latin typeface="JetBrains Mono" panose="02000009000000000000" pitchFamily="49" charset="0"/>
                 <a:ea typeface="JetBrains Mono" panose="02000009000000000000" pitchFamily="49" charset="0"/>
@@ -3647,7 +3683,7 @@
             </a:r>
             <a:endParaRPr lang="en-GB" sz="1100" dirty="0">
               <a:solidFill>
-                <a:prstClr val="black"/>
+                <a:schemeClr val="bg1"/>
               </a:solidFill>
               <a:latin typeface="JetBrains Mono" panose="02000009000000000000" pitchFamily="49" charset="0"/>
               <a:ea typeface="JetBrains Mono" panose="02000009000000000000" pitchFamily="49" charset="0"/>
@@ -3662,7 +3698,7 @@
             <a:r>
               <a:rPr lang="en-GB" sz="1600" dirty="0">
                 <a:solidFill>
-                  <a:prstClr val="black"/>
+                  <a:schemeClr val="bg1"/>
                 </a:solidFill>
                 <a:latin typeface="JetBrains Mono" panose="02000009000000000000" pitchFamily="49" charset="0"/>
                 <a:ea typeface="JetBrains Mono" panose="02000009000000000000" pitchFamily="49" charset="0"/>
@@ -3679,7 +3715,7 @@
             <a:r>
               <a:rPr lang="en-GB" sz="1600" dirty="0">
                 <a:solidFill>
-                  <a:prstClr val="black"/>
+                  <a:schemeClr val="bg1"/>
                 </a:solidFill>
                 <a:latin typeface="JetBrains Mono" panose="02000009000000000000" pitchFamily="49" charset="0"/>
                 <a:ea typeface="JetBrains Mono" panose="02000009000000000000" pitchFamily="49" charset="0"/>
@@ -3696,7 +3732,7 @@
             <a:r>
               <a:rPr lang="en-GB" sz="1100" dirty="0">
                 <a:solidFill>
-                  <a:prstClr val="black"/>
+                  <a:schemeClr val="bg1"/>
                 </a:solidFill>
                 <a:latin typeface="JetBrains Mono" panose="02000009000000000000" pitchFamily="49" charset="0"/>
                 <a:ea typeface="JetBrains Mono" panose="02000009000000000000" pitchFamily="49" charset="0"/>
@@ -3707,7 +3743,7 @@
             <a:r>
               <a:rPr lang="en-GB" sz="1100" dirty="0" err="1">
                 <a:solidFill>
-                  <a:prstClr val="black"/>
+                  <a:schemeClr val="bg1"/>
                 </a:solidFill>
                 <a:latin typeface="JetBrains Mono" panose="02000009000000000000" pitchFamily="49" charset="0"/>
                 <a:ea typeface="JetBrains Mono" panose="02000009000000000000" pitchFamily="49" charset="0"/>
@@ -3717,7 +3753,7 @@
             </a:r>
             <a:endParaRPr lang="en-GB" sz="1100" dirty="0">
               <a:solidFill>
-                <a:prstClr val="black"/>
+                <a:schemeClr val="bg1"/>
               </a:solidFill>
               <a:latin typeface="JetBrains Mono" panose="02000009000000000000" pitchFamily="49" charset="0"/>
               <a:ea typeface="JetBrains Mono" panose="02000009000000000000" pitchFamily="49" charset="0"/>
@@ -3732,7 +3768,7 @@
             <a:r>
               <a:rPr lang="en-GB" sz="1600" dirty="0">
                 <a:solidFill>
-                  <a:prstClr val="black"/>
+                  <a:schemeClr val="bg1"/>
                 </a:solidFill>
                 <a:latin typeface="JetBrains Mono" panose="02000009000000000000" pitchFamily="49" charset="0"/>
                 <a:ea typeface="JetBrains Mono" panose="02000009000000000000" pitchFamily="49" charset="0"/>
@@ -3749,7 +3785,7 @@
             <a:r>
               <a:rPr lang="en-GB" sz="1100" dirty="0">
                 <a:solidFill>
-                  <a:prstClr val="black"/>
+                  <a:schemeClr val="bg1"/>
                 </a:solidFill>
                 <a:latin typeface="JetBrains Mono" panose="02000009000000000000" pitchFamily="49" charset="0"/>
                 <a:ea typeface="JetBrains Mono" panose="02000009000000000000" pitchFamily="49" charset="0"/>
@@ -3764,6 +3800,9 @@
             </a:pPr>
             <a:r>
               <a:rPr lang="en-GB" sz="1600" dirty="0">
+                <a:solidFill>
+                  <a:schemeClr val="bg1"/>
+                </a:solidFill>
                 <a:latin typeface="JetBrains Mono" panose="02000009000000000000" pitchFamily="49" charset="0"/>
                 <a:ea typeface="JetBrains Mono" panose="02000009000000000000" pitchFamily="49" charset="0"/>
                 <a:cs typeface="JetBrains Mono" panose="02000009000000000000" pitchFamily="49" charset="0"/>
@@ -3777,6 +3816,9 @@
             </a:pPr>
             <a:r>
               <a:rPr lang="en-GB" sz="1100" dirty="0">
+                <a:solidFill>
+                  <a:schemeClr val="bg1"/>
+                </a:solidFill>
                 <a:latin typeface="JetBrains Mono" panose="02000009000000000000" pitchFamily="49" charset="0"/>
                 <a:ea typeface="JetBrains Mono" panose="02000009000000000000" pitchFamily="49" charset="0"/>
                 <a:cs typeface="JetBrains Mono" panose="02000009000000000000" pitchFamily="49" charset="0"/>
@@ -3791,7 +3833,7 @@
             <a:r>
               <a:rPr lang="en-GB" sz="1600" dirty="0">
                 <a:solidFill>
-                  <a:prstClr val="black"/>
+                  <a:schemeClr val="bg1"/>
                 </a:solidFill>
                 <a:latin typeface="JetBrains Mono" panose="02000009000000000000" pitchFamily="49" charset="0"/>
                 <a:ea typeface="JetBrains Mono" panose="02000009000000000000" pitchFamily="49" charset="0"/>
@@ -3799,11 +3841,6 @@
               </a:rPr>
               <a:t>32-wide integer, float and vector register files</a:t>
             </a:r>
-            <a:endParaRPr lang="en-GB" sz="1600" dirty="0">
-              <a:latin typeface="JetBrains Mono" panose="02000009000000000000" pitchFamily="49" charset="0"/>
-              <a:ea typeface="JetBrains Mono" panose="02000009000000000000" pitchFamily="49" charset="0"/>
-              <a:cs typeface="JetBrains Mono" panose="02000009000000000000" pitchFamily="49" charset="0"/>
-            </a:endParaRPr>
           </a:p>
           <a:p>
             <a:pPr marL="0" indent="0">
@@ -3811,6 +3848,9 @@
             </a:pPr>
             <a:r>
               <a:rPr lang="en-GB" sz="1600" dirty="0">
+                <a:solidFill>
+                  <a:schemeClr val="bg1"/>
+                </a:solidFill>
                 <a:latin typeface="JetBrains Mono" panose="02000009000000000000" pitchFamily="49" charset="0"/>
                 <a:ea typeface="JetBrains Mono" panose="02000009000000000000" pitchFamily="49" charset="0"/>
                 <a:cs typeface="JetBrains Mono" panose="02000009000000000000" pitchFamily="49" charset="0"/>
@@ -3824,6 +3864,9 @@
             </a:pPr>
             <a:r>
               <a:rPr lang="en-GB" sz="1600" dirty="0">
+                <a:solidFill>
+                  <a:schemeClr val="bg1"/>
+                </a:solidFill>
                 <a:latin typeface="JetBrains Mono" panose="02000009000000000000" pitchFamily="49" charset="0"/>
                 <a:ea typeface="JetBrains Mono" panose="02000009000000000000" pitchFamily="49" charset="0"/>
                 <a:cs typeface="JetBrains Mono" panose="02000009000000000000" pitchFamily="49" charset="0"/>
@@ -3837,6 +3880,9 @@
             </a:pPr>
             <a:r>
               <a:rPr lang="en-GB" sz="1600" dirty="0">
+                <a:solidFill>
+                  <a:schemeClr val="bg1"/>
+                </a:solidFill>
                 <a:latin typeface="JetBrains Mono" panose="02000009000000000000" pitchFamily="49" charset="0"/>
                 <a:ea typeface="JetBrains Mono" panose="02000009000000000000" pitchFamily="49" charset="0"/>
                 <a:cs typeface="JetBrains Mono" panose="02000009000000000000" pitchFamily="49" charset="0"/>
@@ -3850,6 +3896,9 @@
             </a:pPr>
             <a:r>
               <a:rPr lang="en-GB" sz="1600" dirty="0">
+                <a:solidFill>
+                  <a:schemeClr val="bg1"/>
+                </a:solidFill>
                 <a:latin typeface="JetBrains Mono" panose="02000009000000000000" pitchFamily="49" charset="0"/>
                 <a:ea typeface="JetBrains Mono" panose="02000009000000000000" pitchFamily="49" charset="0"/>
                 <a:cs typeface="JetBrains Mono" panose="02000009000000000000" pitchFamily="49" charset="0"/>
@@ -3863,6 +3912,9 @@
             </a:pPr>
             <a:r>
               <a:rPr lang="en-GB" sz="1600" dirty="0">
+                <a:solidFill>
+                  <a:schemeClr val="bg1"/>
+                </a:solidFill>
                 <a:latin typeface="JetBrains Mono" panose="02000009000000000000" pitchFamily="49" charset="0"/>
                 <a:ea typeface="JetBrains Mono" panose="02000009000000000000" pitchFamily="49" charset="0"/>
                 <a:cs typeface="JetBrains Mono" panose="02000009000000000000" pitchFamily="49" charset="0"/>
@@ -3876,6 +3928,9 @@
             </a:pPr>
             <a:r>
               <a:rPr lang="en-GB" sz="1600" dirty="0">
+                <a:solidFill>
+                  <a:schemeClr val="bg1"/>
+                </a:solidFill>
                 <a:latin typeface="JetBrains Mono" panose="02000009000000000000" pitchFamily="49" charset="0"/>
                 <a:ea typeface="JetBrains Mono" panose="02000009000000000000" pitchFamily="49" charset="0"/>
                 <a:cs typeface="JetBrains Mono" panose="02000009000000000000" pitchFamily="49" charset="0"/>
@@ -3889,6 +3944,9 @@
             </a:pPr>
             <a:r>
               <a:rPr lang="en-GB" sz="1100" dirty="0">
+                <a:solidFill>
+                  <a:schemeClr val="bg1"/>
+                </a:solidFill>
                 <a:latin typeface="JetBrains Mono" panose="02000009000000000000" pitchFamily="49" charset="0"/>
                 <a:ea typeface="JetBrains Mono" panose="02000009000000000000" pitchFamily="49" charset="0"/>
                 <a:cs typeface="JetBrains Mono" panose="02000009000000000000" pitchFamily="49" charset="0"/>
@@ -3902,6 +3960,9 @@
             </a:pPr>
             <a:r>
               <a:rPr lang="en-GB" sz="1100" dirty="0">
+                <a:solidFill>
+                  <a:schemeClr val="bg1"/>
+                </a:solidFill>
                 <a:latin typeface="JetBrains Mono" panose="02000009000000000000" pitchFamily="49" charset="0"/>
                 <a:ea typeface="JetBrains Mono" panose="02000009000000000000" pitchFamily="49" charset="0"/>
                 <a:cs typeface="JetBrains Mono" panose="02000009000000000000" pitchFamily="49" charset="0"/>
@@ -3915,6 +3976,9 @@
             </a:pPr>
             <a:r>
               <a:rPr lang="en-GB" sz="1100" dirty="0">
+                <a:solidFill>
+                  <a:schemeClr val="bg1"/>
+                </a:solidFill>
                 <a:latin typeface="JetBrains Mono" panose="02000009000000000000" pitchFamily="49" charset="0"/>
                 <a:ea typeface="JetBrains Mono" panose="02000009000000000000" pitchFamily="49" charset="0"/>
                 <a:cs typeface="JetBrains Mono" panose="02000009000000000000" pitchFamily="49" charset="0"/>
@@ -3928,6 +3992,9 @@
             </a:pPr>
             <a:r>
               <a:rPr lang="en-GB" sz="1100" dirty="0">
+                <a:solidFill>
+                  <a:schemeClr val="bg1"/>
+                </a:solidFill>
                 <a:latin typeface="JetBrains Mono" panose="02000009000000000000" pitchFamily="49" charset="0"/>
                 <a:ea typeface="JetBrains Mono" panose="02000009000000000000" pitchFamily="49" charset="0"/>
                 <a:cs typeface="JetBrains Mono" panose="02000009000000000000" pitchFamily="49" charset="0"/>
@@ -3941,6 +4008,9 @@
             </a:pPr>
             <a:r>
               <a:rPr lang="en-GB" sz="1600" dirty="0">
+                <a:solidFill>
+                  <a:schemeClr val="bg1"/>
+                </a:solidFill>
                 <a:latin typeface="JetBrains Mono" panose="02000009000000000000" pitchFamily="49" charset="0"/>
                 <a:ea typeface="JetBrains Mono" panose="02000009000000000000" pitchFamily="49" charset="0"/>
                 <a:cs typeface="JetBrains Mono" panose="02000009000000000000" pitchFamily="49" charset="0"/>
@@ -3954,6 +4024,9 @@
             </a:pPr>
             <a:r>
               <a:rPr lang="en-GB" sz="1100" dirty="0">
+                <a:solidFill>
+                  <a:schemeClr val="bg1"/>
+                </a:solidFill>
                 <a:latin typeface="JetBrains Mono" panose="02000009000000000000" pitchFamily="49" charset="0"/>
                 <a:ea typeface="JetBrains Mono" panose="02000009000000000000" pitchFamily="49" charset="0"/>
                 <a:cs typeface="JetBrains Mono" panose="02000009000000000000" pitchFamily="49" charset="0"/>
@@ -3967,6 +4040,9 @@
             </a:pPr>
             <a:r>
               <a:rPr lang="en-GB" sz="1100" dirty="0">
+                <a:solidFill>
+                  <a:schemeClr val="bg1"/>
+                </a:solidFill>
                 <a:latin typeface="JetBrains Mono" panose="02000009000000000000" pitchFamily="49" charset="0"/>
                 <a:ea typeface="JetBrains Mono" panose="02000009000000000000" pitchFamily="49" charset="0"/>
                 <a:cs typeface="JetBrains Mono" panose="02000009000000000000" pitchFamily="49" charset="0"/>
@@ -4177,7 +4253,7 @@
                 <a:noFill/>
               </a:ln>
               <a:solidFill>
-                <a:prstClr val="black"/>
+                <a:schemeClr val="bg1"/>
               </a:solidFill>
               <a:effectLst/>
               <a:uLnTx/>
@@ -4389,7 +4465,7 @@
             <a:r>
               <a:rPr lang="en-GB" sz="1500" dirty="0">
                 <a:solidFill>
-                  <a:prstClr val="black"/>
+                  <a:schemeClr val="bg1"/>
                 </a:solidFill>
                 <a:latin typeface="JetBrains Mono" panose="02000009000000000000" pitchFamily="49" charset="0"/>
                 <a:ea typeface="JetBrains Mono" panose="02000009000000000000" pitchFamily="49" charset="0"/>
@@ -4407,7 +4483,7 @@
             <a:r>
               <a:rPr lang="en-GB" sz="1000" dirty="0">
                 <a:solidFill>
-                  <a:prstClr val="black"/>
+                  <a:schemeClr val="bg1"/>
                 </a:solidFill>
                 <a:latin typeface="JetBrains Mono" panose="02000009000000000000" pitchFamily="49" charset="0"/>
                 <a:ea typeface="JetBrains Mono" panose="02000009000000000000" pitchFamily="49" charset="0"/>
@@ -4425,7 +4501,7 @@
             <a:r>
               <a:rPr lang="en-GB" sz="1000" dirty="0">
                 <a:solidFill>
-                  <a:prstClr val="black"/>
+                  <a:schemeClr val="bg1"/>
                 </a:solidFill>
                 <a:latin typeface="JetBrains Mono" panose="02000009000000000000" pitchFamily="49" charset="0"/>
                 <a:ea typeface="JetBrains Mono" panose="02000009000000000000" pitchFamily="49" charset="0"/>
@@ -4443,13 +4519,31 @@
             <a:r>
               <a:rPr lang="en-GB" sz="1500" dirty="0">
                 <a:solidFill>
-                  <a:prstClr val="black"/>
+                  <a:schemeClr val="bg1"/>
                 </a:solidFill>
                 <a:latin typeface="JetBrains Mono" panose="02000009000000000000" pitchFamily="49" charset="0"/>
                 <a:ea typeface="JetBrains Mono" panose="02000009000000000000" pitchFamily="49" charset="0"/>
                 <a:cs typeface="JetBrains Mono" panose="02000009000000000000" pitchFamily="49" charset="0"/>
               </a:rPr>
               <a:t>Stack handling, function calls</a:t>
+            </a:r>
+          </a:p>
+          <a:p>
+            <a:pPr marL="0" indent="0">
+              <a:buFont typeface="Arial" panose="020B0604020202020204" pitchFamily="34" charset="0"/>
+              <a:buNone/>
+              <a:defRPr/>
+            </a:pPr>
+            <a:r>
+              <a:rPr lang="en-GB" sz="1500" dirty="0">
+                <a:solidFill>
+                  <a:schemeClr val="bg1"/>
+                </a:solidFill>
+                <a:latin typeface="JetBrains Mono" panose="02000009000000000000" pitchFamily="49" charset="0"/>
+                <a:ea typeface="JetBrains Mono" panose="02000009000000000000" pitchFamily="49" charset="0"/>
+                <a:cs typeface="JetBrains Mono" panose="02000009000000000000" pitchFamily="49" charset="0"/>
+              </a:rPr>
+              <a:t>Configurable cycle exec units</a:t>
             </a:r>
           </a:p>
         </p:txBody>
@@ -4470,6 +4564,14 @@
 <file path=ppt/slides/slide4.xml><?xml version="1.0" encoding="utf-8"?>
 <p:sld xmlns:a="http://schemas.openxmlformats.org/drawingml/2006/main" xmlns:r="http://schemas.openxmlformats.org/officeDocument/2006/relationships" xmlns:p="http://schemas.openxmlformats.org/presentationml/2006/main">
   <p:cSld>
+    <p:bg>
+      <p:bgPr>
+        <a:solidFill>
+          <a:srgbClr val="181825"/>
+        </a:solidFill>
+        <a:effectLst/>
+      </p:bgPr>
+    </p:bg>
     <p:spTree>
       <p:nvGrpSpPr>
         <p:cNvPr id="1" name="">
@@ -4520,6 +4622,9 @@
           <a:p>
             <a:r>
               <a:rPr lang="en-GB" sz="2800" dirty="0">
+                <a:solidFill>
+                  <a:schemeClr val="bg1"/>
+                </a:solidFill>
                 <a:latin typeface="JetBrains Mono" panose="02000009000000000000" pitchFamily="49" charset="0"/>
                 <a:ea typeface="JetBrains Mono" panose="02000009000000000000" pitchFamily="49" charset="0"/>
                 <a:cs typeface="JetBrains Mono" panose="02000009000000000000" pitchFamily="49" charset="0"/>
@@ -4561,14 +4666,36 @@
               <a:buNone/>
             </a:pPr>
             <a:r>
+              <a:rPr lang="en-GB" sz="1600" dirty="0">
+                <a:solidFill>
+                  <a:schemeClr val="bg1"/>
+                </a:solidFill>
+                <a:latin typeface="JetBrains Mono" panose="02000009000000000000" pitchFamily="49" charset="0"/>
+                <a:ea typeface="JetBrains Mono" panose="02000009000000000000" pitchFamily="49" charset="0"/>
+                <a:cs typeface="JetBrains Mono" panose="02000009000000000000" pitchFamily="49" charset="0"/>
+              </a:rPr>
+              <a:t>dot product</a:t>
+            </a:r>
+          </a:p>
+          <a:p>
+            <a:pPr marL="0" indent="0">
+              <a:buNone/>
+            </a:pPr>
+            <a:r>
               <a:rPr lang="en-GB" sz="1600" dirty="0" err="1">
-                <a:latin typeface="JetBrains Mono" panose="02000009000000000000" pitchFamily="49" charset="0"/>
-                <a:ea typeface="JetBrains Mono" panose="02000009000000000000" pitchFamily="49" charset="0"/>
-                <a:cs typeface="JetBrains Mono" panose="02000009000000000000" pitchFamily="49" charset="0"/>
-              </a:rPr>
-              <a:t>saxpy</a:t>
+                <a:solidFill>
+                  <a:schemeClr val="bg1"/>
+                </a:solidFill>
+                <a:latin typeface="JetBrains Mono" panose="02000009000000000000" pitchFamily="49" charset="0"/>
+                <a:ea typeface="JetBrains Mono" panose="02000009000000000000" pitchFamily="49" charset="0"/>
+                <a:cs typeface="JetBrains Mono" panose="02000009000000000000" pitchFamily="49" charset="0"/>
+              </a:rPr>
+              <a:t>fibonacci</a:t>
             </a:r>
             <a:endParaRPr lang="en-GB" sz="1600" dirty="0">
+              <a:solidFill>
+                <a:schemeClr val="bg1"/>
+              </a:solidFill>
               <a:latin typeface="JetBrains Mono" panose="02000009000000000000" pitchFamily="49" charset="0"/>
               <a:ea typeface="JetBrains Mono" panose="02000009000000000000" pitchFamily="49" charset="0"/>
               <a:cs typeface="JetBrains Mono" panose="02000009000000000000" pitchFamily="49" charset="0"/>
@@ -4579,7 +4706,26 @@
               <a:buNone/>
             </a:pPr>
             <a:r>
+              <a:rPr lang="en-GB" sz="1600" dirty="0">
+                <a:solidFill>
+                  <a:schemeClr val="bg1"/>
+                </a:solidFill>
+                <a:latin typeface="JetBrains Mono" panose="02000009000000000000" pitchFamily="49" charset="0"/>
+                <a:ea typeface="JetBrains Mono" panose="02000009000000000000" pitchFamily="49" charset="0"/>
+                <a:cs typeface="JetBrains Mono" panose="02000009000000000000" pitchFamily="49" charset="0"/>
+              </a:rPr>
+              <a:t>gaussian</a:t>
+            </a:r>
+          </a:p>
+          <a:p>
+            <a:pPr marL="0" indent="0">
+              <a:buNone/>
+            </a:pPr>
+            <a:r>
               <a:rPr lang="en-GB" sz="1600" dirty="0" err="1">
+                <a:solidFill>
+                  <a:schemeClr val="bg1"/>
+                </a:solidFill>
                 <a:latin typeface="JetBrains Mono" panose="02000009000000000000" pitchFamily="49" charset="0"/>
                 <a:ea typeface="JetBrains Mono" panose="02000009000000000000" pitchFamily="49" charset="0"/>
                 <a:cs typeface="JetBrains Mono" panose="02000009000000000000" pitchFamily="49" charset="0"/>
@@ -4587,6 +4733,9 @@
               <a:t>matmul</a:t>
             </a:r>
             <a:endParaRPr lang="en-GB" sz="1600" dirty="0">
+              <a:solidFill>
+                <a:schemeClr val="bg1"/>
+              </a:solidFill>
               <a:latin typeface="JetBrains Mono" panose="02000009000000000000" pitchFamily="49" charset="0"/>
               <a:ea typeface="JetBrains Mono" panose="02000009000000000000" pitchFamily="49" charset="0"/>
               <a:cs typeface="JetBrains Mono" panose="02000009000000000000" pitchFamily="49" charset="0"/>
@@ -4597,14 +4746,36 @@
               <a:buNone/>
             </a:pPr>
             <a:r>
+              <a:rPr lang="en-GB" sz="1600" dirty="0">
+                <a:solidFill>
+                  <a:schemeClr val="bg1"/>
+                </a:solidFill>
+                <a:latin typeface="JetBrains Mono" panose="02000009000000000000" pitchFamily="49" charset="0"/>
+                <a:ea typeface="JetBrains Mono" panose="02000009000000000000" pitchFamily="49" charset="0"/>
+                <a:cs typeface="JetBrains Mono" panose="02000009000000000000" pitchFamily="49" charset="0"/>
+              </a:rPr>
+              <a:t>quicksort</a:t>
+            </a:r>
+          </a:p>
+          <a:p>
+            <a:pPr marL="0" indent="0">
+              <a:buNone/>
+            </a:pPr>
+            <a:r>
               <a:rPr lang="en-GB" sz="1600" dirty="0" err="1">
-                <a:latin typeface="JetBrains Mono" panose="02000009000000000000" pitchFamily="49" charset="0"/>
-                <a:ea typeface="JetBrains Mono" panose="02000009000000000000" pitchFamily="49" charset="0"/>
-                <a:cs typeface="JetBrains Mono" panose="02000009000000000000" pitchFamily="49" charset="0"/>
-              </a:rPr>
-              <a:t>vectoradd</a:t>
+                <a:solidFill>
+                  <a:schemeClr val="bg1"/>
+                </a:solidFill>
+                <a:latin typeface="JetBrains Mono" panose="02000009000000000000" pitchFamily="49" charset="0"/>
+                <a:ea typeface="JetBrains Mono" panose="02000009000000000000" pitchFamily="49" charset="0"/>
+                <a:cs typeface="JetBrains Mono" panose="02000009000000000000" pitchFamily="49" charset="0"/>
+              </a:rPr>
+              <a:t>saxpy</a:t>
             </a:r>
             <a:endParaRPr lang="en-GB" sz="1600" dirty="0">
+              <a:solidFill>
+                <a:schemeClr val="bg1"/>
+              </a:solidFill>
               <a:latin typeface="JetBrains Mono" panose="02000009000000000000" pitchFamily="49" charset="0"/>
               <a:ea typeface="JetBrains Mono" panose="02000009000000000000" pitchFamily="49" charset="0"/>
               <a:cs typeface="JetBrains Mono" panose="02000009000000000000" pitchFamily="49" charset="0"/>
@@ -4628,6 +4799,14 @@
 <file path=ppt/slides/slide5.xml><?xml version="1.0" encoding="utf-8"?>
 <p:sld xmlns:a="http://schemas.openxmlformats.org/drawingml/2006/main" xmlns:r="http://schemas.openxmlformats.org/officeDocument/2006/relationships" xmlns:p="http://schemas.openxmlformats.org/presentationml/2006/main">
   <p:cSld>
+    <p:bg>
+      <p:bgPr>
+        <a:solidFill>
+          <a:srgbClr val="181825"/>
+        </a:solidFill>
+        <a:effectLst/>
+      </p:bgPr>
+    </p:bg>
     <p:spTree>
       <p:nvGrpSpPr>
         <p:cNvPr id="1" name="">
@@ -4678,11 +4857,14 @@
           <a:p>
             <a:r>
               <a:rPr lang="en-GB" sz="2800" dirty="0">
-                <a:latin typeface="JetBrains Mono" panose="02000009000000000000" pitchFamily="49" charset="0"/>
-                <a:ea typeface="JetBrains Mono" panose="02000009000000000000" pitchFamily="49" charset="0"/>
-                <a:cs typeface="JetBrains Mono" panose="02000009000000000000" pitchFamily="49" charset="0"/>
-              </a:rPr>
-              <a:t>Experiment One - </a:t>
+                <a:solidFill>
+                  <a:schemeClr val="bg1"/>
+                </a:solidFill>
+                <a:latin typeface="JetBrains Mono" panose="02000009000000000000" pitchFamily="49" charset="0"/>
+                <a:ea typeface="JetBrains Mono" panose="02000009000000000000" pitchFamily="49" charset="0"/>
+                <a:cs typeface="JetBrains Mono" panose="02000009000000000000" pitchFamily="49" charset="0"/>
+              </a:rPr>
+              <a:t>Experiment One – Pipeline Width</a:t>
             </a:r>
           </a:p>
         </p:txBody>
@@ -4706,7 +4888,7 @@
         <p:spPr>
           <a:xfrm>
             <a:off x="838200" y="819150"/>
-            <a:ext cx="10515600" cy="5357813"/>
+            <a:ext cx="5314950" cy="5357813"/>
           </a:xfrm>
         </p:spPr>
         <p:txBody>
@@ -4720,15 +4902,197 @@
             </a:pPr>
             <a:r>
               <a:rPr lang="en-GB" sz="1600" dirty="0">
-                <a:latin typeface="JetBrains Mono" panose="02000009000000000000" pitchFamily="49" charset="0"/>
-                <a:ea typeface="JetBrains Mono" panose="02000009000000000000" pitchFamily="49" charset="0"/>
-                <a:cs typeface="JetBrains Mono" panose="02000009000000000000" pitchFamily="49" charset="0"/>
-              </a:rPr>
-              <a:t>Hypothesis: </a:t>
-            </a:r>
-          </a:p>
-        </p:txBody>
-      </p:sp>
+                <a:solidFill>
+                  <a:schemeClr val="bg1"/>
+                </a:solidFill>
+                <a:latin typeface="JetBrains Mono" panose="02000009000000000000" pitchFamily="49" charset="0"/>
+                <a:ea typeface="JetBrains Mono" panose="02000009000000000000" pitchFamily="49" charset="0"/>
+                <a:cs typeface="JetBrains Mono" panose="02000009000000000000" pitchFamily="49" charset="0"/>
+              </a:rPr>
+              <a:t>Hypothesis</a:t>
+            </a:r>
+          </a:p>
+          <a:p>
+            <a:pPr marL="0" indent="0">
+              <a:buNone/>
+            </a:pPr>
+            <a:r>
+              <a:rPr lang="en-GB" sz="1200" dirty="0">
+                <a:solidFill>
+                  <a:schemeClr val="bg1"/>
+                </a:solidFill>
+                <a:latin typeface="JetBrains Mono" panose="02000009000000000000" pitchFamily="49" charset="0"/>
+                <a:ea typeface="JetBrains Mono" panose="02000009000000000000" pitchFamily="49" charset="0"/>
+                <a:cs typeface="JetBrains Mono" panose="02000009000000000000" pitchFamily="49" charset="0"/>
+              </a:rPr>
+              <a:t>Increasing pipeline width will lead to increased IPC across all benchmarks.</a:t>
+            </a:r>
+          </a:p>
+          <a:p>
+            <a:pPr marL="0" marR="0" lvl="0" indent="0" algn="l" defTabSz="914400" rtl="0" eaLnBrk="1" fontAlgn="auto" latinLnBrk="0" hangingPunct="1">
+              <a:lnSpc>
+                <a:spcPct val="90000"/>
+              </a:lnSpc>
+              <a:spcBef>
+                <a:spcPts val="1000"/>
+              </a:spcBef>
+              <a:spcAft>
+                <a:spcPts val="0"/>
+              </a:spcAft>
+              <a:buClrTx/>
+              <a:buSzTx/>
+              <a:buFont typeface="Arial" panose="020B0604020202020204" pitchFamily="34" charset="0"/>
+              <a:buNone/>
+              <a:tabLst/>
+              <a:defRPr/>
+            </a:pPr>
+            <a:endParaRPr kumimoji="0" lang="en-GB" sz="1200" b="0" i="0" u="none" strike="noStrike" kern="1200" cap="none" spc="0" normalizeH="0" baseline="0" noProof="0" dirty="0">
+              <a:ln>
+                <a:noFill/>
+              </a:ln>
+              <a:solidFill>
+                <a:prstClr val="white"/>
+              </a:solidFill>
+              <a:effectLst/>
+              <a:uLnTx/>
+              <a:uFillTx/>
+              <a:latin typeface="JetBrains Mono" panose="02000009000000000000" pitchFamily="49" charset="0"/>
+              <a:ea typeface="JetBrains Mono" panose="02000009000000000000" pitchFamily="49" charset="0"/>
+              <a:cs typeface="JetBrains Mono" panose="02000009000000000000" pitchFamily="49" charset="0"/>
+            </a:endParaRPr>
+          </a:p>
+          <a:p>
+            <a:pPr marL="0" marR="0" lvl="0" indent="0" algn="l" defTabSz="914400" rtl="0" eaLnBrk="1" fontAlgn="auto" latinLnBrk="0" hangingPunct="1">
+              <a:lnSpc>
+                <a:spcPct val="90000"/>
+              </a:lnSpc>
+              <a:spcBef>
+                <a:spcPts val="1000"/>
+              </a:spcBef>
+              <a:spcAft>
+                <a:spcPts val="0"/>
+              </a:spcAft>
+              <a:buClrTx/>
+              <a:buSzTx/>
+              <a:buFont typeface="Arial" panose="020B0604020202020204" pitchFamily="34" charset="0"/>
+              <a:buNone/>
+              <a:tabLst/>
+              <a:defRPr/>
+            </a:pPr>
+            <a:r>
+              <a:rPr kumimoji="0" lang="en-GB" sz="1600" b="0" i="0" u="none" strike="noStrike" kern="1200" cap="none" spc="0" normalizeH="0" baseline="0" noProof="0" dirty="0">
+                <a:ln>
+                  <a:noFill/>
+                </a:ln>
+                <a:solidFill>
+                  <a:prstClr val="white"/>
+                </a:solidFill>
+                <a:effectLst/>
+                <a:uLnTx/>
+                <a:uFillTx/>
+                <a:latin typeface="JetBrains Mono" panose="02000009000000000000" pitchFamily="49" charset="0"/>
+                <a:ea typeface="JetBrains Mono" panose="02000009000000000000" pitchFamily="49" charset="0"/>
+                <a:cs typeface="JetBrains Mono" panose="02000009000000000000" pitchFamily="49" charset="0"/>
+              </a:rPr>
+              <a:t>Experiment</a:t>
+            </a:r>
+          </a:p>
+          <a:p>
+            <a:pPr marL="0" indent="0">
+              <a:buNone/>
+            </a:pPr>
+            <a:endParaRPr lang="en-GB" sz="1200" dirty="0">
+              <a:solidFill>
+                <a:schemeClr val="bg1"/>
+              </a:solidFill>
+              <a:latin typeface="JetBrains Mono" panose="02000009000000000000" pitchFamily="49" charset="0"/>
+              <a:ea typeface="JetBrains Mono" panose="02000009000000000000" pitchFamily="49" charset="0"/>
+              <a:cs typeface="JetBrains Mono" panose="02000009000000000000" pitchFamily="49" charset="0"/>
+            </a:endParaRPr>
+          </a:p>
+          <a:p>
+            <a:pPr marL="0" indent="0">
+              <a:buNone/>
+            </a:pPr>
+            <a:endParaRPr lang="en-GB" sz="1200" dirty="0">
+              <a:solidFill>
+                <a:schemeClr val="bg1"/>
+              </a:solidFill>
+              <a:latin typeface="JetBrains Mono" panose="02000009000000000000" pitchFamily="49" charset="0"/>
+              <a:ea typeface="JetBrains Mono" panose="02000009000000000000" pitchFamily="49" charset="0"/>
+              <a:cs typeface="JetBrains Mono" panose="02000009000000000000" pitchFamily="49" charset="0"/>
+            </a:endParaRPr>
+          </a:p>
+          <a:p>
+            <a:pPr marL="0" indent="0">
+              <a:buNone/>
+            </a:pPr>
+            <a:r>
+              <a:rPr lang="en-GB" sz="1600" dirty="0">
+                <a:solidFill>
+                  <a:schemeClr val="bg1"/>
+                </a:solidFill>
+                <a:latin typeface="JetBrains Mono" panose="02000009000000000000" pitchFamily="49" charset="0"/>
+                <a:ea typeface="JetBrains Mono" panose="02000009000000000000" pitchFamily="49" charset="0"/>
+                <a:cs typeface="JetBrains Mono" panose="02000009000000000000" pitchFamily="49" charset="0"/>
+              </a:rPr>
+              <a:t>Results</a:t>
+            </a:r>
+          </a:p>
+          <a:p>
+            <a:pPr marL="0" indent="0">
+              <a:buNone/>
+            </a:pPr>
+            <a:r>
+              <a:rPr lang="en-GB" sz="1200" dirty="0">
+                <a:solidFill>
+                  <a:schemeClr val="bg1"/>
+                </a:solidFill>
+                <a:latin typeface="JetBrains Mono" panose="02000009000000000000" pitchFamily="49" charset="0"/>
+                <a:ea typeface="JetBrains Mono" panose="02000009000000000000" pitchFamily="49" charset="0"/>
+                <a:cs typeface="JetBrains Mono" panose="02000009000000000000" pitchFamily="49" charset="0"/>
+              </a:rPr>
+              <a:t>...</a:t>
+            </a:r>
+          </a:p>
+        </p:txBody>
+      </p:sp>
+      <p:pic>
+        <p:nvPicPr>
+          <p:cNvPr id="13" name="Picture 12">
+            <a:extLst>
+              <a:ext uri="{FF2B5EF4-FFF2-40B4-BE49-F238E27FC236}">
+                <a16:creationId xmlns:a16="http://schemas.microsoft.com/office/drawing/2014/main" id="{CD2E75F6-EC7F-3108-ACE4-2AFCB47E107D}"/>
+              </a:ext>
+            </a:extLst>
+          </p:cNvPr>
+          <p:cNvPicPr>
+            <a:picLocks noChangeAspect="1"/>
+          </p:cNvPicPr>
+          <p:nvPr/>
+        </p:nvPicPr>
+        <p:blipFill>
+          <a:blip r:embed="rId2">
+            <a:extLst>
+              <a:ext uri="{28A0092B-C50C-407E-A947-70E740481C1C}">
+                <a14:useLocalDpi xmlns:a14="http://schemas.microsoft.com/office/drawing/2010/main" val="0"/>
+              </a:ext>
+            </a:extLst>
+          </a:blip>
+          <a:stretch>
+            <a:fillRect/>
+          </a:stretch>
+        </p:blipFill>
+        <p:spPr>
+          <a:xfrm>
+            <a:off x="6153150" y="819150"/>
+            <a:ext cx="6038850" cy="6038850"/>
+          </a:xfrm>
+          <a:prstGeom prst="rect">
+            <a:avLst/>
+          </a:prstGeom>
+        </p:spPr>
+      </p:pic>
     </p:spTree>
     <p:extLst>
       <p:ext uri="{BB962C8B-B14F-4D97-AF65-F5344CB8AC3E}">
@@ -4745,6 +5109,14 @@
 <file path=ppt/slides/slide6.xml><?xml version="1.0" encoding="utf-8"?>
 <p:sld xmlns:a="http://schemas.openxmlformats.org/drawingml/2006/main" xmlns:r="http://schemas.openxmlformats.org/officeDocument/2006/relationships" xmlns:p="http://schemas.openxmlformats.org/presentationml/2006/main">
   <p:cSld>
+    <p:bg>
+      <p:bgPr>
+        <a:solidFill>
+          <a:srgbClr val="181825"/>
+        </a:solidFill>
+        <a:effectLst/>
+      </p:bgPr>
+    </p:bg>
     <p:spTree>
       <p:nvGrpSpPr>
         <p:cNvPr id="1" name="">
@@ -4795,11 +5167,14 @@
           <a:p>
             <a:r>
               <a:rPr lang="en-GB" sz="2800" dirty="0">
-                <a:latin typeface="JetBrains Mono" panose="02000009000000000000" pitchFamily="49" charset="0"/>
-                <a:ea typeface="JetBrains Mono" panose="02000009000000000000" pitchFamily="49" charset="0"/>
-                <a:cs typeface="JetBrains Mono" panose="02000009000000000000" pitchFamily="49" charset="0"/>
-              </a:rPr>
-              <a:t>Experiment Two - </a:t>
+                <a:solidFill>
+                  <a:schemeClr val="bg1"/>
+                </a:solidFill>
+                <a:latin typeface="JetBrains Mono" panose="02000009000000000000" pitchFamily="49" charset="0"/>
+                <a:ea typeface="JetBrains Mono" panose="02000009000000000000" pitchFamily="49" charset="0"/>
+                <a:cs typeface="JetBrains Mono" panose="02000009000000000000" pitchFamily="49" charset="0"/>
+              </a:rPr>
+              <a:t>Experiment Two – Branch Prediction Policies </a:t>
             </a:r>
           </a:p>
         </p:txBody>
@@ -4823,7 +5198,7 @@
         <p:spPr>
           <a:xfrm>
             <a:off x="838200" y="819150"/>
-            <a:ext cx="10515600" cy="5357813"/>
+            <a:ext cx="5314950" cy="5357813"/>
           </a:xfrm>
         </p:spPr>
         <p:txBody>
@@ -4832,20 +5207,322 @@
           </a:bodyPr>
           <a:lstStyle/>
           <a:p>
-            <a:pPr marL="0" indent="0">
-              <a:buNone/>
+            <a:pPr marL="0" marR="0" lvl="0" indent="0" algn="l" defTabSz="914400" rtl="0" eaLnBrk="1" fontAlgn="auto" latinLnBrk="0" hangingPunct="1">
+              <a:lnSpc>
+                <a:spcPct val="90000"/>
+              </a:lnSpc>
+              <a:spcBef>
+                <a:spcPts val="1000"/>
+              </a:spcBef>
+              <a:spcAft>
+                <a:spcPts val="0"/>
+              </a:spcAft>
+              <a:buClrTx/>
+              <a:buSzTx/>
+              <a:buFont typeface="Arial" panose="020B0604020202020204" pitchFamily="34" charset="0"/>
+              <a:buNone/>
+              <a:tabLst/>
+              <a:defRPr/>
             </a:pPr>
             <a:r>
-              <a:rPr lang="en-GB" sz="1600" dirty="0">
-                <a:latin typeface="JetBrains Mono" panose="02000009000000000000" pitchFamily="49" charset="0"/>
-                <a:ea typeface="JetBrains Mono" panose="02000009000000000000" pitchFamily="49" charset="0"/>
-                <a:cs typeface="JetBrains Mono" panose="02000009000000000000" pitchFamily="49" charset="0"/>
-              </a:rPr>
-              <a:t>Hypothesis: </a:t>
-            </a:r>
-          </a:p>
-        </p:txBody>
-      </p:sp>
+              <a:rPr kumimoji="0" lang="en-GB" sz="1600" b="0" i="0" u="none" strike="noStrike" kern="1200" cap="none" spc="0" normalizeH="0" baseline="0" noProof="0" dirty="0">
+                <a:ln>
+                  <a:noFill/>
+                </a:ln>
+                <a:solidFill>
+                  <a:prstClr val="white"/>
+                </a:solidFill>
+                <a:effectLst/>
+                <a:uLnTx/>
+                <a:uFillTx/>
+                <a:latin typeface="JetBrains Mono" panose="02000009000000000000" pitchFamily="49" charset="0"/>
+                <a:ea typeface="JetBrains Mono" panose="02000009000000000000" pitchFamily="49" charset="0"/>
+                <a:cs typeface="JetBrains Mono" panose="02000009000000000000" pitchFamily="49" charset="0"/>
+              </a:rPr>
+              <a:t>Hypothesis</a:t>
+            </a:r>
+          </a:p>
+          <a:p>
+            <a:pPr marL="0" marR="0" lvl="0" indent="0" algn="l" defTabSz="914400" rtl="0" eaLnBrk="1" fontAlgn="auto" latinLnBrk="0" hangingPunct="1">
+              <a:lnSpc>
+                <a:spcPct val="90000"/>
+              </a:lnSpc>
+              <a:spcBef>
+                <a:spcPts val="1000"/>
+              </a:spcBef>
+              <a:spcAft>
+                <a:spcPts val="0"/>
+              </a:spcAft>
+              <a:buClrTx/>
+              <a:buSzTx/>
+              <a:buFont typeface="Arial" panose="020B0604020202020204" pitchFamily="34" charset="0"/>
+              <a:buNone/>
+              <a:tabLst/>
+              <a:defRPr/>
+            </a:pPr>
+            <a:r>
+              <a:rPr kumimoji="0" lang="en-GB" sz="1200" b="0" i="0" u="none" strike="noStrike" kern="1200" cap="none" spc="0" normalizeH="0" baseline="0" noProof="0" dirty="0">
+                <a:ln>
+                  <a:noFill/>
+                </a:ln>
+                <a:solidFill>
+                  <a:prstClr val="white"/>
+                </a:solidFill>
+                <a:effectLst/>
+                <a:uLnTx/>
+                <a:uFillTx/>
+                <a:latin typeface="JetBrains Mono" panose="02000009000000000000" pitchFamily="49" charset="0"/>
+                <a:ea typeface="JetBrains Mono" panose="02000009000000000000" pitchFamily="49" charset="0"/>
+                <a:cs typeface="JetBrains Mono" panose="02000009000000000000" pitchFamily="49" charset="0"/>
+              </a:rPr>
+              <a:t>Increasing pipeline width will lead to increased IPC across all benchmarks.</a:t>
+            </a:r>
+          </a:p>
+          <a:p>
+            <a:pPr marL="0" marR="0" lvl="0" indent="0" algn="l" defTabSz="914400" rtl="0" eaLnBrk="1" fontAlgn="auto" latinLnBrk="0" hangingPunct="1">
+              <a:lnSpc>
+                <a:spcPct val="90000"/>
+              </a:lnSpc>
+              <a:spcBef>
+                <a:spcPts val="1000"/>
+              </a:spcBef>
+              <a:spcAft>
+                <a:spcPts val="0"/>
+              </a:spcAft>
+              <a:buClrTx/>
+              <a:buSzTx/>
+              <a:buFont typeface="Arial" panose="020B0604020202020204" pitchFamily="34" charset="0"/>
+              <a:buNone/>
+              <a:tabLst/>
+              <a:defRPr/>
+            </a:pPr>
+            <a:endParaRPr kumimoji="0" lang="en-GB" sz="1200" b="0" i="0" u="none" strike="noStrike" kern="1200" cap="none" spc="0" normalizeH="0" baseline="0" noProof="0" dirty="0">
+              <a:ln>
+                <a:noFill/>
+              </a:ln>
+              <a:solidFill>
+                <a:prstClr val="white"/>
+              </a:solidFill>
+              <a:effectLst/>
+              <a:uLnTx/>
+              <a:uFillTx/>
+              <a:latin typeface="JetBrains Mono" panose="02000009000000000000" pitchFamily="49" charset="0"/>
+              <a:ea typeface="JetBrains Mono" panose="02000009000000000000" pitchFamily="49" charset="0"/>
+              <a:cs typeface="JetBrains Mono" panose="02000009000000000000" pitchFamily="49" charset="0"/>
+            </a:endParaRPr>
+          </a:p>
+          <a:p>
+            <a:pPr marL="0" marR="0" lvl="0" indent="0" algn="l" defTabSz="914400" rtl="0" eaLnBrk="1" fontAlgn="auto" latinLnBrk="0" hangingPunct="1">
+              <a:lnSpc>
+                <a:spcPct val="90000"/>
+              </a:lnSpc>
+              <a:spcBef>
+                <a:spcPts val="1000"/>
+              </a:spcBef>
+              <a:spcAft>
+                <a:spcPts val="0"/>
+              </a:spcAft>
+              <a:buClrTx/>
+              <a:buSzTx/>
+              <a:buFont typeface="Arial" panose="020B0604020202020204" pitchFamily="34" charset="0"/>
+              <a:buNone/>
+              <a:tabLst/>
+              <a:defRPr/>
+            </a:pPr>
+            <a:r>
+              <a:rPr kumimoji="0" lang="en-GB" sz="1600" b="0" i="0" u="none" strike="noStrike" kern="1200" cap="none" spc="0" normalizeH="0" baseline="0" noProof="0" dirty="0">
+                <a:ln>
+                  <a:noFill/>
+                </a:ln>
+                <a:solidFill>
+                  <a:prstClr val="white"/>
+                </a:solidFill>
+                <a:effectLst/>
+                <a:uLnTx/>
+                <a:uFillTx/>
+                <a:latin typeface="JetBrains Mono" panose="02000009000000000000" pitchFamily="49" charset="0"/>
+                <a:ea typeface="JetBrains Mono" panose="02000009000000000000" pitchFamily="49" charset="0"/>
+                <a:cs typeface="JetBrains Mono" panose="02000009000000000000" pitchFamily="49" charset="0"/>
+              </a:rPr>
+              <a:t>Experiment</a:t>
+            </a:r>
+          </a:p>
+          <a:p>
+            <a:pPr marL="0" marR="0" lvl="0" indent="0" algn="l" defTabSz="914400" rtl="0" eaLnBrk="1" fontAlgn="auto" latinLnBrk="0" hangingPunct="1">
+              <a:lnSpc>
+                <a:spcPct val="90000"/>
+              </a:lnSpc>
+              <a:spcBef>
+                <a:spcPts val="1000"/>
+              </a:spcBef>
+              <a:spcAft>
+                <a:spcPts val="0"/>
+              </a:spcAft>
+              <a:buClrTx/>
+              <a:buSzTx/>
+              <a:buFont typeface="Arial" panose="020B0604020202020204" pitchFamily="34" charset="0"/>
+              <a:buNone/>
+              <a:tabLst/>
+              <a:defRPr/>
+            </a:pPr>
+            <a:endParaRPr kumimoji="0" lang="en-GB" sz="1200" b="0" i="0" u="none" strike="noStrike" kern="1200" cap="none" spc="0" normalizeH="0" baseline="0" noProof="0" dirty="0">
+              <a:ln>
+                <a:noFill/>
+              </a:ln>
+              <a:solidFill>
+                <a:prstClr val="white"/>
+              </a:solidFill>
+              <a:effectLst/>
+              <a:uLnTx/>
+              <a:uFillTx/>
+              <a:latin typeface="JetBrains Mono" panose="02000009000000000000" pitchFamily="49" charset="0"/>
+              <a:ea typeface="JetBrains Mono" panose="02000009000000000000" pitchFamily="49" charset="0"/>
+              <a:cs typeface="JetBrains Mono" panose="02000009000000000000" pitchFamily="49" charset="0"/>
+            </a:endParaRPr>
+          </a:p>
+          <a:p>
+            <a:pPr marL="0" marR="0" lvl="0" indent="0" algn="l" defTabSz="914400" rtl="0" eaLnBrk="1" fontAlgn="auto" latinLnBrk="0" hangingPunct="1">
+              <a:lnSpc>
+                <a:spcPct val="90000"/>
+              </a:lnSpc>
+              <a:spcBef>
+                <a:spcPts val="1000"/>
+              </a:spcBef>
+              <a:spcAft>
+                <a:spcPts val="0"/>
+              </a:spcAft>
+              <a:buClrTx/>
+              <a:buSzTx/>
+              <a:buFont typeface="Arial" panose="020B0604020202020204" pitchFamily="34" charset="0"/>
+              <a:buNone/>
+              <a:tabLst/>
+              <a:defRPr/>
+            </a:pPr>
+            <a:endParaRPr kumimoji="0" lang="en-GB" sz="1200" b="0" i="0" u="none" strike="noStrike" kern="1200" cap="none" spc="0" normalizeH="0" baseline="0" noProof="0" dirty="0">
+              <a:ln>
+                <a:noFill/>
+              </a:ln>
+              <a:solidFill>
+                <a:prstClr val="white"/>
+              </a:solidFill>
+              <a:effectLst/>
+              <a:uLnTx/>
+              <a:uFillTx/>
+              <a:latin typeface="JetBrains Mono" panose="02000009000000000000" pitchFamily="49" charset="0"/>
+              <a:ea typeface="JetBrains Mono" panose="02000009000000000000" pitchFamily="49" charset="0"/>
+              <a:cs typeface="JetBrains Mono" panose="02000009000000000000" pitchFamily="49" charset="0"/>
+            </a:endParaRPr>
+          </a:p>
+          <a:p>
+            <a:pPr marL="0" marR="0" lvl="0" indent="0" algn="l" defTabSz="914400" rtl="0" eaLnBrk="1" fontAlgn="auto" latinLnBrk="0" hangingPunct="1">
+              <a:lnSpc>
+                <a:spcPct val="90000"/>
+              </a:lnSpc>
+              <a:spcBef>
+                <a:spcPts val="1000"/>
+              </a:spcBef>
+              <a:spcAft>
+                <a:spcPts val="0"/>
+              </a:spcAft>
+              <a:buClrTx/>
+              <a:buSzTx/>
+              <a:buFont typeface="Arial" panose="020B0604020202020204" pitchFamily="34" charset="0"/>
+              <a:buNone/>
+              <a:tabLst/>
+              <a:defRPr/>
+            </a:pPr>
+            <a:r>
+              <a:rPr kumimoji="0" lang="en-GB" sz="1600" b="0" i="0" u="none" strike="noStrike" kern="1200" cap="none" spc="0" normalizeH="0" baseline="0" noProof="0" dirty="0">
+                <a:ln>
+                  <a:noFill/>
+                </a:ln>
+                <a:solidFill>
+                  <a:prstClr val="white"/>
+                </a:solidFill>
+                <a:effectLst/>
+                <a:uLnTx/>
+                <a:uFillTx/>
+                <a:latin typeface="JetBrains Mono" panose="02000009000000000000" pitchFamily="49" charset="0"/>
+                <a:ea typeface="JetBrains Mono" panose="02000009000000000000" pitchFamily="49" charset="0"/>
+                <a:cs typeface="JetBrains Mono" panose="02000009000000000000" pitchFamily="49" charset="0"/>
+              </a:rPr>
+              <a:t>Results</a:t>
+            </a:r>
+          </a:p>
+          <a:p>
+            <a:pPr marL="0" marR="0" lvl="0" indent="0" algn="l" defTabSz="914400" rtl="0" eaLnBrk="1" fontAlgn="auto" latinLnBrk="0" hangingPunct="1">
+              <a:lnSpc>
+                <a:spcPct val="90000"/>
+              </a:lnSpc>
+              <a:spcBef>
+                <a:spcPts val="1000"/>
+              </a:spcBef>
+              <a:spcAft>
+                <a:spcPts val="0"/>
+              </a:spcAft>
+              <a:buClrTx/>
+              <a:buSzTx/>
+              <a:buFont typeface="Arial" panose="020B0604020202020204" pitchFamily="34" charset="0"/>
+              <a:buNone/>
+              <a:tabLst/>
+              <a:defRPr/>
+            </a:pPr>
+            <a:r>
+              <a:rPr kumimoji="0" lang="en-GB" sz="1200" b="0" i="0" u="none" strike="noStrike" kern="1200" cap="none" spc="0" normalizeH="0" baseline="0" noProof="0" dirty="0">
+                <a:ln>
+                  <a:noFill/>
+                </a:ln>
+                <a:solidFill>
+                  <a:prstClr val="white"/>
+                </a:solidFill>
+                <a:effectLst/>
+                <a:uLnTx/>
+                <a:uFillTx/>
+                <a:latin typeface="JetBrains Mono" panose="02000009000000000000" pitchFamily="49" charset="0"/>
+                <a:ea typeface="JetBrains Mono" panose="02000009000000000000" pitchFamily="49" charset="0"/>
+                <a:cs typeface="JetBrains Mono" panose="02000009000000000000" pitchFamily="49" charset="0"/>
+              </a:rPr>
+              <a:t>...</a:t>
+            </a:r>
+          </a:p>
+        </p:txBody>
+      </p:sp>
+      <p:pic>
+        <p:nvPicPr>
+          <p:cNvPr id="5" name="Picture 4">
+            <a:extLst>
+              <a:ext uri="{FF2B5EF4-FFF2-40B4-BE49-F238E27FC236}">
+                <a16:creationId xmlns:a16="http://schemas.microsoft.com/office/drawing/2014/main" id="{8134D07C-951D-1852-4CC1-8071AE069423}"/>
+              </a:ext>
+            </a:extLst>
+          </p:cNvPr>
+          <p:cNvPicPr>
+            <a:picLocks noChangeAspect="1"/>
+          </p:cNvPicPr>
+          <p:nvPr/>
+        </p:nvPicPr>
+        <p:blipFill>
+          <a:blip r:embed="rId2">
+            <a:extLst>
+              <a:ext uri="{28A0092B-C50C-407E-A947-70E740481C1C}">
+                <a14:useLocalDpi xmlns:a14="http://schemas.microsoft.com/office/drawing/2010/main" val="0"/>
+              </a:ext>
+            </a:extLst>
+          </a:blip>
+          <a:stretch>
+            <a:fillRect/>
+          </a:stretch>
+        </p:blipFill>
+        <p:spPr>
+          <a:xfrm>
+            <a:off x="6153150" y="819150"/>
+            <a:ext cx="6038850" cy="6038850"/>
+          </a:xfrm>
+          <a:prstGeom prst="rect">
+            <a:avLst/>
+          </a:prstGeom>
+        </p:spPr>
+      </p:pic>
     </p:spTree>
     <p:extLst>
       <p:ext uri="{BB962C8B-B14F-4D97-AF65-F5344CB8AC3E}">
@@ -4862,6 +5539,14 @@
 <file path=ppt/slides/slide7.xml><?xml version="1.0" encoding="utf-8"?>
 <p:sld xmlns:a="http://schemas.openxmlformats.org/drawingml/2006/main" xmlns:r="http://schemas.openxmlformats.org/officeDocument/2006/relationships" xmlns:p="http://schemas.openxmlformats.org/presentationml/2006/main">
   <p:cSld>
+    <p:bg>
+      <p:bgPr>
+        <a:solidFill>
+          <a:srgbClr val="181825"/>
+        </a:solidFill>
+        <a:effectLst/>
+      </p:bgPr>
+    </p:bg>
     <p:spTree>
       <p:nvGrpSpPr>
         <p:cNvPr id="1" name="">
@@ -4912,11 +5597,14 @@
           <a:p>
             <a:r>
               <a:rPr lang="en-GB" sz="2800" dirty="0">
-                <a:latin typeface="JetBrains Mono" panose="02000009000000000000" pitchFamily="49" charset="0"/>
-                <a:ea typeface="JetBrains Mono" panose="02000009000000000000" pitchFamily="49" charset="0"/>
-                <a:cs typeface="JetBrains Mono" panose="02000009000000000000" pitchFamily="49" charset="0"/>
-              </a:rPr>
-              <a:t>Experiment Three - </a:t>
+                <a:solidFill>
+                  <a:schemeClr val="bg1"/>
+                </a:solidFill>
+                <a:latin typeface="JetBrains Mono" panose="02000009000000000000" pitchFamily="49" charset="0"/>
+                <a:ea typeface="JetBrains Mono" panose="02000009000000000000" pitchFamily="49" charset="0"/>
+                <a:cs typeface="JetBrains Mono" panose="02000009000000000000" pitchFamily="49" charset="0"/>
+              </a:rPr>
+              <a:t>Experiment Three - Vectorisation </a:t>
             </a:r>
           </a:p>
         </p:txBody>
@@ -4940,7 +5628,7 @@
         <p:spPr>
           <a:xfrm>
             <a:off x="838200" y="819150"/>
-            <a:ext cx="10515600" cy="5357813"/>
+            <a:ext cx="5314950" cy="5357813"/>
           </a:xfrm>
         </p:spPr>
         <p:txBody>
@@ -4954,15 +5642,160 @@
             </a:pPr>
             <a:r>
               <a:rPr lang="en-GB" sz="1600" dirty="0">
-                <a:latin typeface="JetBrains Mono" panose="02000009000000000000" pitchFamily="49" charset="0"/>
-                <a:ea typeface="JetBrains Mono" panose="02000009000000000000" pitchFamily="49" charset="0"/>
-                <a:cs typeface="JetBrains Mono" panose="02000009000000000000" pitchFamily="49" charset="0"/>
-              </a:rPr>
-              <a:t>Hypothesis: </a:t>
-            </a:r>
-          </a:p>
-        </p:txBody>
-      </p:sp>
+                <a:solidFill>
+                  <a:schemeClr val="bg1"/>
+                </a:solidFill>
+                <a:latin typeface="JetBrains Mono" panose="02000009000000000000" pitchFamily="49" charset="0"/>
+                <a:ea typeface="JetBrains Mono" panose="02000009000000000000" pitchFamily="49" charset="0"/>
+                <a:cs typeface="JetBrains Mono" panose="02000009000000000000" pitchFamily="49" charset="0"/>
+              </a:rPr>
+              <a:t>Hypothesis</a:t>
+            </a:r>
+          </a:p>
+          <a:p>
+            <a:pPr marL="0" indent="0">
+              <a:buNone/>
+            </a:pPr>
+            <a:r>
+              <a:rPr lang="en-GB" sz="1200" dirty="0">
+                <a:solidFill>
+                  <a:schemeClr val="bg1"/>
+                </a:solidFill>
+                <a:latin typeface="JetBrains Mono" panose="02000009000000000000" pitchFamily="49" charset="0"/>
+                <a:ea typeface="JetBrains Mono" panose="02000009000000000000" pitchFamily="49" charset="0"/>
+                <a:cs typeface="JetBrains Mono" panose="02000009000000000000" pitchFamily="49" charset="0"/>
+              </a:rPr>
+              <a:t>Increasing the maximum vector length will decrease the number of cycles taken to execute SIMD benchmarks and therefore speed up execution compared the baseline non-vectorised version.</a:t>
+            </a:r>
+          </a:p>
+          <a:p>
+            <a:pPr marL="0" indent="0">
+              <a:buNone/>
+            </a:pPr>
+            <a:endParaRPr lang="en-GB" sz="1200" dirty="0">
+              <a:solidFill>
+                <a:schemeClr val="bg1"/>
+              </a:solidFill>
+              <a:latin typeface="JetBrains Mono" panose="02000009000000000000" pitchFamily="49" charset="0"/>
+              <a:ea typeface="JetBrains Mono" panose="02000009000000000000" pitchFamily="49" charset="0"/>
+              <a:cs typeface="JetBrains Mono" panose="02000009000000000000" pitchFamily="49" charset="0"/>
+            </a:endParaRPr>
+          </a:p>
+          <a:p>
+            <a:pPr marL="0" indent="0">
+              <a:buNone/>
+            </a:pPr>
+            <a:r>
+              <a:rPr lang="en-GB" sz="1600" dirty="0">
+                <a:solidFill>
+                  <a:schemeClr val="bg1"/>
+                </a:solidFill>
+                <a:latin typeface="JetBrains Mono" panose="02000009000000000000" pitchFamily="49" charset="0"/>
+                <a:ea typeface="JetBrains Mono" panose="02000009000000000000" pitchFamily="49" charset="0"/>
+                <a:cs typeface="JetBrains Mono" panose="02000009000000000000" pitchFamily="49" charset="0"/>
+              </a:rPr>
+              <a:t>Experiment</a:t>
+            </a:r>
+          </a:p>
+          <a:p>
+            <a:pPr marL="0" indent="0">
+              <a:buNone/>
+            </a:pPr>
+            <a:r>
+              <a:rPr lang="en-GB" sz="1200" dirty="0">
+                <a:solidFill>
+                  <a:schemeClr val="bg1"/>
+                </a:solidFill>
+                <a:latin typeface="JetBrains Mono" panose="02000009000000000000" pitchFamily="49" charset="0"/>
+                <a:ea typeface="JetBrains Mono" panose="02000009000000000000" pitchFamily="49" charset="0"/>
+                <a:cs typeface="JetBrains Mono" panose="02000009000000000000" pitchFamily="49" charset="0"/>
+              </a:rPr>
+              <a:t>The four SIMD-friendly benchmarks were executed with the same configuration besides the maximum vector length. The number of cycles taken to complete.</a:t>
+            </a:r>
+          </a:p>
+          <a:p>
+            <a:pPr marL="0" indent="0">
+              <a:buNone/>
+            </a:pPr>
+            <a:endParaRPr lang="en-GB" sz="1200" dirty="0">
+              <a:solidFill>
+                <a:schemeClr val="bg1"/>
+              </a:solidFill>
+              <a:latin typeface="JetBrains Mono" panose="02000009000000000000" pitchFamily="49" charset="0"/>
+              <a:ea typeface="JetBrains Mono" panose="02000009000000000000" pitchFamily="49" charset="0"/>
+              <a:cs typeface="JetBrains Mono" panose="02000009000000000000" pitchFamily="49" charset="0"/>
+            </a:endParaRPr>
+          </a:p>
+          <a:p>
+            <a:pPr marL="0" indent="0">
+              <a:buNone/>
+            </a:pPr>
+            <a:r>
+              <a:rPr lang="en-GB" sz="1600" dirty="0">
+                <a:solidFill>
+                  <a:schemeClr val="bg1"/>
+                </a:solidFill>
+                <a:latin typeface="JetBrains Mono" panose="02000009000000000000" pitchFamily="49" charset="0"/>
+                <a:ea typeface="JetBrains Mono" panose="02000009000000000000" pitchFamily="49" charset="0"/>
+                <a:cs typeface="JetBrains Mono" panose="02000009000000000000" pitchFamily="49" charset="0"/>
+              </a:rPr>
+              <a:t>Results</a:t>
+            </a:r>
+          </a:p>
+          <a:p>
+            <a:pPr marL="0" indent="0">
+              <a:buNone/>
+            </a:pPr>
+            <a:r>
+              <a:rPr lang="en-GB" sz="1200" dirty="0">
+                <a:solidFill>
+                  <a:schemeClr val="bg1"/>
+                </a:solidFill>
+                <a:latin typeface="JetBrains Mono" panose="02000009000000000000" pitchFamily="49" charset="0"/>
+                <a:ea typeface="JetBrains Mono" panose="02000009000000000000" pitchFamily="49" charset="0"/>
+                <a:cs typeface="JetBrains Mono" panose="02000009000000000000" pitchFamily="49" charset="0"/>
+              </a:rPr>
+              <a:t>All benchmarks show a similar decrease of about 10x in the number of cycles taken.</a:t>
+            </a:r>
+          </a:p>
+        </p:txBody>
+      </p:sp>
+      <p:pic>
+        <p:nvPicPr>
+          <p:cNvPr id="5" name="Picture 4">
+            <a:extLst>
+              <a:ext uri="{FF2B5EF4-FFF2-40B4-BE49-F238E27FC236}">
+                <a16:creationId xmlns:a16="http://schemas.microsoft.com/office/drawing/2014/main" id="{03AD5AEB-A1EC-2D6E-6723-894141399DD7}"/>
+              </a:ext>
+            </a:extLst>
+          </p:cNvPr>
+          <p:cNvPicPr>
+            <a:picLocks noChangeAspect="1"/>
+          </p:cNvPicPr>
+          <p:nvPr/>
+        </p:nvPicPr>
+        <p:blipFill>
+          <a:blip r:embed="rId2">
+            <a:extLst>
+              <a:ext uri="{28A0092B-C50C-407E-A947-70E740481C1C}">
+                <a14:useLocalDpi xmlns:a14="http://schemas.microsoft.com/office/drawing/2010/main" val="0"/>
+              </a:ext>
+            </a:extLst>
+          </a:blip>
+          <a:stretch>
+            <a:fillRect/>
+          </a:stretch>
+        </p:blipFill>
+        <p:spPr>
+          <a:xfrm>
+            <a:off x="6153150" y="819150"/>
+            <a:ext cx="6038850" cy="6038850"/>
+          </a:xfrm>
+          <a:prstGeom prst="rect">
+            <a:avLst/>
+          </a:prstGeom>
+        </p:spPr>
+      </p:pic>
     </p:spTree>
     <p:extLst>
       <p:ext uri="{BB962C8B-B14F-4D97-AF65-F5344CB8AC3E}">

--- a/docs/final presentation.pptx
+++ b/docs/final presentation.pptx
@@ -7,7 +7,7 @@
   <p:sldIdLst>
     <p:sldId id="256" r:id="rId2"/>
     <p:sldId id="257" r:id="rId3"/>
-    <p:sldId id="258" r:id="rId4"/>
+    <p:sldId id="264" r:id="rId4"/>
     <p:sldId id="263" r:id="rId5"/>
     <p:sldId id="259" r:id="rId6"/>
     <p:sldId id="260" r:id="rId7"/>
@@ -111,6 +111,21 @@
     </a:lvl9pPr>
   </p:defaultTextStyle>
   <p:extLst>
+    <p:ext uri="{521415D9-36F7-43E2-AB2F-B90AF26B5E84}">
+      <p14:sectionLst xmlns:p14="http://schemas.microsoft.com/office/powerpoint/2010/main">
+        <p14:section name="Default Section" id="{8821A8DF-9A85-474C-B6F2-E6E3BD40262E}">
+          <p14:sldIdLst>
+            <p14:sldId id="256"/>
+            <p14:sldId id="257"/>
+            <p14:sldId id="264"/>
+            <p14:sldId id="263"/>
+            <p14:sldId id="259"/>
+            <p14:sldId id="260"/>
+            <p14:sldId id="261"/>
+          </p14:sldIdLst>
+        </p14:section>
+      </p14:sectionLst>
+    </p:ext>
     <p:ext uri="{EFAFB233-063F-42B5-8137-9DF3F51BA10A}">
       <p15:sldGuideLst xmlns:p15="http://schemas.microsoft.com/office/powerpoint/2012/main"/>
     </p:ext>
@@ -267,7 +282,7 @@
           <a:p>
             <a:fld id="{C8C63B6A-6BCC-454B-8859-8F44071057AF}" type="datetimeFigureOut">
               <a:rPr lang="en-GB" smtClean="0"/>
-              <a:t>28/04/2026</a:t>
+              <a:t>29/04/2026</a:t>
             </a:fld>
             <a:endParaRPr lang="en-GB"/>
           </a:p>
@@ -467,7 +482,7 @@
           <a:p>
             <a:fld id="{C8C63B6A-6BCC-454B-8859-8F44071057AF}" type="datetimeFigureOut">
               <a:rPr lang="en-GB" smtClean="0"/>
-              <a:t>28/04/2026</a:t>
+              <a:t>29/04/2026</a:t>
             </a:fld>
             <a:endParaRPr lang="en-GB"/>
           </a:p>
@@ -677,7 +692,7 @@
           <a:p>
             <a:fld id="{C8C63B6A-6BCC-454B-8859-8F44071057AF}" type="datetimeFigureOut">
               <a:rPr lang="en-GB" smtClean="0"/>
-              <a:t>28/04/2026</a:t>
+              <a:t>29/04/2026</a:t>
             </a:fld>
             <a:endParaRPr lang="en-GB"/>
           </a:p>
@@ -877,7 +892,7 @@
           <a:p>
             <a:fld id="{C8C63B6A-6BCC-454B-8859-8F44071057AF}" type="datetimeFigureOut">
               <a:rPr lang="en-GB" smtClean="0"/>
-              <a:t>28/04/2026</a:t>
+              <a:t>29/04/2026</a:t>
             </a:fld>
             <a:endParaRPr lang="en-GB"/>
           </a:p>
@@ -1153,7 +1168,7 @@
           <a:p>
             <a:fld id="{C8C63B6A-6BCC-454B-8859-8F44071057AF}" type="datetimeFigureOut">
               <a:rPr lang="en-GB" smtClean="0"/>
-              <a:t>28/04/2026</a:t>
+              <a:t>29/04/2026</a:t>
             </a:fld>
             <a:endParaRPr lang="en-GB"/>
           </a:p>
@@ -1421,7 +1436,7 @@
           <a:p>
             <a:fld id="{C8C63B6A-6BCC-454B-8859-8F44071057AF}" type="datetimeFigureOut">
               <a:rPr lang="en-GB" smtClean="0"/>
-              <a:t>28/04/2026</a:t>
+              <a:t>29/04/2026</a:t>
             </a:fld>
             <a:endParaRPr lang="en-GB"/>
           </a:p>
@@ -1836,7 +1851,7 @@
           <a:p>
             <a:fld id="{C8C63B6A-6BCC-454B-8859-8F44071057AF}" type="datetimeFigureOut">
               <a:rPr lang="en-GB" smtClean="0"/>
-              <a:t>28/04/2026</a:t>
+              <a:t>29/04/2026</a:t>
             </a:fld>
             <a:endParaRPr lang="en-GB"/>
           </a:p>
@@ -1978,7 +1993,7 @@
           <a:p>
             <a:fld id="{C8C63B6A-6BCC-454B-8859-8F44071057AF}" type="datetimeFigureOut">
               <a:rPr lang="en-GB" smtClean="0"/>
-              <a:t>28/04/2026</a:t>
+              <a:t>29/04/2026</a:t>
             </a:fld>
             <a:endParaRPr lang="en-GB"/>
           </a:p>
@@ -2091,7 +2106,7 @@
           <a:p>
             <a:fld id="{C8C63B6A-6BCC-454B-8859-8F44071057AF}" type="datetimeFigureOut">
               <a:rPr lang="en-GB" smtClean="0"/>
-              <a:t>28/04/2026</a:t>
+              <a:t>29/04/2026</a:t>
             </a:fld>
             <a:endParaRPr lang="en-GB"/>
           </a:p>
@@ -2404,7 +2419,7 @@
           <a:p>
             <a:fld id="{C8C63B6A-6BCC-454B-8859-8F44071057AF}" type="datetimeFigureOut">
               <a:rPr lang="en-GB" smtClean="0"/>
-              <a:t>28/04/2026</a:t>
+              <a:t>29/04/2026</a:t>
             </a:fld>
             <a:endParaRPr lang="en-GB"/>
           </a:p>
@@ -2693,7 +2708,7 @@
           <a:p>
             <a:fld id="{C8C63B6A-6BCC-454B-8859-8F44071057AF}" type="datetimeFigureOut">
               <a:rPr lang="en-GB" smtClean="0"/>
-              <a:t>28/04/2026</a:t>
+              <a:t>29/04/2026</a:t>
             </a:fld>
             <a:endParaRPr lang="en-GB"/>
           </a:p>
@@ -2936,7 +2951,7 @@
           <a:p>
             <a:fld id="{C8C63B6A-6BCC-454B-8859-8F44071057AF}" type="datetimeFigureOut">
               <a:rPr lang="en-GB" smtClean="0"/>
-              <a:t>28/04/2026</a:t>
+              <a:t>29/04/2026</a:t>
             </a:fld>
             <a:endParaRPr lang="en-GB"/>
           </a:p>
@@ -3554,7 +3569,13 @@
     </p:bg>
     <p:spTree>
       <p:nvGrpSpPr>
-        <p:cNvPr id="1" name=""/>
+        <p:cNvPr id="1" name="">
+          <a:extLst>
+            <a:ext uri="{FF2B5EF4-FFF2-40B4-BE49-F238E27FC236}">
+              <a16:creationId xmlns:a16="http://schemas.microsoft.com/office/drawing/2014/main" id="{2AFABEC5-AA10-5DAE-1AFA-1DF9E0F4EB32}"/>
+            </a:ext>
+          </a:extLst>
+        </p:cNvPr>
         <p:cNvGrpSpPr/>
         <p:nvPr/>
       </p:nvGrpSpPr>
@@ -3568,10 +3589,52 @@
       </p:grpSpPr>
       <p:sp>
         <p:nvSpPr>
-          <p:cNvPr id="3" name="Content Placeholder 2">
-            <a:extLst>
-              <a:ext uri="{FF2B5EF4-FFF2-40B4-BE49-F238E27FC236}">
-                <a16:creationId xmlns:a16="http://schemas.microsoft.com/office/drawing/2014/main" id="{36DD21A2-F86A-A65B-115F-6A1D34AF54F6}"/>
+          <p:cNvPr id="2" name="Title 1">
+            <a:extLst>
+              <a:ext uri="{FF2B5EF4-FFF2-40B4-BE49-F238E27FC236}">
+                <a16:creationId xmlns:a16="http://schemas.microsoft.com/office/drawing/2014/main" id="{095787A7-4CED-3377-E3B2-5EF2E1A8658D}"/>
+              </a:ext>
+            </a:extLst>
+          </p:cNvPr>
+          <p:cNvSpPr>
+            <a:spLocks noGrp="1"/>
+          </p:cNvSpPr>
+          <p:nvPr>
+            <p:ph type="title"/>
+          </p:nvPr>
+        </p:nvSpPr>
+        <p:spPr>
+          <a:xfrm>
+            <a:off x="838200" y="241299"/>
+            <a:ext cx="10515600" cy="577850"/>
+          </a:xfrm>
+        </p:spPr>
+        <p:txBody>
+          <a:bodyPr>
+            <a:normAutofit/>
+          </a:bodyPr>
+          <a:lstStyle/>
+          <a:p>
+            <a:r>
+              <a:rPr lang="en-GB" sz="2800" dirty="0">
+                <a:solidFill>
+                  <a:schemeClr val="bg1"/>
+                </a:solidFill>
+                <a:latin typeface="JetBrains Mono" panose="02000009000000000000" pitchFamily="49" charset="0"/>
+                <a:ea typeface="JetBrains Mono" panose="02000009000000000000" pitchFamily="49" charset="0"/>
+                <a:cs typeface="JetBrains Mono" panose="02000009000000000000" pitchFamily="49" charset="0"/>
+              </a:rPr>
+              <a:t>Features</a:t>
+            </a:r>
+          </a:p>
+        </p:txBody>
+      </p:sp>
+      <p:sp>
+        <p:nvSpPr>
+          <p:cNvPr id="4" name="Content Placeholder 3">
+            <a:extLst>
+              <a:ext uri="{FF2B5EF4-FFF2-40B4-BE49-F238E27FC236}">
+                <a16:creationId xmlns:a16="http://schemas.microsoft.com/office/drawing/2014/main" id="{389E2FA8-BE80-3876-3C98-A936447128D4}"/>
               </a:ext>
             </a:extLst>
           </p:cNvPr>
@@ -3584,104 +3647,23 @@
         </p:nvSpPr>
         <p:spPr>
           <a:xfrm>
-            <a:off x="742950" y="559952"/>
-            <a:ext cx="6007654" cy="5860750"/>
+            <a:off x="838200" y="819150"/>
+            <a:ext cx="5771254" cy="5357813"/>
           </a:xfrm>
         </p:spPr>
         <p:txBody>
           <a:bodyPr>
-            <a:normAutofit fontScale="92500" lnSpcReduction="10000"/>
+            <a:normAutofit/>
           </a:bodyPr>
           <a:lstStyle/>
           <a:p>
             <a:pPr marL="0" indent="0">
-              <a:buNone/>
-              <a:defRPr/>
+              <a:lnSpc>
+                <a:spcPct val="100000"/>
+              </a:lnSpc>
+              <a:buNone/>
             </a:pPr>
-            <a:r>
-              <a:rPr lang="en-GB" sz="1600" dirty="0">
-                <a:solidFill>
-                  <a:schemeClr val="bg1"/>
-                </a:solidFill>
-                <a:latin typeface="JetBrains Mono" panose="02000009000000000000" pitchFamily="49" charset="0"/>
-                <a:ea typeface="JetBrains Mono" panose="02000009000000000000" pitchFamily="49" charset="0"/>
-                <a:cs typeface="JetBrains Mono" panose="02000009000000000000" pitchFamily="49" charset="0"/>
-              </a:rPr>
-              <a:t>RV32I base integer instructions (majority)</a:t>
-            </a:r>
-          </a:p>
-          <a:p>
-            <a:pPr marL="457200" lvl="1" indent="0">
-              <a:buNone/>
-              <a:defRPr/>
-            </a:pPr>
-            <a:r>
-              <a:rPr lang="en-GB" sz="1100" dirty="0">
-                <a:solidFill>
-                  <a:schemeClr val="bg1"/>
-                </a:solidFill>
-                <a:latin typeface="JetBrains Mono" panose="02000009000000000000" pitchFamily="49" charset="0"/>
-                <a:ea typeface="JetBrains Mono" panose="02000009000000000000" pitchFamily="49" charset="0"/>
-                <a:cs typeface="JetBrains Mono" panose="02000009000000000000" pitchFamily="49" charset="0"/>
-              </a:rPr>
-              <a:t>no </a:t>
-            </a:r>
-            <a:r>
-              <a:rPr lang="en-GB" sz="1100" dirty="0" err="1">
-                <a:solidFill>
-                  <a:schemeClr val="bg1"/>
-                </a:solidFill>
-                <a:latin typeface="JetBrains Mono" panose="02000009000000000000" pitchFamily="49" charset="0"/>
-                <a:ea typeface="JetBrains Mono" panose="02000009000000000000" pitchFamily="49" charset="0"/>
-                <a:cs typeface="JetBrains Mono" panose="02000009000000000000" pitchFamily="49" charset="0"/>
-              </a:rPr>
-              <a:t>ebreak</a:t>
-            </a:r>
-            <a:r>
-              <a:rPr lang="en-GB" sz="1100" dirty="0">
-                <a:solidFill>
-                  <a:schemeClr val="bg1"/>
-                </a:solidFill>
-                <a:latin typeface="JetBrains Mono" panose="02000009000000000000" pitchFamily="49" charset="0"/>
-                <a:ea typeface="JetBrains Mono" panose="02000009000000000000" pitchFamily="49" charset="0"/>
-                <a:cs typeface="JetBrains Mono" panose="02000009000000000000" pitchFamily="49" charset="0"/>
-              </a:rPr>
-              <a:t>/</a:t>
-            </a:r>
-            <a:r>
-              <a:rPr lang="en-GB" sz="1100" dirty="0" err="1">
-                <a:solidFill>
-                  <a:schemeClr val="bg1"/>
-                </a:solidFill>
-                <a:latin typeface="JetBrains Mono" panose="02000009000000000000" pitchFamily="49" charset="0"/>
-                <a:ea typeface="JetBrains Mono" panose="02000009000000000000" pitchFamily="49" charset="0"/>
-                <a:cs typeface="JetBrains Mono" panose="02000009000000000000" pitchFamily="49" charset="0"/>
-              </a:rPr>
-              <a:t>ecall</a:t>
-            </a:r>
-            <a:r>
-              <a:rPr lang="en-GB" sz="1100" dirty="0">
-                <a:solidFill>
-                  <a:schemeClr val="bg1"/>
-                </a:solidFill>
-                <a:latin typeface="JetBrains Mono" panose="02000009000000000000" pitchFamily="49" charset="0"/>
-                <a:ea typeface="JetBrains Mono" panose="02000009000000000000" pitchFamily="49" charset="0"/>
-                <a:cs typeface="JetBrains Mono" panose="02000009000000000000" pitchFamily="49" charset="0"/>
-              </a:rPr>
-              <a:t>/fence/</a:t>
-            </a:r>
-            <a:r>
-              <a:rPr lang="en-GB" sz="1100" dirty="0" err="1">
-                <a:solidFill>
-                  <a:schemeClr val="bg1"/>
-                </a:solidFill>
-                <a:latin typeface="JetBrains Mono" panose="02000009000000000000" pitchFamily="49" charset="0"/>
-                <a:ea typeface="JetBrains Mono" panose="02000009000000000000" pitchFamily="49" charset="0"/>
-                <a:cs typeface="JetBrains Mono" panose="02000009000000000000" pitchFamily="49" charset="0"/>
-              </a:rPr>
-              <a:t>csr</a:t>
-            </a:r>
-            <a:endParaRPr lang="en-GB" sz="1100" dirty="0">
+            <a:endParaRPr lang="en-GB" sz="1600" b="1" dirty="0">
               <a:solidFill>
                 <a:schemeClr val="bg1"/>
               </a:solidFill>
@@ -3691,67 +3673,191 @@
             </a:endParaRPr>
           </a:p>
           <a:p>
-            <a:pPr marL="0" lvl="0" indent="0">
-              <a:buNone/>
-              <a:defRPr/>
+            <a:pPr marL="0" indent="0">
+              <a:lnSpc>
+                <a:spcPct val="100000"/>
+              </a:lnSpc>
+              <a:buNone/>
             </a:pPr>
             <a:r>
-              <a:rPr lang="en-GB" sz="1600" dirty="0">
-                <a:solidFill>
-                  <a:schemeClr val="bg1"/>
-                </a:solidFill>
-                <a:latin typeface="JetBrains Mono" panose="02000009000000000000" pitchFamily="49" charset="0"/>
-                <a:ea typeface="JetBrains Mono" panose="02000009000000000000" pitchFamily="49" charset="0"/>
-                <a:cs typeface="JetBrains Mono" panose="02000009000000000000" pitchFamily="49" charset="0"/>
-              </a:rPr>
-              <a:t>RV32M multiply/divide extension (full)</a:t>
+              <a:rPr lang="en-GB" sz="1600" b="1" dirty="0">
+                <a:solidFill>
+                  <a:schemeClr val="bg1"/>
+                </a:solidFill>
+                <a:latin typeface="JetBrains Mono" panose="02000009000000000000" pitchFamily="49" charset="0"/>
+                <a:ea typeface="JetBrains Mono" panose="02000009000000000000" pitchFamily="49" charset="0"/>
+                <a:cs typeface="JetBrains Mono" panose="02000009000000000000" pitchFamily="49" charset="0"/>
+              </a:rPr>
+              <a:t>ISA</a:t>
             </a:r>
           </a:p>
           <a:p>
             <a:pPr marL="0" indent="0">
-              <a:buNone/>
-              <a:defRPr/>
+              <a:lnSpc>
+                <a:spcPct val="100000"/>
+              </a:lnSpc>
+              <a:buNone/>
             </a:pPr>
             <a:r>
-              <a:rPr lang="en-GB" sz="1600" dirty="0">
-                <a:solidFill>
-                  <a:schemeClr val="bg1"/>
-                </a:solidFill>
-                <a:latin typeface="JetBrains Mono" panose="02000009000000000000" pitchFamily="49" charset="0"/>
-                <a:ea typeface="JetBrains Mono" panose="02000009000000000000" pitchFamily="49" charset="0"/>
-                <a:cs typeface="JetBrains Mono" panose="02000009000000000000" pitchFamily="49" charset="0"/>
-              </a:rPr>
-              <a:t>RV32F floating-point extension (majority)</a:t>
-            </a:r>
-          </a:p>
-          <a:p>
-            <a:pPr marL="457200" lvl="1" indent="0">
-              <a:buNone/>
-              <a:defRPr/>
+              <a:rPr lang="en-GB" sz="1200" dirty="0">
+                <a:solidFill>
+                  <a:schemeClr val="bg1"/>
+                </a:solidFill>
+                <a:latin typeface="JetBrains Mono" panose="02000009000000000000" pitchFamily="49" charset="0"/>
+                <a:ea typeface="JetBrains Mono" panose="02000009000000000000" pitchFamily="49" charset="0"/>
+                <a:cs typeface="JetBrains Mono" panose="02000009000000000000" pitchFamily="49" charset="0"/>
+              </a:rPr>
+              <a:t>RV32I base ISA – missing FENCE, EBREAK, ECALL</a:t>
+            </a:r>
+            <a:br>
+              <a:rPr lang="en-GB" sz="1200" dirty="0">
+                <a:solidFill>
+                  <a:schemeClr val="bg1"/>
+                </a:solidFill>
+                <a:latin typeface="JetBrains Mono" panose="02000009000000000000" pitchFamily="49" charset="0"/>
+                <a:ea typeface="JetBrains Mono" panose="02000009000000000000" pitchFamily="49" charset="0"/>
+                <a:cs typeface="JetBrains Mono" panose="02000009000000000000" pitchFamily="49" charset="0"/>
+              </a:rPr>
+            </a:br>
+            <a:r>
+              <a:rPr lang="en-GB" sz="1200" dirty="0">
+                <a:solidFill>
+                  <a:schemeClr val="bg1"/>
+                </a:solidFill>
+                <a:latin typeface="JetBrains Mono" panose="02000009000000000000" pitchFamily="49" charset="0"/>
+                <a:ea typeface="JetBrains Mono" panose="02000009000000000000" pitchFamily="49" charset="0"/>
+                <a:cs typeface="JetBrains Mono" panose="02000009000000000000" pitchFamily="49" charset="0"/>
+              </a:rPr>
+              <a:t>RV32M </a:t>
+            </a:r>
+            <a:r>
+              <a:rPr lang="en-GB" sz="1200" dirty="0" err="1">
+                <a:solidFill>
+                  <a:schemeClr val="bg1"/>
+                </a:solidFill>
+                <a:latin typeface="JetBrains Mono" panose="02000009000000000000" pitchFamily="49" charset="0"/>
+                <a:ea typeface="JetBrains Mono" panose="02000009000000000000" pitchFamily="49" charset="0"/>
+                <a:cs typeface="JetBrains Mono" panose="02000009000000000000" pitchFamily="49" charset="0"/>
+              </a:rPr>
+              <a:t>mul</a:t>
+            </a:r>
+            <a:r>
+              <a:rPr lang="en-GB" sz="1200" dirty="0">
+                <a:solidFill>
+                  <a:schemeClr val="bg1"/>
+                </a:solidFill>
+                <a:latin typeface="JetBrains Mono" panose="02000009000000000000" pitchFamily="49" charset="0"/>
+                <a:ea typeface="JetBrains Mono" panose="02000009000000000000" pitchFamily="49" charset="0"/>
+                <a:cs typeface="JetBrains Mono" panose="02000009000000000000" pitchFamily="49" charset="0"/>
+              </a:rPr>
+              <a:t>/div extension – full implementation</a:t>
+            </a:r>
+            <a:br>
+              <a:rPr lang="en-GB" sz="1200" dirty="0">
+                <a:solidFill>
+                  <a:schemeClr val="bg1"/>
+                </a:solidFill>
+                <a:latin typeface="JetBrains Mono" panose="02000009000000000000" pitchFamily="49" charset="0"/>
+                <a:ea typeface="JetBrains Mono" panose="02000009000000000000" pitchFamily="49" charset="0"/>
+                <a:cs typeface="JetBrains Mono" panose="02000009000000000000" pitchFamily="49" charset="0"/>
+              </a:rPr>
+            </a:br>
+            <a:r>
+              <a:rPr lang="en-GB" sz="1200" dirty="0">
+                <a:solidFill>
+                  <a:schemeClr val="bg1"/>
+                </a:solidFill>
+                <a:latin typeface="JetBrains Mono" panose="02000009000000000000" pitchFamily="49" charset="0"/>
+                <a:ea typeface="JetBrains Mono" panose="02000009000000000000" pitchFamily="49" charset="0"/>
+                <a:cs typeface="JetBrains Mono" panose="02000009000000000000" pitchFamily="49" charset="0"/>
+              </a:rPr>
+              <a:t>RV32F float extension – missing </a:t>
+            </a:r>
+            <a:r>
+              <a:rPr lang="en-GB" sz="1200" dirty="0" err="1">
+                <a:solidFill>
+                  <a:schemeClr val="bg1"/>
+                </a:solidFill>
+                <a:latin typeface="JetBrains Mono" panose="02000009000000000000" pitchFamily="49" charset="0"/>
+                <a:ea typeface="JetBrains Mono" panose="02000009000000000000" pitchFamily="49" charset="0"/>
+                <a:cs typeface="JetBrains Mono" panose="02000009000000000000" pitchFamily="49" charset="0"/>
+              </a:rPr>
+              <a:t>frm</a:t>
+            </a:r>
+            <a:r>
+              <a:rPr lang="en-GB" sz="1200" dirty="0">
+                <a:solidFill>
+                  <a:schemeClr val="bg1"/>
+                </a:solidFill>
+                <a:latin typeface="JetBrains Mono" panose="02000009000000000000" pitchFamily="49" charset="0"/>
+                <a:ea typeface="JetBrains Mono" panose="02000009000000000000" pitchFamily="49" charset="0"/>
+                <a:cs typeface="JetBrains Mono" panose="02000009000000000000" pitchFamily="49" charset="0"/>
+              </a:rPr>
+              <a:t>, </a:t>
+            </a:r>
+            <a:r>
+              <a:rPr lang="en-GB" sz="1200" dirty="0" err="1">
+                <a:solidFill>
+                  <a:schemeClr val="bg1"/>
+                </a:solidFill>
+                <a:latin typeface="JetBrains Mono" panose="02000009000000000000" pitchFamily="49" charset="0"/>
+                <a:ea typeface="JetBrains Mono" panose="02000009000000000000" pitchFamily="49" charset="0"/>
+                <a:cs typeface="JetBrains Mono" panose="02000009000000000000" pitchFamily="49" charset="0"/>
+              </a:rPr>
+              <a:t>fcsrs</a:t>
+            </a:r>
+            <a:r>
+              <a:rPr lang="en-GB" sz="1200" dirty="0">
+                <a:solidFill>
+                  <a:schemeClr val="bg1"/>
+                </a:solidFill>
+                <a:latin typeface="JetBrains Mono" panose="02000009000000000000" pitchFamily="49" charset="0"/>
+                <a:ea typeface="JetBrains Mono" panose="02000009000000000000" pitchFamily="49" charset="0"/>
+                <a:cs typeface="JetBrains Mono" panose="02000009000000000000" pitchFamily="49" charset="0"/>
+              </a:rPr>
+              <a:t>, </a:t>
+            </a:r>
+            <a:r>
+              <a:rPr lang="en-GB" sz="1200" dirty="0" err="1">
+                <a:solidFill>
+                  <a:schemeClr val="bg1"/>
+                </a:solidFill>
+                <a:latin typeface="JetBrains Mono" panose="02000009000000000000" pitchFamily="49" charset="0"/>
+                <a:ea typeface="JetBrains Mono" panose="02000009000000000000" pitchFamily="49" charset="0"/>
+                <a:cs typeface="JetBrains Mono" panose="02000009000000000000" pitchFamily="49" charset="0"/>
+              </a:rPr>
+              <a:t>fflags</a:t>
+            </a:r>
+            <a:br>
+              <a:rPr lang="en-GB" sz="1200" dirty="0">
+                <a:solidFill>
+                  <a:schemeClr val="bg1"/>
+                </a:solidFill>
+                <a:latin typeface="JetBrains Mono" panose="02000009000000000000" pitchFamily="49" charset="0"/>
+                <a:ea typeface="JetBrains Mono" panose="02000009000000000000" pitchFamily="49" charset="0"/>
+                <a:cs typeface="JetBrains Mono" panose="02000009000000000000" pitchFamily="49" charset="0"/>
+              </a:rPr>
+            </a:br>
+            <a:r>
+              <a:rPr lang="en-GB" sz="1200" dirty="0">
+                <a:solidFill>
+                  <a:schemeClr val="bg1"/>
+                </a:solidFill>
+                <a:latin typeface="JetBrains Mono" panose="02000009000000000000" pitchFamily="49" charset="0"/>
+                <a:ea typeface="JetBrains Mono" panose="02000009000000000000" pitchFamily="49" charset="0"/>
+                <a:cs typeface="JetBrains Mono" panose="02000009000000000000" pitchFamily="49" charset="0"/>
+              </a:rPr>
+              <a:t>RV32V vector extension – LMUL=m1, SEW&lt;=32, no tail/mask</a:t>
+            </a:r>
+          </a:p>
+          <a:p>
+            <a:pPr marL="0" indent="0">
+              <a:lnSpc>
+                <a:spcPct val="100000"/>
+              </a:lnSpc>
+              <a:buNone/>
             </a:pPr>
-            <a:r>
-              <a:rPr lang="en-GB" sz="1100" dirty="0">
-                <a:solidFill>
-                  <a:schemeClr val="bg1"/>
-                </a:solidFill>
-                <a:latin typeface="JetBrains Mono" panose="02000009000000000000" pitchFamily="49" charset="0"/>
-                <a:ea typeface="JetBrains Mono" panose="02000009000000000000" pitchFamily="49" charset="0"/>
-                <a:cs typeface="JetBrains Mono" panose="02000009000000000000" pitchFamily="49" charset="0"/>
-              </a:rPr>
-              <a:t>no flags/</a:t>
-            </a:r>
-            <a:r>
-              <a:rPr lang="en-GB" sz="1100" dirty="0" err="1">
-                <a:solidFill>
-                  <a:schemeClr val="bg1"/>
-                </a:solidFill>
-                <a:latin typeface="JetBrains Mono" panose="02000009000000000000" pitchFamily="49" charset="0"/>
-                <a:ea typeface="JetBrains Mono" panose="02000009000000000000" pitchFamily="49" charset="0"/>
-                <a:cs typeface="JetBrains Mono" panose="02000009000000000000" pitchFamily="49" charset="0"/>
-              </a:rPr>
-              <a:t>fcsr</a:t>
-            </a:r>
-            <a:endParaRPr lang="en-GB" sz="1100" dirty="0">
+            <a:endParaRPr lang="en-GB" sz="1200" dirty="0">
               <a:solidFill>
                 <a:schemeClr val="bg1"/>
               </a:solidFill>
@@ -3762,302 +3868,357 @@
           </a:p>
           <a:p>
             <a:pPr marL="0" indent="0">
-              <a:buNone/>
+              <a:lnSpc>
+                <a:spcPct val="100000"/>
+              </a:lnSpc>
+              <a:buNone/>
+            </a:pPr>
+            <a:r>
+              <a:rPr lang="en-GB" sz="1600" b="1" dirty="0">
+                <a:solidFill>
+                  <a:schemeClr val="bg1"/>
+                </a:solidFill>
+                <a:latin typeface="JetBrains Mono" panose="02000009000000000000" pitchFamily="49" charset="0"/>
+                <a:ea typeface="JetBrains Mono" panose="02000009000000000000" pitchFamily="49" charset="0"/>
+                <a:cs typeface="JetBrains Mono" panose="02000009000000000000" pitchFamily="49" charset="0"/>
+              </a:rPr>
+              <a:t>Features</a:t>
+            </a:r>
+          </a:p>
+          <a:p>
+            <a:pPr marL="0" indent="0">
+              <a:lnSpc>
+                <a:spcPct val="100000"/>
+              </a:lnSpc>
+              <a:buNone/>
+            </a:pPr>
+            <a:r>
+              <a:rPr lang="en-GB" sz="1200" dirty="0">
+                <a:solidFill>
+                  <a:schemeClr val="bg1"/>
+                </a:solidFill>
+                <a:latin typeface="JetBrains Mono" panose="02000009000000000000" pitchFamily="49" charset="0"/>
+                <a:ea typeface="JetBrains Mono" panose="02000009000000000000" pitchFamily="49" charset="0"/>
+                <a:cs typeface="JetBrains Mono" panose="02000009000000000000" pitchFamily="49" charset="0"/>
+              </a:rPr>
+              <a:t>Seven-stage pipeline:</a:t>
+            </a:r>
+            <a:br>
+              <a:rPr lang="en-GB" sz="1200" dirty="0">
+                <a:solidFill>
+                  <a:schemeClr val="bg1"/>
+                </a:solidFill>
+                <a:latin typeface="JetBrains Mono" panose="02000009000000000000" pitchFamily="49" charset="0"/>
+                <a:ea typeface="JetBrains Mono" panose="02000009000000000000" pitchFamily="49" charset="0"/>
+                <a:cs typeface="JetBrains Mono" panose="02000009000000000000" pitchFamily="49" charset="0"/>
+              </a:rPr>
+            </a:br>
+            <a:r>
+              <a:rPr lang="en-GB" sz="1200" dirty="0">
+                <a:solidFill>
+                  <a:schemeClr val="bg1"/>
+                </a:solidFill>
+                <a:latin typeface="JetBrains Mono" panose="02000009000000000000" pitchFamily="49" charset="0"/>
+                <a:ea typeface="JetBrains Mono" panose="02000009000000000000" pitchFamily="49" charset="0"/>
+                <a:cs typeface="JetBrains Mono" panose="02000009000000000000" pitchFamily="49" charset="0"/>
+              </a:rPr>
+              <a:t>fetch, decode, dispatch, issue, execute, writeback, commit</a:t>
+            </a:r>
+          </a:p>
+          <a:p>
+            <a:pPr marL="0" indent="0">
+              <a:lnSpc>
+                <a:spcPct val="100000"/>
+              </a:lnSpc>
+              <a:buNone/>
+            </a:pPr>
+            <a:r>
+              <a:rPr lang="en-GB" sz="1200" dirty="0">
+                <a:solidFill>
+                  <a:schemeClr val="bg1"/>
+                </a:solidFill>
+                <a:latin typeface="JetBrains Mono" panose="02000009000000000000" pitchFamily="49" charset="0"/>
+                <a:ea typeface="JetBrains Mono" panose="02000009000000000000" pitchFamily="49" charset="0"/>
+                <a:cs typeface="JetBrains Mono" panose="02000009000000000000" pitchFamily="49" charset="0"/>
+              </a:rPr>
+              <a:t>Modelled multi-cycle instruction latency</a:t>
+            </a:r>
+            <a:br>
+              <a:rPr lang="en-GB" sz="1200" dirty="0">
+                <a:solidFill>
+                  <a:schemeClr val="bg1"/>
+                </a:solidFill>
+                <a:latin typeface="JetBrains Mono" panose="02000009000000000000" pitchFamily="49" charset="0"/>
+                <a:ea typeface="JetBrains Mono" panose="02000009000000000000" pitchFamily="49" charset="0"/>
+                <a:cs typeface="JetBrains Mono" panose="02000009000000000000" pitchFamily="49" charset="0"/>
+              </a:rPr>
+            </a:br>
+            <a:r>
+              <a:rPr lang="en-GB" sz="1200" dirty="0">
+                <a:solidFill>
+                  <a:schemeClr val="bg1"/>
+                </a:solidFill>
+                <a:latin typeface="JetBrains Mono" panose="02000009000000000000" pitchFamily="49" charset="0"/>
+                <a:ea typeface="JetBrains Mono" panose="02000009000000000000" pitchFamily="49" charset="0"/>
+                <a:cs typeface="JetBrains Mono" panose="02000009000000000000" pitchFamily="49" charset="0"/>
+              </a:rPr>
+              <a:t>Out-of-order execution via reservation stations</a:t>
+            </a:r>
+            <a:br>
+              <a:rPr lang="en-GB" sz="1200" dirty="0">
+                <a:solidFill>
+                  <a:schemeClr val="bg1"/>
+                </a:solidFill>
+                <a:latin typeface="JetBrains Mono" panose="02000009000000000000" pitchFamily="49" charset="0"/>
+                <a:ea typeface="JetBrains Mono" panose="02000009000000000000" pitchFamily="49" charset="0"/>
+                <a:cs typeface="JetBrains Mono" panose="02000009000000000000" pitchFamily="49" charset="0"/>
+              </a:rPr>
+            </a:br>
+            <a:r>
+              <a:rPr lang="en-GB" sz="1200" dirty="0">
+                <a:solidFill>
+                  <a:schemeClr val="bg1"/>
+                </a:solidFill>
+                <a:latin typeface="JetBrains Mono" panose="02000009000000000000" pitchFamily="49" charset="0"/>
+                <a:ea typeface="JetBrains Mono" panose="02000009000000000000" pitchFamily="49" charset="0"/>
+                <a:cs typeface="JetBrains Mono" panose="02000009000000000000" pitchFamily="49" charset="0"/>
+              </a:rPr>
+              <a:t>In-order commit via re-order buffer</a:t>
+            </a:r>
+            <a:br>
+              <a:rPr lang="en-GB" sz="1200" dirty="0">
+                <a:solidFill>
+                  <a:schemeClr val="bg1"/>
+                </a:solidFill>
+                <a:latin typeface="JetBrains Mono" panose="02000009000000000000" pitchFamily="49" charset="0"/>
+                <a:ea typeface="JetBrains Mono" panose="02000009000000000000" pitchFamily="49" charset="0"/>
+                <a:cs typeface="JetBrains Mono" panose="02000009000000000000" pitchFamily="49" charset="0"/>
+              </a:rPr>
+            </a:br>
+            <a:r>
+              <a:rPr lang="en-GB" sz="1200" dirty="0">
+                <a:solidFill>
+                  <a:schemeClr val="bg1"/>
+                </a:solidFill>
+                <a:latin typeface="JetBrains Mono" panose="02000009000000000000" pitchFamily="49" charset="0"/>
+                <a:ea typeface="JetBrains Mono" panose="02000009000000000000" pitchFamily="49" charset="0"/>
+                <a:cs typeface="JetBrains Mono" panose="02000009000000000000" pitchFamily="49" charset="0"/>
+              </a:rPr>
+              <a:t>Speculative execution via branch prediction</a:t>
+            </a:r>
+            <a:br>
+              <a:rPr lang="en-GB" sz="1200" dirty="0">
+                <a:solidFill>
+                  <a:schemeClr val="bg1"/>
+                </a:solidFill>
+                <a:latin typeface="JetBrains Mono" panose="02000009000000000000" pitchFamily="49" charset="0"/>
+                <a:ea typeface="JetBrains Mono" panose="02000009000000000000" pitchFamily="49" charset="0"/>
+                <a:cs typeface="JetBrains Mono" panose="02000009000000000000" pitchFamily="49" charset="0"/>
+              </a:rPr>
+            </a:br>
+            <a:r>
+              <a:rPr lang="en-GB" sz="1200" dirty="0">
+                <a:solidFill>
+                  <a:schemeClr val="bg1"/>
+                </a:solidFill>
+                <a:latin typeface="JetBrains Mono" panose="02000009000000000000" pitchFamily="49" charset="0"/>
+                <a:ea typeface="JetBrains Mono" panose="02000009000000000000" pitchFamily="49" charset="0"/>
+                <a:cs typeface="JetBrains Mono" panose="02000009000000000000" pitchFamily="49" charset="0"/>
+              </a:rPr>
+              <a:t>CDB-like broadcast to reservation stations</a:t>
+            </a:r>
+            <a:br>
+              <a:rPr lang="en-GB" sz="1200" dirty="0">
+                <a:solidFill>
+                  <a:schemeClr val="bg1"/>
+                </a:solidFill>
+                <a:latin typeface="JetBrains Mono" panose="02000009000000000000" pitchFamily="49" charset="0"/>
+                <a:ea typeface="JetBrains Mono" panose="02000009000000000000" pitchFamily="49" charset="0"/>
+                <a:cs typeface="JetBrains Mono" panose="02000009000000000000" pitchFamily="49" charset="0"/>
+              </a:rPr>
+            </a:br>
+            <a:r>
+              <a:rPr lang="en-GB" sz="1200" dirty="0">
+                <a:solidFill>
+                  <a:schemeClr val="bg1"/>
+                </a:solidFill>
+                <a:latin typeface="JetBrains Mono" panose="02000009000000000000" pitchFamily="49" charset="0"/>
+                <a:ea typeface="JetBrains Mono" panose="02000009000000000000" pitchFamily="49" charset="0"/>
+                <a:cs typeface="JetBrains Mono" panose="02000009000000000000" pitchFamily="49" charset="0"/>
+              </a:rPr>
+              <a:t>Load-store queue with relaxed memory consistency</a:t>
+            </a:r>
+          </a:p>
+          <a:p>
+            <a:pPr marL="0" indent="0">
+              <a:lnSpc>
+                <a:spcPct val="100000"/>
+              </a:lnSpc>
+              <a:buNone/>
+            </a:pPr>
+            <a:endParaRPr lang="en-GB" sz="1200" dirty="0">
+              <a:solidFill>
+                <a:schemeClr val="bg1"/>
+              </a:solidFill>
+              <a:latin typeface="JetBrains Mono" panose="02000009000000000000" pitchFamily="49" charset="0"/>
+              <a:ea typeface="JetBrains Mono" panose="02000009000000000000" pitchFamily="49" charset="0"/>
+              <a:cs typeface="JetBrains Mono" panose="02000009000000000000" pitchFamily="49" charset="0"/>
+            </a:endParaRPr>
+          </a:p>
+          <a:p>
+            <a:pPr marL="0" marR="0" lvl="0" indent="0" algn="l" defTabSz="914400" rtl="0" eaLnBrk="1" fontAlgn="auto" latinLnBrk="0" hangingPunct="1">
+              <a:lnSpc>
+                <a:spcPct val="100000"/>
+              </a:lnSpc>
+              <a:spcBef>
+                <a:spcPts val="1000"/>
+              </a:spcBef>
+              <a:spcAft>
+                <a:spcPts val="0"/>
+              </a:spcAft>
+              <a:buClrTx/>
+              <a:buSzTx/>
+              <a:buFont typeface="Arial" panose="020B0604020202020204" pitchFamily="34" charset="0"/>
+              <a:buNone/>
+              <a:tabLst/>
               <a:defRPr/>
             </a:pPr>
             <a:r>
-              <a:rPr lang="en-GB" sz="1600" dirty="0">
-                <a:solidFill>
-                  <a:schemeClr val="bg1"/>
-                </a:solidFill>
-                <a:latin typeface="JetBrains Mono" panose="02000009000000000000" pitchFamily="49" charset="0"/>
-                <a:ea typeface="JetBrains Mono" panose="02000009000000000000" pitchFamily="49" charset="0"/>
-                <a:cs typeface="JetBrains Mono" panose="02000009000000000000" pitchFamily="49" charset="0"/>
-              </a:rPr>
-              <a:t>RV32V vector extension (limited)</a:t>
-            </a:r>
-          </a:p>
-          <a:p>
-            <a:pPr marL="457200" lvl="1" indent="0">
-              <a:buNone/>
+              <a:rPr kumimoji="0" lang="en-GB" sz="1600" b="1" i="0" u="none" strike="noStrike" kern="1200" cap="none" spc="0" normalizeH="0" baseline="0" noProof="0" dirty="0">
+                <a:ln>
+                  <a:noFill/>
+                </a:ln>
+                <a:solidFill>
+                  <a:prstClr val="white"/>
+                </a:solidFill>
+                <a:effectLst/>
+                <a:uLnTx/>
+                <a:uFillTx/>
+                <a:latin typeface="JetBrains Mono" panose="02000009000000000000" pitchFamily="49" charset="0"/>
+                <a:ea typeface="JetBrains Mono" panose="02000009000000000000" pitchFamily="49" charset="0"/>
+                <a:cs typeface="JetBrains Mono" panose="02000009000000000000" pitchFamily="49" charset="0"/>
+              </a:rPr>
+              <a:t>Branch Prediction</a:t>
+            </a:r>
+          </a:p>
+          <a:p>
+            <a:pPr marL="0" marR="0" lvl="0" indent="0" algn="l" defTabSz="914400" rtl="0" eaLnBrk="1" fontAlgn="auto" latinLnBrk="0" hangingPunct="1">
+              <a:lnSpc>
+                <a:spcPct val="100000"/>
+              </a:lnSpc>
+              <a:spcBef>
+                <a:spcPts val="1000"/>
+              </a:spcBef>
+              <a:spcAft>
+                <a:spcPts val="0"/>
+              </a:spcAft>
+              <a:buClrTx/>
+              <a:buSzTx/>
+              <a:buFont typeface="Arial" panose="020B0604020202020204" pitchFamily="34" charset="0"/>
+              <a:buNone/>
+              <a:tabLst/>
               <a:defRPr/>
             </a:pPr>
             <a:r>
-              <a:rPr lang="en-GB" sz="1100" dirty="0">
-                <a:solidFill>
-                  <a:schemeClr val="bg1"/>
-                </a:solidFill>
-                <a:latin typeface="JetBrains Mono" panose="02000009000000000000" pitchFamily="49" charset="0"/>
-                <a:ea typeface="JetBrains Mono" panose="02000009000000000000" pitchFamily="49" charset="0"/>
-                <a:cs typeface="JetBrains Mono" panose="02000009000000000000" pitchFamily="49" charset="0"/>
-              </a:rPr>
-              <a:t>LMUL 1, ELEN 32, VLEN 128/256/512</a:t>
-            </a:r>
-          </a:p>
-          <a:p>
-            <a:pPr marL="0" indent="0">
-              <a:buNone/>
-            </a:pPr>
-            <a:r>
-              <a:rPr lang="en-GB" sz="1600" dirty="0">
-                <a:solidFill>
-                  <a:schemeClr val="bg1"/>
-                </a:solidFill>
-                <a:latin typeface="JetBrains Mono" panose="02000009000000000000" pitchFamily="49" charset="0"/>
-                <a:ea typeface="JetBrains Mono" panose="02000009000000000000" pitchFamily="49" charset="0"/>
-                <a:cs typeface="JetBrains Mono" panose="02000009000000000000" pitchFamily="49" charset="0"/>
-              </a:rPr>
-              <a:t>Seven-stage pipeline:</a:t>
-            </a:r>
-          </a:p>
-          <a:p>
-            <a:pPr marL="457200" lvl="1" indent="0">
-              <a:buNone/>
-            </a:pPr>
-            <a:r>
-              <a:rPr lang="en-GB" sz="1100" dirty="0">
-                <a:solidFill>
-                  <a:schemeClr val="bg1"/>
-                </a:solidFill>
-                <a:latin typeface="JetBrains Mono" panose="02000009000000000000" pitchFamily="49" charset="0"/>
-                <a:ea typeface="JetBrains Mono" panose="02000009000000000000" pitchFamily="49" charset="0"/>
-                <a:cs typeface="JetBrains Mono" panose="02000009000000000000" pitchFamily="49" charset="0"/>
-              </a:rPr>
-              <a:t>fetch -&gt; decode -&gt; dispatch -&gt; issue -&gt; execute -&gt; writeback -&gt; commit</a:t>
-            </a:r>
-          </a:p>
-          <a:p>
-            <a:pPr marL="0" indent="0">
-              <a:buNone/>
-            </a:pPr>
-            <a:r>
-              <a:rPr lang="en-GB" sz="1600" dirty="0">
-                <a:solidFill>
-                  <a:schemeClr val="bg1"/>
-                </a:solidFill>
-                <a:latin typeface="JetBrains Mono" panose="02000009000000000000" pitchFamily="49" charset="0"/>
-                <a:ea typeface="JetBrains Mono" panose="02000009000000000000" pitchFamily="49" charset="0"/>
-                <a:cs typeface="JetBrains Mono" panose="02000009000000000000" pitchFamily="49" charset="0"/>
-              </a:rPr>
-              <a:t>32-wide integer, float and vector register files</a:t>
-            </a:r>
-          </a:p>
-          <a:p>
-            <a:pPr marL="0" indent="0">
-              <a:buNone/>
-            </a:pPr>
-            <a:r>
-              <a:rPr lang="en-GB" sz="1600" dirty="0">
-                <a:solidFill>
-                  <a:schemeClr val="bg1"/>
-                </a:solidFill>
-                <a:latin typeface="JetBrains Mono" panose="02000009000000000000" pitchFamily="49" charset="0"/>
-                <a:ea typeface="JetBrains Mono" panose="02000009000000000000" pitchFamily="49" charset="0"/>
-                <a:cs typeface="JetBrains Mono" panose="02000009000000000000" pitchFamily="49" charset="0"/>
-              </a:rPr>
-              <a:t>Out-of-order issue via reservation stations</a:t>
-            </a:r>
-          </a:p>
-          <a:p>
-            <a:pPr marL="0" indent="0">
-              <a:buNone/>
-            </a:pPr>
-            <a:r>
-              <a:rPr lang="en-GB" sz="1600" dirty="0">
-                <a:solidFill>
-                  <a:schemeClr val="bg1"/>
-                </a:solidFill>
-                <a:latin typeface="JetBrains Mono" panose="02000009000000000000" pitchFamily="49" charset="0"/>
-                <a:ea typeface="JetBrains Mono" panose="02000009000000000000" pitchFamily="49" charset="0"/>
-                <a:cs typeface="JetBrains Mono" panose="02000009000000000000" pitchFamily="49" charset="0"/>
-              </a:rPr>
-              <a:t>In-order commit via 64-wide re-order buffer</a:t>
-            </a:r>
-          </a:p>
-          <a:p>
-            <a:pPr marL="0" indent="0">
-              <a:buNone/>
-            </a:pPr>
-            <a:r>
-              <a:rPr lang="en-GB" sz="1600" dirty="0">
-                <a:solidFill>
-                  <a:schemeClr val="bg1"/>
-                </a:solidFill>
-                <a:latin typeface="JetBrains Mono" panose="02000009000000000000" pitchFamily="49" charset="0"/>
-                <a:ea typeface="JetBrains Mono" panose="02000009000000000000" pitchFamily="49" charset="0"/>
-                <a:cs typeface="JetBrains Mono" panose="02000009000000000000" pitchFamily="49" charset="0"/>
-              </a:rPr>
-              <a:t>Renaming via tag-based register alias tables</a:t>
-            </a:r>
-          </a:p>
-          <a:p>
-            <a:pPr marL="0" indent="0">
-              <a:buNone/>
-            </a:pPr>
-            <a:r>
-              <a:rPr lang="en-GB" sz="1600" dirty="0">
-                <a:solidFill>
-                  <a:schemeClr val="bg1"/>
-                </a:solidFill>
-                <a:latin typeface="JetBrains Mono" panose="02000009000000000000" pitchFamily="49" charset="0"/>
-                <a:ea typeface="JetBrains Mono" panose="02000009000000000000" pitchFamily="49" charset="0"/>
-                <a:cs typeface="JetBrains Mono" panose="02000009000000000000" pitchFamily="49" charset="0"/>
-              </a:rPr>
-              <a:t>Configurable fetch/issue/commit widths</a:t>
-            </a:r>
-          </a:p>
-          <a:p>
-            <a:pPr marL="0" indent="0">
-              <a:buNone/>
-            </a:pPr>
-            <a:r>
-              <a:rPr lang="en-GB" sz="1600" dirty="0">
-                <a:solidFill>
-                  <a:schemeClr val="bg1"/>
-                </a:solidFill>
-                <a:latin typeface="JetBrains Mono" panose="02000009000000000000" pitchFamily="49" charset="0"/>
-                <a:ea typeface="JetBrains Mono" panose="02000009000000000000" pitchFamily="49" charset="0"/>
-                <a:cs typeface="JetBrains Mono" panose="02000009000000000000" pitchFamily="49" charset="0"/>
-              </a:rPr>
-              <a:t>Configurable number of execution units</a:t>
-            </a:r>
-          </a:p>
-          <a:p>
-            <a:pPr marL="0" indent="0">
-              <a:buNone/>
-            </a:pPr>
-            <a:r>
-              <a:rPr lang="en-GB" sz="1600" dirty="0">
-                <a:solidFill>
-                  <a:schemeClr val="bg1"/>
-                </a:solidFill>
-                <a:latin typeface="JetBrains Mono" panose="02000009000000000000" pitchFamily="49" charset="0"/>
-                <a:ea typeface="JetBrains Mono" panose="02000009000000000000" pitchFamily="49" charset="0"/>
-                <a:cs typeface="JetBrains Mono" panose="02000009000000000000" pitchFamily="49" charset="0"/>
-              </a:rPr>
-              <a:t>Multiple branch prediction policies:</a:t>
-            </a:r>
-          </a:p>
-          <a:p>
-            <a:pPr marL="457200" lvl="1" indent="0">
-              <a:buNone/>
-            </a:pPr>
-            <a:r>
-              <a:rPr lang="en-GB" sz="1100" dirty="0">
-                <a:solidFill>
-                  <a:schemeClr val="bg1"/>
-                </a:solidFill>
-                <a:latin typeface="JetBrains Mono" panose="02000009000000000000" pitchFamily="49" charset="0"/>
-                <a:ea typeface="JetBrains Mono" panose="02000009000000000000" pitchFamily="49" charset="0"/>
-                <a:cs typeface="JetBrains Mono" panose="02000009000000000000" pitchFamily="49" charset="0"/>
-              </a:rPr>
-              <a:t>static taken</a:t>
-            </a:r>
-          </a:p>
-          <a:p>
-            <a:pPr marL="457200" lvl="1" indent="0">
-              <a:buNone/>
-            </a:pPr>
-            <a:r>
-              <a:rPr lang="en-GB" sz="1100" dirty="0">
-                <a:solidFill>
-                  <a:schemeClr val="bg1"/>
-                </a:solidFill>
-                <a:latin typeface="JetBrains Mono" panose="02000009000000000000" pitchFamily="49" charset="0"/>
-                <a:ea typeface="JetBrains Mono" panose="02000009000000000000" pitchFamily="49" charset="0"/>
-                <a:cs typeface="JetBrains Mono" panose="02000009000000000000" pitchFamily="49" charset="0"/>
-              </a:rPr>
-              <a:t>static not taken</a:t>
-            </a:r>
-          </a:p>
-          <a:p>
-            <a:pPr marL="457200" lvl="1" indent="0">
-              <a:buNone/>
-            </a:pPr>
-            <a:r>
-              <a:rPr lang="en-GB" sz="1100" dirty="0">
-                <a:solidFill>
-                  <a:schemeClr val="bg1"/>
-                </a:solidFill>
-                <a:latin typeface="JetBrains Mono" panose="02000009000000000000" pitchFamily="49" charset="0"/>
-                <a:ea typeface="JetBrains Mono" panose="02000009000000000000" pitchFamily="49" charset="0"/>
-                <a:cs typeface="JetBrains Mono" panose="02000009000000000000" pitchFamily="49" charset="0"/>
-              </a:rPr>
-              <a:t>static backward taken forward not taken</a:t>
-            </a:r>
-          </a:p>
-          <a:p>
-            <a:pPr marL="457200" lvl="1" indent="0">
-              <a:buNone/>
-            </a:pPr>
-            <a:r>
-              <a:rPr lang="en-GB" sz="1100" dirty="0">
-                <a:solidFill>
-                  <a:schemeClr val="bg1"/>
-                </a:solidFill>
-                <a:latin typeface="JetBrains Mono" panose="02000009000000000000" pitchFamily="49" charset="0"/>
-                <a:ea typeface="JetBrains Mono" panose="02000009000000000000" pitchFamily="49" charset="0"/>
-                <a:cs typeface="JetBrains Mono" panose="02000009000000000000" pitchFamily="49" charset="0"/>
-              </a:rPr>
-              <a:t>dynamic two-bit saturating counter</a:t>
-            </a:r>
-          </a:p>
-          <a:p>
-            <a:pPr marL="0" indent="0">
-              <a:buNone/>
-            </a:pPr>
-            <a:r>
-              <a:rPr lang="en-GB" sz="1600" dirty="0">
-                <a:solidFill>
-                  <a:schemeClr val="bg1"/>
-                </a:solidFill>
-                <a:latin typeface="JetBrains Mono" panose="02000009000000000000" pitchFamily="49" charset="0"/>
-                <a:ea typeface="JetBrains Mono" panose="02000009000000000000" pitchFamily="49" charset="0"/>
-                <a:cs typeface="JetBrains Mono" panose="02000009000000000000" pitchFamily="49" charset="0"/>
-              </a:rPr>
-              <a:t>Relaxed memory policy:</a:t>
-            </a:r>
-          </a:p>
-          <a:p>
-            <a:pPr marL="457200" lvl="1" indent="0">
-              <a:buNone/>
-            </a:pPr>
-            <a:r>
-              <a:rPr lang="en-GB" sz="1100" dirty="0">
-                <a:solidFill>
-                  <a:schemeClr val="bg1"/>
-                </a:solidFill>
-                <a:latin typeface="JetBrains Mono" panose="02000009000000000000" pitchFamily="49" charset="0"/>
-                <a:ea typeface="JetBrains Mono" panose="02000009000000000000" pitchFamily="49" charset="0"/>
-                <a:cs typeface="JetBrains Mono" panose="02000009000000000000" pitchFamily="49" charset="0"/>
-              </a:rPr>
-              <a:t>non-overlapping loads bypass pending older stores</a:t>
-            </a:r>
-          </a:p>
-          <a:p>
-            <a:pPr marL="457200" lvl="1" indent="0">
-              <a:buNone/>
-            </a:pPr>
-            <a:r>
-              <a:rPr lang="en-GB" sz="1100" dirty="0">
-                <a:solidFill>
-                  <a:schemeClr val="bg1"/>
-                </a:solidFill>
-                <a:latin typeface="JetBrains Mono" panose="02000009000000000000" pitchFamily="49" charset="0"/>
-                <a:ea typeface="JetBrains Mono" panose="02000009000000000000" pitchFamily="49" charset="0"/>
-                <a:cs typeface="JetBrains Mono" panose="02000009000000000000" pitchFamily="49" charset="0"/>
-              </a:rPr>
-              <a:t>overlapping loads have older stores forwarded at byte level</a:t>
-            </a:r>
+              <a:rPr kumimoji="0" lang="en-GB" sz="1200" b="0" i="0" u="none" strike="noStrike" kern="1200" cap="none" spc="0" normalizeH="0" baseline="0" noProof="0" dirty="0">
+                <a:ln>
+                  <a:noFill/>
+                </a:ln>
+                <a:solidFill>
+                  <a:prstClr val="white"/>
+                </a:solidFill>
+                <a:effectLst/>
+                <a:uLnTx/>
+                <a:uFillTx/>
+                <a:latin typeface="JetBrains Mono" panose="02000009000000000000" pitchFamily="49" charset="0"/>
+                <a:ea typeface="JetBrains Mono" panose="02000009000000000000" pitchFamily="49" charset="0"/>
+                <a:cs typeface="JetBrains Mono" panose="02000009000000000000" pitchFamily="49" charset="0"/>
+              </a:rPr>
+              <a:t>Static taken / not taken</a:t>
+            </a:r>
+            <a:br>
+              <a:rPr kumimoji="0" lang="en-GB" sz="1200" b="0" i="0" u="none" strike="noStrike" kern="1200" cap="none" spc="0" normalizeH="0" baseline="0" noProof="0" dirty="0">
+                <a:ln>
+                  <a:noFill/>
+                </a:ln>
+                <a:solidFill>
+                  <a:prstClr val="white"/>
+                </a:solidFill>
+                <a:effectLst/>
+                <a:uLnTx/>
+                <a:uFillTx/>
+                <a:latin typeface="JetBrains Mono" panose="02000009000000000000" pitchFamily="49" charset="0"/>
+                <a:ea typeface="JetBrains Mono" panose="02000009000000000000" pitchFamily="49" charset="0"/>
+                <a:cs typeface="JetBrains Mono" panose="02000009000000000000" pitchFamily="49" charset="0"/>
+              </a:rPr>
+            </a:br>
+            <a:r>
+              <a:rPr kumimoji="0" lang="en-GB" sz="1200" b="0" i="0" u="none" strike="noStrike" kern="1200" cap="none" spc="0" normalizeH="0" baseline="0" noProof="0" dirty="0">
+                <a:ln>
+                  <a:noFill/>
+                </a:ln>
+                <a:solidFill>
+                  <a:prstClr val="white"/>
+                </a:solidFill>
+                <a:effectLst/>
+                <a:uLnTx/>
+                <a:uFillTx/>
+                <a:latin typeface="JetBrains Mono" panose="02000009000000000000" pitchFamily="49" charset="0"/>
+                <a:ea typeface="JetBrains Mono" panose="02000009000000000000" pitchFamily="49" charset="0"/>
+                <a:cs typeface="JetBrains Mono" panose="02000009000000000000" pitchFamily="49" charset="0"/>
+              </a:rPr>
+              <a:t>Backwards taken, forwards not taken</a:t>
+            </a:r>
+            <a:br>
+              <a:rPr kumimoji="0" lang="en-GB" sz="1200" b="0" i="0" u="none" strike="noStrike" kern="1200" cap="none" spc="0" normalizeH="0" baseline="0" noProof="0" dirty="0">
+                <a:ln>
+                  <a:noFill/>
+                </a:ln>
+                <a:solidFill>
+                  <a:prstClr val="white"/>
+                </a:solidFill>
+                <a:effectLst/>
+                <a:uLnTx/>
+                <a:uFillTx/>
+                <a:latin typeface="JetBrains Mono" panose="02000009000000000000" pitchFamily="49" charset="0"/>
+                <a:ea typeface="JetBrains Mono" panose="02000009000000000000" pitchFamily="49" charset="0"/>
+                <a:cs typeface="JetBrains Mono" panose="02000009000000000000" pitchFamily="49" charset="0"/>
+              </a:rPr>
+            </a:br>
+            <a:r>
+              <a:rPr kumimoji="0" lang="en-GB" sz="1200" b="0" i="0" u="none" strike="noStrike" kern="1200" cap="none" spc="0" normalizeH="0" baseline="0" noProof="0" dirty="0">
+                <a:ln>
+                  <a:noFill/>
+                </a:ln>
+                <a:solidFill>
+                  <a:prstClr val="white"/>
+                </a:solidFill>
+                <a:effectLst/>
+                <a:uLnTx/>
+                <a:uFillTx/>
+                <a:latin typeface="JetBrains Mono" panose="02000009000000000000" pitchFamily="49" charset="0"/>
+                <a:ea typeface="JetBrains Mono" panose="02000009000000000000" pitchFamily="49" charset="0"/>
+                <a:cs typeface="JetBrains Mono" panose="02000009000000000000" pitchFamily="49" charset="0"/>
+              </a:rPr>
+              <a:t>Dynamic two-bit saturating counter</a:t>
+            </a:r>
+            <a:endParaRPr lang="en-GB" sz="1200" dirty="0">
+              <a:solidFill>
+                <a:schemeClr val="bg1"/>
+              </a:solidFill>
+              <a:latin typeface="JetBrains Mono" panose="02000009000000000000" pitchFamily="49" charset="0"/>
+              <a:ea typeface="JetBrains Mono" panose="02000009000000000000" pitchFamily="49" charset="0"/>
+              <a:cs typeface="JetBrains Mono" panose="02000009000000000000" pitchFamily="49" charset="0"/>
+            </a:endParaRPr>
           </a:p>
         </p:txBody>
       </p:sp>
       <p:sp>
         <p:nvSpPr>
-          <p:cNvPr id="5" name="Content Placeholder 2">
-            <a:extLst>
-              <a:ext uri="{FF2B5EF4-FFF2-40B4-BE49-F238E27FC236}">
-                <a16:creationId xmlns:a16="http://schemas.microsoft.com/office/drawing/2014/main" id="{E7A94E5A-66A6-A3C2-377F-B9991338FA0F}"/>
+          <p:cNvPr id="5" name="Content Placeholder 3">
+            <a:extLst>
+              <a:ext uri="{FF2B5EF4-FFF2-40B4-BE49-F238E27FC236}">
+                <a16:creationId xmlns:a16="http://schemas.microsoft.com/office/drawing/2014/main" id="{5B52E97E-A33A-D552-B1FD-FE3F05418315}"/>
               </a:ext>
             </a:extLst>
           </p:cNvPr>
@@ -4068,8 +4229,8 @@
         </p:nvSpPr>
         <p:spPr>
           <a:xfrm>
-            <a:off x="6096000" y="559952"/>
-            <a:ext cx="5353050" cy="5860750"/>
+            <a:off x="6609455" y="819149"/>
+            <a:ext cx="4744344" cy="5357813"/>
           </a:xfrm>
           <a:prstGeom prst="rect">
             <a:avLst/>
@@ -4244,16 +4405,29 @@
             </a:lvl9pPr>
           </a:lstStyle>
           <a:p>
-            <a:pPr marL="0" indent="0">
-              <a:buNone/>
+            <a:pPr marL="0" marR="0" lvl="0" indent="0" algn="l" defTabSz="914400" rtl="0" eaLnBrk="1" fontAlgn="auto" latinLnBrk="0" hangingPunct="1">
+              <a:lnSpc>
+                <a:spcPct val="100000"/>
+              </a:lnSpc>
+              <a:spcBef>
+                <a:spcPts val="1000"/>
+              </a:spcBef>
+              <a:spcAft>
+                <a:spcPts val="0"/>
+              </a:spcAft>
+              <a:buClrTx/>
+              <a:buSzTx/>
+              <a:buFont typeface="Arial" panose="020B0604020202020204" pitchFamily="34" charset="0"/>
+              <a:buNone/>
+              <a:tabLst/>
               <a:defRPr/>
             </a:pPr>
-            <a:endParaRPr kumimoji="0" lang="en-GB" sz="1600" b="0" i="0" u="none" strike="noStrike" kern="1200" cap="none" spc="0" normalizeH="0" baseline="0" noProof="0" dirty="0">
+            <a:endParaRPr kumimoji="0" lang="en-GB" sz="1600" b="1" i="0" u="none" strike="noStrike" kern="1200" cap="none" spc="0" normalizeH="0" baseline="0" noProof="0" dirty="0">
               <a:ln>
                 <a:noFill/>
               </a:ln>
               <a:solidFill>
-                <a:schemeClr val="bg1"/>
+                <a:prstClr val="white"/>
               </a:solidFill>
               <a:effectLst/>
               <a:uLnTx/>
@@ -4263,287 +4437,471 @@
               <a:cs typeface="JetBrains Mono" panose="02000009000000000000" pitchFamily="49" charset="0"/>
             </a:endParaRPr>
           </a:p>
-        </p:txBody>
-      </p:sp>
-      <p:sp>
-        <p:nvSpPr>
-          <p:cNvPr id="2" name="Content Placeholder 2">
-            <a:extLst>
-              <a:ext uri="{FF2B5EF4-FFF2-40B4-BE49-F238E27FC236}">
-                <a16:creationId xmlns:a16="http://schemas.microsoft.com/office/drawing/2014/main" id="{28B1C536-722D-D79D-082E-72655AE2D13F}"/>
-              </a:ext>
-            </a:extLst>
-          </p:cNvPr>
-          <p:cNvSpPr txBox="1">
-            <a:spLocks/>
-          </p:cNvSpPr>
-          <p:nvPr/>
-        </p:nvSpPr>
-        <p:spPr>
-          <a:xfrm>
-            <a:off x="6750604" y="559952"/>
-            <a:ext cx="4698446" cy="5860750"/>
-          </a:xfrm>
-          <a:prstGeom prst="rect">
-            <a:avLst/>
-          </a:prstGeom>
-        </p:spPr>
-        <p:txBody>
-          <a:bodyPr vert="horz" lIns="91440" tIns="45720" rIns="91440" bIns="45720" rtlCol="0">
-            <a:normAutofit/>
-          </a:bodyPr>
-          <a:lstStyle>
-            <a:lvl1pPr marL="228600" indent="-228600" algn="l" defTabSz="914400" rtl="0" eaLnBrk="1" latinLnBrk="0" hangingPunct="1">
-              <a:lnSpc>
-                <a:spcPct val="90000"/>
+          <a:p>
+            <a:pPr marL="0" marR="0" lvl="0" indent="0" algn="l" defTabSz="914400" rtl="0" eaLnBrk="1" fontAlgn="auto" latinLnBrk="0" hangingPunct="1">
+              <a:lnSpc>
+                <a:spcPct val="100000"/>
               </a:lnSpc>
               <a:spcBef>
                 <a:spcPts val="1000"/>
               </a:spcBef>
-              <a:buFont typeface="Arial" panose="020B0604020202020204" pitchFamily="34" charset="0"/>
-              <a:buChar char="•"/>
-              <a:defRPr sz="2800" kern="1200">
-                <a:solidFill>
-                  <a:schemeClr val="tx1"/>
-                </a:solidFill>
-                <a:latin typeface="+mn-lt"/>
-                <a:ea typeface="+mn-ea"/>
-                <a:cs typeface="+mn-cs"/>
-              </a:defRPr>
-            </a:lvl1pPr>
-            <a:lvl2pPr marL="685800" indent="-228600" algn="l" defTabSz="914400" rtl="0" eaLnBrk="1" latinLnBrk="0" hangingPunct="1">
-              <a:lnSpc>
-                <a:spcPct val="90000"/>
-              </a:lnSpc>
-              <a:spcBef>
-                <a:spcPts val="500"/>
-              </a:spcBef>
-              <a:buFont typeface="Arial" panose="020B0604020202020204" pitchFamily="34" charset="0"/>
-              <a:buChar char="•"/>
-              <a:defRPr sz="2400" kern="1200">
-                <a:solidFill>
-                  <a:schemeClr val="tx1"/>
-                </a:solidFill>
-                <a:latin typeface="+mn-lt"/>
-                <a:ea typeface="+mn-ea"/>
-                <a:cs typeface="+mn-cs"/>
-              </a:defRPr>
-            </a:lvl2pPr>
-            <a:lvl3pPr marL="1143000" indent="-228600" algn="l" defTabSz="914400" rtl="0" eaLnBrk="1" latinLnBrk="0" hangingPunct="1">
-              <a:lnSpc>
-                <a:spcPct val="90000"/>
-              </a:lnSpc>
-              <a:spcBef>
-                <a:spcPts val="500"/>
-              </a:spcBef>
-              <a:buFont typeface="Arial" panose="020B0604020202020204" pitchFamily="34" charset="0"/>
-              <a:buChar char="•"/>
-              <a:defRPr sz="2000" kern="1200">
-                <a:solidFill>
-                  <a:schemeClr val="tx1"/>
-                </a:solidFill>
-                <a:latin typeface="+mn-lt"/>
-                <a:ea typeface="+mn-ea"/>
-                <a:cs typeface="+mn-cs"/>
-              </a:defRPr>
-            </a:lvl3pPr>
-            <a:lvl4pPr marL="1600200" indent="-228600" algn="l" defTabSz="914400" rtl="0" eaLnBrk="1" latinLnBrk="0" hangingPunct="1">
-              <a:lnSpc>
-                <a:spcPct val="90000"/>
-              </a:lnSpc>
-              <a:spcBef>
-                <a:spcPts val="500"/>
-              </a:spcBef>
-              <a:buFont typeface="Arial" panose="020B0604020202020204" pitchFamily="34" charset="0"/>
-              <a:buChar char="•"/>
-              <a:defRPr sz="1800" kern="1200">
-                <a:solidFill>
-                  <a:schemeClr val="tx1"/>
-                </a:solidFill>
-                <a:latin typeface="+mn-lt"/>
-                <a:ea typeface="+mn-ea"/>
-                <a:cs typeface="+mn-cs"/>
-              </a:defRPr>
-            </a:lvl4pPr>
-            <a:lvl5pPr marL="2057400" indent="-228600" algn="l" defTabSz="914400" rtl="0" eaLnBrk="1" latinLnBrk="0" hangingPunct="1">
-              <a:lnSpc>
-                <a:spcPct val="90000"/>
-              </a:lnSpc>
-              <a:spcBef>
-                <a:spcPts val="500"/>
-              </a:spcBef>
-              <a:buFont typeface="Arial" panose="020B0604020202020204" pitchFamily="34" charset="0"/>
-              <a:buChar char="•"/>
-              <a:defRPr sz="1800" kern="1200">
-                <a:solidFill>
-                  <a:schemeClr val="tx1"/>
-                </a:solidFill>
-                <a:latin typeface="+mn-lt"/>
-                <a:ea typeface="+mn-ea"/>
-                <a:cs typeface="+mn-cs"/>
-              </a:defRPr>
-            </a:lvl5pPr>
-            <a:lvl6pPr marL="2514600" indent="-228600" algn="l" defTabSz="914400" rtl="0" eaLnBrk="1" latinLnBrk="0" hangingPunct="1">
-              <a:lnSpc>
-                <a:spcPct val="90000"/>
-              </a:lnSpc>
-              <a:spcBef>
-                <a:spcPts val="500"/>
-              </a:spcBef>
-              <a:buFont typeface="Arial" panose="020B0604020202020204" pitchFamily="34" charset="0"/>
-              <a:buChar char="•"/>
-              <a:defRPr sz="1800" kern="1200">
-                <a:solidFill>
-                  <a:schemeClr val="tx1"/>
-                </a:solidFill>
-                <a:latin typeface="+mn-lt"/>
-                <a:ea typeface="+mn-ea"/>
-                <a:cs typeface="+mn-cs"/>
-              </a:defRPr>
-            </a:lvl6pPr>
-            <a:lvl7pPr marL="2971800" indent="-228600" algn="l" defTabSz="914400" rtl="0" eaLnBrk="1" latinLnBrk="0" hangingPunct="1">
-              <a:lnSpc>
-                <a:spcPct val="90000"/>
-              </a:lnSpc>
-              <a:spcBef>
-                <a:spcPts val="500"/>
-              </a:spcBef>
-              <a:buFont typeface="Arial" panose="020B0604020202020204" pitchFamily="34" charset="0"/>
-              <a:buChar char="•"/>
-              <a:defRPr sz="1800" kern="1200">
-                <a:solidFill>
-                  <a:schemeClr val="tx1"/>
-                </a:solidFill>
-                <a:latin typeface="+mn-lt"/>
-                <a:ea typeface="+mn-ea"/>
-                <a:cs typeface="+mn-cs"/>
-              </a:defRPr>
-            </a:lvl7pPr>
-            <a:lvl8pPr marL="3429000" indent="-228600" algn="l" defTabSz="914400" rtl="0" eaLnBrk="1" latinLnBrk="0" hangingPunct="1">
-              <a:lnSpc>
-                <a:spcPct val="90000"/>
-              </a:lnSpc>
-              <a:spcBef>
-                <a:spcPts val="500"/>
-              </a:spcBef>
-              <a:buFont typeface="Arial" panose="020B0604020202020204" pitchFamily="34" charset="0"/>
-              <a:buChar char="•"/>
-              <a:defRPr sz="1800" kern="1200">
-                <a:solidFill>
-                  <a:schemeClr val="tx1"/>
-                </a:solidFill>
-                <a:latin typeface="+mn-lt"/>
-                <a:ea typeface="+mn-ea"/>
-                <a:cs typeface="+mn-cs"/>
-              </a:defRPr>
-            </a:lvl8pPr>
-            <a:lvl9pPr marL="3886200" indent="-228600" algn="l" defTabSz="914400" rtl="0" eaLnBrk="1" latinLnBrk="0" hangingPunct="1">
-              <a:lnSpc>
-                <a:spcPct val="90000"/>
-              </a:lnSpc>
-              <a:spcBef>
-                <a:spcPts val="500"/>
-              </a:spcBef>
-              <a:buFont typeface="Arial" panose="020B0604020202020204" pitchFamily="34" charset="0"/>
-              <a:buChar char="•"/>
-              <a:defRPr sz="1800" kern="1200">
-                <a:solidFill>
-                  <a:schemeClr val="tx1"/>
-                </a:solidFill>
-                <a:latin typeface="+mn-lt"/>
-                <a:ea typeface="+mn-ea"/>
-                <a:cs typeface="+mn-cs"/>
-              </a:defRPr>
-            </a:lvl9pPr>
-          </a:lstStyle>
-          <a:p>
-            <a:pPr marL="0" indent="0">
-              <a:buFont typeface="Arial" panose="020B0604020202020204" pitchFamily="34" charset="0"/>
-              <a:buNone/>
+              <a:spcAft>
+                <a:spcPts val="0"/>
+              </a:spcAft>
+              <a:buClrTx/>
+              <a:buSzTx/>
+              <a:buFont typeface="Arial" panose="020B0604020202020204" pitchFamily="34" charset="0"/>
+              <a:buNone/>
+              <a:tabLst/>
               <a:defRPr/>
             </a:pPr>
             <a:r>
-              <a:rPr lang="en-GB" sz="1500" dirty="0">
-                <a:solidFill>
-                  <a:schemeClr val="bg1"/>
-                </a:solidFill>
-                <a:latin typeface="JetBrains Mono" panose="02000009000000000000" pitchFamily="49" charset="0"/>
-                <a:ea typeface="JetBrains Mono" panose="02000009000000000000" pitchFamily="49" charset="0"/>
-                <a:cs typeface="JetBrains Mono" panose="02000009000000000000" pitchFamily="49" charset="0"/>
-              </a:rPr>
-              <a:t>Interactive terminal UI</a:t>
-            </a:r>
-          </a:p>
-          <a:p>
-            <a:pPr marL="457200" lvl="1" indent="0">
-              <a:buFont typeface="Arial" panose="020B0604020202020204" pitchFamily="34" charset="0"/>
-              <a:buNone/>
+              <a:rPr kumimoji="0" lang="en-GB" sz="1500" b="1" i="0" u="none" strike="noStrike" kern="1200" cap="none" spc="0" normalizeH="0" baseline="0" noProof="0" dirty="0">
+                <a:ln>
+                  <a:noFill/>
+                </a:ln>
+                <a:solidFill>
+                  <a:prstClr val="white"/>
+                </a:solidFill>
+                <a:effectLst/>
+                <a:uLnTx/>
+                <a:uFillTx/>
+                <a:latin typeface="JetBrains Mono" panose="02000009000000000000" pitchFamily="49" charset="0"/>
+                <a:ea typeface="JetBrains Mono" panose="02000009000000000000" pitchFamily="49" charset="0"/>
+                <a:cs typeface="JetBrains Mono" panose="02000009000000000000" pitchFamily="49" charset="0"/>
+              </a:rPr>
+              <a:t>Memory</a:t>
+            </a:r>
+          </a:p>
+          <a:p>
+            <a:pPr marL="0" marR="0" lvl="0" indent="0" algn="l" defTabSz="914400" rtl="0" eaLnBrk="1" fontAlgn="auto" latinLnBrk="0" hangingPunct="1">
+              <a:lnSpc>
+                <a:spcPct val="100000"/>
+              </a:lnSpc>
+              <a:spcBef>
+                <a:spcPts val="1000"/>
+              </a:spcBef>
+              <a:spcAft>
+                <a:spcPts val="0"/>
+              </a:spcAft>
+              <a:buClrTx/>
+              <a:buSzTx/>
+              <a:buFont typeface="Arial" panose="020B0604020202020204" pitchFamily="34" charset="0"/>
+              <a:buNone/>
+              <a:tabLst/>
               <a:defRPr/>
             </a:pPr>
             <a:r>
-              <a:rPr lang="en-GB" sz="1000" dirty="0">
-                <a:solidFill>
-                  <a:schemeClr val="bg1"/>
-                </a:solidFill>
-                <a:latin typeface="JetBrains Mono" panose="02000009000000000000" pitchFamily="49" charset="0"/>
-                <a:ea typeface="JetBrains Mono" panose="02000009000000000000" pitchFamily="49" charset="0"/>
-                <a:cs typeface="JetBrains Mono" panose="02000009000000000000" pitchFamily="49" charset="0"/>
-              </a:rPr>
-              <a:t>step/run, headless mode</a:t>
-            </a:r>
-          </a:p>
-          <a:p>
-            <a:pPr marL="457200" lvl="1" indent="0">
-              <a:buFont typeface="Arial" panose="020B0604020202020204" pitchFamily="34" charset="0"/>
-              <a:buNone/>
+              <a:rPr kumimoji="0" lang="en-GB" sz="1100" b="0" i="0" u="none" strike="noStrike" kern="1200" cap="none" spc="0" normalizeH="0" baseline="0" noProof="0" dirty="0">
+                <a:ln>
+                  <a:noFill/>
+                </a:ln>
+                <a:solidFill>
+                  <a:prstClr val="white"/>
+                </a:solidFill>
+                <a:effectLst/>
+                <a:uLnTx/>
+                <a:uFillTx/>
+                <a:latin typeface="JetBrains Mono" panose="02000009000000000000" pitchFamily="49" charset="0"/>
+                <a:ea typeface="JetBrains Mono" panose="02000009000000000000" pitchFamily="49" charset="0"/>
+                <a:cs typeface="JetBrains Mono" panose="02000009000000000000" pitchFamily="49" charset="0"/>
+              </a:rPr>
+              <a:t>Von Neumann Memory Architecture</a:t>
+            </a:r>
+          </a:p>
+          <a:p>
+            <a:pPr marL="0" marR="0" lvl="0" indent="0" algn="l" defTabSz="914400" rtl="0" eaLnBrk="1" fontAlgn="auto" latinLnBrk="0" hangingPunct="1">
+              <a:lnSpc>
+                <a:spcPct val="100000"/>
+              </a:lnSpc>
+              <a:spcBef>
+                <a:spcPts val="1000"/>
+              </a:spcBef>
+              <a:spcAft>
+                <a:spcPts val="0"/>
+              </a:spcAft>
+              <a:buClrTx/>
+              <a:buSzTx/>
+              <a:buFont typeface="Arial" panose="020B0604020202020204" pitchFamily="34" charset="0"/>
+              <a:buNone/>
+              <a:tabLst/>
               <a:defRPr/>
             </a:pPr>
             <a:r>
-              <a:rPr lang="en-GB" sz="1000" dirty="0">
-                <a:solidFill>
-                  <a:schemeClr val="bg1"/>
-                </a:solidFill>
-                <a:latin typeface="JetBrains Mono" panose="02000009000000000000" pitchFamily="49" charset="0"/>
-                <a:ea typeface="JetBrains Mono" panose="02000009000000000000" pitchFamily="49" charset="0"/>
-                <a:cs typeface="JetBrains Mono" panose="02000009000000000000" pitchFamily="49" charset="0"/>
-              </a:rPr>
-              <a:t>registers, stack</a:t>
-            </a:r>
-          </a:p>
-          <a:p>
-            <a:pPr marL="0" indent="0">
-              <a:buFont typeface="Arial" panose="020B0604020202020204" pitchFamily="34" charset="0"/>
-              <a:buNone/>
+              <a:rPr kumimoji="0" lang="en-GB" sz="1100" b="0" i="0" u="none" strike="noStrike" kern="1200" cap="none" spc="0" normalizeH="0" baseline="0" noProof="0" dirty="0">
+                <a:ln>
+                  <a:noFill/>
+                </a:ln>
+                <a:solidFill>
+                  <a:prstClr val="white"/>
+                </a:solidFill>
+                <a:effectLst/>
+                <a:uLnTx/>
+                <a:uFillTx/>
+                <a:latin typeface="JetBrains Mono" panose="02000009000000000000" pitchFamily="49" charset="0"/>
+                <a:ea typeface="JetBrains Mono" panose="02000009000000000000" pitchFamily="49" charset="0"/>
+                <a:cs typeface="JetBrains Mono" panose="02000009000000000000" pitchFamily="49" charset="0"/>
+              </a:rPr>
+              <a:t>Non-overlapping loads bypass pending older stores</a:t>
+            </a:r>
+            <a:br>
+              <a:rPr kumimoji="0" lang="en-GB" sz="1100" b="0" i="0" u="none" strike="noStrike" kern="1200" cap="none" spc="0" normalizeH="0" baseline="0" noProof="0" dirty="0">
+                <a:ln>
+                  <a:noFill/>
+                </a:ln>
+                <a:solidFill>
+                  <a:prstClr val="white"/>
+                </a:solidFill>
+                <a:effectLst/>
+                <a:uLnTx/>
+                <a:uFillTx/>
+                <a:latin typeface="JetBrains Mono" panose="02000009000000000000" pitchFamily="49" charset="0"/>
+                <a:ea typeface="JetBrains Mono" panose="02000009000000000000" pitchFamily="49" charset="0"/>
+                <a:cs typeface="JetBrains Mono" panose="02000009000000000000" pitchFamily="49" charset="0"/>
+              </a:rPr>
+            </a:br>
+            <a:r>
+              <a:rPr kumimoji="0" lang="en-GB" sz="1100" b="0" i="0" u="none" strike="noStrike" kern="1200" cap="none" spc="0" normalizeH="0" baseline="0" noProof="0" dirty="0">
+                <a:ln>
+                  <a:noFill/>
+                </a:ln>
+                <a:solidFill>
+                  <a:prstClr val="white"/>
+                </a:solidFill>
+                <a:effectLst/>
+                <a:uLnTx/>
+                <a:uFillTx/>
+                <a:latin typeface="JetBrains Mono" panose="02000009000000000000" pitchFamily="49" charset="0"/>
+                <a:ea typeface="JetBrains Mono" panose="02000009000000000000" pitchFamily="49" charset="0"/>
+                <a:cs typeface="JetBrains Mono" panose="02000009000000000000" pitchFamily="49" charset="0"/>
+              </a:rPr>
+              <a:t>Overlapping loads forward bytes from older stores</a:t>
+            </a:r>
+          </a:p>
+          <a:p>
+            <a:pPr marL="0" marR="0" lvl="0" indent="0" algn="l" defTabSz="914400" rtl="0" eaLnBrk="1" fontAlgn="auto" latinLnBrk="0" hangingPunct="1">
+              <a:lnSpc>
+                <a:spcPct val="100000"/>
+              </a:lnSpc>
+              <a:spcBef>
+                <a:spcPts val="1000"/>
+              </a:spcBef>
+              <a:spcAft>
+                <a:spcPts val="0"/>
+              </a:spcAft>
+              <a:buClrTx/>
+              <a:buSzTx/>
+              <a:buFont typeface="Arial" panose="020B0604020202020204" pitchFamily="34" charset="0"/>
+              <a:buNone/>
+              <a:tabLst/>
               <a:defRPr/>
             </a:pPr>
-            <a:r>
-              <a:rPr lang="en-GB" sz="1500" dirty="0">
-                <a:solidFill>
-                  <a:schemeClr val="bg1"/>
-                </a:solidFill>
-                <a:latin typeface="JetBrains Mono" panose="02000009000000000000" pitchFamily="49" charset="0"/>
-                <a:ea typeface="JetBrains Mono" panose="02000009000000000000" pitchFamily="49" charset="0"/>
-                <a:cs typeface="JetBrains Mono" panose="02000009000000000000" pitchFamily="49" charset="0"/>
-              </a:rPr>
-              <a:t>Stack handling, function calls</a:t>
-            </a:r>
+            <a:endParaRPr kumimoji="0" lang="en-GB" sz="1600" b="1" i="0" u="none" strike="noStrike" kern="1200" cap="none" spc="0" normalizeH="0" baseline="0" noProof="0" dirty="0">
+              <a:ln>
+                <a:noFill/>
+              </a:ln>
+              <a:solidFill>
+                <a:prstClr val="white"/>
+              </a:solidFill>
+              <a:effectLst/>
+              <a:uLnTx/>
+              <a:uFillTx/>
+              <a:latin typeface="JetBrains Mono" panose="02000009000000000000" pitchFamily="49" charset="0"/>
+              <a:ea typeface="JetBrains Mono" panose="02000009000000000000" pitchFamily="49" charset="0"/>
+              <a:cs typeface="JetBrains Mono" panose="02000009000000000000" pitchFamily="49" charset="0"/>
+            </a:endParaRPr>
           </a:p>
           <a:p>
             <a:pPr marL="0" indent="0">
-              <a:buFont typeface="Arial" panose="020B0604020202020204" pitchFamily="34" charset="0"/>
-              <a:buNone/>
-              <a:defRPr/>
+              <a:lnSpc>
+                <a:spcPct val="100000"/>
+              </a:lnSpc>
+              <a:buFont typeface="Arial" panose="020B0604020202020204" pitchFamily="34" charset="0"/>
+              <a:buNone/>
             </a:pPr>
             <a:r>
-              <a:rPr lang="en-GB" sz="1500" dirty="0">
-                <a:solidFill>
-                  <a:schemeClr val="bg1"/>
-                </a:solidFill>
-                <a:latin typeface="JetBrains Mono" panose="02000009000000000000" pitchFamily="49" charset="0"/>
-                <a:ea typeface="JetBrains Mono" panose="02000009000000000000" pitchFamily="49" charset="0"/>
-                <a:cs typeface="JetBrains Mono" panose="02000009000000000000" pitchFamily="49" charset="0"/>
-              </a:rPr>
-              <a:t>Configurable cycle exec units</a:t>
+              <a:rPr lang="en-GB" sz="1600" b="1" dirty="0">
+                <a:solidFill>
+                  <a:schemeClr val="bg1"/>
+                </a:solidFill>
+                <a:latin typeface="JetBrains Mono" panose="02000009000000000000" pitchFamily="49" charset="0"/>
+                <a:ea typeface="JetBrains Mono" panose="02000009000000000000" pitchFamily="49" charset="0"/>
+                <a:cs typeface="JetBrains Mono" panose="02000009000000000000" pitchFamily="49" charset="0"/>
+              </a:rPr>
+              <a:t>Configuration</a:t>
+            </a:r>
+          </a:p>
+          <a:p>
+            <a:pPr marL="0" indent="0">
+              <a:lnSpc>
+                <a:spcPct val="100000"/>
+              </a:lnSpc>
+              <a:buNone/>
+            </a:pPr>
+            <a:r>
+              <a:rPr lang="en-GB" sz="1200" dirty="0">
+                <a:solidFill>
+                  <a:schemeClr val="bg1"/>
+                </a:solidFill>
+                <a:latin typeface="JetBrains Mono" panose="02000009000000000000" pitchFamily="49" charset="0"/>
+                <a:ea typeface="JetBrains Mono" panose="02000009000000000000" pitchFamily="49" charset="0"/>
+                <a:cs typeface="JetBrains Mono" panose="02000009000000000000" pitchFamily="49" charset="0"/>
+              </a:rPr>
+              <a:t>Configurable fetch/issue/commit width</a:t>
+            </a:r>
+            <a:br>
+              <a:rPr lang="en-GB" sz="1200" dirty="0">
+                <a:solidFill>
+                  <a:schemeClr val="bg1"/>
+                </a:solidFill>
+                <a:latin typeface="JetBrains Mono" panose="02000009000000000000" pitchFamily="49" charset="0"/>
+                <a:ea typeface="JetBrains Mono" panose="02000009000000000000" pitchFamily="49" charset="0"/>
+                <a:cs typeface="JetBrains Mono" panose="02000009000000000000" pitchFamily="49" charset="0"/>
+              </a:rPr>
+            </a:br>
+            <a:r>
+              <a:rPr lang="en-GB" sz="1200" dirty="0">
+                <a:solidFill>
+                  <a:schemeClr val="bg1"/>
+                </a:solidFill>
+                <a:latin typeface="JetBrains Mono" panose="02000009000000000000" pitchFamily="49" charset="0"/>
+                <a:ea typeface="JetBrains Mono" panose="02000009000000000000" pitchFamily="49" charset="0"/>
+                <a:cs typeface="JetBrains Mono" panose="02000009000000000000" pitchFamily="49" charset="0"/>
+              </a:rPr>
+              <a:t>Configurable number of each execution unit type</a:t>
+            </a:r>
+            <a:br>
+              <a:rPr lang="en-GB" sz="1200" dirty="0">
+                <a:solidFill>
+                  <a:schemeClr val="bg1"/>
+                </a:solidFill>
+                <a:latin typeface="JetBrains Mono" panose="02000009000000000000" pitchFamily="49" charset="0"/>
+                <a:ea typeface="JetBrains Mono" panose="02000009000000000000" pitchFamily="49" charset="0"/>
+                <a:cs typeface="JetBrains Mono" panose="02000009000000000000" pitchFamily="49" charset="0"/>
+              </a:rPr>
+            </a:br>
+            <a:r>
+              <a:rPr lang="en-GB" sz="1200" dirty="0">
+                <a:solidFill>
+                  <a:schemeClr val="bg1"/>
+                </a:solidFill>
+                <a:latin typeface="JetBrains Mono" panose="02000009000000000000" pitchFamily="49" charset="0"/>
+                <a:ea typeface="JetBrains Mono" panose="02000009000000000000" pitchFamily="49" charset="0"/>
+                <a:cs typeface="JetBrains Mono" panose="02000009000000000000" pitchFamily="49" charset="0"/>
+              </a:rPr>
+              <a:t>Configurable reservation station capacity</a:t>
+            </a:r>
+            <a:br>
+              <a:rPr lang="en-GB" sz="1200" dirty="0">
+                <a:solidFill>
+                  <a:schemeClr val="bg1"/>
+                </a:solidFill>
+                <a:latin typeface="JetBrains Mono" panose="02000009000000000000" pitchFamily="49" charset="0"/>
+                <a:ea typeface="JetBrains Mono" panose="02000009000000000000" pitchFamily="49" charset="0"/>
+                <a:cs typeface="JetBrains Mono" panose="02000009000000000000" pitchFamily="49" charset="0"/>
+              </a:rPr>
+            </a:br>
+            <a:r>
+              <a:rPr lang="en-GB" sz="1200" dirty="0">
+                <a:solidFill>
+                  <a:schemeClr val="bg1"/>
+                </a:solidFill>
+                <a:latin typeface="JetBrains Mono" panose="02000009000000000000" pitchFamily="49" charset="0"/>
+                <a:ea typeface="JetBrains Mono" panose="02000009000000000000" pitchFamily="49" charset="0"/>
+                <a:cs typeface="JetBrains Mono" panose="02000009000000000000" pitchFamily="49" charset="0"/>
+              </a:rPr>
+              <a:t>Configurable load-store queue capacity</a:t>
+            </a:r>
+            <a:br>
+              <a:rPr lang="en-GB" sz="1200" dirty="0">
+                <a:solidFill>
+                  <a:schemeClr val="bg1"/>
+                </a:solidFill>
+                <a:latin typeface="JetBrains Mono" panose="02000009000000000000" pitchFamily="49" charset="0"/>
+                <a:ea typeface="JetBrains Mono" panose="02000009000000000000" pitchFamily="49" charset="0"/>
+                <a:cs typeface="JetBrains Mono" panose="02000009000000000000" pitchFamily="49" charset="0"/>
+              </a:rPr>
+            </a:br>
+            <a:r>
+              <a:rPr lang="en-GB" sz="1200" dirty="0">
+                <a:solidFill>
+                  <a:schemeClr val="bg1"/>
+                </a:solidFill>
+                <a:latin typeface="JetBrains Mono" panose="02000009000000000000" pitchFamily="49" charset="0"/>
+                <a:ea typeface="JetBrains Mono" panose="02000009000000000000" pitchFamily="49" charset="0"/>
+                <a:cs typeface="JetBrains Mono" panose="02000009000000000000" pitchFamily="49" charset="0"/>
+              </a:rPr>
+              <a:t>Configurable vector length (128, 256, 512)</a:t>
+            </a:r>
+            <a:br>
+              <a:rPr lang="en-GB" sz="1200" dirty="0">
+                <a:solidFill>
+                  <a:schemeClr val="bg1"/>
+                </a:solidFill>
+                <a:latin typeface="JetBrains Mono" panose="02000009000000000000" pitchFamily="49" charset="0"/>
+                <a:ea typeface="JetBrains Mono" panose="02000009000000000000" pitchFamily="49" charset="0"/>
+                <a:cs typeface="JetBrains Mono" panose="02000009000000000000" pitchFamily="49" charset="0"/>
+              </a:rPr>
+            </a:br>
+            <a:r>
+              <a:rPr lang="en-GB" sz="1200" dirty="0">
+                <a:solidFill>
+                  <a:schemeClr val="bg1"/>
+                </a:solidFill>
+                <a:latin typeface="JetBrains Mono" panose="02000009000000000000" pitchFamily="49" charset="0"/>
+                <a:ea typeface="JetBrains Mono" panose="02000009000000000000" pitchFamily="49" charset="0"/>
+                <a:cs typeface="JetBrains Mono" panose="02000009000000000000" pitchFamily="49" charset="0"/>
+              </a:rPr>
+              <a:t>Configurable branch prediction policy</a:t>
+            </a:r>
+          </a:p>
+          <a:p>
+            <a:pPr marL="0" indent="0">
+              <a:lnSpc>
+                <a:spcPct val="100000"/>
+              </a:lnSpc>
+              <a:buNone/>
+            </a:pPr>
+            <a:endParaRPr lang="en-GB" sz="1200" dirty="0">
+              <a:solidFill>
+                <a:schemeClr val="bg1"/>
+              </a:solidFill>
+              <a:latin typeface="JetBrains Mono" panose="02000009000000000000" pitchFamily="49" charset="0"/>
+              <a:ea typeface="JetBrains Mono" panose="02000009000000000000" pitchFamily="49" charset="0"/>
+              <a:cs typeface="JetBrains Mono" panose="02000009000000000000" pitchFamily="49" charset="0"/>
+            </a:endParaRPr>
+          </a:p>
+          <a:p>
+            <a:pPr marL="0" indent="0">
+              <a:lnSpc>
+                <a:spcPct val="100000"/>
+              </a:lnSpc>
+              <a:buNone/>
+            </a:pPr>
+            <a:r>
+              <a:rPr lang="en-GB" sz="1600" b="1" dirty="0">
+                <a:solidFill>
+                  <a:schemeClr val="bg1"/>
+                </a:solidFill>
+                <a:latin typeface="JetBrains Mono" panose="02000009000000000000" pitchFamily="49" charset="0"/>
+                <a:ea typeface="JetBrains Mono" panose="02000009000000000000" pitchFamily="49" charset="0"/>
+                <a:cs typeface="JetBrains Mono" panose="02000009000000000000" pitchFamily="49" charset="0"/>
+              </a:rPr>
+              <a:t>TUI</a:t>
+            </a:r>
+          </a:p>
+          <a:p>
+            <a:pPr marL="0" indent="0">
+              <a:lnSpc>
+                <a:spcPct val="100000"/>
+              </a:lnSpc>
+              <a:buNone/>
+            </a:pPr>
+            <a:r>
+              <a:rPr lang="en-GB" sz="1200" dirty="0">
+                <a:solidFill>
+                  <a:schemeClr val="bg1"/>
+                </a:solidFill>
+                <a:latin typeface="JetBrains Mono" panose="02000009000000000000" pitchFamily="49" charset="0"/>
+                <a:ea typeface="JetBrains Mono" panose="02000009000000000000" pitchFamily="49" charset="0"/>
+                <a:cs typeface="JetBrains Mono" panose="02000009000000000000" pitchFamily="49" charset="0"/>
+              </a:rPr>
+              <a:t>Scrollable disassembled instruction view</a:t>
+            </a:r>
+            <a:br>
+              <a:rPr lang="en-GB" sz="1200" dirty="0">
+                <a:solidFill>
+                  <a:schemeClr val="bg1"/>
+                </a:solidFill>
+                <a:latin typeface="JetBrains Mono" panose="02000009000000000000" pitchFamily="49" charset="0"/>
+                <a:ea typeface="JetBrains Mono" panose="02000009000000000000" pitchFamily="49" charset="0"/>
+                <a:cs typeface="JetBrains Mono" panose="02000009000000000000" pitchFamily="49" charset="0"/>
+              </a:rPr>
+            </a:br>
+            <a:r>
+              <a:rPr lang="en-GB" sz="1200" dirty="0">
+                <a:solidFill>
+                  <a:schemeClr val="bg1"/>
+                </a:solidFill>
+                <a:latin typeface="JetBrains Mono" panose="02000009000000000000" pitchFamily="49" charset="0"/>
+                <a:ea typeface="JetBrains Mono" panose="02000009000000000000" pitchFamily="49" charset="0"/>
+                <a:cs typeface="JetBrains Mono" panose="02000009000000000000" pitchFamily="49" charset="0"/>
+              </a:rPr>
+              <a:t>Scrollable register content view</a:t>
+            </a:r>
+            <a:br>
+              <a:rPr lang="en-GB" sz="1200" dirty="0">
+                <a:solidFill>
+                  <a:schemeClr val="bg1"/>
+                </a:solidFill>
+                <a:latin typeface="JetBrains Mono" panose="02000009000000000000" pitchFamily="49" charset="0"/>
+                <a:ea typeface="JetBrains Mono" panose="02000009000000000000" pitchFamily="49" charset="0"/>
+                <a:cs typeface="JetBrains Mono" panose="02000009000000000000" pitchFamily="49" charset="0"/>
+              </a:rPr>
+            </a:br>
+            <a:r>
+              <a:rPr lang="en-GB" sz="1200" dirty="0">
+                <a:solidFill>
+                  <a:schemeClr val="bg1"/>
+                </a:solidFill>
+                <a:latin typeface="JetBrains Mono" panose="02000009000000000000" pitchFamily="49" charset="0"/>
+                <a:ea typeface="JetBrains Mono" panose="02000009000000000000" pitchFamily="49" charset="0"/>
+                <a:cs typeface="JetBrains Mono" panose="02000009000000000000" pitchFamily="49" charset="0"/>
+              </a:rPr>
+              <a:t>Scrollable stack content view</a:t>
+            </a:r>
+            <a:br>
+              <a:rPr lang="en-GB" sz="1200" dirty="0">
+                <a:solidFill>
+                  <a:schemeClr val="bg1"/>
+                </a:solidFill>
+                <a:latin typeface="JetBrains Mono" panose="02000009000000000000" pitchFamily="49" charset="0"/>
+                <a:ea typeface="JetBrains Mono" panose="02000009000000000000" pitchFamily="49" charset="0"/>
+                <a:cs typeface="JetBrains Mono" panose="02000009000000000000" pitchFamily="49" charset="0"/>
+              </a:rPr>
+            </a:br>
+            <a:r>
+              <a:rPr lang="en-GB" sz="1200" dirty="0">
+                <a:solidFill>
+                  <a:schemeClr val="bg1"/>
+                </a:solidFill>
+                <a:latin typeface="JetBrains Mono" panose="02000009000000000000" pitchFamily="49" charset="0"/>
+                <a:ea typeface="JetBrains Mono" panose="02000009000000000000" pitchFamily="49" charset="0"/>
+                <a:cs typeface="JetBrains Mono" panose="02000009000000000000" pitchFamily="49" charset="0"/>
+              </a:rPr>
+              <a:t>Step/run/help </a:t>
+            </a:r>
+            <a:r>
+              <a:rPr lang="en-GB" sz="1200" dirty="0" err="1">
+                <a:solidFill>
+                  <a:schemeClr val="bg1"/>
+                </a:solidFill>
+                <a:latin typeface="JetBrains Mono" panose="02000009000000000000" pitchFamily="49" charset="0"/>
+                <a:ea typeface="JetBrains Mono" panose="02000009000000000000" pitchFamily="49" charset="0"/>
+                <a:cs typeface="JetBrains Mono" panose="02000009000000000000" pitchFamily="49" charset="0"/>
+              </a:rPr>
+              <a:t>keybinds</a:t>
+            </a:r>
+            <a:br>
+              <a:rPr lang="en-GB" sz="1200" dirty="0">
+                <a:solidFill>
+                  <a:schemeClr val="bg1"/>
+                </a:solidFill>
+                <a:latin typeface="JetBrains Mono" panose="02000009000000000000" pitchFamily="49" charset="0"/>
+                <a:ea typeface="JetBrains Mono" panose="02000009000000000000" pitchFamily="49" charset="0"/>
+                <a:cs typeface="JetBrains Mono" panose="02000009000000000000" pitchFamily="49" charset="0"/>
+              </a:rPr>
+            </a:br>
+            <a:r>
+              <a:rPr lang="en-GB" sz="1200" dirty="0">
+                <a:solidFill>
+                  <a:schemeClr val="bg1"/>
+                </a:solidFill>
+                <a:latin typeface="JetBrains Mono" panose="02000009000000000000" pitchFamily="49" charset="0"/>
+                <a:ea typeface="JetBrains Mono" panose="02000009000000000000" pitchFamily="49" charset="0"/>
+                <a:cs typeface="JetBrains Mono" panose="02000009000000000000" pitchFamily="49" charset="0"/>
+              </a:rPr>
+              <a:t>Optional headless mode</a:t>
             </a:r>
           </a:p>
         </p:txBody>
@@ -4551,7 +4909,7 @@
     </p:spTree>
     <p:extLst>
       <p:ext uri="{BB962C8B-B14F-4D97-AF65-F5344CB8AC3E}">
-        <p14:creationId xmlns:p14="http://schemas.microsoft.com/office/powerpoint/2010/main" val="2289486543"/>
+        <p14:creationId xmlns:p14="http://schemas.microsoft.com/office/powerpoint/2010/main" val="1704127765"/>
       </p:ext>
     </p:extLst>
   </p:cSld>
@@ -4594,6 +4952,306 @@
       </p:grpSpPr>
       <p:sp>
         <p:nvSpPr>
+          <p:cNvPr id="15" name="Content Placeholder 3">
+            <a:extLst>
+              <a:ext uri="{FF2B5EF4-FFF2-40B4-BE49-F238E27FC236}">
+                <a16:creationId xmlns:a16="http://schemas.microsoft.com/office/drawing/2014/main" id="{798E5B9D-70CE-EE8A-CBC7-B7263AD4AB23}"/>
+              </a:ext>
+            </a:extLst>
+          </p:cNvPr>
+          <p:cNvSpPr txBox="1">
+            <a:spLocks/>
+          </p:cNvSpPr>
+          <p:nvPr/>
+        </p:nvSpPr>
+        <p:spPr>
+          <a:xfrm>
+            <a:off x="4498358" y="823641"/>
+            <a:ext cx="3195284" cy="2609850"/>
+          </a:xfrm>
+          <a:prstGeom prst="rect">
+            <a:avLst/>
+          </a:prstGeom>
+        </p:spPr>
+        <p:txBody>
+          <a:bodyPr vert="horz" lIns="91440" tIns="45720" rIns="91440" bIns="45720" rtlCol="0">
+            <a:normAutofit/>
+          </a:bodyPr>
+          <a:lstStyle>
+            <a:lvl1pPr marL="228600" indent="-228600" algn="l" defTabSz="914400" rtl="0" eaLnBrk="1" latinLnBrk="0" hangingPunct="1">
+              <a:lnSpc>
+                <a:spcPct val="90000"/>
+              </a:lnSpc>
+              <a:spcBef>
+                <a:spcPts val="1000"/>
+              </a:spcBef>
+              <a:buFont typeface="Arial" panose="020B0604020202020204" pitchFamily="34" charset="0"/>
+              <a:buChar char="•"/>
+              <a:defRPr sz="2800" kern="1200">
+                <a:solidFill>
+                  <a:schemeClr val="tx1"/>
+                </a:solidFill>
+                <a:latin typeface="+mn-lt"/>
+                <a:ea typeface="+mn-ea"/>
+                <a:cs typeface="+mn-cs"/>
+              </a:defRPr>
+            </a:lvl1pPr>
+            <a:lvl2pPr marL="685800" indent="-228600" algn="l" defTabSz="914400" rtl="0" eaLnBrk="1" latinLnBrk="0" hangingPunct="1">
+              <a:lnSpc>
+                <a:spcPct val="90000"/>
+              </a:lnSpc>
+              <a:spcBef>
+                <a:spcPts val="500"/>
+              </a:spcBef>
+              <a:buFont typeface="Arial" panose="020B0604020202020204" pitchFamily="34" charset="0"/>
+              <a:buChar char="•"/>
+              <a:defRPr sz="2400" kern="1200">
+                <a:solidFill>
+                  <a:schemeClr val="tx1"/>
+                </a:solidFill>
+                <a:latin typeface="+mn-lt"/>
+                <a:ea typeface="+mn-ea"/>
+                <a:cs typeface="+mn-cs"/>
+              </a:defRPr>
+            </a:lvl2pPr>
+            <a:lvl3pPr marL="1143000" indent="-228600" algn="l" defTabSz="914400" rtl="0" eaLnBrk="1" latinLnBrk="0" hangingPunct="1">
+              <a:lnSpc>
+                <a:spcPct val="90000"/>
+              </a:lnSpc>
+              <a:spcBef>
+                <a:spcPts val="500"/>
+              </a:spcBef>
+              <a:buFont typeface="Arial" panose="020B0604020202020204" pitchFamily="34" charset="0"/>
+              <a:buChar char="•"/>
+              <a:defRPr sz="2000" kern="1200">
+                <a:solidFill>
+                  <a:schemeClr val="tx1"/>
+                </a:solidFill>
+                <a:latin typeface="+mn-lt"/>
+                <a:ea typeface="+mn-ea"/>
+                <a:cs typeface="+mn-cs"/>
+              </a:defRPr>
+            </a:lvl3pPr>
+            <a:lvl4pPr marL="1600200" indent="-228600" algn="l" defTabSz="914400" rtl="0" eaLnBrk="1" latinLnBrk="0" hangingPunct="1">
+              <a:lnSpc>
+                <a:spcPct val="90000"/>
+              </a:lnSpc>
+              <a:spcBef>
+                <a:spcPts val="500"/>
+              </a:spcBef>
+              <a:buFont typeface="Arial" panose="020B0604020202020204" pitchFamily="34" charset="0"/>
+              <a:buChar char="•"/>
+              <a:defRPr sz="1800" kern="1200">
+                <a:solidFill>
+                  <a:schemeClr val="tx1"/>
+                </a:solidFill>
+                <a:latin typeface="+mn-lt"/>
+                <a:ea typeface="+mn-ea"/>
+                <a:cs typeface="+mn-cs"/>
+              </a:defRPr>
+            </a:lvl4pPr>
+            <a:lvl5pPr marL="2057400" indent="-228600" algn="l" defTabSz="914400" rtl="0" eaLnBrk="1" latinLnBrk="0" hangingPunct="1">
+              <a:lnSpc>
+                <a:spcPct val="90000"/>
+              </a:lnSpc>
+              <a:spcBef>
+                <a:spcPts val="500"/>
+              </a:spcBef>
+              <a:buFont typeface="Arial" panose="020B0604020202020204" pitchFamily="34" charset="0"/>
+              <a:buChar char="•"/>
+              <a:defRPr sz="1800" kern="1200">
+                <a:solidFill>
+                  <a:schemeClr val="tx1"/>
+                </a:solidFill>
+                <a:latin typeface="+mn-lt"/>
+                <a:ea typeface="+mn-ea"/>
+                <a:cs typeface="+mn-cs"/>
+              </a:defRPr>
+            </a:lvl5pPr>
+            <a:lvl6pPr marL="2514600" indent="-228600" algn="l" defTabSz="914400" rtl="0" eaLnBrk="1" latinLnBrk="0" hangingPunct="1">
+              <a:lnSpc>
+                <a:spcPct val="90000"/>
+              </a:lnSpc>
+              <a:spcBef>
+                <a:spcPts val="500"/>
+              </a:spcBef>
+              <a:buFont typeface="Arial" panose="020B0604020202020204" pitchFamily="34" charset="0"/>
+              <a:buChar char="•"/>
+              <a:defRPr sz="1800" kern="1200">
+                <a:solidFill>
+                  <a:schemeClr val="tx1"/>
+                </a:solidFill>
+                <a:latin typeface="+mn-lt"/>
+                <a:ea typeface="+mn-ea"/>
+                <a:cs typeface="+mn-cs"/>
+              </a:defRPr>
+            </a:lvl6pPr>
+            <a:lvl7pPr marL="2971800" indent="-228600" algn="l" defTabSz="914400" rtl="0" eaLnBrk="1" latinLnBrk="0" hangingPunct="1">
+              <a:lnSpc>
+                <a:spcPct val="90000"/>
+              </a:lnSpc>
+              <a:spcBef>
+                <a:spcPts val="500"/>
+              </a:spcBef>
+              <a:buFont typeface="Arial" panose="020B0604020202020204" pitchFamily="34" charset="0"/>
+              <a:buChar char="•"/>
+              <a:defRPr sz="1800" kern="1200">
+                <a:solidFill>
+                  <a:schemeClr val="tx1"/>
+                </a:solidFill>
+                <a:latin typeface="+mn-lt"/>
+                <a:ea typeface="+mn-ea"/>
+                <a:cs typeface="+mn-cs"/>
+              </a:defRPr>
+            </a:lvl7pPr>
+            <a:lvl8pPr marL="3429000" indent="-228600" algn="l" defTabSz="914400" rtl="0" eaLnBrk="1" latinLnBrk="0" hangingPunct="1">
+              <a:lnSpc>
+                <a:spcPct val="90000"/>
+              </a:lnSpc>
+              <a:spcBef>
+                <a:spcPts val="500"/>
+              </a:spcBef>
+              <a:buFont typeface="Arial" panose="020B0604020202020204" pitchFamily="34" charset="0"/>
+              <a:buChar char="•"/>
+              <a:defRPr sz="1800" kern="1200">
+                <a:solidFill>
+                  <a:schemeClr val="tx1"/>
+                </a:solidFill>
+                <a:latin typeface="+mn-lt"/>
+                <a:ea typeface="+mn-ea"/>
+                <a:cs typeface="+mn-cs"/>
+              </a:defRPr>
+            </a:lvl8pPr>
+            <a:lvl9pPr marL="3886200" indent="-228600" algn="l" defTabSz="914400" rtl="0" eaLnBrk="1" latinLnBrk="0" hangingPunct="1">
+              <a:lnSpc>
+                <a:spcPct val="90000"/>
+              </a:lnSpc>
+              <a:spcBef>
+                <a:spcPts val="500"/>
+              </a:spcBef>
+              <a:buFont typeface="Arial" panose="020B0604020202020204" pitchFamily="34" charset="0"/>
+              <a:buChar char="•"/>
+              <a:defRPr sz="1800" kern="1200">
+                <a:solidFill>
+                  <a:schemeClr val="tx1"/>
+                </a:solidFill>
+                <a:latin typeface="+mn-lt"/>
+                <a:ea typeface="+mn-ea"/>
+                <a:cs typeface="+mn-cs"/>
+              </a:defRPr>
+            </a:lvl9pPr>
+          </a:lstStyle>
+          <a:p>
+            <a:pPr marL="0" indent="0">
+              <a:lnSpc>
+                <a:spcPct val="100000"/>
+              </a:lnSpc>
+              <a:buFont typeface="Arial" panose="020B0604020202020204" pitchFamily="34" charset="0"/>
+              <a:buNone/>
+            </a:pPr>
+            <a:endParaRPr lang="en-GB" sz="1600" b="1" dirty="0">
+              <a:solidFill>
+                <a:schemeClr val="bg1"/>
+              </a:solidFill>
+              <a:latin typeface="JetBrains Mono" panose="02000009000000000000" pitchFamily="49" charset="0"/>
+              <a:ea typeface="JetBrains Mono" panose="02000009000000000000" pitchFamily="49" charset="0"/>
+              <a:cs typeface="JetBrains Mono" panose="02000009000000000000" pitchFamily="49" charset="0"/>
+            </a:endParaRPr>
+          </a:p>
+          <a:p>
+            <a:pPr marL="0" indent="0">
+              <a:lnSpc>
+                <a:spcPct val="100000"/>
+              </a:lnSpc>
+              <a:buFont typeface="Arial" panose="020B0604020202020204" pitchFamily="34" charset="0"/>
+              <a:buNone/>
+            </a:pPr>
+            <a:r>
+              <a:rPr lang="en-GB" sz="1600" b="1" dirty="0" err="1">
+                <a:solidFill>
+                  <a:schemeClr val="bg1"/>
+                </a:solidFill>
+                <a:latin typeface="JetBrains Mono" panose="02000009000000000000" pitchFamily="49" charset="0"/>
+                <a:ea typeface="JetBrains Mono" panose="02000009000000000000" pitchFamily="49" charset="0"/>
+                <a:cs typeface="JetBrains Mono" panose="02000009000000000000" pitchFamily="49" charset="0"/>
+              </a:rPr>
+              <a:t>saxpy</a:t>
+            </a:r>
+            <a:endParaRPr lang="en-GB" sz="1600" b="1" dirty="0">
+              <a:solidFill>
+                <a:schemeClr val="bg1"/>
+              </a:solidFill>
+              <a:latin typeface="JetBrains Mono" panose="02000009000000000000" pitchFamily="49" charset="0"/>
+              <a:ea typeface="JetBrains Mono" panose="02000009000000000000" pitchFamily="49" charset="0"/>
+              <a:cs typeface="JetBrains Mono" panose="02000009000000000000" pitchFamily="49" charset="0"/>
+            </a:endParaRPr>
+          </a:p>
+          <a:p>
+            <a:pPr marL="0" indent="0">
+              <a:lnSpc>
+                <a:spcPct val="100000"/>
+              </a:lnSpc>
+              <a:buFont typeface="Arial" panose="020B0604020202020204" pitchFamily="34" charset="0"/>
+              <a:buNone/>
+            </a:pPr>
+            <a:r>
+              <a:rPr lang="en-GB" sz="1200" dirty="0">
+                <a:solidFill>
+                  <a:schemeClr val="bg1"/>
+                </a:solidFill>
+                <a:latin typeface="JetBrains Mono" panose="02000009000000000000" pitchFamily="49" charset="0"/>
+                <a:ea typeface="JetBrains Mono" panose="02000009000000000000" pitchFamily="49" charset="0"/>
+                <a:cs typeface="JetBrains Mono" panose="02000009000000000000" pitchFamily="49" charset="0"/>
+              </a:rPr>
+              <a:t>Computes [y = </a:t>
+            </a:r>
+            <a:r>
+              <a:rPr lang="en-GB" sz="1200" dirty="0" err="1">
+                <a:solidFill>
+                  <a:schemeClr val="bg1"/>
+                </a:solidFill>
+                <a:latin typeface="JetBrains Mono" panose="02000009000000000000" pitchFamily="49" charset="0"/>
+                <a:ea typeface="JetBrains Mono" panose="02000009000000000000" pitchFamily="49" charset="0"/>
+                <a:cs typeface="JetBrains Mono" panose="02000009000000000000" pitchFamily="49" charset="0"/>
+              </a:rPr>
+              <a:t>ax</a:t>
+            </a:r>
+            <a:r>
+              <a:rPr lang="en-GB" sz="1200" dirty="0">
+                <a:solidFill>
+                  <a:schemeClr val="bg1"/>
+                </a:solidFill>
+                <a:latin typeface="JetBrains Mono" panose="02000009000000000000" pitchFamily="49" charset="0"/>
+                <a:ea typeface="JetBrains Mono" panose="02000009000000000000" pitchFamily="49" charset="0"/>
+                <a:cs typeface="JetBrains Mono" panose="02000009000000000000" pitchFamily="49" charset="0"/>
+              </a:rPr>
+              <a:t> + y] on two 1024-length 32-bit floating-point vectors. Stresses repeated fused multiply-add, load-store bandwidth and predictable loops.</a:t>
+            </a:r>
+          </a:p>
+          <a:p>
+            <a:pPr marL="0" indent="0">
+              <a:lnSpc>
+                <a:spcPct val="100000"/>
+              </a:lnSpc>
+              <a:buFont typeface="Arial" panose="020B0604020202020204" pitchFamily="34" charset="0"/>
+              <a:buNone/>
+            </a:pPr>
+            <a:r>
+              <a:rPr lang="en-GB" sz="1200" dirty="0">
+                <a:solidFill>
+                  <a:schemeClr val="bg1"/>
+                </a:solidFill>
+                <a:latin typeface="JetBrains Mono" panose="02000009000000000000" pitchFamily="49" charset="0"/>
+                <a:ea typeface="JetBrains Mono" panose="02000009000000000000" pitchFamily="49" charset="0"/>
+                <a:cs typeface="JetBrains Mono" panose="02000009000000000000" pitchFamily="49" charset="0"/>
+              </a:rPr>
+              <a:t>Vector variant tests repeated vector-float fused multiply-add.</a:t>
+            </a:r>
+          </a:p>
+        </p:txBody>
+      </p:sp>
+      <p:sp>
+        <p:nvSpPr>
           <p:cNvPr id="2" name="Title 1">
             <a:extLst>
               <a:ext uri="{FF2B5EF4-FFF2-40B4-BE49-F238E27FC236}">
@@ -4636,63 +5294,204 @@
       </p:sp>
       <p:sp>
         <p:nvSpPr>
-          <p:cNvPr id="4" name="Content Placeholder 3">
-            <a:extLst>
-              <a:ext uri="{FF2B5EF4-FFF2-40B4-BE49-F238E27FC236}">
-                <a16:creationId xmlns:a16="http://schemas.microsoft.com/office/drawing/2014/main" id="{35405747-EEE1-B666-0153-2F1562478381}"/>
-              </a:ext>
-            </a:extLst>
-          </p:cNvPr>
-          <p:cNvSpPr>
-            <a:spLocks noGrp="1"/>
+          <p:cNvPr id="3" name="Content Placeholder 3">
+            <a:extLst>
+              <a:ext uri="{FF2B5EF4-FFF2-40B4-BE49-F238E27FC236}">
+                <a16:creationId xmlns:a16="http://schemas.microsoft.com/office/drawing/2014/main" id="{925639CB-3167-CCE4-0D02-552CFDEFE079}"/>
+              </a:ext>
+            </a:extLst>
+          </p:cNvPr>
+          <p:cNvSpPr txBox="1">
+            <a:spLocks/>
           </p:cNvSpPr>
-          <p:nvPr>
-            <p:ph idx="1"/>
-          </p:nvPr>
+          <p:nvPr/>
         </p:nvSpPr>
         <p:spPr>
           <a:xfrm>
-            <a:off x="838200" y="819150"/>
-            <a:ext cx="10515600" cy="5357813"/>
+            <a:off x="838200" y="819151"/>
+            <a:ext cx="3195284" cy="2609850"/>
           </a:xfrm>
+          <a:prstGeom prst="rect">
+            <a:avLst/>
+          </a:prstGeom>
         </p:spPr>
         <p:txBody>
-          <a:bodyPr>
+          <a:bodyPr vert="horz" lIns="91440" tIns="45720" rIns="91440" bIns="45720" rtlCol="0">
             <a:normAutofit/>
           </a:bodyPr>
-          <a:lstStyle/>
+          <a:lstStyle>
+            <a:lvl1pPr marL="228600" indent="-228600" algn="l" defTabSz="914400" rtl="0" eaLnBrk="1" latinLnBrk="0" hangingPunct="1">
+              <a:lnSpc>
+                <a:spcPct val="90000"/>
+              </a:lnSpc>
+              <a:spcBef>
+                <a:spcPts val="1000"/>
+              </a:spcBef>
+              <a:buFont typeface="Arial" panose="020B0604020202020204" pitchFamily="34" charset="0"/>
+              <a:buChar char="•"/>
+              <a:defRPr sz="2800" kern="1200">
+                <a:solidFill>
+                  <a:schemeClr val="tx1"/>
+                </a:solidFill>
+                <a:latin typeface="+mn-lt"/>
+                <a:ea typeface="+mn-ea"/>
+                <a:cs typeface="+mn-cs"/>
+              </a:defRPr>
+            </a:lvl1pPr>
+            <a:lvl2pPr marL="685800" indent="-228600" algn="l" defTabSz="914400" rtl="0" eaLnBrk="1" latinLnBrk="0" hangingPunct="1">
+              <a:lnSpc>
+                <a:spcPct val="90000"/>
+              </a:lnSpc>
+              <a:spcBef>
+                <a:spcPts val="500"/>
+              </a:spcBef>
+              <a:buFont typeface="Arial" panose="020B0604020202020204" pitchFamily="34" charset="0"/>
+              <a:buChar char="•"/>
+              <a:defRPr sz="2400" kern="1200">
+                <a:solidFill>
+                  <a:schemeClr val="tx1"/>
+                </a:solidFill>
+                <a:latin typeface="+mn-lt"/>
+                <a:ea typeface="+mn-ea"/>
+                <a:cs typeface="+mn-cs"/>
+              </a:defRPr>
+            </a:lvl2pPr>
+            <a:lvl3pPr marL="1143000" indent="-228600" algn="l" defTabSz="914400" rtl="0" eaLnBrk="1" latinLnBrk="0" hangingPunct="1">
+              <a:lnSpc>
+                <a:spcPct val="90000"/>
+              </a:lnSpc>
+              <a:spcBef>
+                <a:spcPts val="500"/>
+              </a:spcBef>
+              <a:buFont typeface="Arial" panose="020B0604020202020204" pitchFamily="34" charset="0"/>
+              <a:buChar char="•"/>
+              <a:defRPr sz="2000" kern="1200">
+                <a:solidFill>
+                  <a:schemeClr val="tx1"/>
+                </a:solidFill>
+                <a:latin typeface="+mn-lt"/>
+                <a:ea typeface="+mn-ea"/>
+                <a:cs typeface="+mn-cs"/>
+              </a:defRPr>
+            </a:lvl3pPr>
+            <a:lvl4pPr marL="1600200" indent="-228600" algn="l" defTabSz="914400" rtl="0" eaLnBrk="1" latinLnBrk="0" hangingPunct="1">
+              <a:lnSpc>
+                <a:spcPct val="90000"/>
+              </a:lnSpc>
+              <a:spcBef>
+                <a:spcPts val="500"/>
+              </a:spcBef>
+              <a:buFont typeface="Arial" panose="020B0604020202020204" pitchFamily="34" charset="0"/>
+              <a:buChar char="•"/>
+              <a:defRPr sz="1800" kern="1200">
+                <a:solidFill>
+                  <a:schemeClr val="tx1"/>
+                </a:solidFill>
+                <a:latin typeface="+mn-lt"/>
+                <a:ea typeface="+mn-ea"/>
+                <a:cs typeface="+mn-cs"/>
+              </a:defRPr>
+            </a:lvl4pPr>
+            <a:lvl5pPr marL="2057400" indent="-228600" algn="l" defTabSz="914400" rtl="0" eaLnBrk="1" latinLnBrk="0" hangingPunct="1">
+              <a:lnSpc>
+                <a:spcPct val="90000"/>
+              </a:lnSpc>
+              <a:spcBef>
+                <a:spcPts val="500"/>
+              </a:spcBef>
+              <a:buFont typeface="Arial" panose="020B0604020202020204" pitchFamily="34" charset="0"/>
+              <a:buChar char="•"/>
+              <a:defRPr sz="1800" kern="1200">
+                <a:solidFill>
+                  <a:schemeClr val="tx1"/>
+                </a:solidFill>
+                <a:latin typeface="+mn-lt"/>
+                <a:ea typeface="+mn-ea"/>
+                <a:cs typeface="+mn-cs"/>
+              </a:defRPr>
+            </a:lvl5pPr>
+            <a:lvl6pPr marL="2514600" indent="-228600" algn="l" defTabSz="914400" rtl="0" eaLnBrk="1" latinLnBrk="0" hangingPunct="1">
+              <a:lnSpc>
+                <a:spcPct val="90000"/>
+              </a:lnSpc>
+              <a:spcBef>
+                <a:spcPts val="500"/>
+              </a:spcBef>
+              <a:buFont typeface="Arial" panose="020B0604020202020204" pitchFamily="34" charset="0"/>
+              <a:buChar char="•"/>
+              <a:defRPr sz="1800" kern="1200">
+                <a:solidFill>
+                  <a:schemeClr val="tx1"/>
+                </a:solidFill>
+                <a:latin typeface="+mn-lt"/>
+                <a:ea typeface="+mn-ea"/>
+                <a:cs typeface="+mn-cs"/>
+              </a:defRPr>
+            </a:lvl6pPr>
+            <a:lvl7pPr marL="2971800" indent="-228600" algn="l" defTabSz="914400" rtl="0" eaLnBrk="1" latinLnBrk="0" hangingPunct="1">
+              <a:lnSpc>
+                <a:spcPct val="90000"/>
+              </a:lnSpc>
+              <a:spcBef>
+                <a:spcPts val="500"/>
+              </a:spcBef>
+              <a:buFont typeface="Arial" panose="020B0604020202020204" pitchFamily="34" charset="0"/>
+              <a:buChar char="•"/>
+              <a:defRPr sz="1800" kern="1200">
+                <a:solidFill>
+                  <a:schemeClr val="tx1"/>
+                </a:solidFill>
+                <a:latin typeface="+mn-lt"/>
+                <a:ea typeface="+mn-ea"/>
+                <a:cs typeface="+mn-cs"/>
+              </a:defRPr>
+            </a:lvl7pPr>
+            <a:lvl8pPr marL="3429000" indent="-228600" algn="l" defTabSz="914400" rtl="0" eaLnBrk="1" latinLnBrk="0" hangingPunct="1">
+              <a:lnSpc>
+                <a:spcPct val="90000"/>
+              </a:lnSpc>
+              <a:spcBef>
+                <a:spcPts val="500"/>
+              </a:spcBef>
+              <a:buFont typeface="Arial" panose="020B0604020202020204" pitchFamily="34" charset="0"/>
+              <a:buChar char="•"/>
+              <a:defRPr sz="1800" kern="1200">
+                <a:solidFill>
+                  <a:schemeClr val="tx1"/>
+                </a:solidFill>
+                <a:latin typeface="+mn-lt"/>
+                <a:ea typeface="+mn-ea"/>
+                <a:cs typeface="+mn-cs"/>
+              </a:defRPr>
+            </a:lvl8pPr>
+            <a:lvl9pPr marL="3886200" indent="-228600" algn="l" defTabSz="914400" rtl="0" eaLnBrk="1" latinLnBrk="0" hangingPunct="1">
+              <a:lnSpc>
+                <a:spcPct val="90000"/>
+              </a:lnSpc>
+              <a:spcBef>
+                <a:spcPts val="500"/>
+              </a:spcBef>
+              <a:buFont typeface="Arial" panose="020B0604020202020204" pitchFamily="34" charset="0"/>
+              <a:buChar char="•"/>
+              <a:defRPr sz="1800" kern="1200">
+                <a:solidFill>
+                  <a:schemeClr val="tx1"/>
+                </a:solidFill>
+                <a:latin typeface="+mn-lt"/>
+                <a:ea typeface="+mn-ea"/>
+                <a:cs typeface="+mn-cs"/>
+              </a:defRPr>
+            </a:lvl9pPr>
+          </a:lstStyle>
           <a:p>
             <a:pPr marL="0" indent="0">
+              <a:lnSpc>
+                <a:spcPct val="100000"/>
+              </a:lnSpc>
+              <a:buFont typeface="Arial" panose="020B0604020202020204" pitchFamily="34" charset="0"/>
               <a:buNone/>
             </a:pPr>
-            <a:r>
-              <a:rPr lang="en-GB" sz="1600" dirty="0">
-                <a:solidFill>
-                  <a:schemeClr val="bg1"/>
-                </a:solidFill>
-                <a:latin typeface="JetBrains Mono" panose="02000009000000000000" pitchFamily="49" charset="0"/>
-                <a:ea typeface="JetBrains Mono" panose="02000009000000000000" pitchFamily="49" charset="0"/>
-                <a:cs typeface="JetBrains Mono" panose="02000009000000000000" pitchFamily="49" charset="0"/>
-              </a:rPr>
-              <a:t>dot product</a:t>
-            </a:r>
-          </a:p>
-          <a:p>
-            <a:pPr marL="0" indent="0">
-              <a:buNone/>
-            </a:pPr>
-            <a:r>
-              <a:rPr lang="en-GB" sz="1600" dirty="0" err="1">
-                <a:solidFill>
-                  <a:schemeClr val="bg1"/>
-                </a:solidFill>
-                <a:latin typeface="JetBrains Mono" panose="02000009000000000000" pitchFamily="49" charset="0"/>
-                <a:ea typeface="JetBrains Mono" panose="02000009000000000000" pitchFamily="49" charset="0"/>
-                <a:cs typeface="JetBrains Mono" panose="02000009000000000000" pitchFamily="49" charset="0"/>
-              </a:rPr>
-              <a:t>fibonacci</a:t>
-            </a:r>
-            <a:endParaRPr lang="en-GB" sz="1600" dirty="0">
+            <a:endParaRPr lang="en-GB" sz="1600" b="1" dirty="0">
               <a:solidFill>
                 <a:schemeClr val="bg1"/>
               </a:solidFill>
@@ -4703,36 +5502,265 @@
           </a:p>
           <a:p>
             <a:pPr marL="0" indent="0">
+              <a:lnSpc>
+                <a:spcPct val="100000"/>
+              </a:lnSpc>
+              <a:buFont typeface="Arial" panose="020B0604020202020204" pitchFamily="34" charset="0"/>
               <a:buNone/>
             </a:pPr>
             <a:r>
-              <a:rPr lang="en-GB" sz="1600" dirty="0">
-                <a:solidFill>
-                  <a:schemeClr val="bg1"/>
-                </a:solidFill>
-                <a:latin typeface="JetBrains Mono" panose="02000009000000000000" pitchFamily="49" charset="0"/>
-                <a:ea typeface="JetBrains Mono" panose="02000009000000000000" pitchFamily="49" charset="0"/>
-                <a:cs typeface="JetBrains Mono" panose="02000009000000000000" pitchFamily="49" charset="0"/>
-              </a:rPr>
-              <a:t>gaussian</a:t>
+              <a:rPr lang="en-GB" sz="1600" b="1" dirty="0">
+                <a:solidFill>
+                  <a:schemeClr val="bg1"/>
+                </a:solidFill>
+                <a:latin typeface="JetBrains Mono" panose="02000009000000000000" pitchFamily="49" charset="0"/>
+                <a:ea typeface="JetBrains Mono" panose="02000009000000000000" pitchFamily="49" charset="0"/>
+                <a:cs typeface="JetBrains Mono" panose="02000009000000000000" pitchFamily="49" charset="0"/>
+              </a:rPr>
+              <a:t>dot</a:t>
             </a:r>
           </a:p>
           <a:p>
             <a:pPr marL="0" indent="0">
+              <a:lnSpc>
+                <a:spcPct val="100000"/>
+              </a:lnSpc>
+              <a:buFont typeface="Arial" panose="020B0604020202020204" pitchFamily="34" charset="0"/>
               <a:buNone/>
             </a:pPr>
             <a:r>
-              <a:rPr lang="en-GB" sz="1600" dirty="0" err="1">
-                <a:solidFill>
-                  <a:schemeClr val="bg1"/>
-                </a:solidFill>
-                <a:latin typeface="JetBrains Mono" panose="02000009000000000000" pitchFamily="49" charset="0"/>
-                <a:ea typeface="JetBrains Mono" panose="02000009000000000000" pitchFamily="49" charset="0"/>
-                <a:cs typeface="JetBrains Mono" panose="02000009000000000000" pitchFamily="49" charset="0"/>
-              </a:rPr>
-              <a:t>matmul</a:t>
-            </a:r>
-            <a:endParaRPr lang="en-GB" sz="1600" dirty="0">
+              <a:rPr lang="en-GB" sz="1200" dirty="0">
+                <a:solidFill>
+                  <a:schemeClr val="bg1"/>
+                </a:solidFill>
+                <a:latin typeface="JetBrains Mono" panose="02000009000000000000" pitchFamily="49" charset="0"/>
+                <a:ea typeface="JetBrains Mono" panose="02000009000000000000" pitchFamily="49" charset="0"/>
+                <a:cs typeface="JetBrains Mono" panose="02000009000000000000" pitchFamily="49" charset="0"/>
+              </a:rPr>
+              <a:t>Performs the dot product of two 1024-length 32-bit integer vectors. Stresses ALU/MUL throughput, simple loop branch prediction, sequential loads.</a:t>
+            </a:r>
+          </a:p>
+          <a:p>
+            <a:pPr marL="0" indent="0">
+              <a:lnSpc>
+                <a:spcPct val="100000"/>
+              </a:lnSpc>
+              <a:buNone/>
+            </a:pPr>
+            <a:r>
+              <a:rPr lang="en-GB" sz="1200" dirty="0">
+                <a:solidFill>
+                  <a:schemeClr val="bg1"/>
+                </a:solidFill>
+                <a:latin typeface="JetBrains Mono" panose="02000009000000000000" pitchFamily="49" charset="0"/>
+                <a:ea typeface="JetBrains Mono" panose="02000009000000000000" pitchFamily="49" charset="0"/>
+                <a:cs typeface="JetBrains Mono" panose="02000009000000000000" pitchFamily="49" charset="0"/>
+              </a:rPr>
+              <a:t>Vector variant tests repeated vector-int multiply-accumulate and vector-int reduction.</a:t>
+            </a:r>
+          </a:p>
+        </p:txBody>
+      </p:sp>
+      <p:sp>
+        <p:nvSpPr>
+          <p:cNvPr id="7" name="Content Placeholder 3">
+            <a:extLst>
+              <a:ext uri="{FF2B5EF4-FFF2-40B4-BE49-F238E27FC236}">
+                <a16:creationId xmlns:a16="http://schemas.microsoft.com/office/drawing/2014/main" id="{339C5A52-001E-3FC1-10BC-303596B77907}"/>
+              </a:ext>
+            </a:extLst>
+          </p:cNvPr>
+          <p:cNvSpPr txBox="1">
+            <a:spLocks/>
+          </p:cNvSpPr>
+          <p:nvPr/>
+        </p:nvSpPr>
+        <p:spPr>
+          <a:xfrm>
+            <a:off x="8158516" y="3424509"/>
+            <a:ext cx="3195284" cy="2609850"/>
+          </a:xfrm>
+          <a:prstGeom prst="rect">
+            <a:avLst/>
+          </a:prstGeom>
+        </p:spPr>
+        <p:txBody>
+          <a:bodyPr vert="horz" lIns="91440" tIns="45720" rIns="91440" bIns="45720" rtlCol="0">
+            <a:normAutofit/>
+          </a:bodyPr>
+          <a:lstStyle>
+            <a:lvl1pPr marL="228600" indent="-228600" algn="l" defTabSz="914400" rtl="0" eaLnBrk="1" latinLnBrk="0" hangingPunct="1">
+              <a:lnSpc>
+                <a:spcPct val="90000"/>
+              </a:lnSpc>
+              <a:spcBef>
+                <a:spcPts val="1000"/>
+              </a:spcBef>
+              <a:buFont typeface="Arial" panose="020B0604020202020204" pitchFamily="34" charset="0"/>
+              <a:buChar char="•"/>
+              <a:defRPr sz="2800" kern="1200">
+                <a:solidFill>
+                  <a:schemeClr val="tx1"/>
+                </a:solidFill>
+                <a:latin typeface="+mn-lt"/>
+                <a:ea typeface="+mn-ea"/>
+                <a:cs typeface="+mn-cs"/>
+              </a:defRPr>
+            </a:lvl1pPr>
+            <a:lvl2pPr marL="685800" indent="-228600" algn="l" defTabSz="914400" rtl="0" eaLnBrk="1" latinLnBrk="0" hangingPunct="1">
+              <a:lnSpc>
+                <a:spcPct val="90000"/>
+              </a:lnSpc>
+              <a:spcBef>
+                <a:spcPts val="500"/>
+              </a:spcBef>
+              <a:buFont typeface="Arial" panose="020B0604020202020204" pitchFamily="34" charset="0"/>
+              <a:buChar char="•"/>
+              <a:defRPr sz="2400" kern="1200">
+                <a:solidFill>
+                  <a:schemeClr val="tx1"/>
+                </a:solidFill>
+                <a:latin typeface="+mn-lt"/>
+                <a:ea typeface="+mn-ea"/>
+                <a:cs typeface="+mn-cs"/>
+              </a:defRPr>
+            </a:lvl2pPr>
+            <a:lvl3pPr marL="1143000" indent="-228600" algn="l" defTabSz="914400" rtl="0" eaLnBrk="1" latinLnBrk="0" hangingPunct="1">
+              <a:lnSpc>
+                <a:spcPct val="90000"/>
+              </a:lnSpc>
+              <a:spcBef>
+                <a:spcPts val="500"/>
+              </a:spcBef>
+              <a:buFont typeface="Arial" panose="020B0604020202020204" pitchFamily="34" charset="0"/>
+              <a:buChar char="•"/>
+              <a:defRPr sz="2000" kern="1200">
+                <a:solidFill>
+                  <a:schemeClr val="tx1"/>
+                </a:solidFill>
+                <a:latin typeface="+mn-lt"/>
+                <a:ea typeface="+mn-ea"/>
+                <a:cs typeface="+mn-cs"/>
+              </a:defRPr>
+            </a:lvl3pPr>
+            <a:lvl4pPr marL="1600200" indent="-228600" algn="l" defTabSz="914400" rtl="0" eaLnBrk="1" latinLnBrk="0" hangingPunct="1">
+              <a:lnSpc>
+                <a:spcPct val="90000"/>
+              </a:lnSpc>
+              <a:spcBef>
+                <a:spcPts val="500"/>
+              </a:spcBef>
+              <a:buFont typeface="Arial" panose="020B0604020202020204" pitchFamily="34" charset="0"/>
+              <a:buChar char="•"/>
+              <a:defRPr sz="1800" kern="1200">
+                <a:solidFill>
+                  <a:schemeClr val="tx1"/>
+                </a:solidFill>
+                <a:latin typeface="+mn-lt"/>
+                <a:ea typeface="+mn-ea"/>
+                <a:cs typeface="+mn-cs"/>
+              </a:defRPr>
+            </a:lvl4pPr>
+            <a:lvl5pPr marL="2057400" indent="-228600" algn="l" defTabSz="914400" rtl="0" eaLnBrk="1" latinLnBrk="0" hangingPunct="1">
+              <a:lnSpc>
+                <a:spcPct val="90000"/>
+              </a:lnSpc>
+              <a:spcBef>
+                <a:spcPts val="500"/>
+              </a:spcBef>
+              <a:buFont typeface="Arial" panose="020B0604020202020204" pitchFamily="34" charset="0"/>
+              <a:buChar char="•"/>
+              <a:defRPr sz="1800" kern="1200">
+                <a:solidFill>
+                  <a:schemeClr val="tx1"/>
+                </a:solidFill>
+                <a:latin typeface="+mn-lt"/>
+                <a:ea typeface="+mn-ea"/>
+                <a:cs typeface="+mn-cs"/>
+              </a:defRPr>
+            </a:lvl5pPr>
+            <a:lvl6pPr marL="2514600" indent="-228600" algn="l" defTabSz="914400" rtl="0" eaLnBrk="1" latinLnBrk="0" hangingPunct="1">
+              <a:lnSpc>
+                <a:spcPct val="90000"/>
+              </a:lnSpc>
+              <a:spcBef>
+                <a:spcPts val="500"/>
+              </a:spcBef>
+              <a:buFont typeface="Arial" panose="020B0604020202020204" pitchFamily="34" charset="0"/>
+              <a:buChar char="•"/>
+              <a:defRPr sz="1800" kern="1200">
+                <a:solidFill>
+                  <a:schemeClr val="tx1"/>
+                </a:solidFill>
+                <a:latin typeface="+mn-lt"/>
+                <a:ea typeface="+mn-ea"/>
+                <a:cs typeface="+mn-cs"/>
+              </a:defRPr>
+            </a:lvl6pPr>
+            <a:lvl7pPr marL="2971800" indent="-228600" algn="l" defTabSz="914400" rtl="0" eaLnBrk="1" latinLnBrk="0" hangingPunct="1">
+              <a:lnSpc>
+                <a:spcPct val="90000"/>
+              </a:lnSpc>
+              <a:spcBef>
+                <a:spcPts val="500"/>
+              </a:spcBef>
+              <a:buFont typeface="Arial" panose="020B0604020202020204" pitchFamily="34" charset="0"/>
+              <a:buChar char="•"/>
+              <a:defRPr sz="1800" kern="1200">
+                <a:solidFill>
+                  <a:schemeClr val="tx1"/>
+                </a:solidFill>
+                <a:latin typeface="+mn-lt"/>
+                <a:ea typeface="+mn-ea"/>
+                <a:cs typeface="+mn-cs"/>
+              </a:defRPr>
+            </a:lvl7pPr>
+            <a:lvl8pPr marL="3429000" indent="-228600" algn="l" defTabSz="914400" rtl="0" eaLnBrk="1" latinLnBrk="0" hangingPunct="1">
+              <a:lnSpc>
+                <a:spcPct val="90000"/>
+              </a:lnSpc>
+              <a:spcBef>
+                <a:spcPts val="500"/>
+              </a:spcBef>
+              <a:buFont typeface="Arial" panose="020B0604020202020204" pitchFamily="34" charset="0"/>
+              <a:buChar char="•"/>
+              <a:defRPr sz="1800" kern="1200">
+                <a:solidFill>
+                  <a:schemeClr val="tx1"/>
+                </a:solidFill>
+                <a:latin typeface="+mn-lt"/>
+                <a:ea typeface="+mn-ea"/>
+                <a:cs typeface="+mn-cs"/>
+              </a:defRPr>
+            </a:lvl8pPr>
+            <a:lvl9pPr marL="3886200" indent="-228600" algn="l" defTabSz="914400" rtl="0" eaLnBrk="1" latinLnBrk="0" hangingPunct="1">
+              <a:lnSpc>
+                <a:spcPct val="90000"/>
+              </a:lnSpc>
+              <a:spcBef>
+                <a:spcPts val="500"/>
+              </a:spcBef>
+              <a:buFont typeface="Arial" panose="020B0604020202020204" pitchFamily="34" charset="0"/>
+              <a:buChar char="•"/>
+              <a:defRPr sz="1800" kern="1200">
+                <a:solidFill>
+                  <a:schemeClr val="tx1"/>
+                </a:solidFill>
+                <a:latin typeface="+mn-lt"/>
+                <a:ea typeface="+mn-ea"/>
+                <a:cs typeface="+mn-cs"/>
+              </a:defRPr>
+            </a:lvl9pPr>
+          </a:lstStyle>
+          <a:p>
+            <a:pPr marL="0" indent="0">
+              <a:lnSpc>
+                <a:spcPct val="100000"/>
+              </a:lnSpc>
+              <a:buFont typeface="Arial" panose="020B0604020202020204" pitchFamily="34" charset="0"/>
+              <a:buNone/>
+            </a:pPr>
+            <a:endParaRPr lang="en-GB" sz="1600" b="1" dirty="0">
               <a:solidFill>
                 <a:schemeClr val="bg1"/>
               </a:solidFill>
@@ -4743,36 +5771,24 @@
           </a:p>
           <a:p>
             <a:pPr marL="0" indent="0">
+              <a:lnSpc>
+                <a:spcPct val="100000"/>
+              </a:lnSpc>
+              <a:buFont typeface="Arial" panose="020B0604020202020204" pitchFamily="34" charset="0"/>
               <a:buNone/>
             </a:pPr>
             <a:r>
-              <a:rPr lang="en-GB" sz="1600" dirty="0">
-                <a:solidFill>
-                  <a:schemeClr val="bg1"/>
-                </a:solidFill>
-                <a:latin typeface="JetBrains Mono" panose="02000009000000000000" pitchFamily="49" charset="0"/>
-                <a:ea typeface="JetBrains Mono" panose="02000009000000000000" pitchFamily="49" charset="0"/>
-                <a:cs typeface="JetBrains Mono" panose="02000009000000000000" pitchFamily="49" charset="0"/>
-              </a:rPr>
-              <a:t>quicksort</a:t>
-            </a:r>
-          </a:p>
-          <a:p>
-            <a:pPr marL="0" indent="0">
-              <a:buNone/>
-            </a:pPr>
-            <a:r>
-              <a:rPr lang="en-GB" sz="1600" dirty="0" err="1">
-                <a:solidFill>
-                  <a:schemeClr val="bg1"/>
-                </a:solidFill>
-                <a:latin typeface="JetBrains Mono" panose="02000009000000000000" pitchFamily="49" charset="0"/>
-                <a:ea typeface="JetBrains Mono" panose="02000009000000000000" pitchFamily="49" charset="0"/>
-                <a:cs typeface="JetBrains Mono" panose="02000009000000000000" pitchFamily="49" charset="0"/>
-              </a:rPr>
-              <a:t>saxpy</a:t>
-            </a:r>
-            <a:endParaRPr lang="en-GB" sz="1600" dirty="0">
+              <a:rPr lang="en-GB" sz="1600" b="1" dirty="0" err="1">
+                <a:solidFill>
+                  <a:schemeClr val="bg1"/>
+                </a:solidFill>
+                <a:latin typeface="JetBrains Mono" panose="02000009000000000000" pitchFamily="49" charset="0"/>
+                <a:ea typeface="JetBrains Mono" panose="02000009000000000000" pitchFamily="49" charset="0"/>
+                <a:cs typeface="JetBrains Mono" panose="02000009000000000000" pitchFamily="49" charset="0"/>
+              </a:rPr>
+              <a:t>fibonacci</a:t>
+            </a:r>
+            <a:endParaRPr lang="en-GB" sz="1600" b="1" dirty="0">
               <a:solidFill>
                 <a:schemeClr val="bg1"/>
               </a:solidFill>
@@ -4780,6 +5796,867 @@
               <a:ea typeface="JetBrains Mono" panose="02000009000000000000" pitchFamily="49" charset="0"/>
               <a:cs typeface="JetBrains Mono" panose="02000009000000000000" pitchFamily="49" charset="0"/>
             </a:endParaRPr>
+          </a:p>
+          <a:p>
+            <a:pPr marL="0" indent="0">
+              <a:lnSpc>
+                <a:spcPct val="100000"/>
+              </a:lnSpc>
+              <a:buFont typeface="Arial" panose="020B0604020202020204" pitchFamily="34" charset="0"/>
+              <a:buNone/>
+            </a:pPr>
+            <a:r>
+              <a:rPr lang="en-GB" sz="1200" dirty="0">
+                <a:solidFill>
+                  <a:schemeClr val="bg1"/>
+                </a:solidFill>
+                <a:latin typeface="JetBrains Mono" panose="02000009000000000000" pitchFamily="49" charset="0"/>
+                <a:ea typeface="JetBrains Mono" panose="02000009000000000000" pitchFamily="49" charset="0"/>
+                <a:cs typeface="JetBrains Mono" panose="02000009000000000000" pitchFamily="49" charset="0"/>
+              </a:rPr>
+              <a:t>Recursively calculates the 14</a:t>
+            </a:r>
+            <a:r>
+              <a:rPr lang="en-GB" sz="1200" baseline="30000" dirty="0">
+                <a:solidFill>
+                  <a:schemeClr val="bg1"/>
+                </a:solidFill>
+                <a:latin typeface="JetBrains Mono" panose="02000009000000000000" pitchFamily="49" charset="0"/>
+                <a:ea typeface="JetBrains Mono" panose="02000009000000000000" pitchFamily="49" charset="0"/>
+                <a:cs typeface="JetBrains Mono" panose="02000009000000000000" pitchFamily="49" charset="0"/>
+              </a:rPr>
+              <a:t>th</a:t>
+            </a:r>
+            <a:r>
+              <a:rPr lang="en-GB" sz="1200" dirty="0">
+                <a:solidFill>
+                  <a:schemeClr val="bg1"/>
+                </a:solidFill>
+                <a:latin typeface="JetBrains Mono" panose="02000009000000000000" pitchFamily="49" charset="0"/>
+                <a:ea typeface="JetBrains Mono" panose="02000009000000000000" pitchFamily="49" charset="0"/>
+                <a:cs typeface="JetBrains Mono" panose="02000009000000000000" pitchFamily="49" charset="0"/>
+              </a:rPr>
+              <a:t> Fibonacci number. Stresses branch prediction, function call overhead, and pipeline stalling.</a:t>
+            </a:r>
+          </a:p>
+        </p:txBody>
+      </p:sp>
+      <p:sp>
+        <p:nvSpPr>
+          <p:cNvPr id="8" name="Content Placeholder 3">
+            <a:extLst>
+              <a:ext uri="{FF2B5EF4-FFF2-40B4-BE49-F238E27FC236}">
+                <a16:creationId xmlns:a16="http://schemas.microsoft.com/office/drawing/2014/main" id="{F98179BD-B552-6373-4452-F0A5E663E46F}"/>
+              </a:ext>
+            </a:extLst>
+          </p:cNvPr>
+          <p:cNvSpPr txBox="1">
+            <a:spLocks/>
+          </p:cNvSpPr>
+          <p:nvPr/>
+        </p:nvSpPr>
+        <p:spPr>
+          <a:xfrm>
+            <a:off x="8158516" y="823641"/>
+            <a:ext cx="3195284" cy="2609850"/>
+          </a:xfrm>
+          <a:prstGeom prst="rect">
+            <a:avLst/>
+          </a:prstGeom>
+        </p:spPr>
+        <p:txBody>
+          <a:bodyPr vert="horz" lIns="91440" tIns="45720" rIns="91440" bIns="45720" rtlCol="0">
+            <a:normAutofit/>
+          </a:bodyPr>
+          <a:lstStyle>
+            <a:lvl1pPr marL="228600" indent="-228600" algn="l" defTabSz="914400" rtl="0" eaLnBrk="1" latinLnBrk="0" hangingPunct="1">
+              <a:lnSpc>
+                <a:spcPct val="90000"/>
+              </a:lnSpc>
+              <a:spcBef>
+                <a:spcPts val="1000"/>
+              </a:spcBef>
+              <a:buFont typeface="Arial" panose="020B0604020202020204" pitchFamily="34" charset="0"/>
+              <a:buChar char="•"/>
+              <a:defRPr sz="2800" kern="1200">
+                <a:solidFill>
+                  <a:schemeClr val="tx1"/>
+                </a:solidFill>
+                <a:latin typeface="+mn-lt"/>
+                <a:ea typeface="+mn-ea"/>
+                <a:cs typeface="+mn-cs"/>
+              </a:defRPr>
+            </a:lvl1pPr>
+            <a:lvl2pPr marL="685800" indent="-228600" algn="l" defTabSz="914400" rtl="0" eaLnBrk="1" latinLnBrk="0" hangingPunct="1">
+              <a:lnSpc>
+                <a:spcPct val="90000"/>
+              </a:lnSpc>
+              <a:spcBef>
+                <a:spcPts val="500"/>
+              </a:spcBef>
+              <a:buFont typeface="Arial" panose="020B0604020202020204" pitchFamily="34" charset="0"/>
+              <a:buChar char="•"/>
+              <a:defRPr sz="2400" kern="1200">
+                <a:solidFill>
+                  <a:schemeClr val="tx1"/>
+                </a:solidFill>
+                <a:latin typeface="+mn-lt"/>
+                <a:ea typeface="+mn-ea"/>
+                <a:cs typeface="+mn-cs"/>
+              </a:defRPr>
+            </a:lvl2pPr>
+            <a:lvl3pPr marL="1143000" indent="-228600" algn="l" defTabSz="914400" rtl="0" eaLnBrk="1" latinLnBrk="0" hangingPunct="1">
+              <a:lnSpc>
+                <a:spcPct val="90000"/>
+              </a:lnSpc>
+              <a:spcBef>
+                <a:spcPts val="500"/>
+              </a:spcBef>
+              <a:buFont typeface="Arial" panose="020B0604020202020204" pitchFamily="34" charset="0"/>
+              <a:buChar char="•"/>
+              <a:defRPr sz="2000" kern="1200">
+                <a:solidFill>
+                  <a:schemeClr val="tx1"/>
+                </a:solidFill>
+                <a:latin typeface="+mn-lt"/>
+                <a:ea typeface="+mn-ea"/>
+                <a:cs typeface="+mn-cs"/>
+              </a:defRPr>
+            </a:lvl3pPr>
+            <a:lvl4pPr marL="1600200" indent="-228600" algn="l" defTabSz="914400" rtl="0" eaLnBrk="1" latinLnBrk="0" hangingPunct="1">
+              <a:lnSpc>
+                <a:spcPct val="90000"/>
+              </a:lnSpc>
+              <a:spcBef>
+                <a:spcPts val="500"/>
+              </a:spcBef>
+              <a:buFont typeface="Arial" panose="020B0604020202020204" pitchFamily="34" charset="0"/>
+              <a:buChar char="•"/>
+              <a:defRPr sz="1800" kern="1200">
+                <a:solidFill>
+                  <a:schemeClr val="tx1"/>
+                </a:solidFill>
+                <a:latin typeface="+mn-lt"/>
+                <a:ea typeface="+mn-ea"/>
+                <a:cs typeface="+mn-cs"/>
+              </a:defRPr>
+            </a:lvl4pPr>
+            <a:lvl5pPr marL="2057400" indent="-228600" algn="l" defTabSz="914400" rtl="0" eaLnBrk="1" latinLnBrk="0" hangingPunct="1">
+              <a:lnSpc>
+                <a:spcPct val="90000"/>
+              </a:lnSpc>
+              <a:spcBef>
+                <a:spcPts val="500"/>
+              </a:spcBef>
+              <a:buFont typeface="Arial" panose="020B0604020202020204" pitchFamily="34" charset="0"/>
+              <a:buChar char="•"/>
+              <a:defRPr sz="1800" kern="1200">
+                <a:solidFill>
+                  <a:schemeClr val="tx1"/>
+                </a:solidFill>
+                <a:latin typeface="+mn-lt"/>
+                <a:ea typeface="+mn-ea"/>
+                <a:cs typeface="+mn-cs"/>
+              </a:defRPr>
+            </a:lvl5pPr>
+            <a:lvl6pPr marL="2514600" indent="-228600" algn="l" defTabSz="914400" rtl="0" eaLnBrk="1" latinLnBrk="0" hangingPunct="1">
+              <a:lnSpc>
+                <a:spcPct val="90000"/>
+              </a:lnSpc>
+              <a:spcBef>
+                <a:spcPts val="500"/>
+              </a:spcBef>
+              <a:buFont typeface="Arial" panose="020B0604020202020204" pitchFamily="34" charset="0"/>
+              <a:buChar char="•"/>
+              <a:defRPr sz="1800" kern="1200">
+                <a:solidFill>
+                  <a:schemeClr val="tx1"/>
+                </a:solidFill>
+                <a:latin typeface="+mn-lt"/>
+                <a:ea typeface="+mn-ea"/>
+                <a:cs typeface="+mn-cs"/>
+              </a:defRPr>
+            </a:lvl6pPr>
+            <a:lvl7pPr marL="2971800" indent="-228600" algn="l" defTabSz="914400" rtl="0" eaLnBrk="1" latinLnBrk="0" hangingPunct="1">
+              <a:lnSpc>
+                <a:spcPct val="90000"/>
+              </a:lnSpc>
+              <a:spcBef>
+                <a:spcPts val="500"/>
+              </a:spcBef>
+              <a:buFont typeface="Arial" panose="020B0604020202020204" pitchFamily="34" charset="0"/>
+              <a:buChar char="•"/>
+              <a:defRPr sz="1800" kern="1200">
+                <a:solidFill>
+                  <a:schemeClr val="tx1"/>
+                </a:solidFill>
+                <a:latin typeface="+mn-lt"/>
+                <a:ea typeface="+mn-ea"/>
+                <a:cs typeface="+mn-cs"/>
+              </a:defRPr>
+            </a:lvl7pPr>
+            <a:lvl8pPr marL="3429000" indent="-228600" algn="l" defTabSz="914400" rtl="0" eaLnBrk="1" latinLnBrk="0" hangingPunct="1">
+              <a:lnSpc>
+                <a:spcPct val="90000"/>
+              </a:lnSpc>
+              <a:spcBef>
+                <a:spcPts val="500"/>
+              </a:spcBef>
+              <a:buFont typeface="Arial" panose="020B0604020202020204" pitchFamily="34" charset="0"/>
+              <a:buChar char="•"/>
+              <a:defRPr sz="1800" kern="1200">
+                <a:solidFill>
+                  <a:schemeClr val="tx1"/>
+                </a:solidFill>
+                <a:latin typeface="+mn-lt"/>
+                <a:ea typeface="+mn-ea"/>
+                <a:cs typeface="+mn-cs"/>
+              </a:defRPr>
+            </a:lvl8pPr>
+            <a:lvl9pPr marL="3886200" indent="-228600" algn="l" defTabSz="914400" rtl="0" eaLnBrk="1" latinLnBrk="0" hangingPunct="1">
+              <a:lnSpc>
+                <a:spcPct val="90000"/>
+              </a:lnSpc>
+              <a:spcBef>
+                <a:spcPts val="500"/>
+              </a:spcBef>
+              <a:buFont typeface="Arial" panose="020B0604020202020204" pitchFamily="34" charset="0"/>
+              <a:buChar char="•"/>
+              <a:defRPr sz="1800" kern="1200">
+                <a:solidFill>
+                  <a:schemeClr val="tx1"/>
+                </a:solidFill>
+                <a:latin typeface="+mn-lt"/>
+                <a:ea typeface="+mn-ea"/>
+                <a:cs typeface="+mn-cs"/>
+              </a:defRPr>
+            </a:lvl9pPr>
+          </a:lstStyle>
+          <a:p>
+            <a:pPr marL="0" indent="0">
+              <a:lnSpc>
+                <a:spcPct val="100000"/>
+              </a:lnSpc>
+              <a:buFont typeface="Arial" panose="020B0604020202020204" pitchFamily="34" charset="0"/>
+              <a:buNone/>
+            </a:pPr>
+            <a:endParaRPr lang="en-GB" sz="1600" b="1" dirty="0">
+              <a:solidFill>
+                <a:schemeClr val="bg1"/>
+              </a:solidFill>
+              <a:latin typeface="JetBrains Mono" panose="02000009000000000000" pitchFamily="49" charset="0"/>
+              <a:ea typeface="JetBrains Mono" panose="02000009000000000000" pitchFamily="49" charset="0"/>
+              <a:cs typeface="JetBrains Mono" panose="02000009000000000000" pitchFamily="49" charset="0"/>
+            </a:endParaRPr>
+          </a:p>
+          <a:p>
+            <a:pPr marL="0" indent="0">
+              <a:lnSpc>
+                <a:spcPct val="100000"/>
+              </a:lnSpc>
+              <a:buFont typeface="Arial" panose="020B0604020202020204" pitchFamily="34" charset="0"/>
+              <a:buNone/>
+            </a:pPr>
+            <a:r>
+              <a:rPr lang="en-GB" sz="1600" b="1" dirty="0">
+                <a:solidFill>
+                  <a:schemeClr val="bg1"/>
+                </a:solidFill>
+                <a:latin typeface="JetBrains Mono" panose="02000009000000000000" pitchFamily="49" charset="0"/>
+                <a:ea typeface="JetBrains Mono" panose="02000009000000000000" pitchFamily="49" charset="0"/>
+                <a:cs typeface="JetBrains Mono" panose="02000009000000000000" pitchFamily="49" charset="0"/>
+              </a:rPr>
+              <a:t>gaussian</a:t>
+            </a:r>
+          </a:p>
+          <a:p>
+            <a:pPr marL="0" indent="0">
+              <a:lnSpc>
+                <a:spcPct val="100000"/>
+              </a:lnSpc>
+              <a:buFont typeface="Arial" panose="020B0604020202020204" pitchFamily="34" charset="0"/>
+              <a:buNone/>
+            </a:pPr>
+            <a:r>
+              <a:rPr lang="en-GB" sz="1200" dirty="0">
+                <a:solidFill>
+                  <a:schemeClr val="bg1"/>
+                </a:solidFill>
+                <a:latin typeface="JetBrains Mono" panose="02000009000000000000" pitchFamily="49" charset="0"/>
+                <a:ea typeface="JetBrains Mono" panose="02000009000000000000" pitchFamily="49" charset="0"/>
+                <a:cs typeface="JetBrains Mono" panose="02000009000000000000" pitchFamily="49" charset="0"/>
+              </a:rPr>
+              <a:t>Performs 3x3 convolution over an 18x18 32-bit floating-point matrix. Stresses nested loops, floating-point accumulation and structured memory access.</a:t>
+            </a:r>
+          </a:p>
+          <a:p>
+            <a:pPr marL="0" indent="0">
+              <a:lnSpc>
+                <a:spcPct val="100000"/>
+              </a:lnSpc>
+              <a:buFont typeface="Arial" panose="020B0604020202020204" pitchFamily="34" charset="0"/>
+              <a:buNone/>
+            </a:pPr>
+            <a:r>
+              <a:rPr lang="en-GB" sz="1200" dirty="0">
+                <a:solidFill>
+                  <a:schemeClr val="bg1"/>
+                </a:solidFill>
+                <a:latin typeface="JetBrains Mono" panose="02000009000000000000" pitchFamily="49" charset="0"/>
+                <a:ea typeface="JetBrains Mono" panose="02000009000000000000" pitchFamily="49" charset="0"/>
+                <a:cs typeface="JetBrains Mono" panose="02000009000000000000" pitchFamily="49" charset="0"/>
+              </a:rPr>
+              <a:t>Vector variant tests repeated convolution style vector-float multiply-accumulate operations.</a:t>
+            </a:r>
+          </a:p>
+        </p:txBody>
+      </p:sp>
+      <p:sp>
+        <p:nvSpPr>
+          <p:cNvPr id="9" name="Content Placeholder 3">
+            <a:extLst>
+              <a:ext uri="{FF2B5EF4-FFF2-40B4-BE49-F238E27FC236}">
+                <a16:creationId xmlns:a16="http://schemas.microsoft.com/office/drawing/2014/main" id="{C15D4F59-C75E-0A5E-8344-7D666C146494}"/>
+              </a:ext>
+            </a:extLst>
+          </p:cNvPr>
+          <p:cNvSpPr txBox="1">
+            <a:spLocks/>
+          </p:cNvSpPr>
+          <p:nvPr/>
+        </p:nvSpPr>
+        <p:spPr>
+          <a:xfrm>
+            <a:off x="838200" y="3424509"/>
+            <a:ext cx="3195284" cy="2609850"/>
+          </a:xfrm>
+          <a:prstGeom prst="rect">
+            <a:avLst/>
+          </a:prstGeom>
+        </p:spPr>
+        <p:txBody>
+          <a:bodyPr vert="horz" lIns="91440" tIns="45720" rIns="91440" bIns="45720" rtlCol="0">
+            <a:normAutofit/>
+          </a:bodyPr>
+          <a:lstStyle>
+            <a:lvl1pPr marL="228600" indent="-228600" algn="l" defTabSz="914400" rtl="0" eaLnBrk="1" latinLnBrk="0" hangingPunct="1">
+              <a:lnSpc>
+                <a:spcPct val="90000"/>
+              </a:lnSpc>
+              <a:spcBef>
+                <a:spcPts val="1000"/>
+              </a:spcBef>
+              <a:buFont typeface="Arial" panose="020B0604020202020204" pitchFamily="34" charset="0"/>
+              <a:buChar char="•"/>
+              <a:defRPr sz="2800" kern="1200">
+                <a:solidFill>
+                  <a:schemeClr val="tx1"/>
+                </a:solidFill>
+                <a:latin typeface="+mn-lt"/>
+                <a:ea typeface="+mn-ea"/>
+                <a:cs typeface="+mn-cs"/>
+              </a:defRPr>
+            </a:lvl1pPr>
+            <a:lvl2pPr marL="685800" indent="-228600" algn="l" defTabSz="914400" rtl="0" eaLnBrk="1" latinLnBrk="0" hangingPunct="1">
+              <a:lnSpc>
+                <a:spcPct val="90000"/>
+              </a:lnSpc>
+              <a:spcBef>
+                <a:spcPts val="500"/>
+              </a:spcBef>
+              <a:buFont typeface="Arial" panose="020B0604020202020204" pitchFamily="34" charset="0"/>
+              <a:buChar char="•"/>
+              <a:defRPr sz="2400" kern="1200">
+                <a:solidFill>
+                  <a:schemeClr val="tx1"/>
+                </a:solidFill>
+                <a:latin typeface="+mn-lt"/>
+                <a:ea typeface="+mn-ea"/>
+                <a:cs typeface="+mn-cs"/>
+              </a:defRPr>
+            </a:lvl2pPr>
+            <a:lvl3pPr marL="1143000" indent="-228600" algn="l" defTabSz="914400" rtl="0" eaLnBrk="1" latinLnBrk="0" hangingPunct="1">
+              <a:lnSpc>
+                <a:spcPct val="90000"/>
+              </a:lnSpc>
+              <a:spcBef>
+                <a:spcPts val="500"/>
+              </a:spcBef>
+              <a:buFont typeface="Arial" panose="020B0604020202020204" pitchFamily="34" charset="0"/>
+              <a:buChar char="•"/>
+              <a:defRPr sz="2000" kern="1200">
+                <a:solidFill>
+                  <a:schemeClr val="tx1"/>
+                </a:solidFill>
+                <a:latin typeface="+mn-lt"/>
+                <a:ea typeface="+mn-ea"/>
+                <a:cs typeface="+mn-cs"/>
+              </a:defRPr>
+            </a:lvl3pPr>
+            <a:lvl4pPr marL="1600200" indent="-228600" algn="l" defTabSz="914400" rtl="0" eaLnBrk="1" latinLnBrk="0" hangingPunct="1">
+              <a:lnSpc>
+                <a:spcPct val="90000"/>
+              </a:lnSpc>
+              <a:spcBef>
+                <a:spcPts val="500"/>
+              </a:spcBef>
+              <a:buFont typeface="Arial" panose="020B0604020202020204" pitchFamily="34" charset="0"/>
+              <a:buChar char="•"/>
+              <a:defRPr sz="1800" kern="1200">
+                <a:solidFill>
+                  <a:schemeClr val="tx1"/>
+                </a:solidFill>
+                <a:latin typeface="+mn-lt"/>
+                <a:ea typeface="+mn-ea"/>
+                <a:cs typeface="+mn-cs"/>
+              </a:defRPr>
+            </a:lvl4pPr>
+            <a:lvl5pPr marL="2057400" indent="-228600" algn="l" defTabSz="914400" rtl="0" eaLnBrk="1" latinLnBrk="0" hangingPunct="1">
+              <a:lnSpc>
+                <a:spcPct val="90000"/>
+              </a:lnSpc>
+              <a:spcBef>
+                <a:spcPts val="500"/>
+              </a:spcBef>
+              <a:buFont typeface="Arial" panose="020B0604020202020204" pitchFamily="34" charset="0"/>
+              <a:buChar char="•"/>
+              <a:defRPr sz="1800" kern="1200">
+                <a:solidFill>
+                  <a:schemeClr val="tx1"/>
+                </a:solidFill>
+                <a:latin typeface="+mn-lt"/>
+                <a:ea typeface="+mn-ea"/>
+                <a:cs typeface="+mn-cs"/>
+              </a:defRPr>
+            </a:lvl5pPr>
+            <a:lvl6pPr marL="2514600" indent="-228600" algn="l" defTabSz="914400" rtl="0" eaLnBrk="1" latinLnBrk="0" hangingPunct="1">
+              <a:lnSpc>
+                <a:spcPct val="90000"/>
+              </a:lnSpc>
+              <a:spcBef>
+                <a:spcPts val="500"/>
+              </a:spcBef>
+              <a:buFont typeface="Arial" panose="020B0604020202020204" pitchFamily="34" charset="0"/>
+              <a:buChar char="•"/>
+              <a:defRPr sz="1800" kern="1200">
+                <a:solidFill>
+                  <a:schemeClr val="tx1"/>
+                </a:solidFill>
+                <a:latin typeface="+mn-lt"/>
+                <a:ea typeface="+mn-ea"/>
+                <a:cs typeface="+mn-cs"/>
+              </a:defRPr>
+            </a:lvl6pPr>
+            <a:lvl7pPr marL="2971800" indent="-228600" algn="l" defTabSz="914400" rtl="0" eaLnBrk="1" latinLnBrk="0" hangingPunct="1">
+              <a:lnSpc>
+                <a:spcPct val="90000"/>
+              </a:lnSpc>
+              <a:spcBef>
+                <a:spcPts val="500"/>
+              </a:spcBef>
+              <a:buFont typeface="Arial" panose="020B0604020202020204" pitchFamily="34" charset="0"/>
+              <a:buChar char="•"/>
+              <a:defRPr sz="1800" kern="1200">
+                <a:solidFill>
+                  <a:schemeClr val="tx1"/>
+                </a:solidFill>
+                <a:latin typeface="+mn-lt"/>
+                <a:ea typeface="+mn-ea"/>
+                <a:cs typeface="+mn-cs"/>
+              </a:defRPr>
+            </a:lvl7pPr>
+            <a:lvl8pPr marL="3429000" indent="-228600" algn="l" defTabSz="914400" rtl="0" eaLnBrk="1" latinLnBrk="0" hangingPunct="1">
+              <a:lnSpc>
+                <a:spcPct val="90000"/>
+              </a:lnSpc>
+              <a:spcBef>
+                <a:spcPts val="500"/>
+              </a:spcBef>
+              <a:buFont typeface="Arial" panose="020B0604020202020204" pitchFamily="34" charset="0"/>
+              <a:buChar char="•"/>
+              <a:defRPr sz="1800" kern="1200">
+                <a:solidFill>
+                  <a:schemeClr val="tx1"/>
+                </a:solidFill>
+                <a:latin typeface="+mn-lt"/>
+                <a:ea typeface="+mn-ea"/>
+                <a:cs typeface="+mn-cs"/>
+              </a:defRPr>
+            </a:lvl8pPr>
+            <a:lvl9pPr marL="3886200" indent="-228600" algn="l" defTabSz="914400" rtl="0" eaLnBrk="1" latinLnBrk="0" hangingPunct="1">
+              <a:lnSpc>
+                <a:spcPct val="90000"/>
+              </a:lnSpc>
+              <a:spcBef>
+                <a:spcPts val="500"/>
+              </a:spcBef>
+              <a:buFont typeface="Arial" panose="020B0604020202020204" pitchFamily="34" charset="0"/>
+              <a:buChar char="•"/>
+              <a:defRPr sz="1800" kern="1200">
+                <a:solidFill>
+                  <a:schemeClr val="tx1"/>
+                </a:solidFill>
+                <a:latin typeface="+mn-lt"/>
+                <a:ea typeface="+mn-ea"/>
+                <a:cs typeface="+mn-cs"/>
+              </a:defRPr>
+            </a:lvl9pPr>
+          </a:lstStyle>
+          <a:p>
+            <a:pPr marL="0" indent="0">
+              <a:lnSpc>
+                <a:spcPct val="100000"/>
+              </a:lnSpc>
+              <a:buFont typeface="Arial" panose="020B0604020202020204" pitchFamily="34" charset="0"/>
+              <a:buNone/>
+            </a:pPr>
+            <a:endParaRPr lang="en-GB" sz="1600" b="1" dirty="0">
+              <a:solidFill>
+                <a:schemeClr val="bg1"/>
+              </a:solidFill>
+              <a:latin typeface="JetBrains Mono" panose="02000009000000000000" pitchFamily="49" charset="0"/>
+              <a:ea typeface="JetBrains Mono" panose="02000009000000000000" pitchFamily="49" charset="0"/>
+              <a:cs typeface="JetBrains Mono" panose="02000009000000000000" pitchFamily="49" charset="0"/>
+            </a:endParaRPr>
+          </a:p>
+          <a:p>
+            <a:pPr marL="0" indent="0">
+              <a:lnSpc>
+                <a:spcPct val="100000"/>
+              </a:lnSpc>
+              <a:buFont typeface="Arial" panose="020B0604020202020204" pitchFamily="34" charset="0"/>
+              <a:buNone/>
+            </a:pPr>
+            <a:r>
+              <a:rPr lang="en-GB" sz="1600" b="1" dirty="0" err="1">
+                <a:solidFill>
+                  <a:schemeClr val="bg1"/>
+                </a:solidFill>
+                <a:latin typeface="JetBrains Mono" panose="02000009000000000000" pitchFamily="49" charset="0"/>
+                <a:ea typeface="JetBrains Mono" panose="02000009000000000000" pitchFamily="49" charset="0"/>
+                <a:cs typeface="JetBrains Mono" panose="02000009000000000000" pitchFamily="49" charset="0"/>
+              </a:rPr>
+              <a:t>matmul</a:t>
+            </a:r>
+            <a:endParaRPr lang="en-GB" sz="1600" b="1" dirty="0">
+              <a:solidFill>
+                <a:schemeClr val="bg1"/>
+              </a:solidFill>
+              <a:latin typeface="JetBrains Mono" panose="02000009000000000000" pitchFamily="49" charset="0"/>
+              <a:ea typeface="JetBrains Mono" panose="02000009000000000000" pitchFamily="49" charset="0"/>
+              <a:cs typeface="JetBrains Mono" panose="02000009000000000000" pitchFamily="49" charset="0"/>
+            </a:endParaRPr>
+          </a:p>
+          <a:p>
+            <a:pPr marL="0" indent="0">
+              <a:lnSpc>
+                <a:spcPct val="100000"/>
+              </a:lnSpc>
+              <a:buFont typeface="Arial" panose="020B0604020202020204" pitchFamily="34" charset="0"/>
+              <a:buNone/>
+            </a:pPr>
+            <a:r>
+              <a:rPr lang="en-GB" sz="1200" dirty="0">
+                <a:solidFill>
+                  <a:schemeClr val="bg1"/>
+                </a:solidFill>
+                <a:latin typeface="JetBrains Mono" panose="02000009000000000000" pitchFamily="49" charset="0"/>
+                <a:ea typeface="JetBrains Mono" panose="02000009000000000000" pitchFamily="49" charset="0"/>
+                <a:cs typeface="JetBrains Mono" panose="02000009000000000000" pitchFamily="49" charset="0"/>
+              </a:rPr>
+              <a:t>Matrix-multiplies two 16x16</a:t>
+            </a:r>
+            <a:br>
+              <a:rPr lang="en-GB" sz="1200" dirty="0">
+                <a:solidFill>
+                  <a:schemeClr val="bg1"/>
+                </a:solidFill>
+                <a:latin typeface="JetBrains Mono" panose="02000009000000000000" pitchFamily="49" charset="0"/>
+                <a:ea typeface="JetBrains Mono" panose="02000009000000000000" pitchFamily="49" charset="0"/>
+                <a:cs typeface="JetBrains Mono" panose="02000009000000000000" pitchFamily="49" charset="0"/>
+              </a:rPr>
+            </a:br>
+            <a:r>
+              <a:rPr lang="en-GB" sz="1200" dirty="0">
+                <a:solidFill>
+                  <a:schemeClr val="bg1"/>
+                </a:solidFill>
+                <a:latin typeface="JetBrains Mono" panose="02000009000000000000" pitchFamily="49" charset="0"/>
+                <a:ea typeface="JetBrains Mono" panose="02000009000000000000" pitchFamily="49" charset="0"/>
+                <a:cs typeface="JetBrains Mono" panose="02000009000000000000" pitchFamily="49" charset="0"/>
+              </a:rPr>
+              <a:t>32-bit integer matrices. Stresses multiply throughput and loop overhead.</a:t>
+            </a:r>
+          </a:p>
+          <a:p>
+            <a:pPr marL="0" indent="0">
+              <a:lnSpc>
+                <a:spcPct val="100000"/>
+              </a:lnSpc>
+              <a:buFont typeface="Arial" panose="020B0604020202020204" pitchFamily="34" charset="0"/>
+              <a:buNone/>
+            </a:pPr>
+            <a:r>
+              <a:rPr lang="en-GB" sz="1200" dirty="0">
+                <a:solidFill>
+                  <a:schemeClr val="bg1"/>
+                </a:solidFill>
+                <a:latin typeface="JetBrains Mono" panose="02000009000000000000" pitchFamily="49" charset="0"/>
+                <a:ea typeface="JetBrains Mono" panose="02000009000000000000" pitchFamily="49" charset="0"/>
+                <a:cs typeface="JetBrains Mono" panose="02000009000000000000" pitchFamily="49" charset="0"/>
+              </a:rPr>
+              <a:t>Vector variant tests repeated vector-int multiply-accumulate and vector loads/stores.</a:t>
+            </a:r>
+          </a:p>
+        </p:txBody>
+      </p:sp>
+      <p:sp>
+        <p:nvSpPr>
+          <p:cNvPr id="10" name="Content Placeholder 3">
+            <a:extLst>
+              <a:ext uri="{FF2B5EF4-FFF2-40B4-BE49-F238E27FC236}">
+                <a16:creationId xmlns:a16="http://schemas.microsoft.com/office/drawing/2014/main" id="{6AC6FD52-6D96-917A-A2A7-B6CEA705BD1E}"/>
+              </a:ext>
+            </a:extLst>
+          </p:cNvPr>
+          <p:cNvSpPr txBox="1">
+            <a:spLocks/>
+          </p:cNvSpPr>
+          <p:nvPr/>
+        </p:nvSpPr>
+        <p:spPr>
+          <a:xfrm>
+            <a:off x="4498358" y="3424509"/>
+            <a:ext cx="3195284" cy="2609850"/>
+          </a:xfrm>
+          <a:prstGeom prst="rect">
+            <a:avLst/>
+          </a:prstGeom>
+        </p:spPr>
+        <p:txBody>
+          <a:bodyPr vert="horz" lIns="91440" tIns="45720" rIns="91440" bIns="45720" rtlCol="0">
+            <a:normAutofit/>
+          </a:bodyPr>
+          <a:lstStyle>
+            <a:lvl1pPr marL="228600" indent="-228600" algn="l" defTabSz="914400" rtl="0" eaLnBrk="1" latinLnBrk="0" hangingPunct="1">
+              <a:lnSpc>
+                <a:spcPct val="90000"/>
+              </a:lnSpc>
+              <a:spcBef>
+                <a:spcPts val="1000"/>
+              </a:spcBef>
+              <a:buFont typeface="Arial" panose="020B0604020202020204" pitchFamily="34" charset="0"/>
+              <a:buChar char="•"/>
+              <a:defRPr sz="2800" kern="1200">
+                <a:solidFill>
+                  <a:schemeClr val="tx1"/>
+                </a:solidFill>
+                <a:latin typeface="+mn-lt"/>
+                <a:ea typeface="+mn-ea"/>
+                <a:cs typeface="+mn-cs"/>
+              </a:defRPr>
+            </a:lvl1pPr>
+            <a:lvl2pPr marL="685800" indent="-228600" algn="l" defTabSz="914400" rtl="0" eaLnBrk="1" latinLnBrk="0" hangingPunct="1">
+              <a:lnSpc>
+                <a:spcPct val="90000"/>
+              </a:lnSpc>
+              <a:spcBef>
+                <a:spcPts val="500"/>
+              </a:spcBef>
+              <a:buFont typeface="Arial" panose="020B0604020202020204" pitchFamily="34" charset="0"/>
+              <a:buChar char="•"/>
+              <a:defRPr sz="2400" kern="1200">
+                <a:solidFill>
+                  <a:schemeClr val="tx1"/>
+                </a:solidFill>
+                <a:latin typeface="+mn-lt"/>
+                <a:ea typeface="+mn-ea"/>
+                <a:cs typeface="+mn-cs"/>
+              </a:defRPr>
+            </a:lvl2pPr>
+            <a:lvl3pPr marL="1143000" indent="-228600" algn="l" defTabSz="914400" rtl="0" eaLnBrk="1" latinLnBrk="0" hangingPunct="1">
+              <a:lnSpc>
+                <a:spcPct val="90000"/>
+              </a:lnSpc>
+              <a:spcBef>
+                <a:spcPts val="500"/>
+              </a:spcBef>
+              <a:buFont typeface="Arial" panose="020B0604020202020204" pitchFamily="34" charset="0"/>
+              <a:buChar char="•"/>
+              <a:defRPr sz="2000" kern="1200">
+                <a:solidFill>
+                  <a:schemeClr val="tx1"/>
+                </a:solidFill>
+                <a:latin typeface="+mn-lt"/>
+                <a:ea typeface="+mn-ea"/>
+                <a:cs typeface="+mn-cs"/>
+              </a:defRPr>
+            </a:lvl3pPr>
+            <a:lvl4pPr marL="1600200" indent="-228600" algn="l" defTabSz="914400" rtl="0" eaLnBrk="1" latinLnBrk="0" hangingPunct="1">
+              <a:lnSpc>
+                <a:spcPct val="90000"/>
+              </a:lnSpc>
+              <a:spcBef>
+                <a:spcPts val="500"/>
+              </a:spcBef>
+              <a:buFont typeface="Arial" panose="020B0604020202020204" pitchFamily="34" charset="0"/>
+              <a:buChar char="•"/>
+              <a:defRPr sz="1800" kern="1200">
+                <a:solidFill>
+                  <a:schemeClr val="tx1"/>
+                </a:solidFill>
+                <a:latin typeface="+mn-lt"/>
+                <a:ea typeface="+mn-ea"/>
+                <a:cs typeface="+mn-cs"/>
+              </a:defRPr>
+            </a:lvl4pPr>
+            <a:lvl5pPr marL="2057400" indent="-228600" algn="l" defTabSz="914400" rtl="0" eaLnBrk="1" latinLnBrk="0" hangingPunct="1">
+              <a:lnSpc>
+                <a:spcPct val="90000"/>
+              </a:lnSpc>
+              <a:spcBef>
+                <a:spcPts val="500"/>
+              </a:spcBef>
+              <a:buFont typeface="Arial" panose="020B0604020202020204" pitchFamily="34" charset="0"/>
+              <a:buChar char="•"/>
+              <a:defRPr sz="1800" kern="1200">
+                <a:solidFill>
+                  <a:schemeClr val="tx1"/>
+                </a:solidFill>
+                <a:latin typeface="+mn-lt"/>
+                <a:ea typeface="+mn-ea"/>
+                <a:cs typeface="+mn-cs"/>
+              </a:defRPr>
+            </a:lvl5pPr>
+            <a:lvl6pPr marL="2514600" indent="-228600" algn="l" defTabSz="914400" rtl="0" eaLnBrk="1" latinLnBrk="0" hangingPunct="1">
+              <a:lnSpc>
+                <a:spcPct val="90000"/>
+              </a:lnSpc>
+              <a:spcBef>
+                <a:spcPts val="500"/>
+              </a:spcBef>
+              <a:buFont typeface="Arial" panose="020B0604020202020204" pitchFamily="34" charset="0"/>
+              <a:buChar char="•"/>
+              <a:defRPr sz="1800" kern="1200">
+                <a:solidFill>
+                  <a:schemeClr val="tx1"/>
+                </a:solidFill>
+                <a:latin typeface="+mn-lt"/>
+                <a:ea typeface="+mn-ea"/>
+                <a:cs typeface="+mn-cs"/>
+              </a:defRPr>
+            </a:lvl6pPr>
+            <a:lvl7pPr marL="2971800" indent="-228600" algn="l" defTabSz="914400" rtl="0" eaLnBrk="1" latinLnBrk="0" hangingPunct="1">
+              <a:lnSpc>
+                <a:spcPct val="90000"/>
+              </a:lnSpc>
+              <a:spcBef>
+                <a:spcPts val="500"/>
+              </a:spcBef>
+              <a:buFont typeface="Arial" panose="020B0604020202020204" pitchFamily="34" charset="0"/>
+              <a:buChar char="•"/>
+              <a:defRPr sz="1800" kern="1200">
+                <a:solidFill>
+                  <a:schemeClr val="tx1"/>
+                </a:solidFill>
+                <a:latin typeface="+mn-lt"/>
+                <a:ea typeface="+mn-ea"/>
+                <a:cs typeface="+mn-cs"/>
+              </a:defRPr>
+            </a:lvl7pPr>
+            <a:lvl8pPr marL="3429000" indent="-228600" algn="l" defTabSz="914400" rtl="0" eaLnBrk="1" latinLnBrk="0" hangingPunct="1">
+              <a:lnSpc>
+                <a:spcPct val="90000"/>
+              </a:lnSpc>
+              <a:spcBef>
+                <a:spcPts val="500"/>
+              </a:spcBef>
+              <a:buFont typeface="Arial" panose="020B0604020202020204" pitchFamily="34" charset="0"/>
+              <a:buChar char="•"/>
+              <a:defRPr sz="1800" kern="1200">
+                <a:solidFill>
+                  <a:schemeClr val="tx1"/>
+                </a:solidFill>
+                <a:latin typeface="+mn-lt"/>
+                <a:ea typeface="+mn-ea"/>
+                <a:cs typeface="+mn-cs"/>
+              </a:defRPr>
+            </a:lvl8pPr>
+            <a:lvl9pPr marL="3886200" indent="-228600" algn="l" defTabSz="914400" rtl="0" eaLnBrk="1" latinLnBrk="0" hangingPunct="1">
+              <a:lnSpc>
+                <a:spcPct val="90000"/>
+              </a:lnSpc>
+              <a:spcBef>
+                <a:spcPts val="500"/>
+              </a:spcBef>
+              <a:buFont typeface="Arial" panose="020B0604020202020204" pitchFamily="34" charset="0"/>
+              <a:buChar char="•"/>
+              <a:defRPr sz="1800" kern="1200">
+                <a:solidFill>
+                  <a:schemeClr val="tx1"/>
+                </a:solidFill>
+                <a:latin typeface="+mn-lt"/>
+                <a:ea typeface="+mn-ea"/>
+                <a:cs typeface="+mn-cs"/>
+              </a:defRPr>
+            </a:lvl9pPr>
+          </a:lstStyle>
+          <a:p>
+            <a:pPr marL="0" indent="0">
+              <a:lnSpc>
+                <a:spcPct val="100000"/>
+              </a:lnSpc>
+              <a:buFont typeface="Arial" panose="020B0604020202020204" pitchFamily="34" charset="0"/>
+              <a:buNone/>
+            </a:pPr>
+            <a:endParaRPr lang="en-GB" sz="1600" b="1" dirty="0">
+              <a:solidFill>
+                <a:schemeClr val="bg1"/>
+              </a:solidFill>
+              <a:latin typeface="JetBrains Mono" panose="02000009000000000000" pitchFamily="49" charset="0"/>
+              <a:ea typeface="JetBrains Mono" panose="02000009000000000000" pitchFamily="49" charset="0"/>
+              <a:cs typeface="JetBrains Mono" panose="02000009000000000000" pitchFamily="49" charset="0"/>
+            </a:endParaRPr>
+          </a:p>
+          <a:p>
+            <a:pPr marL="0" indent="0">
+              <a:lnSpc>
+                <a:spcPct val="100000"/>
+              </a:lnSpc>
+              <a:buFont typeface="Arial" panose="020B0604020202020204" pitchFamily="34" charset="0"/>
+              <a:buNone/>
+            </a:pPr>
+            <a:r>
+              <a:rPr lang="en-GB" sz="1600" b="1" dirty="0">
+                <a:solidFill>
+                  <a:schemeClr val="bg1"/>
+                </a:solidFill>
+                <a:latin typeface="JetBrains Mono" panose="02000009000000000000" pitchFamily="49" charset="0"/>
+                <a:ea typeface="JetBrains Mono" panose="02000009000000000000" pitchFamily="49" charset="0"/>
+                <a:cs typeface="JetBrains Mono" panose="02000009000000000000" pitchFamily="49" charset="0"/>
+              </a:rPr>
+              <a:t>quicksort</a:t>
+            </a:r>
+          </a:p>
+          <a:p>
+            <a:pPr marL="0" indent="0">
+              <a:lnSpc>
+                <a:spcPct val="100000"/>
+              </a:lnSpc>
+              <a:buFont typeface="Arial" panose="020B0604020202020204" pitchFamily="34" charset="0"/>
+              <a:buNone/>
+            </a:pPr>
+            <a:r>
+              <a:rPr lang="en-GB" sz="1200" dirty="0">
+                <a:solidFill>
+                  <a:schemeClr val="bg1"/>
+                </a:solidFill>
+                <a:latin typeface="JetBrains Mono" panose="02000009000000000000" pitchFamily="49" charset="0"/>
+                <a:ea typeface="JetBrains Mono" panose="02000009000000000000" pitchFamily="49" charset="0"/>
+                <a:cs typeface="JetBrains Mono" panose="02000009000000000000" pitchFamily="49" charset="0"/>
+              </a:rPr>
+              <a:t>Recursively sorts a 128-length 32-bit integer array. Stresses data-dependent branching, function calls via recursion, and irregular memory access.</a:t>
+            </a:r>
           </a:p>
         </p:txBody>
       </p:sp>
@@ -4898,10 +6775,13 @@
           <a:lstStyle/>
           <a:p>
             <a:pPr marL="0" indent="0">
+              <a:lnSpc>
+                <a:spcPct val="100000"/>
+              </a:lnSpc>
               <a:buNone/>
             </a:pPr>
             <a:r>
-              <a:rPr lang="en-GB" sz="1600" dirty="0">
+              <a:rPr lang="en-GB" sz="1600" b="1" dirty="0">
                 <a:solidFill>
                   <a:schemeClr val="bg1"/>
                 </a:solidFill>
@@ -4914,6 +6794,9 @@
           </a:p>
           <a:p>
             <a:pPr marL="0" indent="0">
+              <a:lnSpc>
+                <a:spcPct val="100000"/>
+              </a:lnSpc>
               <a:buNone/>
             </a:pPr>
             <a:r>
@@ -4925,13 +6808,13 @@
                 <a:ea typeface="JetBrains Mono" panose="02000009000000000000" pitchFamily="49" charset="0"/>
                 <a:cs typeface="JetBrains Mono" panose="02000009000000000000" pitchFamily="49" charset="0"/>
               </a:rPr>
-              <a:t>Increasing pipeline width will lead to increased IPC across all benchmarks.</a:t>
+              <a:t>Increasing pipeline width and number of execution units will lead to increased IPC across all benchmarks.</a:t>
             </a:r>
           </a:p>
           <a:p>
             <a:pPr marL="0" marR="0" lvl="0" indent="0" algn="l" defTabSz="914400" rtl="0" eaLnBrk="1" fontAlgn="auto" latinLnBrk="0" hangingPunct="1">
               <a:lnSpc>
-                <a:spcPct val="90000"/>
+                <a:spcPct val="100000"/>
               </a:lnSpc>
               <a:spcBef>
                 <a:spcPts val="1000"/>
@@ -4964,7 +6847,7 @@
           <a:p>
             <a:pPr marL="0" marR="0" lvl="0" indent="0" algn="l" defTabSz="914400" rtl="0" eaLnBrk="1" fontAlgn="auto" latinLnBrk="0" hangingPunct="1">
               <a:lnSpc>
-                <a:spcPct val="90000"/>
+                <a:spcPct val="100000"/>
               </a:lnSpc>
               <a:spcBef>
                 <a:spcPts val="1000"/>
@@ -4980,7 +6863,7 @@
               <a:defRPr/>
             </a:pPr>
             <a:r>
-              <a:rPr kumimoji="0" lang="en-GB" sz="1600" b="0" i="0" u="none" strike="noStrike" kern="1200" cap="none" spc="0" normalizeH="0" baseline="0" noProof="0" dirty="0">
+              <a:rPr kumimoji="0" lang="en-GB" sz="1600" b="1" i="0" u="none" strike="noStrike" kern="1200" cap="none" spc="0" normalizeH="0" baseline="0" noProof="0" dirty="0">
                 <a:ln>
                   <a:noFill/>
                 </a:ln>
@@ -4999,6 +6882,49 @@
           </a:p>
           <a:p>
             <a:pPr marL="0" indent="0">
+              <a:lnSpc>
+                <a:spcPct val="100000"/>
+              </a:lnSpc>
+              <a:buNone/>
+            </a:pPr>
+            <a:r>
+              <a:rPr lang="en-GB" sz="1200" dirty="0">
+                <a:solidFill>
+                  <a:schemeClr val="bg1"/>
+                </a:solidFill>
+                <a:latin typeface="JetBrains Mono" panose="02000009000000000000" pitchFamily="49" charset="0"/>
+                <a:ea typeface="JetBrains Mono" panose="02000009000000000000" pitchFamily="49" charset="0"/>
+                <a:cs typeface="JetBrains Mono" panose="02000009000000000000" pitchFamily="49" charset="0"/>
+              </a:rPr>
+              <a:t>All benchmarks were simulated with four different configurations: 1-, 2-, and 4-wide fetch/issue/commit widths. The number of each execution unit type was scaled 1:1 with pipeline width. Reservation station capacities were scaled 4:1 with width.</a:t>
+            </a:r>
+            <a:br>
+              <a:rPr lang="en-GB" sz="1200" dirty="0">
+                <a:solidFill>
+                  <a:schemeClr val="bg1"/>
+                </a:solidFill>
+                <a:latin typeface="JetBrains Mono" panose="02000009000000000000" pitchFamily="49" charset="0"/>
+                <a:ea typeface="JetBrains Mono" panose="02000009000000000000" pitchFamily="49" charset="0"/>
+                <a:cs typeface="JetBrains Mono" panose="02000009000000000000" pitchFamily="49" charset="0"/>
+              </a:rPr>
+            </a:br>
+            <a:r>
+              <a:rPr lang="en-GB" sz="1200" dirty="0">
+                <a:solidFill>
+                  <a:schemeClr val="bg1"/>
+                </a:solidFill>
+                <a:latin typeface="JetBrains Mono" panose="02000009000000000000" pitchFamily="49" charset="0"/>
+                <a:ea typeface="JetBrains Mono" panose="02000009000000000000" pitchFamily="49" charset="0"/>
+                <a:cs typeface="JetBrains Mono" panose="02000009000000000000" pitchFamily="49" charset="0"/>
+              </a:rPr>
+              <a:t>Instructions per cycle was calculated in each case.</a:t>
+            </a:r>
+          </a:p>
+          <a:p>
+            <a:pPr marL="0" indent="0">
+              <a:lnSpc>
+                <a:spcPct val="100000"/>
+              </a:lnSpc>
               <a:buNone/>
             </a:pPr>
             <a:endParaRPr lang="en-GB" sz="1200" dirty="0">
@@ -5012,35 +6938,47 @@
           </a:p>
           <a:p>
             <a:pPr marL="0" indent="0">
+              <a:lnSpc>
+                <a:spcPct val="100000"/>
+              </a:lnSpc>
               <a:buNone/>
             </a:pPr>
-            <a:endParaRPr lang="en-GB" sz="1200" dirty="0">
-              <a:solidFill>
-                <a:schemeClr val="bg1"/>
-              </a:solidFill>
-              <a:latin typeface="JetBrains Mono" panose="02000009000000000000" pitchFamily="49" charset="0"/>
-              <a:ea typeface="JetBrains Mono" panose="02000009000000000000" pitchFamily="49" charset="0"/>
-              <a:cs typeface="JetBrains Mono" panose="02000009000000000000" pitchFamily="49" charset="0"/>
-            </a:endParaRPr>
+            <a:r>
+              <a:rPr lang="en-GB" sz="1600" b="1" dirty="0">
+                <a:solidFill>
+                  <a:schemeClr val="bg1"/>
+                </a:solidFill>
+                <a:latin typeface="JetBrains Mono" panose="02000009000000000000" pitchFamily="49" charset="0"/>
+                <a:ea typeface="JetBrains Mono" panose="02000009000000000000" pitchFamily="49" charset="0"/>
+                <a:cs typeface="JetBrains Mono" panose="02000009000000000000" pitchFamily="49" charset="0"/>
+              </a:rPr>
+              <a:t>Results</a:t>
+            </a:r>
           </a:p>
           <a:p>
             <a:pPr marL="0" indent="0">
+              <a:lnSpc>
+                <a:spcPct val="100000"/>
+              </a:lnSpc>
               <a:buNone/>
             </a:pPr>
             <a:r>
-              <a:rPr lang="en-GB" sz="1600" dirty="0">
-                <a:solidFill>
-                  <a:schemeClr val="bg1"/>
-                </a:solidFill>
-                <a:latin typeface="JetBrains Mono" panose="02000009000000000000" pitchFamily="49" charset="0"/>
-                <a:ea typeface="JetBrains Mono" panose="02000009000000000000" pitchFamily="49" charset="0"/>
-                <a:cs typeface="JetBrains Mono" panose="02000009000000000000" pitchFamily="49" charset="0"/>
-              </a:rPr>
-              <a:t>Results</a:t>
+              <a:rPr lang="en-GB" sz="1200" dirty="0">
+                <a:solidFill>
+                  <a:schemeClr val="bg1"/>
+                </a:solidFill>
+                <a:latin typeface="JetBrains Mono" panose="02000009000000000000" pitchFamily="49" charset="0"/>
+                <a:ea typeface="JetBrains Mono" panose="02000009000000000000" pitchFamily="49" charset="0"/>
+                <a:cs typeface="JetBrains Mono" panose="02000009000000000000" pitchFamily="49" charset="0"/>
+              </a:rPr>
+              <a:t>Average IPC increases from 0.836 at width-1 to 2.391 at width-8. All benchmarks besides dot product make use of the full 8-width pipeline and show improvement there.</a:t>
             </a:r>
           </a:p>
           <a:p>
             <a:pPr marL="0" indent="0">
+              <a:lnSpc>
+                <a:spcPct val="100000"/>
+              </a:lnSpc>
               <a:buNone/>
             </a:pPr>
             <a:r>
@@ -5052,17 +6990,17 @@
                 <a:ea typeface="JetBrains Mono" panose="02000009000000000000" pitchFamily="49" charset="0"/>
                 <a:cs typeface="JetBrains Mono" panose="02000009000000000000" pitchFamily="49" charset="0"/>
               </a:rPr>
-              <a:t>...</a:t>
+              <a:t>8-width shows a very marginal improvement over 4-width. Suggests that there are other bottlenecks that surface, like branch misses or memory dependencies. Fibonacci and quicksort scale poorly because of their recursive and therefore branch-heavy nature.</a:t>
             </a:r>
           </a:p>
         </p:txBody>
       </p:sp>
       <p:pic>
         <p:nvPicPr>
-          <p:cNvPr id="13" name="Picture 12">
-            <a:extLst>
-              <a:ext uri="{FF2B5EF4-FFF2-40B4-BE49-F238E27FC236}">
-                <a16:creationId xmlns:a16="http://schemas.microsoft.com/office/drawing/2014/main" id="{CD2E75F6-EC7F-3108-ACE4-2AFCB47E107D}"/>
+          <p:cNvPr id="9" name="Picture 8">
+            <a:extLst>
+              <a:ext uri="{FF2B5EF4-FFF2-40B4-BE49-F238E27FC236}">
+                <a16:creationId xmlns:a16="http://schemas.microsoft.com/office/drawing/2014/main" id="{782F9E61-487F-F449-68BB-ADFA44467A16}"/>
               </a:ext>
             </a:extLst>
           </p:cNvPr>
@@ -5209,7 +7147,7 @@
           <a:p>
             <a:pPr marL="0" marR="0" lvl="0" indent="0" algn="l" defTabSz="914400" rtl="0" eaLnBrk="1" fontAlgn="auto" latinLnBrk="0" hangingPunct="1">
               <a:lnSpc>
-                <a:spcPct val="90000"/>
+                <a:spcPct val="100000"/>
               </a:lnSpc>
               <a:spcBef>
                 <a:spcPts val="1000"/>
@@ -5225,7 +7163,7 @@
               <a:defRPr/>
             </a:pPr>
             <a:r>
-              <a:rPr kumimoji="0" lang="en-GB" sz="1600" b="0" i="0" u="none" strike="noStrike" kern="1200" cap="none" spc="0" normalizeH="0" baseline="0" noProof="0" dirty="0">
+              <a:rPr kumimoji="0" lang="en-GB" sz="1600" b="1" i="0" u="none" strike="noStrike" kern="1200" cap="none" spc="0" normalizeH="0" baseline="0" noProof="0" dirty="0">
                 <a:ln>
                   <a:noFill/>
                 </a:ln>
@@ -5245,7 +7183,7 @@
           <a:p>
             <a:pPr marL="0" marR="0" lvl="0" indent="0" algn="l" defTabSz="914400" rtl="0" eaLnBrk="1" fontAlgn="auto" latinLnBrk="0" hangingPunct="1">
               <a:lnSpc>
-                <a:spcPct val="90000"/>
+                <a:spcPct val="100000"/>
               </a:lnSpc>
               <a:spcBef>
                 <a:spcPts val="1000"/>
@@ -5275,13 +7213,13 @@
                 <a:ea typeface="JetBrains Mono" panose="02000009000000000000" pitchFamily="49" charset="0"/>
                 <a:cs typeface="JetBrains Mono" panose="02000009000000000000" pitchFamily="49" charset="0"/>
               </a:rPr>
-              <a:t>Increasing pipeline width will lead to increased IPC across all benchmarks.</a:t>
+              <a:t>Dynamic branch prediction will show an improvement in prediction accuracy over static policies in most cases.</a:t>
             </a:r>
           </a:p>
           <a:p>
             <a:pPr marL="0" marR="0" lvl="0" indent="0" algn="l" defTabSz="914400" rtl="0" eaLnBrk="1" fontAlgn="auto" latinLnBrk="0" hangingPunct="1">
               <a:lnSpc>
-                <a:spcPct val="90000"/>
+                <a:spcPct val="100000"/>
               </a:lnSpc>
               <a:spcBef>
                 <a:spcPts val="1000"/>
@@ -5314,7 +7252,7 @@
           <a:p>
             <a:pPr marL="0" marR="0" lvl="0" indent="0" algn="l" defTabSz="914400" rtl="0" eaLnBrk="1" fontAlgn="auto" latinLnBrk="0" hangingPunct="1">
               <a:lnSpc>
-                <a:spcPct val="90000"/>
+                <a:spcPct val="100000"/>
               </a:lnSpc>
               <a:spcBef>
                 <a:spcPts val="1000"/>
@@ -5330,7 +7268,7 @@
               <a:defRPr/>
             </a:pPr>
             <a:r>
-              <a:rPr kumimoji="0" lang="en-GB" sz="1600" b="0" i="0" u="none" strike="noStrike" kern="1200" cap="none" spc="0" normalizeH="0" baseline="0" noProof="0" dirty="0">
+              <a:rPr kumimoji="0" lang="en-GB" sz="1600" b="1" i="0" u="none" strike="noStrike" kern="1200" cap="none" spc="0" normalizeH="0" baseline="0" noProof="0" dirty="0">
                 <a:ln>
                   <a:noFill/>
                 </a:ln>
@@ -5348,9 +7286,96 @@
             </a:r>
           </a:p>
           <a:p>
+            <a:pPr marL="0" lvl="0" indent="0">
+              <a:lnSpc>
+                <a:spcPct val="100000"/>
+              </a:lnSpc>
+              <a:buNone/>
+              <a:defRPr/>
+            </a:pPr>
+            <a:r>
+              <a:rPr kumimoji="0" lang="en-GB" sz="1200" b="0" i="0" u="none" strike="noStrike" kern="1200" cap="none" spc="0" normalizeH="0" baseline="0" noProof="0" dirty="0">
+                <a:ln>
+                  <a:noFill/>
+                </a:ln>
+                <a:solidFill>
+                  <a:prstClr val="white"/>
+                </a:solidFill>
+                <a:effectLst/>
+                <a:uLnTx/>
+                <a:uFillTx/>
+                <a:latin typeface="JetBrains Mono" panose="02000009000000000000" pitchFamily="49" charset="0"/>
+                <a:ea typeface="JetBrains Mono" panose="02000009000000000000" pitchFamily="49" charset="0"/>
+                <a:cs typeface="JetBrains Mono" panose="02000009000000000000" pitchFamily="49" charset="0"/>
+              </a:rPr>
+              <a:t>All benchmarks were simulated with four different branch prediction policies: three static (always taken, never taken, backwards taken forwards not </a:t>
+            </a:r>
+            <a:r>
+              <a:rPr lang="en-GB" sz="1200" dirty="0">
+                <a:solidFill>
+                  <a:prstClr val="white"/>
+                </a:solidFill>
+                <a:latin typeface="JetBrains Mono" panose="02000009000000000000" pitchFamily="49" charset="0"/>
+                <a:ea typeface="JetBrains Mono" panose="02000009000000000000" pitchFamily="49" charset="0"/>
+                <a:cs typeface="JetBrains Mono" panose="02000009000000000000" pitchFamily="49" charset="0"/>
+              </a:rPr>
+              <a:t>taken), </a:t>
+            </a:r>
+            <a:r>
+              <a:rPr kumimoji="0" lang="en-GB" sz="1200" b="0" i="0" u="none" strike="noStrike" kern="1200" cap="none" spc="0" normalizeH="0" baseline="0" noProof="0" dirty="0">
+                <a:ln>
+                  <a:noFill/>
+                </a:ln>
+                <a:solidFill>
+                  <a:prstClr val="white"/>
+                </a:solidFill>
+                <a:effectLst/>
+                <a:uLnTx/>
+                <a:uFillTx/>
+                <a:latin typeface="JetBrains Mono" panose="02000009000000000000" pitchFamily="49" charset="0"/>
+                <a:ea typeface="JetBrains Mono" panose="02000009000000000000" pitchFamily="49" charset="0"/>
+                <a:cs typeface="JetBrains Mono" panose="02000009000000000000" pitchFamily="49" charset="0"/>
+              </a:rPr>
+              <a:t>and one dynamic (two-bit saturating counter).</a:t>
+            </a:r>
+            <a:br>
+              <a:rPr kumimoji="0" lang="en-GB" sz="1200" b="0" i="0" u="none" strike="noStrike" kern="1200" cap="none" spc="0" normalizeH="0" baseline="0" noProof="0" dirty="0">
+                <a:ln>
+                  <a:noFill/>
+                </a:ln>
+                <a:solidFill>
+                  <a:prstClr val="white"/>
+                </a:solidFill>
+                <a:effectLst/>
+                <a:uLnTx/>
+                <a:uFillTx/>
+                <a:latin typeface="JetBrains Mono" panose="02000009000000000000" pitchFamily="49" charset="0"/>
+                <a:ea typeface="JetBrains Mono" panose="02000009000000000000" pitchFamily="49" charset="0"/>
+                <a:cs typeface="JetBrains Mono" panose="02000009000000000000" pitchFamily="49" charset="0"/>
+              </a:rPr>
+            </a:br>
+            <a:r>
+              <a:rPr kumimoji="0" lang="en-GB" sz="1200" b="0" i="0" u="none" strike="noStrike" kern="1200" cap="none" spc="0" normalizeH="0" baseline="0" noProof="0" dirty="0">
+                <a:ln>
+                  <a:noFill/>
+                </a:ln>
+                <a:solidFill>
+                  <a:prstClr val="white"/>
+                </a:solidFill>
+                <a:effectLst/>
+                <a:uLnTx/>
+                <a:uFillTx/>
+                <a:latin typeface="JetBrains Mono" panose="02000009000000000000" pitchFamily="49" charset="0"/>
+                <a:ea typeface="JetBrains Mono" panose="02000009000000000000" pitchFamily="49" charset="0"/>
+                <a:cs typeface="JetBrains Mono" panose="02000009000000000000" pitchFamily="49" charset="0"/>
+              </a:rPr>
+              <a:t>Prediction accuracy (correctly predicted divided by total branch count) was calculated in each case.</a:t>
+            </a:r>
+          </a:p>
+          <a:p>
             <a:pPr marL="0" marR="0" lvl="0" indent="0" algn="l" defTabSz="914400" rtl="0" eaLnBrk="1" fontAlgn="auto" latinLnBrk="0" hangingPunct="1">
               <a:lnSpc>
-                <a:spcPct val="90000"/>
+                <a:spcPct val="100000"/>
               </a:lnSpc>
               <a:spcBef>
                 <a:spcPts val="1000"/>
@@ -5383,7 +7408,7 @@
           <a:p>
             <a:pPr marL="0" marR="0" lvl="0" indent="0" algn="l" defTabSz="914400" rtl="0" eaLnBrk="1" fontAlgn="auto" latinLnBrk="0" hangingPunct="1">
               <a:lnSpc>
-                <a:spcPct val="90000"/>
+                <a:spcPct val="100000"/>
               </a:lnSpc>
               <a:spcBef>
                 <a:spcPts val="1000"/>
@@ -5398,6 +7423,228 @@
               <a:tabLst/>
               <a:defRPr/>
             </a:pPr>
+            <a:r>
+              <a:rPr kumimoji="0" lang="en-GB" sz="1600" b="1" i="0" u="none" strike="noStrike" kern="1200" cap="none" spc="0" normalizeH="0" baseline="0" noProof="0" dirty="0">
+                <a:ln>
+                  <a:noFill/>
+                </a:ln>
+                <a:solidFill>
+                  <a:prstClr val="white"/>
+                </a:solidFill>
+                <a:effectLst/>
+                <a:uLnTx/>
+                <a:uFillTx/>
+                <a:latin typeface="JetBrains Mono" panose="02000009000000000000" pitchFamily="49" charset="0"/>
+                <a:ea typeface="JetBrains Mono" panose="02000009000000000000" pitchFamily="49" charset="0"/>
+                <a:cs typeface="JetBrains Mono" panose="02000009000000000000" pitchFamily="49" charset="0"/>
+              </a:rPr>
+              <a:t>Results</a:t>
+            </a:r>
+          </a:p>
+          <a:p>
+            <a:pPr marL="0" marR="0" lvl="0" indent="0" algn="l" defTabSz="914400" rtl="0" eaLnBrk="1" fontAlgn="auto" latinLnBrk="0" hangingPunct="1">
+              <a:lnSpc>
+                <a:spcPct val="100000"/>
+              </a:lnSpc>
+              <a:spcBef>
+                <a:spcPts val="1000"/>
+              </a:spcBef>
+              <a:spcAft>
+                <a:spcPts val="0"/>
+              </a:spcAft>
+              <a:buClrTx/>
+              <a:buSzTx/>
+              <a:buFont typeface="Arial" panose="020B0604020202020204" pitchFamily="34" charset="0"/>
+              <a:buNone/>
+              <a:tabLst/>
+              <a:defRPr/>
+            </a:pPr>
+            <a:r>
+              <a:rPr kumimoji="0" lang="en-GB" sz="1200" b="0" i="0" u="none" strike="noStrike" kern="1200" cap="none" spc="0" normalizeH="0" baseline="0" noProof="0" dirty="0">
+                <a:ln>
+                  <a:noFill/>
+                </a:ln>
+                <a:solidFill>
+                  <a:prstClr val="white"/>
+                </a:solidFill>
+                <a:effectLst/>
+                <a:uLnTx/>
+                <a:uFillTx/>
+                <a:latin typeface="JetBrains Mono" panose="02000009000000000000" pitchFamily="49" charset="0"/>
+                <a:ea typeface="JetBrains Mono" panose="02000009000000000000" pitchFamily="49" charset="0"/>
+                <a:cs typeface="JetBrains Mono" panose="02000009000000000000" pitchFamily="49" charset="0"/>
+              </a:rPr>
+              <a:t>Best policy is two-bit with 81.59% average accuracy, narrowly followed by BTFNT with 80.91%. Benchmarks </a:t>
+            </a:r>
+            <a:r>
+              <a:rPr kumimoji="0" lang="en-GB" sz="1200" b="0" i="0" u="none" strike="noStrike" kern="1200" cap="none" spc="0" normalizeH="0" baseline="0" noProof="0" dirty="0" err="1">
+                <a:ln>
+                  <a:noFill/>
+                </a:ln>
+                <a:solidFill>
+                  <a:prstClr val="white"/>
+                </a:solidFill>
+                <a:effectLst/>
+                <a:uLnTx/>
+                <a:uFillTx/>
+                <a:latin typeface="JetBrains Mono" panose="02000009000000000000" pitchFamily="49" charset="0"/>
+                <a:ea typeface="JetBrains Mono" panose="02000009000000000000" pitchFamily="49" charset="0"/>
+                <a:cs typeface="JetBrains Mono" panose="02000009000000000000" pitchFamily="49" charset="0"/>
+              </a:rPr>
+              <a:t>ar</a:t>
+            </a:r>
+            <a:r>
+              <a:rPr lang="en-GB" sz="1200" dirty="0">
+                <a:solidFill>
+                  <a:prstClr val="white"/>
+                </a:solidFill>
+                <a:latin typeface="JetBrains Mono" panose="02000009000000000000" pitchFamily="49" charset="0"/>
+                <a:ea typeface="JetBrains Mono" panose="02000009000000000000" pitchFamily="49" charset="0"/>
+                <a:cs typeface="JetBrains Mono" panose="02000009000000000000" pitchFamily="49" charset="0"/>
+              </a:rPr>
+              <a:t>e loop-heavy so static-taken and BTFNT perform well. </a:t>
+            </a:r>
+            <a:r>
+              <a:rPr kumimoji="0" lang="en-GB" sz="1200" b="0" i="0" u="none" strike="noStrike" kern="1200" cap="none" spc="0" normalizeH="0" baseline="0" noProof="0" dirty="0">
+                <a:ln>
+                  <a:noFill/>
+                </a:ln>
+                <a:solidFill>
+                  <a:prstClr val="white"/>
+                </a:solidFill>
+                <a:effectLst/>
+                <a:uLnTx/>
+                <a:uFillTx/>
+                <a:latin typeface="JetBrains Mono" panose="02000009000000000000" pitchFamily="49" charset="0"/>
+                <a:ea typeface="JetBrains Mono" panose="02000009000000000000" pitchFamily="49" charset="0"/>
+                <a:cs typeface="JetBrains Mono" panose="02000009000000000000" pitchFamily="49" charset="0"/>
+              </a:rPr>
+              <a:t>Static not taken performs terribly in most cases, especially dot, </a:t>
+            </a:r>
+            <a:r>
+              <a:rPr kumimoji="0" lang="en-GB" sz="1200" b="0" i="0" u="none" strike="noStrike" kern="1200" cap="none" spc="0" normalizeH="0" baseline="0" noProof="0" dirty="0" err="1">
+                <a:ln>
+                  <a:noFill/>
+                </a:ln>
+                <a:solidFill>
+                  <a:prstClr val="white"/>
+                </a:solidFill>
+                <a:effectLst/>
+                <a:uLnTx/>
+                <a:uFillTx/>
+                <a:latin typeface="JetBrains Mono" panose="02000009000000000000" pitchFamily="49" charset="0"/>
+                <a:ea typeface="JetBrains Mono" panose="02000009000000000000" pitchFamily="49" charset="0"/>
+                <a:cs typeface="JetBrains Mono" panose="02000009000000000000" pitchFamily="49" charset="0"/>
+              </a:rPr>
+              <a:t>saxpy</a:t>
+            </a:r>
+            <a:r>
+              <a:rPr kumimoji="0" lang="en-GB" sz="1200" b="0" i="0" u="none" strike="noStrike" kern="1200" cap="none" spc="0" normalizeH="0" baseline="0" noProof="0" dirty="0">
+                <a:ln>
+                  <a:noFill/>
+                </a:ln>
+                <a:solidFill>
+                  <a:prstClr val="white"/>
+                </a:solidFill>
+                <a:effectLst/>
+                <a:uLnTx/>
+                <a:uFillTx/>
+                <a:latin typeface="JetBrains Mono" panose="02000009000000000000" pitchFamily="49" charset="0"/>
+                <a:ea typeface="JetBrains Mono" panose="02000009000000000000" pitchFamily="49" charset="0"/>
+                <a:cs typeface="JetBrains Mono" panose="02000009000000000000" pitchFamily="49" charset="0"/>
+              </a:rPr>
+              <a:t>, and </a:t>
+            </a:r>
+            <a:r>
+              <a:rPr kumimoji="0" lang="en-GB" sz="1200" b="0" i="0" u="none" strike="noStrike" kern="1200" cap="none" spc="0" normalizeH="0" baseline="0" noProof="0" dirty="0" err="1">
+                <a:ln>
+                  <a:noFill/>
+                </a:ln>
+                <a:solidFill>
+                  <a:prstClr val="white"/>
+                </a:solidFill>
+                <a:effectLst/>
+                <a:uLnTx/>
+                <a:uFillTx/>
+                <a:latin typeface="JetBrains Mono" panose="02000009000000000000" pitchFamily="49" charset="0"/>
+                <a:ea typeface="JetBrains Mono" panose="02000009000000000000" pitchFamily="49" charset="0"/>
+                <a:cs typeface="JetBrains Mono" panose="02000009000000000000" pitchFamily="49" charset="0"/>
+              </a:rPr>
+              <a:t>matmul</a:t>
+            </a:r>
+            <a:r>
+              <a:rPr lang="en-GB" sz="1200" dirty="0">
+                <a:solidFill>
+                  <a:prstClr val="white"/>
+                </a:solidFill>
+                <a:latin typeface="JetBrains Mono" panose="02000009000000000000" pitchFamily="49" charset="0"/>
+                <a:ea typeface="JetBrains Mono" panose="02000009000000000000" pitchFamily="49" charset="0"/>
+                <a:cs typeface="JetBrains Mono" panose="02000009000000000000" pitchFamily="49" charset="0"/>
+              </a:rPr>
+              <a:t> as loops are almost always taken</a:t>
+            </a:r>
+            <a:r>
+              <a:rPr kumimoji="0" lang="en-GB" sz="1200" b="0" i="0" u="none" strike="noStrike" kern="1200" cap="none" spc="0" normalizeH="0" baseline="0" noProof="0" dirty="0">
+                <a:ln>
+                  <a:noFill/>
+                </a:ln>
+                <a:solidFill>
+                  <a:prstClr val="white"/>
+                </a:solidFill>
+                <a:effectLst/>
+                <a:uLnTx/>
+                <a:uFillTx/>
+                <a:latin typeface="JetBrains Mono" panose="02000009000000000000" pitchFamily="49" charset="0"/>
+                <a:ea typeface="JetBrains Mono" panose="02000009000000000000" pitchFamily="49" charset="0"/>
+                <a:cs typeface="JetBrains Mono" panose="02000009000000000000" pitchFamily="49" charset="0"/>
+              </a:rPr>
+              <a:t>. It performs well in </a:t>
+            </a:r>
+            <a:r>
+              <a:rPr kumimoji="0" lang="en-GB" sz="1200" b="0" i="0" u="none" strike="noStrike" kern="1200" cap="none" spc="0" normalizeH="0" baseline="0" noProof="0" dirty="0" err="1">
+                <a:ln>
+                  <a:noFill/>
+                </a:ln>
+                <a:solidFill>
+                  <a:prstClr val="white"/>
+                </a:solidFill>
+                <a:effectLst/>
+                <a:uLnTx/>
+                <a:uFillTx/>
+                <a:latin typeface="JetBrains Mono" panose="02000009000000000000" pitchFamily="49" charset="0"/>
+                <a:ea typeface="JetBrains Mono" panose="02000009000000000000" pitchFamily="49" charset="0"/>
+                <a:cs typeface="JetBrains Mono" panose="02000009000000000000" pitchFamily="49" charset="0"/>
+              </a:rPr>
+              <a:t>fibonacci</a:t>
+            </a:r>
+            <a:r>
+              <a:rPr kumimoji="0" lang="en-GB" sz="1200" b="0" i="0" u="none" strike="noStrike" kern="1200" cap="none" spc="0" normalizeH="0" baseline="0" noProof="0" dirty="0">
+                <a:ln>
+                  <a:noFill/>
+                </a:ln>
+                <a:solidFill>
+                  <a:prstClr val="white"/>
+                </a:solidFill>
+                <a:effectLst/>
+                <a:uLnTx/>
+                <a:uFillTx/>
+                <a:latin typeface="JetBrains Mono" panose="02000009000000000000" pitchFamily="49" charset="0"/>
+                <a:ea typeface="JetBrains Mono" panose="02000009000000000000" pitchFamily="49" charset="0"/>
+                <a:cs typeface="JetBrains Mono" panose="02000009000000000000" pitchFamily="49" charset="0"/>
+              </a:rPr>
+              <a:t> due to its mixed taken / not taken paths. Quicksort</a:t>
+            </a:r>
+            <a:r>
+              <a:rPr lang="en-GB" sz="1200" dirty="0">
+                <a:solidFill>
+                  <a:prstClr val="white"/>
+                </a:solidFill>
+                <a:latin typeface="JetBrains Mono" panose="02000009000000000000" pitchFamily="49" charset="0"/>
+                <a:ea typeface="JetBrains Mono" panose="02000009000000000000" pitchFamily="49" charset="0"/>
+                <a:cs typeface="JetBrains Mono" panose="02000009000000000000" pitchFamily="49" charset="0"/>
+              </a:rPr>
+              <a:t> benefits the most from dynamic branch prediction as it is much less structurally predictable.</a:t>
+            </a:r>
             <a:endParaRPr kumimoji="0" lang="en-GB" sz="1200" b="0" i="0" u="none" strike="noStrike" kern="1200" cap="none" spc="0" normalizeH="0" baseline="0" noProof="0" dirty="0">
               <a:ln>
                 <a:noFill/>
@@ -5413,86 +7660,14 @@
               <a:cs typeface="JetBrains Mono" panose="02000009000000000000" pitchFamily="49" charset="0"/>
             </a:endParaRPr>
           </a:p>
-          <a:p>
-            <a:pPr marL="0" marR="0" lvl="0" indent="0" algn="l" defTabSz="914400" rtl="0" eaLnBrk="1" fontAlgn="auto" latinLnBrk="0" hangingPunct="1">
-              <a:lnSpc>
-                <a:spcPct val="90000"/>
-              </a:lnSpc>
-              <a:spcBef>
-                <a:spcPts val="1000"/>
-              </a:spcBef>
-              <a:spcAft>
-                <a:spcPts val="0"/>
-              </a:spcAft>
-              <a:buClrTx/>
-              <a:buSzTx/>
-              <a:buFont typeface="Arial" panose="020B0604020202020204" pitchFamily="34" charset="0"/>
-              <a:buNone/>
-              <a:tabLst/>
-              <a:defRPr/>
-            </a:pPr>
-            <a:r>
-              <a:rPr kumimoji="0" lang="en-GB" sz="1600" b="0" i="0" u="none" strike="noStrike" kern="1200" cap="none" spc="0" normalizeH="0" baseline="0" noProof="0" dirty="0">
-                <a:ln>
-                  <a:noFill/>
-                </a:ln>
-                <a:solidFill>
-                  <a:prstClr val="white"/>
-                </a:solidFill>
-                <a:effectLst/>
-                <a:uLnTx/>
-                <a:uFillTx/>
-                <a:latin typeface="JetBrains Mono" panose="02000009000000000000" pitchFamily="49" charset="0"/>
-                <a:ea typeface="JetBrains Mono" panose="02000009000000000000" pitchFamily="49" charset="0"/>
-                <a:cs typeface="JetBrains Mono" panose="02000009000000000000" pitchFamily="49" charset="0"/>
-              </a:rPr>
-              <a:t>Results</a:t>
-            </a:r>
-          </a:p>
-          <a:p>
-            <a:pPr marL="0" marR="0" lvl="0" indent="0" algn="l" defTabSz="914400" rtl="0" eaLnBrk="1" fontAlgn="auto" latinLnBrk="0" hangingPunct="1">
-              <a:lnSpc>
-                <a:spcPct val="90000"/>
-              </a:lnSpc>
-              <a:spcBef>
-                <a:spcPts val="1000"/>
-              </a:spcBef>
-              <a:spcAft>
-                <a:spcPts val="0"/>
-              </a:spcAft>
-              <a:buClrTx/>
-              <a:buSzTx/>
-              <a:buFont typeface="Arial" panose="020B0604020202020204" pitchFamily="34" charset="0"/>
-              <a:buNone/>
-              <a:tabLst/>
-              <a:defRPr/>
-            </a:pPr>
-            <a:r>
-              <a:rPr kumimoji="0" lang="en-GB" sz="1200" b="0" i="0" u="none" strike="noStrike" kern="1200" cap="none" spc="0" normalizeH="0" baseline="0" noProof="0" dirty="0">
-                <a:ln>
-                  <a:noFill/>
-                </a:ln>
-                <a:solidFill>
-                  <a:prstClr val="white"/>
-                </a:solidFill>
-                <a:effectLst/>
-                <a:uLnTx/>
-                <a:uFillTx/>
-                <a:latin typeface="JetBrains Mono" panose="02000009000000000000" pitchFamily="49" charset="0"/>
-                <a:ea typeface="JetBrains Mono" panose="02000009000000000000" pitchFamily="49" charset="0"/>
-                <a:cs typeface="JetBrains Mono" panose="02000009000000000000" pitchFamily="49" charset="0"/>
-              </a:rPr>
-              <a:t>...</a:t>
-            </a:r>
-          </a:p>
         </p:txBody>
       </p:sp>
       <p:pic>
         <p:nvPicPr>
-          <p:cNvPr id="5" name="Picture 4">
-            <a:extLst>
-              <a:ext uri="{FF2B5EF4-FFF2-40B4-BE49-F238E27FC236}">
-                <a16:creationId xmlns:a16="http://schemas.microsoft.com/office/drawing/2014/main" id="{8134D07C-951D-1852-4CC1-8071AE069423}"/>
+          <p:cNvPr id="10" name="Picture 9">
+            <a:extLst>
+              <a:ext uri="{FF2B5EF4-FFF2-40B4-BE49-F238E27FC236}">
+                <a16:creationId xmlns:a16="http://schemas.microsoft.com/office/drawing/2014/main" id="{E6C6CD05-D5E3-1844-FC7F-F6467C9207AD}"/>
               </a:ext>
             </a:extLst>
           </p:cNvPr>
@@ -5638,10 +7813,13 @@
           <a:lstStyle/>
           <a:p>
             <a:pPr marL="0" indent="0">
+              <a:lnSpc>
+                <a:spcPct val="100000"/>
+              </a:lnSpc>
               <a:buNone/>
             </a:pPr>
             <a:r>
-              <a:rPr lang="en-GB" sz="1600" dirty="0">
+              <a:rPr lang="en-GB" sz="1600" b="1" dirty="0">
                 <a:solidFill>
                   <a:schemeClr val="bg1"/>
                 </a:solidFill>
@@ -5654,6 +7832,9 @@
           </a:p>
           <a:p>
             <a:pPr marL="0" indent="0">
+              <a:lnSpc>
+                <a:spcPct val="100000"/>
+              </a:lnSpc>
               <a:buNone/>
             </a:pPr>
             <a:r>
@@ -5665,11 +7846,14 @@
                 <a:ea typeface="JetBrains Mono" panose="02000009000000000000" pitchFamily="49" charset="0"/>
                 <a:cs typeface="JetBrains Mono" panose="02000009000000000000" pitchFamily="49" charset="0"/>
               </a:rPr>
-              <a:t>Increasing the maximum vector length will decrease the number of cycles taken to execute SIMD benchmarks and therefore speed up execution compared the baseline non-vectorised version.</a:t>
+              <a:t>Increasing vector length will improve performance by reducing the number of cycles taken to complete.</a:t>
             </a:r>
           </a:p>
           <a:p>
             <a:pPr marL="0" indent="0">
+              <a:lnSpc>
+                <a:spcPct val="100000"/>
+              </a:lnSpc>
               <a:buNone/>
             </a:pPr>
             <a:endParaRPr lang="en-GB" sz="1200" dirty="0">
@@ -5683,10 +7867,13 @@
           </a:p>
           <a:p>
             <a:pPr marL="0" indent="0">
+              <a:lnSpc>
+                <a:spcPct val="100000"/>
+              </a:lnSpc>
               <a:buNone/>
             </a:pPr>
             <a:r>
-              <a:rPr lang="en-GB" sz="1600" dirty="0">
+              <a:rPr lang="en-GB" sz="1600" b="1" dirty="0">
                 <a:solidFill>
                   <a:schemeClr val="bg1"/>
                 </a:solidFill>
@@ -5699,6 +7886,9 @@
           </a:p>
           <a:p>
             <a:pPr marL="0" indent="0">
+              <a:lnSpc>
+                <a:spcPct val="100000"/>
+              </a:lnSpc>
               <a:buNone/>
             </a:pPr>
             <a:r>
@@ -5710,11 +7900,35 @@
                 <a:ea typeface="JetBrains Mono" panose="02000009000000000000" pitchFamily="49" charset="0"/>
                 <a:cs typeface="JetBrains Mono" panose="02000009000000000000" pitchFamily="49" charset="0"/>
               </a:rPr>
-              <a:t>The four SIMD-friendly benchmarks were executed with the same configuration besides the maximum vector length. The number of cycles taken to complete.</a:t>
+              <a:t>The four SIMD-friendly benchmarks were executed in four different configurations: a scalar baseline (2-width), and vectorised with VLEN=128, VLEN=256, and VLEN=512.</a:t>
+            </a:r>
+            <a:br>
+              <a:rPr lang="en-GB" sz="1200" dirty="0">
+                <a:solidFill>
+                  <a:schemeClr val="bg1"/>
+                </a:solidFill>
+                <a:latin typeface="JetBrains Mono" panose="02000009000000000000" pitchFamily="49" charset="0"/>
+                <a:ea typeface="JetBrains Mono" panose="02000009000000000000" pitchFamily="49" charset="0"/>
+                <a:cs typeface="JetBrains Mono" panose="02000009000000000000" pitchFamily="49" charset="0"/>
+              </a:rPr>
+            </a:br>
+            <a:r>
+              <a:rPr lang="en-GB" sz="1200" dirty="0">
+                <a:solidFill>
+                  <a:schemeClr val="bg1"/>
+                </a:solidFill>
+                <a:latin typeface="JetBrains Mono" panose="02000009000000000000" pitchFamily="49" charset="0"/>
+                <a:ea typeface="JetBrains Mono" panose="02000009000000000000" pitchFamily="49" charset="0"/>
+                <a:cs typeface="JetBrains Mono" panose="02000009000000000000" pitchFamily="49" charset="0"/>
+              </a:rPr>
+              <a:t>Ratio of number of cycles taken to complete vs the baseline was calculated in each vectorised case.</a:t>
             </a:r>
           </a:p>
           <a:p>
             <a:pPr marL="0" indent="0">
+              <a:lnSpc>
+                <a:spcPct val="100000"/>
+              </a:lnSpc>
               <a:buNone/>
             </a:pPr>
             <a:endParaRPr lang="en-GB" sz="1200" dirty="0">
@@ -5728,10 +7942,13 @@
           </a:p>
           <a:p>
             <a:pPr marL="0" indent="0">
+              <a:lnSpc>
+                <a:spcPct val="100000"/>
+              </a:lnSpc>
               <a:buNone/>
             </a:pPr>
             <a:r>
-              <a:rPr lang="en-GB" sz="1600" dirty="0">
+              <a:rPr lang="en-GB" sz="1600" b="1" dirty="0">
                 <a:solidFill>
                   <a:schemeClr val="bg1"/>
                 </a:solidFill>
@@ -5744,6 +7961,9 @@
           </a:p>
           <a:p>
             <a:pPr marL="0" indent="0">
+              <a:lnSpc>
+                <a:spcPct val="100000"/>
+              </a:lnSpc>
               <a:buNone/>
             </a:pPr>
             <a:r>
@@ -5755,17 +7975,58 @@
                 <a:ea typeface="JetBrains Mono" panose="02000009000000000000" pitchFamily="49" charset="0"/>
                 <a:cs typeface="JetBrains Mono" panose="02000009000000000000" pitchFamily="49" charset="0"/>
               </a:rPr>
-              <a:t>All benchmarks show a similar decrease of about 10x in the number of cycles taken.</a:t>
+              <a:t>All benchmarks show the cycle speedup roughly doubling at each vector length step. Average speedup is 3.89x at 128-bit, 7.349x at 256-bit and 14.508x at 512-bit.</a:t>
+            </a:r>
+          </a:p>
+          <a:p>
+            <a:pPr marL="0" indent="0">
+              <a:lnSpc>
+                <a:spcPct val="100000"/>
+              </a:lnSpc>
+              <a:buNone/>
+            </a:pPr>
+            <a:r>
+              <a:rPr lang="en-GB" sz="1200" dirty="0">
+                <a:solidFill>
+                  <a:schemeClr val="bg1"/>
+                </a:solidFill>
+                <a:latin typeface="JetBrains Mono" panose="02000009000000000000" pitchFamily="49" charset="0"/>
+                <a:ea typeface="JetBrains Mono" panose="02000009000000000000" pitchFamily="49" charset="0"/>
+                <a:cs typeface="JetBrains Mono" panose="02000009000000000000" pitchFamily="49" charset="0"/>
+              </a:rPr>
+              <a:t>Benchmarks reach a peak </a:t>
+            </a:r>
+            <a:r>
+              <a:rPr lang="en-GB" sz="1200">
+                <a:solidFill>
+                  <a:schemeClr val="bg1"/>
+                </a:solidFill>
+                <a:latin typeface="JetBrains Mono" panose="02000009000000000000" pitchFamily="49" charset="0"/>
+                <a:ea typeface="JetBrains Mono" panose="02000009000000000000" pitchFamily="49" charset="0"/>
+                <a:cs typeface="JetBrains Mono" panose="02000009000000000000" pitchFamily="49" charset="0"/>
+              </a:rPr>
+              <a:t>of almost </a:t>
+            </a:r>
+            <a:r>
+              <a:rPr lang="en-GB" sz="1200" dirty="0">
+                <a:solidFill>
+                  <a:schemeClr val="bg1"/>
+                </a:solidFill>
+                <a:latin typeface="JetBrains Mono" panose="02000009000000000000" pitchFamily="49" charset="0"/>
+                <a:ea typeface="JetBrains Mono" panose="02000009000000000000" pitchFamily="49" charset="0"/>
+                <a:cs typeface="JetBrains Mono" panose="02000009000000000000" pitchFamily="49" charset="0"/>
+              </a:rPr>
+              <a:t>16x speedup at VLEN=512, due to processing 16 elements (VLEN / 32-bit) per iteration instead of just 1 in the scalar case.</a:t>
             </a:r>
           </a:p>
         </p:txBody>
       </p:sp>
       <p:pic>
         <p:nvPicPr>
-          <p:cNvPr id="5" name="Picture 4">
-            <a:extLst>
-              <a:ext uri="{FF2B5EF4-FFF2-40B4-BE49-F238E27FC236}">
-                <a16:creationId xmlns:a16="http://schemas.microsoft.com/office/drawing/2014/main" id="{03AD5AEB-A1EC-2D6E-6723-894141399DD7}"/>
+          <p:cNvPr id="10" name="Picture 9">
+            <a:extLst>
+              <a:ext uri="{FF2B5EF4-FFF2-40B4-BE49-F238E27FC236}">
+                <a16:creationId xmlns:a16="http://schemas.microsoft.com/office/drawing/2014/main" id="{8296C511-596B-F193-4194-FF5FA5F0A5E6}"/>
               </a:ext>
             </a:extLst>
           </p:cNvPr>

--- a/docs/final presentation.pptx
+++ b/docs/final presentation.pptx
@@ -3402,7 +3402,7 @@
             <a:r>
               <a:rPr lang="en-GB" sz="4800" dirty="0">
                 <a:solidFill>
-                  <a:schemeClr val="bg1"/>
+                  <a:srgbClr val="CDD6F4"/>
                 </a:solidFill>
                 <a:latin typeface="JetBrains Mono" panose="02000009000000000000" pitchFamily="49" charset="0"/>
                 <a:ea typeface="JetBrains Mono" panose="02000009000000000000" pitchFamily="49" charset="0"/>
@@ -3413,7 +3413,7 @@
             <a:br>
               <a:rPr lang="en-GB" sz="4800" dirty="0">
                 <a:solidFill>
-                  <a:schemeClr val="bg1"/>
+                  <a:srgbClr val="CDD6F4"/>
                 </a:solidFill>
                 <a:latin typeface="JetBrains Mono" panose="02000009000000000000" pitchFamily="49" charset="0"/>
                 <a:ea typeface="JetBrains Mono" panose="02000009000000000000" pitchFamily="49" charset="0"/>
@@ -3423,7 +3423,7 @@
             <a:r>
               <a:rPr lang="en-GB" sz="4800" dirty="0">
                 <a:solidFill>
-                  <a:schemeClr val="bg1"/>
+                  <a:srgbClr val="CDD6F4"/>
                 </a:solidFill>
                 <a:latin typeface="JetBrains Mono" panose="02000009000000000000" pitchFamily="49" charset="0"/>
                 <a:ea typeface="JetBrains Mono" panose="02000009000000000000" pitchFamily="49" charset="0"/>
@@ -3458,7 +3458,7 @@
             <a:r>
               <a:rPr lang="en-GB" dirty="0">
                 <a:solidFill>
-                  <a:schemeClr val="bg1"/>
+                  <a:srgbClr val="B4BEFE"/>
                 </a:solidFill>
                 <a:latin typeface="JetBrains Mono" panose="02000009000000000000" pitchFamily="49" charset="0"/>
                 <a:ea typeface="JetBrains Mono" panose="02000009000000000000" pitchFamily="49" charset="0"/>
@@ -3618,7 +3618,7 @@
             <a:r>
               <a:rPr lang="en-GB" sz="2800" dirty="0">
                 <a:solidFill>
-                  <a:schemeClr val="bg1"/>
+                  <a:srgbClr val="B4BEFE"/>
                 </a:solidFill>
                 <a:latin typeface="JetBrains Mono" panose="02000009000000000000" pitchFamily="49" charset="0"/>
                 <a:ea typeface="JetBrains Mono" panose="02000009000000000000" pitchFamily="49" charset="0"/>
@@ -3665,7 +3665,7 @@
             </a:pPr>
             <a:endParaRPr lang="en-GB" sz="1600" b="1" dirty="0">
               <a:solidFill>
-                <a:schemeClr val="bg1"/>
+                <a:srgbClr val="CDD6F4"/>
               </a:solidFill>
               <a:latin typeface="JetBrains Mono" panose="02000009000000000000" pitchFamily="49" charset="0"/>
               <a:ea typeface="JetBrains Mono" panose="02000009000000000000" pitchFamily="49" charset="0"/>
@@ -3682,13 +3682,13 @@
             <a:r>
               <a:rPr lang="en-GB" sz="1600" b="1" dirty="0">
                 <a:solidFill>
-                  <a:schemeClr val="bg1"/>
-                </a:solidFill>
-                <a:latin typeface="JetBrains Mono" panose="02000009000000000000" pitchFamily="49" charset="0"/>
-                <a:ea typeface="JetBrains Mono" panose="02000009000000000000" pitchFamily="49" charset="0"/>
-                <a:cs typeface="JetBrains Mono" panose="02000009000000000000" pitchFamily="49" charset="0"/>
-              </a:rPr>
-              <a:t>ISA</a:t>
+                  <a:srgbClr val="CBA6F7"/>
+                </a:solidFill>
+                <a:latin typeface="JetBrains Mono" panose="02000009000000000000" pitchFamily="49" charset="0"/>
+                <a:ea typeface="JetBrains Mono" panose="02000009000000000000" pitchFamily="49" charset="0"/>
+                <a:cs typeface="JetBrains Mono" panose="02000009000000000000" pitchFamily="49" charset="0"/>
+              </a:rPr>
+              <a:t>Instruction Set</a:t>
             </a:r>
           </a:p>
           <a:p>
@@ -3701,7 +3701,7 @@
             <a:r>
               <a:rPr lang="en-GB" sz="1200" dirty="0">
                 <a:solidFill>
-                  <a:schemeClr val="bg1"/>
+                  <a:srgbClr val="CDD6F4"/>
                 </a:solidFill>
                 <a:latin typeface="JetBrains Mono" panose="02000009000000000000" pitchFamily="49" charset="0"/>
                 <a:ea typeface="JetBrains Mono" panose="02000009000000000000" pitchFamily="49" charset="0"/>
@@ -3712,7 +3712,7 @@
             <a:br>
               <a:rPr lang="en-GB" sz="1200" dirty="0">
                 <a:solidFill>
-                  <a:schemeClr val="bg1"/>
+                  <a:srgbClr val="CDD6F4"/>
                 </a:solidFill>
                 <a:latin typeface="JetBrains Mono" panose="02000009000000000000" pitchFamily="49" charset="0"/>
                 <a:ea typeface="JetBrains Mono" panose="02000009000000000000" pitchFamily="49" charset="0"/>
@@ -3722,7 +3722,7 @@
             <a:r>
               <a:rPr lang="en-GB" sz="1200" dirty="0">
                 <a:solidFill>
-                  <a:schemeClr val="bg1"/>
+                  <a:srgbClr val="CDD6F4"/>
                 </a:solidFill>
                 <a:latin typeface="JetBrains Mono" panose="02000009000000000000" pitchFamily="49" charset="0"/>
                 <a:ea typeface="JetBrains Mono" panose="02000009000000000000" pitchFamily="49" charset="0"/>
@@ -3733,7 +3733,7 @@
             <a:r>
               <a:rPr lang="en-GB" sz="1200" dirty="0" err="1">
                 <a:solidFill>
-                  <a:schemeClr val="bg1"/>
+                  <a:srgbClr val="CDD6F4"/>
                 </a:solidFill>
                 <a:latin typeface="JetBrains Mono" panose="02000009000000000000" pitchFamily="49" charset="0"/>
                 <a:ea typeface="JetBrains Mono" panose="02000009000000000000" pitchFamily="49" charset="0"/>
@@ -3744,7 +3744,7 @@
             <a:r>
               <a:rPr lang="en-GB" sz="1200" dirty="0">
                 <a:solidFill>
-                  <a:schemeClr val="bg1"/>
+                  <a:srgbClr val="CDD6F4"/>
                 </a:solidFill>
                 <a:latin typeface="JetBrains Mono" panose="02000009000000000000" pitchFamily="49" charset="0"/>
                 <a:ea typeface="JetBrains Mono" panose="02000009000000000000" pitchFamily="49" charset="0"/>
@@ -3755,7 +3755,7 @@
             <a:br>
               <a:rPr lang="en-GB" sz="1200" dirty="0">
                 <a:solidFill>
-                  <a:schemeClr val="bg1"/>
+                  <a:srgbClr val="CDD6F4"/>
                 </a:solidFill>
                 <a:latin typeface="JetBrains Mono" panose="02000009000000000000" pitchFamily="49" charset="0"/>
                 <a:ea typeface="JetBrains Mono" panose="02000009000000000000" pitchFamily="49" charset="0"/>
@@ -3765,7 +3765,7 @@
             <a:r>
               <a:rPr lang="en-GB" sz="1200" dirty="0">
                 <a:solidFill>
-                  <a:schemeClr val="bg1"/>
+                  <a:srgbClr val="CDD6F4"/>
                 </a:solidFill>
                 <a:latin typeface="JetBrains Mono" panose="02000009000000000000" pitchFamily="49" charset="0"/>
                 <a:ea typeface="JetBrains Mono" panose="02000009000000000000" pitchFamily="49" charset="0"/>
@@ -3776,7 +3776,7 @@
             <a:r>
               <a:rPr lang="en-GB" sz="1200" dirty="0" err="1">
                 <a:solidFill>
-                  <a:schemeClr val="bg1"/>
+                  <a:srgbClr val="CDD6F4"/>
                 </a:solidFill>
                 <a:latin typeface="JetBrains Mono" panose="02000009000000000000" pitchFamily="49" charset="0"/>
                 <a:ea typeface="JetBrains Mono" panose="02000009000000000000" pitchFamily="49" charset="0"/>
@@ -3787,7 +3787,7 @@
             <a:r>
               <a:rPr lang="en-GB" sz="1200" dirty="0">
                 <a:solidFill>
-                  <a:schemeClr val="bg1"/>
+                  <a:srgbClr val="CDD6F4"/>
                 </a:solidFill>
                 <a:latin typeface="JetBrains Mono" panose="02000009000000000000" pitchFamily="49" charset="0"/>
                 <a:ea typeface="JetBrains Mono" panose="02000009000000000000" pitchFamily="49" charset="0"/>
@@ -3798,7 +3798,7 @@
             <a:r>
               <a:rPr lang="en-GB" sz="1200" dirty="0" err="1">
                 <a:solidFill>
-                  <a:schemeClr val="bg1"/>
+                  <a:srgbClr val="CDD6F4"/>
                 </a:solidFill>
                 <a:latin typeface="JetBrains Mono" panose="02000009000000000000" pitchFamily="49" charset="0"/>
                 <a:ea typeface="JetBrains Mono" panose="02000009000000000000" pitchFamily="49" charset="0"/>
@@ -3809,7 +3809,7 @@
             <a:r>
               <a:rPr lang="en-GB" sz="1200" dirty="0">
                 <a:solidFill>
-                  <a:schemeClr val="bg1"/>
+                  <a:srgbClr val="CDD6F4"/>
                 </a:solidFill>
                 <a:latin typeface="JetBrains Mono" panose="02000009000000000000" pitchFamily="49" charset="0"/>
                 <a:ea typeface="JetBrains Mono" panose="02000009000000000000" pitchFamily="49" charset="0"/>
@@ -3820,7 +3820,7 @@
             <a:r>
               <a:rPr lang="en-GB" sz="1200" dirty="0" err="1">
                 <a:solidFill>
-                  <a:schemeClr val="bg1"/>
+                  <a:srgbClr val="CDD6F4"/>
                 </a:solidFill>
                 <a:latin typeface="JetBrains Mono" panose="02000009000000000000" pitchFamily="49" charset="0"/>
                 <a:ea typeface="JetBrains Mono" panose="02000009000000000000" pitchFamily="49" charset="0"/>
@@ -3831,7 +3831,7 @@
             <a:br>
               <a:rPr lang="en-GB" sz="1200" dirty="0">
                 <a:solidFill>
-                  <a:schemeClr val="bg1"/>
+                  <a:srgbClr val="CDD6F4"/>
                 </a:solidFill>
                 <a:latin typeface="JetBrains Mono" panose="02000009000000000000" pitchFamily="49" charset="0"/>
                 <a:ea typeface="JetBrains Mono" panose="02000009000000000000" pitchFamily="49" charset="0"/>
@@ -3841,7 +3841,7 @@
             <a:r>
               <a:rPr lang="en-GB" sz="1200" dirty="0">
                 <a:solidFill>
-                  <a:schemeClr val="bg1"/>
+                  <a:srgbClr val="CDD6F4"/>
                 </a:solidFill>
                 <a:latin typeface="JetBrains Mono" panose="02000009000000000000" pitchFamily="49" charset="0"/>
                 <a:ea typeface="JetBrains Mono" panose="02000009000000000000" pitchFamily="49" charset="0"/>
@@ -3859,7 +3859,7 @@
             </a:pPr>
             <a:endParaRPr lang="en-GB" sz="1200" dirty="0">
               <a:solidFill>
-                <a:schemeClr val="bg1"/>
+                <a:srgbClr val="CDD6F4"/>
               </a:solidFill>
               <a:latin typeface="JetBrains Mono" panose="02000009000000000000" pitchFamily="49" charset="0"/>
               <a:ea typeface="JetBrains Mono" panose="02000009000000000000" pitchFamily="49" charset="0"/>
@@ -3876,7 +3876,7 @@
             <a:r>
               <a:rPr lang="en-GB" sz="1600" b="1" dirty="0">
                 <a:solidFill>
-                  <a:schemeClr val="bg1"/>
+                  <a:srgbClr val="89B4FA"/>
                 </a:solidFill>
                 <a:latin typeface="JetBrains Mono" panose="02000009000000000000" pitchFamily="49" charset="0"/>
                 <a:ea typeface="JetBrains Mono" panose="02000009000000000000" pitchFamily="49" charset="0"/>
@@ -3895,7 +3895,7 @@
             <a:r>
               <a:rPr lang="en-GB" sz="1200" dirty="0">
                 <a:solidFill>
-                  <a:schemeClr val="bg1"/>
+                  <a:srgbClr val="CDD6F4"/>
                 </a:solidFill>
                 <a:latin typeface="JetBrains Mono" panose="02000009000000000000" pitchFamily="49" charset="0"/>
                 <a:ea typeface="JetBrains Mono" panose="02000009000000000000" pitchFamily="49" charset="0"/>
@@ -3906,7 +3906,7 @@
             <a:br>
               <a:rPr lang="en-GB" sz="1200" dirty="0">
                 <a:solidFill>
-                  <a:schemeClr val="bg1"/>
+                  <a:srgbClr val="CDD6F4"/>
                 </a:solidFill>
                 <a:latin typeface="JetBrains Mono" panose="02000009000000000000" pitchFamily="49" charset="0"/>
                 <a:ea typeface="JetBrains Mono" panose="02000009000000000000" pitchFamily="49" charset="0"/>
@@ -3916,7 +3916,7 @@
             <a:r>
               <a:rPr lang="en-GB" sz="1200" dirty="0">
                 <a:solidFill>
-                  <a:schemeClr val="bg1"/>
+                  <a:srgbClr val="CDD6F4"/>
                 </a:solidFill>
                 <a:latin typeface="JetBrains Mono" panose="02000009000000000000" pitchFamily="49" charset="0"/>
                 <a:ea typeface="JetBrains Mono" panose="02000009000000000000" pitchFamily="49" charset="0"/>
@@ -3935,7 +3935,7 @@
             <a:r>
               <a:rPr lang="en-GB" sz="1200" dirty="0">
                 <a:solidFill>
-                  <a:schemeClr val="bg1"/>
+                  <a:srgbClr val="CDD6F4"/>
                 </a:solidFill>
                 <a:latin typeface="JetBrains Mono" panose="02000009000000000000" pitchFamily="49" charset="0"/>
                 <a:ea typeface="JetBrains Mono" panose="02000009000000000000" pitchFamily="49" charset="0"/>
@@ -3946,7 +3946,7 @@
             <a:br>
               <a:rPr lang="en-GB" sz="1200" dirty="0">
                 <a:solidFill>
-                  <a:schemeClr val="bg1"/>
+                  <a:srgbClr val="CDD6F4"/>
                 </a:solidFill>
                 <a:latin typeface="JetBrains Mono" panose="02000009000000000000" pitchFamily="49" charset="0"/>
                 <a:ea typeface="JetBrains Mono" panose="02000009000000000000" pitchFamily="49" charset="0"/>
@@ -3956,7 +3956,7 @@
             <a:r>
               <a:rPr lang="en-GB" sz="1200" dirty="0">
                 <a:solidFill>
-                  <a:schemeClr val="bg1"/>
+                  <a:srgbClr val="CDD6F4"/>
                 </a:solidFill>
                 <a:latin typeface="JetBrains Mono" panose="02000009000000000000" pitchFamily="49" charset="0"/>
                 <a:ea typeface="JetBrains Mono" panose="02000009000000000000" pitchFamily="49" charset="0"/>
@@ -3967,7 +3967,7 @@
             <a:br>
               <a:rPr lang="en-GB" sz="1200" dirty="0">
                 <a:solidFill>
-                  <a:schemeClr val="bg1"/>
+                  <a:srgbClr val="CDD6F4"/>
                 </a:solidFill>
                 <a:latin typeface="JetBrains Mono" panose="02000009000000000000" pitchFamily="49" charset="0"/>
                 <a:ea typeface="JetBrains Mono" panose="02000009000000000000" pitchFamily="49" charset="0"/>
@@ -3977,7 +3977,7 @@
             <a:r>
               <a:rPr lang="en-GB" sz="1200" dirty="0">
                 <a:solidFill>
-                  <a:schemeClr val="bg1"/>
+                  <a:srgbClr val="CDD6F4"/>
                 </a:solidFill>
                 <a:latin typeface="JetBrains Mono" panose="02000009000000000000" pitchFamily="49" charset="0"/>
                 <a:ea typeface="JetBrains Mono" panose="02000009000000000000" pitchFamily="49" charset="0"/>
@@ -3988,7 +3988,7 @@
             <a:br>
               <a:rPr lang="en-GB" sz="1200" dirty="0">
                 <a:solidFill>
-                  <a:schemeClr val="bg1"/>
+                  <a:srgbClr val="CDD6F4"/>
                 </a:solidFill>
                 <a:latin typeface="JetBrains Mono" panose="02000009000000000000" pitchFamily="49" charset="0"/>
                 <a:ea typeface="JetBrains Mono" panose="02000009000000000000" pitchFamily="49" charset="0"/>
@@ -3998,7 +3998,7 @@
             <a:r>
               <a:rPr lang="en-GB" sz="1200" dirty="0">
                 <a:solidFill>
-                  <a:schemeClr val="bg1"/>
+                  <a:srgbClr val="CDD6F4"/>
                 </a:solidFill>
                 <a:latin typeface="JetBrains Mono" panose="02000009000000000000" pitchFamily="49" charset="0"/>
                 <a:ea typeface="JetBrains Mono" panose="02000009000000000000" pitchFamily="49" charset="0"/>
@@ -4009,7 +4009,7 @@
             <a:br>
               <a:rPr lang="en-GB" sz="1200" dirty="0">
                 <a:solidFill>
-                  <a:schemeClr val="bg1"/>
+                  <a:srgbClr val="CDD6F4"/>
                 </a:solidFill>
                 <a:latin typeface="JetBrains Mono" panose="02000009000000000000" pitchFamily="49" charset="0"/>
                 <a:ea typeface="JetBrains Mono" panose="02000009000000000000" pitchFamily="49" charset="0"/>
@@ -4019,7 +4019,7 @@
             <a:r>
               <a:rPr lang="en-GB" sz="1200" dirty="0">
                 <a:solidFill>
-                  <a:schemeClr val="bg1"/>
+                  <a:srgbClr val="CDD6F4"/>
                 </a:solidFill>
                 <a:latin typeface="JetBrains Mono" panose="02000009000000000000" pitchFamily="49" charset="0"/>
                 <a:ea typeface="JetBrains Mono" panose="02000009000000000000" pitchFamily="49" charset="0"/>
@@ -4030,7 +4030,7 @@
             <a:br>
               <a:rPr lang="en-GB" sz="1200" dirty="0">
                 <a:solidFill>
-                  <a:schemeClr val="bg1"/>
+                  <a:srgbClr val="CDD6F4"/>
                 </a:solidFill>
                 <a:latin typeface="JetBrains Mono" panose="02000009000000000000" pitchFamily="49" charset="0"/>
                 <a:ea typeface="JetBrains Mono" panose="02000009000000000000" pitchFamily="49" charset="0"/>
@@ -4040,7 +4040,7 @@
             <a:r>
               <a:rPr lang="en-GB" sz="1200" dirty="0">
                 <a:solidFill>
-                  <a:schemeClr val="bg1"/>
+                  <a:srgbClr val="CDD6F4"/>
                 </a:solidFill>
                 <a:latin typeface="JetBrains Mono" panose="02000009000000000000" pitchFamily="49" charset="0"/>
                 <a:ea typeface="JetBrains Mono" panose="02000009000000000000" pitchFamily="49" charset="0"/>
@@ -4058,7 +4058,7 @@
             </a:pPr>
             <a:endParaRPr lang="en-GB" sz="1200" dirty="0">
               <a:solidFill>
-                <a:schemeClr val="bg1"/>
+                <a:srgbClr val="CDD6F4"/>
               </a:solidFill>
               <a:latin typeface="JetBrains Mono" panose="02000009000000000000" pitchFamily="49" charset="0"/>
               <a:ea typeface="JetBrains Mono" panose="02000009000000000000" pitchFamily="49" charset="0"/>
@@ -4089,7 +4089,7 @@
                   <a:noFill/>
                 </a:ln>
                 <a:solidFill>
-                  <a:prstClr val="white"/>
+                  <a:srgbClr val="A6E3A1"/>
                 </a:solidFill>
                 <a:effectLst/>
                 <a:uLnTx/>
@@ -4125,7 +4125,7 @@
                   <a:noFill/>
                 </a:ln>
                 <a:solidFill>
-                  <a:prstClr val="white"/>
+                  <a:srgbClr val="CDD6F4"/>
                 </a:solidFill>
                 <a:effectLst/>
                 <a:uLnTx/>
@@ -4142,7 +4142,7 @@
                   <a:noFill/>
                 </a:ln>
                 <a:solidFill>
-                  <a:prstClr val="white"/>
+                  <a:srgbClr val="CDD6F4"/>
                 </a:solidFill>
                 <a:effectLst/>
                 <a:uLnTx/>
@@ -4158,7 +4158,7 @@
                   <a:noFill/>
                 </a:ln>
                 <a:solidFill>
-                  <a:prstClr val="white"/>
+                  <a:srgbClr val="CDD6F4"/>
                 </a:solidFill>
                 <a:effectLst/>
                 <a:uLnTx/>
@@ -4175,7 +4175,7 @@
                   <a:noFill/>
                 </a:ln>
                 <a:solidFill>
-                  <a:prstClr val="white"/>
+                  <a:srgbClr val="CDD6F4"/>
                 </a:solidFill>
                 <a:effectLst/>
                 <a:uLnTx/>
@@ -4191,7 +4191,7 @@
                   <a:noFill/>
                 </a:ln>
                 <a:solidFill>
-                  <a:prstClr val="white"/>
+                  <a:srgbClr val="CDD6F4"/>
                 </a:solidFill>
                 <a:effectLst/>
                 <a:uLnTx/>
@@ -4204,7 +4204,7 @@
             </a:r>
             <a:endParaRPr lang="en-GB" sz="1200" dirty="0">
               <a:solidFill>
-                <a:schemeClr val="bg1"/>
+                <a:srgbClr val="CDD6F4"/>
               </a:solidFill>
               <a:latin typeface="JetBrains Mono" panose="02000009000000000000" pitchFamily="49" charset="0"/>
               <a:ea typeface="JetBrains Mono" panose="02000009000000000000" pitchFamily="49" charset="0"/>
@@ -4427,7 +4427,7 @@
                 <a:noFill/>
               </a:ln>
               <a:solidFill>
-                <a:prstClr val="white"/>
+                <a:srgbClr val="CDD6F4"/>
               </a:solidFill>
               <a:effectLst/>
               <a:uLnTx/>
@@ -4461,7 +4461,7 @@
                   <a:noFill/>
                 </a:ln>
                 <a:solidFill>
-                  <a:prstClr val="white"/>
+                  <a:srgbClr val="F9E2AF"/>
                 </a:solidFill>
                 <a:effectLst/>
                 <a:uLnTx/>
@@ -4497,7 +4497,7 @@
                   <a:noFill/>
                 </a:ln>
                 <a:solidFill>
-                  <a:prstClr val="white"/>
+                  <a:srgbClr val="CDD6F4"/>
                 </a:solidFill>
                 <a:effectLst/>
                 <a:uLnTx/>
@@ -4533,7 +4533,7 @@
                   <a:noFill/>
                 </a:ln>
                 <a:solidFill>
-                  <a:prstClr val="white"/>
+                  <a:srgbClr val="CDD6F4"/>
                 </a:solidFill>
                 <a:effectLst/>
                 <a:uLnTx/>
@@ -4550,7 +4550,7 @@
                   <a:noFill/>
                 </a:ln>
                 <a:solidFill>
-                  <a:prstClr val="white"/>
+                  <a:srgbClr val="CDD6F4"/>
                 </a:solidFill>
                 <a:effectLst/>
                 <a:uLnTx/>
@@ -4566,7 +4566,7 @@
                   <a:noFill/>
                 </a:ln>
                 <a:solidFill>
-                  <a:prstClr val="white"/>
+                  <a:srgbClr val="CDD6F4"/>
                 </a:solidFill>
                 <a:effectLst/>
                 <a:uLnTx/>
@@ -4601,7 +4601,7 @@
                 <a:noFill/>
               </a:ln>
               <a:solidFill>
-                <a:prstClr val="white"/>
+                <a:srgbClr val="CDD6F4"/>
               </a:solidFill>
               <a:effectLst/>
               <a:uLnTx/>
@@ -4622,7 +4622,7 @@
             <a:r>
               <a:rPr lang="en-GB" sz="1600" b="1" dirty="0">
                 <a:solidFill>
-                  <a:schemeClr val="bg1"/>
+                  <a:srgbClr val="FAB387"/>
                 </a:solidFill>
                 <a:latin typeface="JetBrains Mono" panose="02000009000000000000" pitchFamily="49" charset="0"/>
                 <a:ea typeface="JetBrains Mono" panose="02000009000000000000" pitchFamily="49" charset="0"/>
@@ -4641,7 +4641,7 @@
             <a:r>
               <a:rPr lang="en-GB" sz="1200" dirty="0">
                 <a:solidFill>
-                  <a:schemeClr val="bg1"/>
+                  <a:srgbClr val="CDD6F4"/>
                 </a:solidFill>
                 <a:latin typeface="JetBrains Mono" panose="02000009000000000000" pitchFamily="49" charset="0"/>
                 <a:ea typeface="JetBrains Mono" panose="02000009000000000000" pitchFamily="49" charset="0"/>
@@ -4652,7 +4652,7 @@
             <a:br>
               <a:rPr lang="en-GB" sz="1200" dirty="0">
                 <a:solidFill>
-                  <a:schemeClr val="bg1"/>
+                  <a:srgbClr val="CDD6F4"/>
                 </a:solidFill>
                 <a:latin typeface="JetBrains Mono" panose="02000009000000000000" pitchFamily="49" charset="0"/>
                 <a:ea typeface="JetBrains Mono" panose="02000009000000000000" pitchFamily="49" charset="0"/>
@@ -4662,7 +4662,7 @@
             <a:r>
               <a:rPr lang="en-GB" sz="1200" dirty="0">
                 <a:solidFill>
-                  <a:schemeClr val="bg1"/>
+                  <a:srgbClr val="CDD6F4"/>
                 </a:solidFill>
                 <a:latin typeface="JetBrains Mono" panose="02000009000000000000" pitchFamily="49" charset="0"/>
                 <a:ea typeface="JetBrains Mono" panose="02000009000000000000" pitchFamily="49" charset="0"/>
@@ -4673,7 +4673,7 @@
             <a:br>
               <a:rPr lang="en-GB" sz="1200" dirty="0">
                 <a:solidFill>
-                  <a:schemeClr val="bg1"/>
+                  <a:srgbClr val="CDD6F4"/>
                 </a:solidFill>
                 <a:latin typeface="JetBrains Mono" panose="02000009000000000000" pitchFamily="49" charset="0"/>
                 <a:ea typeface="JetBrains Mono" panose="02000009000000000000" pitchFamily="49" charset="0"/>
@@ -4683,7 +4683,7 @@
             <a:r>
               <a:rPr lang="en-GB" sz="1200" dirty="0">
                 <a:solidFill>
-                  <a:schemeClr val="bg1"/>
+                  <a:srgbClr val="CDD6F4"/>
                 </a:solidFill>
                 <a:latin typeface="JetBrains Mono" panose="02000009000000000000" pitchFamily="49" charset="0"/>
                 <a:ea typeface="JetBrains Mono" panose="02000009000000000000" pitchFamily="49" charset="0"/>
@@ -4694,7 +4694,7 @@
             <a:br>
               <a:rPr lang="en-GB" sz="1200" dirty="0">
                 <a:solidFill>
-                  <a:schemeClr val="bg1"/>
+                  <a:srgbClr val="CDD6F4"/>
                 </a:solidFill>
                 <a:latin typeface="JetBrains Mono" panose="02000009000000000000" pitchFamily="49" charset="0"/>
                 <a:ea typeface="JetBrains Mono" panose="02000009000000000000" pitchFamily="49" charset="0"/>
@@ -4704,7 +4704,7 @@
             <a:r>
               <a:rPr lang="en-GB" sz="1200" dirty="0">
                 <a:solidFill>
-                  <a:schemeClr val="bg1"/>
+                  <a:srgbClr val="CDD6F4"/>
                 </a:solidFill>
                 <a:latin typeface="JetBrains Mono" panose="02000009000000000000" pitchFamily="49" charset="0"/>
                 <a:ea typeface="JetBrains Mono" panose="02000009000000000000" pitchFamily="49" charset="0"/>
@@ -4715,7 +4715,7 @@
             <a:br>
               <a:rPr lang="en-GB" sz="1200" dirty="0">
                 <a:solidFill>
-                  <a:schemeClr val="bg1"/>
+                  <a:srgbClr val="CDD6F4"/>
                 </a:solidFill>
                 <a:latin typeface="JetBrains Mono" panose="02000009000000000000" pitchFamily="49" charset="0"/>
                 <a:ea typeface="JetBrains Mono" panose="02000009000000000000" pitchFamily="49" charset="0"/>
@@ -4725,7 +4725,7 @@
             <a:r>
               <a:rPr lang="en-GB" sz="1200" dirty="0">
                 <a:solidFill>
-                  <a:schemeClr val="bg1"/>
+                  <a:srgbClr val="CDD6F4"/>
                 </a:solidFill>
                 <a:latin typeface="JetBrains Mono" panose="02000009000000000000" pitchFamily="49" charset="0"/>
                 <a:ea typeface="JetBrains Mono" panose="02000009000000000000" pitchFamily="49" charset="0"/>
@@ -4736,7 +4736,7 @@
             <a:br>
               <a:rPr lang="en-GB" sz="1200" dirty="0">
                 <a:solidFill>
-                  <a:schemeClr val="bg1"/>
+                  <a:srgbClr val="CDD6F4"/>
                 </a:solidFill>
                 <a:latin typeface="JetBrains Mono" panose="02000009000000000000" pitchFamily="49" charset="0"/>
                 <a:ea typeface="JetBrains Mono" panose="02000009000000000000" pitchFamily="49" charset="0"/>
@@ -4746,7 +4746,7 @@
             <a:r>
               <a:rPr lang="en-GB" sz="1200" dirty="0">
                 <a:solidFill>
-                  <a:schemeClr val="bg1"/>
+                  <a:srgbClr val="CDD6F4"/>
                 </a:solidFill>
                 <a:latin typeface="JetBrains Mono" panose="02000009000000000000" pitchFamily="49" charset="0"/>
                 <a:ea typeface="JetBrains Mono" panose="02000009000000000000" pitchFamily="49" charset="0"/>
@@ -4764,7 +4764,7 @@
             </a:pPr>
             <a:endParaRPr lang="en-GB" sz="1200" dirty="0">
               <a:solidFill>
-                <a:schemeClr val="bg1"/>
+                <a:srgbClr val="CDD6F4"/>
               </a:solidFill>
               <a:latin typeface="JetBrains Mono" panose="02000009000000000000" pitchFamily="49" charset="0"/>
               <a:ea typeface="JetBrains Mono" panose="02000009000000000000" pitchFamily="49" charset="0"/>
@@ -4781,13 +4781,13 @@
             <a:r>
               <a:rPr lang="en-GB" sz="1600" b="1" dirty="0">
                 <a:solidFill>
-                  <a:schemeClr val="bg1"/>
-                </a:solidFill>
-                <a:latin typeface="JetBrains Mono" panose="02000009000000000000" pitchFamily="49" charset="0"/>
-                <a:ea typeface="JetBrains Mono" panose="02000009000000000000" pitchFamily="49" charset="0"/>
-                <a:cs typeface="JetBrains Mono" panose="02000009000000000000" pitchFamily="49" charset="0"/>
-              </a:rPr>
-              <a:t>TUI</a:t>
+                  <a:srgbClr val="F38BA8"/>
+                </a:solidFill>
+                <a:latin typeface="JetBrains Mono" panose="02000009000000000000" pitchFamily="49" charset="0"/>
+                <a:ea typeface="JetBrains Mono" panose="02000009000000000000" pitchFamily="49" charset="0"/>
+                <a:cs typeface="JetBrains Mono" panose="02000009000000000000" pitchFamily="49" charset="0"/>
+              </a:rPr>
+              <a:t>Terminal UI</a:t>
             </a:r>
           </a:p>
           <a:p>
@@ -4800,7 +4800,7 @@
             <a:r>
               <a:rPr lang="en-GB" sz="1200" dirty="0">
                 <a:solidFill>
-                  <a:schemeClr val="bg1"/>
+                  <a:srgbClr val="CDD6F4"/>
                 </a:solidFill>
                 <a:latin typeface="JetBrains Mono" panose="02000009000000000000" pitchFamily="49" charset="0"/>
                 <a:ea typeface="JetBrains Mono" panose="02000009000000000000" pitchFamily="49" charset="0"/>
@@ -4811,7 +4811,7 @@
             <a:br>
               <a:rPr lang="en-GB" sz="1200" dirty="0">
                 <a:solidFill>
-                  <a:schemeClr val="bg1"/>
+                  <a:srgbClr val="CDD6F4"/>
                 </a:solidFill>
                 <a:latin typeface="JetBrains Mono" panose="02000009000000000000" pitchFamily="49" charset="0"/>
                 <a:ea typeface="JetBrains Mono" panose="02000009000000000000" pitchFamily="49" charset="0"/>
@@ -4821,7 +4821,7 @@
             <a:r>
               <a:rPr lang="en-GB" sz="1200" dirty="0">
                 <a:solidFill>
-                  <a:schemeClr val="bg1"/>
+                  <a:srgbClr val="CDD6F4"/>
                 </a:solidFill>
                 <a:latin typeface="JetBrains Mono" panose="02000009000000000000" pitchFamily="49" charset="0"/>
                 <a:ea typeface="JetBrains Mono" panose="02000009000000000000" pitchFamily="49" charset="0"/>
@@ -4832,7 +4832,7 @@
             <a:br>
               <a:rPr lang="en-GB" sz="1200" dirty="0">
                 <a:solidFill>
-                  <a:schemeClr val="bg1"/>
+                  <a:srgbClr val="CDD6F4"/>
                 </a:solidFill>
                 <a:latin typeface="JetBrains Mono" panose="02000009000000000000" pitchFamily="49" charset="0"/>
                 <a:ea typeface="JetBrains Mono" panose="02000009000000000000" pitchFamily="49" charset="0"/>
@@ -4842,7 +4842,7 @@
             <a:r>
               <a:rPr lang="en-GB" sz="1200" dirty="0">
                 <a:solidFill>
-                  <a:schemeClr val="bg1"/>
+                  <a:srgbClr val="CDD6F4"/>
                 </a:solidFill>
                 <a:latin typeface="JetBrains Mono" panose="02000009000000000000" pitchFamily="49" charset="0"/>
                 <a:ea typeface="JetBrains Mono" panose="02000009000000000000" pitchFamily="49" charset="0"/>
@@ -4853,7 +4853,7 @@
             <a:br>
               <a:rPr lang="en-GB" sz="1200" dirty="0">
                 <a:solidFill>
-                  <a:schemeClr val="bg1"/>
+                  <a:srgbClr val="CDD6F4"/>
                 </a:solidFill>
                 <a:latin typeface="JetBrains Mono" panose="02000009000000000000" pitchFamily="49" charset="0"/>
                 <a:ea typeface="JetBrains Mono" panose="02000009000000000000" pitchFamily="49" charset="0"/>
@@ -4863,7 +4863,7 @@
             <a:r>
               <a:rPr lang="en-GB" sz="1200" dirty="0">
                 <a:solidFill>
-                  <a:schemeClr val="bg1"/>
+                  <a:srgbClr val="CDD6F4"/>
                 </a:solidFill>
                 <a:latin typeface="JetBrains Mono" panose="02000009000000000000" pitchFamily="49" charset="0"/>
                 <a:ea typeface="JetBrains Mono" panose="02000009000000000000" pitchFamily="49" charset="0"/>
@@ -4874,7 +4874,7 @@
             <a:r>
               <a:rPr lang="en-GB" sz="1200" dirty="0" err="1">
                 <a:solidFill>
-                  <a:schemeClr val="bg1"/>
+                  <a:srgbClr val="CDD6F4"/>
                 </a:solidFill>
                 <a:latin typeface="JetBrains Mono" panose="02000009000000000000" pitchFamily="49" charset="0"/>
                 <a:ea typeface="JetBrains Mono" panose="02000009000000000000" pitchFamily="49" charset="0"/>
@@ -4885,7 +4885,7 @@
             <a:br>
               <a:rPr lang="en-GB" sz="1200" dirty="0">
                 <a:solidFill>
-                  <a:schemeClr val="bg1"/>
+                  <a:srgbClr val="CDD6F4"/>
                 </a:solidFill>
                 <a:latin typeface="JetBrains Mono" panose="02000009000000000000" pitchFamily="49" charset="0"/>
                 <a:ea typeface="JetBrains Mono" panose="02000009000000000000" pitchFamily="49" charset="0"/>
@@ -4895,7 +4895,7 @@
             <a:r>
               <a:rPr lang="en-GB" sz="1200" dirty="0">
                 <a:solidFill>
-                  <a:schemeClr val="bg1"/>
+                  <a:srgbClr val="CDD6F4"/>
                 </a:solidFill>
                 <a:latin typeface="JetBrains Mono" panose="02000009000000000000" pitchFamily="49" charset="0"/>
                 <a:ea typeface="JetBrains Mono" panose="02000009000000000000" pitchFamily="49" charset="0"/>
@@ -5151,7 +5151,7 @@
             </a:pPr>
             <a:endParaRPr lang="en-GB" sz="1600" b="1" dirty="0">
               <a:solidFill>
-                <a:schemeClr val="bg1"/>
+                <a:srgbClr val="CDD6F4"/>
               </a:solidFill>
               <a:latin typeface="JetBrains Mono" panose="02000009000000000000" pitchFamily="49" charset="0"/>
               <a:ea typeface="JetBrains Mono" panose="02000009000000000000" pitchFamily="49" charset="0"/>
@@ -5167,24 +5167,16 @@
               <a:buNone/>
             </a:pPr>
             <a:r>
-              <a:rPr lang="en-GB" sz="1600" b="1" dirty="0" err="1">
-                <a:solidFill>
-                  <a:schemeClr val="bg1"/>
-                </a:solidFill>
-                <a:latin typeface="JetBrains Mono" panose="02000009000000000000" pitchFamily="49" charset="0"/>
-                <a:ea typeface="JetBrains Mono" panose="02000009000000000000" pitchFamily="49" charset="0"/>
-                <a:cs typeface="JetBrains Mono" panose="02000009000000000000" pitchFamily="49" charset="0"/>
-              </a:rPr>
-              <a:t>saxpy</a:t>
-            </a:r>
-            <a:endParaRPr lang="en-GB" sz="1600" b="1" dirty="0">
-              <a:solidFill>
-                <a:schemeClr val="bg1"/>
-              </a:solidFill>
-              <a:latin typeface="JetBrains Mono" panose="02000009000000000000" pitchFamily="49" charset="0"/>
-              <a:ea typeface="JetBrains Mono" panose="02000009000000000000" pitchFamily="49" charset="0"/>
-              <a:cs typeface="JetBrains Mono" panose="02000009000000000000" pitchFamily="49" charset="0"/>
-            </a:endParaRPr>
+              <a:rPr lang="en-GB" sz="1600" b="1" dirty="0">
+                <a:solidFill>
+                  <a:srgbClr val="89B4FA"/>
+                </a:solidFill>
+                <a:latin typeface="JetBrains Mono" panose="02000009000000000000" pitchFamily="49" charset="0"/>
+                <a:ea typeface="JetBrains Mono" panose="02000009000000000000" pitchFamily="49" charset="0"/>
+                <a:cs typeface="JetBrains Mono" panose="02000009000000000000" pitchFamily="49" charset="0"/>
+              </a:rPr>
+              <a:t>SAXPY</a:t>
+            </a:r>
           </a:p>
           <a:p>
             <a:pPr marL="0" indent="0">
@@ -5197,7 +5189,7 @@
             <a:r>
               <a:rPr lang="en-GB" sz="1200" dirty="0">
                 <a:solidFill>
-                  <a:schemeClr val="bg1"/>
+                  <a:srgbClr val="CDD6F4"/>
                 </a:solidFill>
                 <a:latin typeface="JetBrains Mono" panose="02000009000000000000" pitchFamily="49" charset="0"/>
                 <a:ea typeface="JetBrains Mono" panose="02000009000000000000" pitchFamily="49" charset="0"/>
@@ -5208,7 +5200,7 @@
             <a:r>
               <a:rPr lang="en-GB" sz="1200" dirty="0" err="1">
                 <a:solidFill>
-                  <a:schemeClr val="bg1"/>
+                  <a:srgbClr val="CDD6F4"/>
                 </a:solidFill>
                 <a:latin typeface="JetBrains Mono" panose="02000009000000000000" pitchFamily="49" charset="0"/>
                 <a:ea typeface="JetBrains Mono" panose="02000009000000000000" pitchFamily="49" charset="0"/>
@@ -5219,7 +5211,7 @@
             <a:r>
               <a:rPr lang="en-GB" sz="1200" dirty="0">
                 <a:solidFill>
-                  <a:schemeClr val="bg1"/>
+                  <a:srgbClr val="CDD6F4"/>
                 </a:solidFill>
                 <a:latin typeface="JetBrains Mono" panose="02000009000000000000" pitchFamily="49" charset="0"/>
                 <a:ea typeface="JetBrains Mono" panose="02000009000000000000" pitchFamily="49" charset="0"/>
@@ -5239,7 +5231,7 @@
             <a:r>
               <a:rPr lang="en-GB" sz="1200" dirty="0">
                 <a:solidFill>
-                  <a:schemeClr val="bg1"/>
+                  <a:srgbClr val="CDD6F4"/>
                 </a:solidFill>
                 <a:latin typeface="JetBrains Mono" panose="02000009000000000000" pitchFamily="49" charset="0"/>
                 <a:ea typeface="JetBrains Mono" panose="02000009000000000000" pitchFamily="49" charset="0"/>
@@ -5281,7 +5273,7 @@
             <a:r>
               <a:rPr lang="en-GB" sz="2800" dirty="0">
                 <a:solidFill>
-                  <a:schemeClr val="bg1"/>
+                  <a:srgbClr val="B4BEFE"/>
                 </a:solidFill>
                 <a:latin typeface="JetBrains Mono" panose="02000009000000000000" pitchFamily="49" charset="0"/>
                 <a:ea typeface="JetBrains Mono" panose="02000009000000000000" pitchFamily="49" charset="0"/>
@@ -5493,7 +5485,7 @@
             </a:pPr>
             <a:endParaRPr lang="en-GB" sz="1600" b="1" dirty="0">
               <a:solidFill>
-                <a:schemeClr val="bg1"/>
+                <a:srgbClr val="CDD6F4"/>
               </a:solidFill>
               <a:latin typeface="JetBrains Mono" panose="02000009000000000000" pitchFamily="49" charset="0"/>
               <a:ea typeface="JetBrains Mono" panose="02000009000000000000" pitchFamily="49" charset="0"/>
@@ -5511,13 +5503,13 @@
             <a:r>
               <a:rPr lang="en-GB" sz="1600" b="1" dirty="0">
                 <a:solidFill>
-                  <a:schemeClr val="bg1"/>
-                </a:solidFill>
-                <a:latin typeface="JetBrains Mono" panose="02000009000000000000" pitchFamily="49" charset="0"/>
-                <a:ea typeface="JetBrains Mono" panose="02000009000000000000" pitchFamily="49" charset="0"/>
-                <a:cs typeface="JetBrains Mono" panose="02000009000000000000" pitchFamily="49" charset="0"/>
-              </a:rPr>
-              <a:t>dot</a:t>
+                  <a:srgbClr val="CBA6F7"/>
+                </a:solidFill>
+                <a:latin typeface="JetBrains Mono" panose="02000009000000000000" pitchFamily="49" charset="0"/>
+                <a:ea typeface="JetBrains Mono" panose="02000009000000000000" pitchFamily="49" charset="0"/>
+                <a:cs typeface="JetBrains Mono" panose="02000009000000000000" pitchFamily="49" charset="0"/>
+              </a:rPr>
+              <a:t>Dot</a:t>
             </a:r>
           </a:p>
           <a:p>
@@ -5531,7 +5523,7 @@
             <a:r>
               <a:rPr lang="en-GB" sz="1200" dirty="0">
                 <a:solidFill>
-                  <a:schemeClr val="bg1"/>
+                  <a:srgbClr val="CDD6F4"/>
                 </a:solidFill>
                 <a:latin typeface="JetBrains Mono" panose="02000009000000000000" pitchFamily="49" charset="0"/>
                 <a:ea typeface="JetBrains Mono" panose="02000009000000000000" pitchFamily="49" charset="0"/>
@@ -5550,7 +5542,7 @@
             <a:r>
               <a:rPr lang="en-GB" sz="1200" dirty="0">
                 <a:solidFill>
-                  <a:schemeClr val="bg1"/>
+                  <a:srgbClr val="CDD6F4"/>
                 </a:solidFill>
                 <a:latin typeface="JetBrains Mono" panose="02000009000000000000" pitchFamily="49" charset="0"/>
                 <a:ea typeface="JetBrains Mono" panose="02000009000000000000" pitchFamily="49" charset="0"/>
@@ -5762,7 +5754,7 @@
             </a:pPr>
             <a:endParaRPr lang="en-GB" sz="1600" b="1" dirty="0">
               <a:solidFill>
-                <a:schemeClr val="bg1"/>
+                <a:srgbClr val="CDD6F4"/>
               </a:solidFill>
               <a:latin typeface="JetBrains Mono" panose="02000009000000000000" pitchFamily="49" charset="0"/>
               <a:ea typeface="JetBrains Mono" panose="02000009000000000000" pitchFamily="49" charset="0"/>
@@ -5778,24 +5770,16 @@
               <a:buNone/>
             </a:pPr>
             <a:r>
-              <a:rPr lang="en-GB" sz="1600" b="1" dirty="0" err="1">
-                <a:solidFill>
-                  <a:schemeClr val="bg1"/>
-                </a:solidFill>
-                <a:latin typeface="JetBrains Mono" panose="02000009000000000000" pitchFamily="49" charset="0"/>
-                <a:ea typeface="JetBrains Mono" panose="02000009000000000000" pitchFamily="49" charset="0"/>
-                <a:cs typeface="JetBrains Mono" panose="02000009000000000000" pitchFamily="49" charset="0"/>
-              </a:rPr>
-              <a:t>fibonacci</a:t>
-            </a:r>
-            <a:endParaRPr lang="en-GB" sz="1600" b="1" dirty="0">
-              <a:solidFill>
-                <a:schemeClr val="bg1"/>
-              </a:solidFill>
-              <a:latin typeface="JetBrains Mono" panose="02000009000000000000" pitchFamily="49" charset="0"/>
-              <a:ea typeface="JetBrains Mono" panose="02000009000000000000" pitchFamily="49" charset="0"/>
-              <a:cs typeface="JetBrains Mono" panose="02000009000000000000" pitchFamily="49" charset="0"/>
-            </a:endParaRPr>
+              <a:rPr lang="en-GB" sz="1600" b="1" dirty="0">
+                <a:solidFill>
+                  <a:srgbClr val="F38BA8"/>
+                </a:solidFill>
+                <a:latin typeface="JetBrains Mono" panose="02000009000000000000" pitchFamily="49" charset="0"/>
+                <a:ea typeface="JetBrains Mono" panose="02000009000000000000" pitchFamily="49" charset="0"/>
+                <a:cs typeface="JetBrains Mono" panose="02000009000000000000" pitchFamily="49" charset="0"/>
+              </a:rPr>
+              <a:t>Fibonacci</a:t>
+            </a:r>
           </a:p>
           <a:p>
             <a:pPr marL="0" indent="0">
@@ -5808,7 +5792,7 @@
             <a:r>
               <a:rPr lang="en-GB" sz="1200" dirty="0">
                 <a:solidFill>
-                  <a:schemeClr val="bg1"/>
+                  <a:srgbClr val="CDD6F4"/>
                 </a:solidFill>
                 <a:latin typeface="JetBrains Mono" panose="02000009000000000000" pitchFamily="49" charset="0"/>
                 <a:ea typeface="JetBrains Mono" panose="02000009000000000000" pitchFamily="49" charset="0"/>
@@ -5819,7 +5803,7 @@
             <a:r>
               <a:rPr lang="en-GB" sz="1200" baseline="30000" dirty="0">
                 <a:solidFill>
-                  <a:schemeClr val="bg1"/>
+                  <a:srgbClr val="CDD6F4"/>
                 </a:solidFill>
                 <a:latin typeface="JetBrains Mono" panose="02000009000000000000" pitchFamily="49" charset="0"/>
                 <a:ea typeface="JetBrains Mono" panose="02000009000000000000" pitchFamily="49" charset="0"/>
@@ -5830,7 +5814,7 @@
             <a:r>
               <a:rPr lang="en-GB" sz="1200" dirty="0">
                 <a:solidFill>
-                  <a:schemeClr val="bg1"/>
+                  <a:srgbClr val="CDD6F4"/>
                 </a:solidFill>
                 <a:latin typeface="JetBrains Mono" panose="02000009000000000000" pitchFamily="49" charset="0"/>
                 <a:ea typeface="JetBrains Mono" panose="02000009000000000000" pitchFamily="49" charset="0"/>
@@ -6042,7 +6026,7 @@
             </a:pPr>
             <a:endParaRPr lang="en-GB" sz="1600" b="1" dirty="0">
               <a:solidFill>
-                <a:schemeClr val="bg1"/>
+                <a:srgbClr val="CDD6F4"/>
               </a:solidFill>
               <a:latin typeface="JetBrains Mono" panose="02000009000000000000" pitchFamily="49" charset="0"/>
               <a:ea typeface="JetBrains Mono" panose="02000009000000000000" pitchFamily="49" charset="0"/>
@@ -6060,13 +6044,13 @@
             <a:r>
               <a:rPr lang="en-GB" sz="1600" b="1" dirty="0">
                 <a:solidFill>
-                  <a:schemeClr val="bg1"/>
-                </a:solidFill>
-                <a:latin typeface="JetBrains Mono" panose="02000009000000000000" pitchFamily="49" charset="0"/>
-                <a:ea typeface="JetBrains Mono" panose="02000009000000000000" pitchFamily="49" charset="0"/>
-                <a:cs typeface="JetBrains Mono" panose="02000009000000000000" pitchFamily="49" charset="0"/>
-              </a:rPr>
-              <a:t>gaussian</a:t>
+                  <a:srgbClr val="A6E3A1"/>
+                </a:solidFill>
+                <a:latin typeface="JetBrains Mono" panose="02000009000000000000" pitchFamily="49" charset="0"/>
+                <a:ea typeface="JetBrains Mono" panose="02000009000000000000" pitchFamily="49" charset="0"/>
+                <a:cs typeface="JetBrains Mono" panose="02000009000000000000" pitchFamily="49" charset="0"/>
+              </a:rPr>
+              <a:t>Gaussian</a:t>
             </a:r>
           </a:p>
           <a:p>
@@ -6080,7 +6064,7 @@
             <a:r>
               <a:rPr lang="en-GB" sz="1200" dirty="0">
                 <a:solidFill>
-                  <a:schemeClr val="bg1"/>
+                  <a:srgbClr val="CDD6F4"/>
                 </a:solidFill>
                 <a:latin typeface="JetBrains Mono" panose="02000009000000000000" pitchFamily="49" charset="0"/>
                 <a:ea typeface="JetBrains Mono" panose="02000009000000000000" pitchFamily="49" charset="0"/>
@@ -6100,7 +6084,7 @@
             <a:r>
               <a:rPr lang="en-GB" sz="1200" dirty="0">
                 <a:solidFill>
-                  <a:schemeClr val="bg1"/>
+                  <a:srgbClr val="CDD6F4"/>
                 </a:solidFill>
                 <a:latin typeface="JetBrains Mono" panose="02000009000000000000" pitchFamily="49" charset="0"/>
                 <a:ea typeface="JetBrains Mono" panose="02000009000000000000" pitchFamily="49" charset="0"/>
@@ -6312,7 +6296,7 @@
             </a:pPr>
             <a:endParaRPr lang="en-GB" sz="1600" b="1" dirty="0">
               <a:solidFill>
-                <a:schemeClr val="bg1"/>
+                <a:srgbClr val="CDD6F4"/>
               </a:solidFill>
               <a:latin typeface="JetBrains Mono" panose="02000009000000000000" pitchFamily="49" charset="0"/>
               <a:ea typeface="JetBrains Mono" panose="02000009000000000000" pitchFamily="49" charset="0"/>
@@ -6330,17 +6314,17 @@
             <a:r>
               <a:rPr lang="en-GB" sz="1600" b="1" dirty="0" err="1">
                 <a:solidFill>
-                  <a:schemeClr val="bg1"/>
-                </a:solidFill>
-                <a:latin typeface="JetBrains Mono" panose="02000009000000000000" pitchFamily="49" charset="0"/>
-                <a:ea typeface="JetBrains Mono" panose="02000009000000000000" pitchFamily="49" charset="0"/>
-                <a:cs typeface="JetBrains Mono" panose="02000009000000000000" pitchFamily="49" charset="0"/>
-              </a:rPr>
-              <a:t>matmul</a:t>
+                  <a:srgbClr val="F9E2AF"/>
+                </a:solidFill>
+                <a:latin typeface="JetBrains Mono" panose="02000009000000000000" pitchFamily="49" charset="0"/>
+                <a:ea typeface="JetBrains Mono" panose="02000009000000000000" pitchFamily="49" charset="0"/>
+                <a:cs typeface="JetBrains Mono" panose="02000009000000000000" pitchFamily="49" charset="0"/>
+              </a:rPr>
+              <a:t>Matmul</a:t>
             </a:r>
             <a:endParaRPr lang="en-GB" sz="1600" b="1" dirty="0">
               <a:solidFill>
-                <a:schemeClr val="bg1"/>
+                <a:srgbClr val="F9E2AF"/>
               </a:solidFill>
               <a:latin typeface="JetBrains Mono" panose="02000009000000000000" pitchFamily="49" charset="0"/>
               <a:ea typeface="JetBrains Mono" panose="02000009000000000000" pitchFamily="49" charset="0"/>
@@ -6358,7 +6342,7 @@
             <a:r>
               <a:rPr lang="en-GB" sz="1200" dirty="0">
                 <a:solidFill>
-                  <a:schemeClr val="bg1"/>
+                  <a:srgbClr val="CDD6F4"/>
                 </a:solidFill>
                 <a:latin typeface="JetBrains Mono" panose="02000009000000000000" pitchFamily="49" charset="0"/>
                 <a:ea typeface="JetBrains Mono" panose="02000009000000000000" pitchFamily="49" charset="0"/>
@@ -6369,7 +6353,7 @@
             <a:br>
               <a:rPr lang="en-GB" sz="1200" dirty="0">
                 <a:solidFill>
-                  <a:schemeClr val="bg1"/>
+                  <a:srgbClr val="CDD6F4"/>
                 </a:solidFill>
                 <a:latin typeface="JetBrains Mono" panose="02000009000000000000" pitchFamily="49" charset="0"/>
                 <a:ea typeface="JetBrains Mono" panose="02000009000000000000" pitchFamily="49" charset="0"/>
@@ -6379,7 +6363,7 @@
             <a:r>
               <a:rPr lang="en-GB" sz="1200" dirty="0">
                 <a:solidFill>
-                  <a:schemeClr val="bg1"/>
+                  <a:srgbClr val="CDD6F4"/>
                 </a:solidFill>
                 <a:latin typeface="JetBrains Mono" panose="02000009000000000000" pitchFamily="49" charset="0"/>
                 <a:ea typeface="JetBrains Mono" panose="02000009000000000000" pitchFamily="49" charset="0"/>
@@ -6399,7 +6383,7 @@
             <a:r>
               <a:rPr lang="en-GB" sz="1200" dirty="0">
                 <a:solidFill>
-                  <a:schemeClr val="bg1"/>
+                  <a:srgbClr val="CDD6F4"/>
                 </a:solidFill>
                 <a:latin typeface="JetBrains Mono" panose="02000009000000000000" pitchFamily="49" charset="0"/>
                 <a:ea typeface="JetBrains Mono" panose="02000009000000000000" pitchFamily="49" charset="0"/>
@@ -6611,7 +6595,7 @@
             </a:pPr>
             <a:endParaRPr lang="en-GB" sz="1600" b="1" dirty="0">
               <a:solidFill>
-                <a:schemeClr val="bg1"/>
+                <a:srgbClr val="CDD6F4"/>
               </a:solidFill>
               <a:latin typeface="JetBrains Mono" panose="02000009000000000000" pitchFamily="49" charset="0"/>
               <a:ea typeface="JetBrains Mono" panose="02000009000000000000" pitchFamily="49" charset="0"/>
@@ -6629,13 +6613,13 @@
             <a:r>
               <a:rPr lang="en-GB" sz="1600" b="1" dirty="0">
                 <a:solidFill>
-                  <a:schemeClr val="bg1"/>
-                </a:solidFill>
-                <a:latin typeface="JetBrains Mono" panose="02000009000000000000" pitchFamily="49" charset="0"/>
-                <a:ea typeface="JetBrains Mono" panose="02000009000000000000" pitchFamily="49" charset="0"/>
-                <a:cs typeface="JetBrains Mono" panose="02000009000000000000" pitchFamily="49" charset="0"/>
-              </a:rPr>
-              <a:t>quicksort</a:t>
+                  <a:srgbClr val="FAB387"/>
+                </a:solidFill>
+                <a:latin typeface="JetBrains Mono" panose="02000009000000000000" pitchFamily="49" charset="0"/>
+                <a:ea typeface="JetBrains Mono" panose="02000009000000000000" pitchFamily="49" charset="0"/>
+                <a:cs typeface="JetBrains Mono" panose="02000009000000000000" pitchFamily="49" charset="0"/>
+              </a:rPr>
+              <a:t>Quicksort</a:t>
             </a:r>
           </a:p>
           <a:p>
@@ -6649,7 +6633,7 @@
             <a:r>
               <a:rPr lang="en-GB" sz="1200" dirty="0">
                 <a:solidFill>
-                  <a:schemeClr val="bg1"/>
+                  <a:srgbClr val="CDD6F4"/>
                 </a:solidFill>
                 <a:latin typeface="JetBrains Mono" panose="02000009000000000000" pitchFamily="49" charset="0"/>
                 <a:ea typeface="JetBrains Mono" panose="02000009000000000000" pitchFamily="49" charset="0"/>
@@ -6735,7 +6719,7 @@
             <a:r>
               <a:rPr lang="en-GB" sz="2800" dirty="0">
                 <a:solidFill>
-                  <a:schemeClr val="bg1"/>
+                  <a:srgbClr val="B4BEFE"/>
                 </a:solidFill>
                 <a:latin typeface="JetBrains Mono" panose="02000009000000000000" pitchFamily="49" charset="0"/>
                 <a:ea typeface="JetBrains Mono" panose="02000009000000000000" pitchFamily="49" charset="0"/>
@@ -6765,7 +6749,7 @@
         <p:spPr>
           <a:xfrm>
             <a:off x="838200" y="819150"/>
-            <a:ext cx="5314950" cy="5357813"/>
+            <a:ext cx="5314950" cy="6038850"/>
           </a:xfrm>
         </p:spPr>
         <p:txBody>
@@ -6780,10 +6764,26 @@
               </a:lnSpc>
               <a:buNone/>
             </a:pPr>
+            <a:endParaRPr lang="en-GB" sz="1600" b="1" dirty="0">
+              <a:solidFill>
+                <a:srgbClr val="A6E3A1"/>
+              </a:solidFill>
+              <a:latin typeface="JetBrains Mono" panose="02000009000000000000" pitchFamily="49" charset="0"/>
+              <a:ea typeface="JetBrains Mono" panose="02000009000000000000" pitchFamily="49" charset="0"/>
+              <a:cs typeface="JetBrains Mono" panose="02000009000000000000" pitchFamily="49" charset="0"/>
+            </a:endParaRPr>
+          </a:p>
+          <a:p>
+            <a:pPr marL="0" indent="0">
+              <a:lnSpc>
+                <a:spcPct val="100000"/>
+              </a:lnSpc>
+              <a:buNone/>
+            </a:pPr>
             <a:r>
               <a:rPr lang="en-GB" sz="1600" b="1" dirty="0">
                 <a:solidFill>
-                  <a:schemeClr val="bg1"/>
+                  <a:srgbClr val="CBA6F7"/>
                 </a:solidFill>
                 <a:latin typeface="JetBrains Mono" panose="02000009000000000000" pitchFamily="49" charset="0"/>
                 <a:ea typeface="JetBrains Mono" panose="02000009000000000000" pitchFamily="49" charset="0"/>
@@ -6802,7 +6802,7 @@
             <a:r>
               <a:rPr lang="en-GB" sz="1200" dirty="0">
                 <a:solidFill>
-                  <a:schemeClr val="bg1"/>
+                  <a:srgbClr val="CDD6F4"/>
                 </a:solidFill>
                 <a:latin typeface="JetBrains Mono" panose="02000009000000000000" pitchFamily="49" charset="0"/>
                 <a:ea typeface="JetBrains Mono" panose="02000009000000000000" pitchFamily="49" charset="0"/>
@@ -6834,7 +6834,7 @@
                 <a:noFill/>
               </a:ln>
               <a:solidFill>
-                <a:prstClr val="white"/>
+                <a:srgbClr val="CDD6F4"/>
               </a:solidFill>
               <a:effectLst/>
               <a:uLnTx/>
@@ -6868,7 +6868,7 @@
                   <a:noFill/>
                 </a:ln>
                 <a:solidFill>
-                  <a:prstClr val="white"/>
+                  <a:srgbClr val="89B4FA"/>
                 </a:solidFill>
                 <a:effectLst/>
                 <a:uLnTx/>
@@ -6890,7 +6890,7 @@
             <a:r>
               <a:rPr lang="en-GB" sz="1200" dirty="0">
                 <a:solidFill>
-                  <a:schemeClr val="bg1"/>
+                  <a:srgbClr val="CDD6F4"/>
                 </a:solidFill>
                 <a:latin typeface="JetBrains Mono" panose="02000009000000000000" pitchFamily="49" charset="0"/>
                 <a:ea typeface="JetBrains Mono" panose="02000009000000000000" pitchFamily="49" charset="0"/>
@@ -6901,7 +6901,7 @@
             <a:br>
               <a:rPr lang="en-GB" sz="1200" dirty="0">
                 <a:solidFill>
-                  <a:schemeClr val="bg1"/>
+                  <a:srgbClr val="CDD6F4"/>
                 </a:solidFill>
                 <a:latin typeface="JetBrains Mono" panose="02000009000000000000" pitchFamily="49" charset="0"/>
                 <a:ea typeface="JetBrains Mono" panose="02000009000000000000" pitchFamily="49" charset="0"/>
@@ -6911,7 +6911,7 @@
             <a:r>
               <a:rPr lang="en-GB" sz="1200" dirty="0">
                 <a:solidFill>
-                  <a:schemeClr val="bg1"/>
+                  <a:srgbClr val="CDD6F4"/>
                 </a:solidFill>
                 <a:latin typeface="JetBrains Mono" panose="02000009000000000000" pitchFamily="49" charset="0"/>
                 <a:ea typeface="JetBrains Mono" panose="02000009000000000000" pitchFamily="49" charset="0"/>
@@ -6929,7 +6929,7 @@
             </a:pPr>
             <a:endParaRPr lang="en-GB" sz="1200" dirty="0">
               <a:solidFill>
-                <a:schemeClr val="bg1"/>
+                <a:srgbClr val="CDD6F4"/>
               </a:solidFill>
               <a:latin typeface="JetBrains Mono" panose="02000009000000000000" pitchFamily="49" charset="0"/>
               <a:ea typeface="JetBrains Mono" panose="02000009000000000000" pitchFamily="49" charset="0"/>
@@ -6946,7 +6946,7 @@
             <a:r>
               <a:rPr lang="en-GB" sz="1600" b="1" dirty="0">
                 <a:solidFill>
-                  <a:schemeClr val="bg1"/>
+                  <a:srgbClr val="A6E3A1"/>
                 </a:solidFill>
                 <a:latin typeface="JetBrains Mono" panose="02000009000000000000" pitchFamily="49" charset="0"/>
                 <a:ea typeface="JetBrains Mono" panose="02000009000000000000" pitchFamily="49" charset="0"/>
@@ -6965,7 +6965,7 @@
             <a:r>
               <a:rPr lang="en-GB" sz="1200" dirty="0">
                 <a:solidFill>
-                  <a:schemeClr val="bg1"/>
+                  <a:srgbClr val="CDD6F4"/>
                 </a:solidFill>
                 <a:latin typeface="JetBrains Mono" panose="02000009000000000000" pitchFamily="49" charset="0"/>
                 <a:ea typeface="JetBrains Mono" panose="02000009000000000000" pitchFamily="49" charset="0"/>
@@ -6984,7 +6984,7 @@
             <a:r>
               <a:rPr lang="en-GB" sz="1200" dirty="0">
                 <a:solidFill>
-                  <a:schemeClr val="bg1"/>
+                  <a:srgbClr val="CDD6F4"/>
                 </a:solidFill>
                 <a:latin typeface="JetBrains Mono" panose="02000009000000000000" pitchFamily="49" charset="0"/>
                 <a:ea typeface="JetBrains Mono" panose="02000009000000000000" pitchFamily="49" charset="0"/>
@@ -7106,7 +7106,7 @@
             <a:r>
               <a:rPr lang="en-GB" sz="2800" dirty="0">
                 <a:solidFill>
-                  <a:schemeClr val="bg1"/>
+                  <a:srgbClr val="B4BEFE"/>
                 </a:solidFill>
                 <a:latin typeface="JetBrains Mono" panose="02000009000000000000" pitchFamily="49" charset="0"/>
                 <a:ea typeface="JetBrains Mono" panose="02000009000000000000" pitchFamily="49" charset="0"/>
@@ -7136,7 +7136,7 @@
         <p:spPr>
           <a:xfrm>
             <a:off x="838200" y="819150"/>
-            <a:ext cx="5314950" cy="5357813"/>
+            <a:ext cx="5314950" cy="6038850"/>
           </a:xfrm>
         </p:spPr>
         <p:txBody>
@@ -7162,23 +7162,20 @@
               <a:tabLst/>
               <a:defRPr/>
             </a:pPr>
-            <a:r>
-              <a:rPr kumimoji="0" lang="en-GB" sz="1600" b="1" i="0" u="none" strike="noStrike" kern="1200" cap="none" spc="0" normalizeH="0" baseline="0" noProof="0" dirty="0">
-                <a:ln>
-                  <a:noFill/>
-                </a:ln>
-                <a:solidFill>
-                  <a:prstClr val="white"/>
-                </a:solidFill>
-                <a:effectLst/>
-                <a:uLnTx/>
-                <a:uFillTx/>
-                <a:latin typeface="JetBrains Mono" panose="02000009000000000000" pitchFamily="49" charset="0"/>
-                <a:ea typeface="JetBrains Mono" panose="02000009000000000000" pitchFamily="49" charset="0"/>
-                <a:cs typeface="JetBrains Mono" panose="02000009000000000000" pitchFamily="49" charset="0"/>
-              </a:rPr>
-              <a:t>Hypothesis</a:t>
-            </a:r>
+            <a:endParaRPr kumimoji="0" lang="en-GB" sz="1600" b="1" i="0" u="none" strike="noStrike" kern="1200" cap="none" spc="0" normalizeH="0" baseline="0" noProof="0" dirty="0">
+              <a:ln>
+                <a:noFill/>
+              </a:ln>
+              <a:solidFill>
+                <a:srgbClr val="A6E3A1"/>
+              </a:solidFill>
+              <a:effectLst/>
+              <a:uLnTx/>
+              <a:uFillTx/>
+              <a:latin typeface="JetBrains Mono" panose="02000009000000000000" pitchFamily="49" charset="0"/>
+              <a:ea typeface="JetBrains Mono" panose="02000009000000000000" pitchFamily="49" charset="0"/>
+              <a:cs typeface="JetBrains Mono" panose="02000009000000000000" pitchFamily="49" charset="0"/>
+            </a:endParaRPr>
           </a:p>
           <a:p>
             <a:pPr marL="0" marR="0" lvl="0" indent="0" algn="l" defTabSz="914400" rtl="0" eaLnBrk="1" fontAlgn="auto" latinLnBrk="0" hangingPunct="1">
@@ -7199,12 +7196,12 @@
               <a:defRPr/>
             </a:pPr>
             <a:r>
-              <a:rPr kumimoji="0" lang="en-GB" sz="1200" b="0" i="0" u="none" strike="noStrike" kern="1200" cap="none" spc="0" normalizeH="0" baseline="0" noProof="0" dirty="0">
+              <a:rPr kumimoji="0" lang="en-GB" sz="1600" b="1" i="0" u="none" strike="noStrike" kern="1200" cap="none" spc="0" normalizeH="0" baseline="0" noProof="0" dirty="0">
                 <a:ln>
                   <a:noFill/>
                 </a:ln>
                 <a:solidFill>
-                  <a:prstClr val="white"/>
+                  <a:srgbClr val="CBA6F7"/>
                 </a:solidFill>
                 <a:effectLst/>
                 <a:uLnTx/>
@@ -7213,7 +7210,7 @@
                 <a:ea typeface="JetBrains Mono" panose="02000009000000000000" pitchFamily="49" charset="0"/>
                 <a:cs typeface="JetBrains Mono" panose="02000009000000000000" pitchFamily="49" charset="0"/>
               </a:rPr>
-              <a:t>Dynamic branch prediction will show an improvement in prediction accuracy over static policies in most cases.</a:t>
+              <a:t>Hypothesis</a:t>
             </a:r>
           </a:p>
           <a:p>
@@ -7234,12 +7231,48 @@
               <a:tabLst/>
               <a:defRPr/>
             </a:pPr>
+            <a:r>
+              <a:rPr kumimoji="0" lang="en-GB" sz="1200" b="0" i="0" u="none" strike="noStrike" kern="1200" cap="none" spc="0" normalizeH="0" baseline="0" noProof="0" dirty="0">
+                <a:ln>
+                  <a:noFill/>
+                </a:ln>
+                <a:solidFill>
+                  <a:srgbClr val="CDD6F4"/>
+                </a:solidFill>
+                <a:effectLst/>
+                <a:uLnTx/>
+                <a:uFillTx/>
+                <a:latin typeface="JetBrains Mono" panose="02000009000000000000" pitchFamily="49" charset="0"/>
+                <a:ea typeface="JetBrains Mono" panose="02000009000000000000" pitchFamily="49" charset="0"/>
+                <a:cs typeface="JetBrains Mono" panose="02000009000000000000" pitchFamily="49" charset="0"/>
+              </a:rPr>
+              <a:t>Dynamic branch prediction will show an improvement in prediction accuracy over static policies in most cases.</a:t>
+            </a:r>
+          </a:p>
+          <a:p>
+            <a:pPr marL="0" marR="0" lvl="0" indent="0" algn="l" defTabSz="914400" rtl="0" eaLnBrk="1" fontAlgn="auto" latinLnBrk="0" hangingPunct="1">
+              <a:lnSpc>
+                <a:spcPct val="100000"/>
+              </a:lnSpc>
+              <a:spcBef>
+                <a:spcPts val="1000"/>
+              </a:spcBef>
+              <a:spcAft>
+                <a:spcPts val="0"/>
+              </a:spcAft>
+              <a:buClrTx/>
+              <a:buSzTx/>
+              <a:buFont typeface="Arial" panose="020B0604020202020204" pitchFamily="34" charset="0"/>
+              <a:buNone/>
+              <a:tabLst/>
+              <a:defRPr/>
+            </a:pPr>
             <a:endParaRPr kumimoji="0" lang="en-GB" sz="1200" b="0" i="0" u="none" strike="noStrike" kern="1200" cap="none" spc="0" normalizeH="0" baseline="0" noProof="0" dirty="0">
               <a:ln>
                 <a:noFill/>
               </a:ln>
               <a:solidFill>
-                <a:prstClr val="white"/>
+                <a:srgbClr val="CDD6F4"/>
               </a:solidFill>
               <a:effectLst/>
               <a:uLnTx/>
@@ -7273,7 +7306,7 @@
                   <a:noFill/>
                 </a:ln>
                 <a:solidFill>
-                  <a:prstClr val="white"/>
+                  <a:srgbClr val="89B4FA"/>
                 </a:solidFill>
                 <a:effectLst/>
                 <a:uLnTx/>
@@ -7299,7 +7332,7 @@
                   <a:noFill/>
                 </a:ln>
                 <a:solidFill>
-                  <a:prstClr val="white"/>
+                  <a:srgbClr val="CDD6F4"/>
                 </a:solidFill>
                 <a:effectLst/>
                 <a:uLnTx/>
@@ -7313,7 +7346,7 @@
             <a:r>
               <a:rPr lang="en-GB" sz="1200" dirty="0">
                 <a:solidFill>
-                  <a:prstClr val="white"/>
+                  <a:srgbClr val="CDD6F4"/>
                 </a:solidFill>
                 <a:latin typeface="JetBrains Mono" panose="02000009000000000000" pitchFamily="49" charset="0"/>
                 <a:ea typeface="JetBrains Mono" panose="02000009000000000000" pitchFamily="49" charset="0"/>
@@ -7327,7 +7360,7 @@
                   <a:noFill/>
                 </a:ln>
                 <a:solidFill>
-                  <a:prstClr val="white"/>
+                  <a:srgbClr val="CDD6F4"/>
                 </a:solidFill>
                 <a:effectLst/>
                 <a:uLnTx/>
@@ -7344,7 +7377,7 @@
                   <a:noFill/>
                 </a:ln>
                 <a:solidFill>
-                  <a:prstClr val="white"/>
+                  <a:srgbClr val="CDD6F4"/>
                 </a:solidFill>
                 <a:effectLst/>
                 <a:uLnTx/>
@@ -7360,7 +7393,7 @@
                   <a:noFill/>
                 </a:ln>
                 <a:solidFill>
-                  <a:prstClr val="white"/>
+                  <a:srgbClr val="CDD6F4"/>
                 </a:solidFill>
                 <a:effectLst/>
                 <a:uLnTx/>
@@ -7395,7 +7428,7 @@
                 <a:noFill/>
               </a:ln>
               <a:solidFill>
-                <a:prstClr val="white"/>
+                <a:srgbClr val="CDD6F4"/>
               </a:solidFill>
               <a:effectLst/>
               <a:uLnTx/>
@@ -7429,7 +7462,7 @@
                   <a:noFill/>
                 </a:ln>
                 <a:solidFill>
-                  <a:prstClr val="white"/>
+                  <a:srgbClr val="A6E3A1"/>
                 </a:solidFill>
                 <a:effectLst/>
                 <a:uLnTx/>
@@ -7465,7 +7498,7 @@
                   <a:noFill/>
                 </a:ln>
                 <a:solidFill>
-                  <a:prstClr val="white"/>
+                  <a:srgbClr val="CDD6F4"/>
                 </a:solidFill>
                 <a:effectLst/>
                 <a:uLnTx/>
@@ -7482,7 +7515,7 @@
                   <a:noFill/>
                 </a:ln>
                 <a:solidFill>
-                  <a:prstClr val="white"/>
+                  <a:srgbClr val="CDD6F4"/>
                 </a:solidFill>
                 <a:effectLst/>
                 <a:uLnTx/>
@@ -7496,7 +7529,7 @@
             <a:r>
               <a:rPr lang="en-GB" sz="1200" dirty="0">
                 <a:solidFill>
-                  <a:prstClr val="white"/>
+                  <a:srgbClr val="CDD6F4"/>
                 </a:solidFill>
                 <a:latin typeface="JetBrains Mono" panose="02000009000000000000" pitchFamily="49" charset="0"/>
                 <a:ea typeface="JetBrains Mono" panose="02000009000000000000" pitchFamily="49" charset="0"/>
@@ -7510,7 +7543,7 @@
                   <a:noFill/>
                 </a:ln>
                 <a:solidFill>
-                  <a:prstClr val="white"/>
+                  <a:srgbClr val="CDD6F4"/>
                 </a:solidFill>
                 <a:effectLst/>
                 <a:uLnTx/>
@@ -7527,7 +7560,7 @@
                   <a:noFill/>
                 </a:ln>
                 <a:solidFill>
-                  <a:prstClr val="white"/>
+                  <a:srgbClr val="CDD6F4"/>
                 </a:solidFill>
                 <a:effectLst/>
                 <a:uLnTx/>
@@ -7544,7 +7577,7 @@
                   <a:noFill/>
                 </a:ln>
                 <a:solidFill>
-                  <a:prstClr val="white"/>
+                  <a:srgbClr val="CDD6F4"/>
                 </a:solidFill>
                 <a:effectLst/>
                 <a:uLnTx/>
@@ -7561,7 +7594,7 @@
                   <a:noFill/>
                 </a:ln>
                 <a:solidFill>
-                  <a:prstClr val="white"/>
+                  <a:srgbClr val="CDD6F4"/>
                 </a:solidFill>
                 <a:effectLst/>
                 <a:uLnTx/>
@@ -7575,7 +7608,7 @@
             <a:r>
               <a:rPr lang="en-GB" sz="1200" dirty="0">
                 <a:solidFill>
-                  <a:prstClr val="white"/>
+                  <a:srgbClr val="CDD6F4"/>
                 </a:solidFill>
                 <a:latin typeface="JetBrains Mono" panose="02000009000000000000" pitchFamily="49" charset="0"/>
                 <a:ea typeface="JetBrains Mono" panose="02000009000000000000" pitchFamily="49" charset="0"/>
@@ -7589,7 +7622,7 @@
                   <a:noFill/>
                 </a:ln>
                 <a:solidFill>
-                  <a:prstClr val="white"/>
+                  <a:srgbClr val="CDD6F4"/>
                 </a:solidFill>
                 <a:effectLst/>
                 <a:uLnTx/>
@@ -7606,7 +7639,7 @@
                   <a:noFill/>
                 </a:ln>
                 <a:solidFill>
-                  <a:prstClr val="white"/>
+                  <a:srgbClr val="CDD6F4"/>
                 </a:solidFill>
                 <a:effectLst/>
                 <a:uLnTx/>
@@ -7623,7 +7656,7 @@
                   <a:noFill/>
                 </a:ln>
                 <a:solidFill>
-                  <a:prstClr val="white"/>
+                  <a:srgbClr val="CDD6F4"/>
                 </a:solidFill>
                 <a:effectLst/>
                 <a:uLnTx/>
@@ -7637,7 +7670,7 @@
             <a:r>
               <a:rPr lang="en-GB" sz="1200" dirty="0">
                 <a:solidFill>
-                  <a:prstClr val="white"/>
+                  <a:srgbClr val="CDD6F4"/>
                 </a:solidFill>
                 <a:latin typeface="JetBrains Mono" panose="02000009000000000000" pitchFamily="49" charset="0"/>
                 <a:ea typeface="JetBrains Mono" panose="02000009000000000000" pitchFamily="49" charset="0"/>
@@ -7650,7 +7683,7 @@
                 <a:noFill/>
               </a:ln>
               <a:solidFill>
-                <a:prstClr val="white"/>
+                <a:srgbClr val="CDD6F4"/>
               </a:solidFill>
               <a:effectLst/>
               <a:uLnTx/>
@@ -7773,7 +7806,7 @@
             <a:r>
               <a:rPr lang="en-GB" sz="2800" dirty="0">
                 <a:solidFill>
-                  <a:schemeClr val="bg1"/>
+                  <a:srgbClr val="B4BEFE"/>
                 </a:solidFill>
                 <a:latin typeface="JetBrains Mono" panose="02000009000000000000" pitchFamily="49" charset="0"/>
                 <a:ea typeface="JetBrains Mono" panose="02000009000000000000" pitchFamily="49" charset="0"/>
@@ -7803,7 +7836,7 @@
         <p:spPr>
           <a:xfrm>
             <a:off x="838200" y="819150"/>
-            <a:ext cx="5314950" cy="5357813"/>
+            <a:ext cx="5314950" cy="6038850"/>
           </a:xfrm>
         </p:spPr>
         <p:txBody>
@@ -7818,47 +7851,9 @@
               </a:lnSpc>
               <a:buNone/>
             </a:pPr>
-            <a:r>
-              <a:rPr lang="en-GB" sz="1600" b="1" dirty="0">
-                <a:solidFill>
-                  <a:schemeClr val="bg1"/>
-                </a:solidFill>
-                <a:latin typeface="JetBrains Mono" panose="02000009000000000000" pitchFamily="49" charset="0"/>
-                <a:ea typeface="JetBrains Mono" panose="02000009000000000000" pitchFamily="49" charset="0"/>
-                <a:cs typeface="JetBrains Mono" panose="02000009000000000000" pitchFamily="49" charset="0"/>
-              </a:rPr>
-              <a:t>Hypothesis</a:t>
-            </a:r>
-          </a:p>
-          <a:p>
-            <a:pPr marL="0" indent="0">
-              <a:lnSpc>
-                <a:spcPct val="100000"/>
-              </a:lnSpc>
-              <a:buNone/>
-            </a:pPr>
-            <a:r>
-              <a:rPr lang="en-GB" sz="1200" dirty="0">
-                <a:solidFill>
-                  <a:schemeClr val="bg1"/>
-                </a:solidFill>
-                <a:latin typeface="JetBrains Mono" panose="02000009000000000000" pitchFamily="49" charset="0"/>
-                <a:ea typeface="JetBrains Mono" panose="02000009000000000000" pitchFamily="49" charset="0"/>
-                <a:cs typeface="JetBrains Mono" panose="02000009000000000000" pitchFamily="49" charset="0"/>
-              </a:rPr>
-              <a:t>Increasing vector length will improve performance by reducing the number of cycles taken to complete.</a:t>
-            </a:r>
-          </a:p>
-          <a:p>
-            <a:pPr marL="0" indent="0">
-              <a:lnSpc>
-                <a:spcPct val="100000"/>
-              </a:lnSpc>
-              <a:buNone/>
-            </a:pPr>
-            <a:endParaRPr lang="en-GB" sz="1200" dirty="0">
+            <a:endParaRPr lang="en-GB" sz="1600" b="1" dirty="0">
               <a:solidFill>
-                <a:schemeClr val="bg1"/>
+                <a:srgbClr val="A6E3A1"/>
               </a:solidFill>
               <a:latin typeface="JetBrains Mono" panose="02000009000000000000" pitchFamily="49" charset="0"/>
               <a:ea typeface="JetBrains Mono" panose="02000009000000000000" pitchFamily="49" charset="0"/>
@@ -7875,13 +7870,13 @@
             <a:r>
               <a:rPr lang="en-GB" sz="1600" b="1" dirty="0">
                 <a:solidFill>
-                  <a:schemeClr val="bg1"/>
-                </a:solidFill>
-                <a:latin typeface="JetBrains Mono" panose="02000009000000000000" pitchFamily="49" charset="0"/>
-                <a:ea typeface="JetBrains Mono" panose="02000009000000000000" pitchFamily="49" charset="0"/>
-                <a:cs typeface="JetBrains Mono" panose="02000009000000000000" pitchFamily="49" charset="0"/>
-              </a:rPr>
-              <a:t>Experiment</a:t>
+                  <a:srgbClr val="CBA6F7"/>
+                </a:solidFill>
+                <a:latin typeface="JetBrains Mono" panose="02000009000000000000" pitchFamily="49" charset="0"/>
+                <a:ea typeface="JetBrains Mono" panose="02000009000000000000" pitchFamily="49" charset="0"/>
+                <a:cs typeface="JetBrains Mono" panose="02000009000000000000" pitchFamily="49" charset="0"/>
+              </a:rPr>
+              <a:t>Hypothesis</a:t>
             </a:r>
           </a:p>
           <a:p>
@@ -7894,34 +7889,13 @@
             <a:r>
               <a:rPr lang="en-GB" sz="1200" dirty="0">
                 <a:solidFill>
-                  <a:schemeClr val="bg1"/>
-                </a:solidFill>
-                <a:latin typeface="JetBrains Mono" panose="02000009000000000000" pitchFamily="49" charset="0"/>
-                <a:ea typeface="JetBrains Mono" panose="02000009000000000000" pitchFamily="49" charset="0"/>
-                <a:cs typeface="JetBrains Mono" panose="02000009000000000000" pitchFamily="49" charset="0"/>
-              </a:rPr>
-              <a:t>The four SIMD-friendly benchmarks were executed in four different configurations: a scalar baseline (2-width), and vectorised with VLEN=128, VLEN=256, and VLEN=512.</a:t>
-            </a:r>
-            <a:br>
-              <a:rPr lang="en-GB" sz="1200" dirty="0">
-                <a:solidFill>
-                  <a:schemeClr val="bg1"/>
-                </a:solidFill>
-                <a:latin typeface="JetBrains Mono" panose="02000009000000000000" pitchFamily="49" charset="0"/>
-                <a:ea typeface="JetBrains Mono" panose="02000009000000000000" pitchFamily="49" charset="0"/>
-                <a:cs typeface="JetBrains Mono" panose="02000009000000000000" pitchFamily="49" charset="0"/>
-              </a:rPr>
-            </a:br>
-            <a:r>
-              <a:rPr lang="en-GB" sz="1200" dirty="0">
-                <a:solidFill>
-                  <a:schemeClr val="bg1"/>
-                </a:solidFill>
-                <a:latin typeface="JetBrains Mono" panose="02000009000000000000" pitchFamily="49" charset="0"/>
-                <a:ea typeface="JetBrains Mono" panose="02000009000000000000" pitchFamily="49" charset="0"/>
-                <a:cs typeface="JetBrains Mono" panose="02000009000000000000" pitchFamily="49" charset="0"/>
-              </a:rPr>
-              <a:t>Ratio of number of cycles taken to complete vs the baseline was calculated in each vectorised case.</a:t>
+                  <a:srgbClr val="CDD6F4"/>
+                </a:solidFill>
+                <a:latin typeface="JetBrains Mono" panose="02000009000000000000" pitchFamily="49" charset="0"/>
+                <a:ea typeface="JetBrains Mono" panose="02000009000000000000" pitchFamily="49" charset="0"/>
+                <a:cs typeface="JetBrains Mono" panose="02000009000000000000" pitchFamily="49" charset="0"/>
+              </a:rPr>
+              <a:t>Increasing vector length will improve performance by reducing the number of cycles taken to complete.</a:t>
             </a:r>
           </a:p>
           <a:p>
@@ -7933,7 +7907,7 @@
             </a:pPr>
             <a:endParaRPr lang="en-GB" sz="1200" dirty="0">
               <a:solidFill>
-                <a:schemeClr val="bg1"/>
+                <a:srgbClr val="CDD6F4"/>
               </a:solidFill>
               <a:latin typeface="JetBrains Mono" panose="02000009000000000000" pitchFamily="49" charset="0"/>
               <a:ea typeface="JetBrains Mono" panose="02000009000000000000" pitchFamily="49" charset="0"/>
@@ -7950,7 +7924,82 @@
             <a:r>
               <a:rPr lang="en-GB" sz="1600" b="1" dirty="0">
                 <a:solidFill>
-                  <a:schemeClr val="bg1"/>
+                  <a:srgbClr val="89B4FA"/>
+                </a:solidFill>
+                <a:latin typeface="JetBrains Mono" panose="02000009000000000000" pitchFamily="49" charset="0"/>
+                <a:ea typeface="JetBrains Mono" panose="02000009000000000000" pitchFamily="49" charset="0"/>
+                <a:cs typeface="JetBrains Mono" panose="02000009000000000000" pitchFamily="49" charset="0"/>
+              </a:rPr>
+              <a:t>Experiment</a:t>
+            </a:r>
+          </a:p>
+          <a:p>
+            <a:pPr marL="0" indent="0">
+              <a:lnSpc>
+                <a:spcPct val="100000"/>
+              </a:lnSpc>
+              <a:buNone/>
+            </a:pPr>
+            <a:r>
+              <a:rPr lang="en-GB" sz="1200" dirty="0">
+                <a:solidFill>
+                  <a:srgbClr val="CDD6F4"/>
+                </a:solidFill>
+                <a:latin typeface="JetBrains Mono" panose="02000009000000000000" pitchFamily="49" charset="0"/>
+                <a:ea typeface="JetBrains Mono" panose="02000009000000000000" pitchFamily="49" charset="0"/>
+                <a:cs typeface="JetBrains Mono" panose="02000009000000000000" pitchFamily="49" charset="0"/>
+              </a:rPr>
+              <a:t>The four SIMD-friendly benchmarks were executed in four different configurations: a scalar baseline (2-width), and vectorised with VLEN=128, VLEN=256, and VLEN=512.</a:t>
+            </a:r>
+            <a:br>
+              <a:rPr lang="en-GB" sz="1200" dirty="0">
+                <a:solidFill>
+                  <a:srgbClr val="CDD6F4"/>
+                </a:solidFill>
+                <a:latin typeface="JetBrains Mono" panose="02000009000000000000" pitchFamily="49" charset="0"/>
+                <a:ea typeface="JetBrains Mono" panose="02000009000000000000" pitchFamily="49" charset="0"/>
+                <a:cs typeface="JetBrains Mono" panose="02000009000000000000" pitchFamily="49" charset="0"/>
+              </a:rPr>
+            </a:br>
+            <a:r>
+              <a:rPr lang="en-GB" sz="1200" dirty="0">
+                <a:solidFill>
+                  <a:srgbClr val="CDD6F4"/>
+                </a:solidFill>
+                <a:latin typeface="JetBrains Mono" panose="02000009000000000000" pitchFamily="49" charset="0"/>
+                <a:ea typeface="JetBrains Mono" panose="02000009000000000000" pitchFamily="49" charset="0"/>
+                <a:cs typeface="JetBrains Mono" panose="02000009000000000000" pitchFamily="49" charset="0"/>
+              </a:rPr>
+              <a:t>Ratio of number of cycles taken to complete vs the baseline was calculated in each vectorised case.</a:t>
+            </a:r>
+          </a:p>
+          <a:p>
+            <a:pPr marL="0" indent="0">
+              <a:lnSpc>
+                <a:spcPct val="100000"/>
+              </a:lnSpc>
+              <a:buNone/>
+            </a:pPr>
+            <a:endParaRPr lang="en-GB" sz="1200" dirty="0">
+              <a:solidFill>
+                <a:srgbClr val="CDD6F4"/>
+              </a:solidFill>
+              <a:latin typeface="JetBrains Mono" panose="02000009000000000000" pitchFamily="49" charset="0"/>
+              <a:ea typeface="JetBrains Mono" panose="02000009000000000000" pitchFamily="49" charset="0"/>
+              <a:cs typeface="JetBrains Mono" panose="02000009000000000000" pitchFamily="49" charset="0"/>
+            </a:endParaRPr>
+          </a:p>
+          <a:p>
+            <a:pPr marL="0" indent="0">
+              <a:lnSpc>
+                <a:spcPct val="100000"/>
+              </a:lnSpc>
+              <a:buNone/>
+            </a:pPr>
+            <a:r>
+              <a:rPr lang="en-GB" sz="1600" b="1" dirty="0">
+                <a:solidFill>
+                  <a:srgbClr val="A6E3A1"/>
                 </a:solidFill>
                 <a:latin typeface="JetBrains Mono" panose="02000009000000000000" pitchFamily="49" charset="0"/>
                 <a:ea typeface="JetBrains Mono" panose="02000009000000000000" pitchFamily="49" charset="0"/>
@@ -7969,7 +8018,7 @@
             <a:r>
               <a:rPr lang="en-GB" sz="1200" dirty="0">
                 <a:solidFill>
-                  <a:schemeClr val="bg1"/>
+                  <a:srgbClr val="CDD6F4"/>
                 </a:solidFill>
                 <a:latin typeface="JetBrains Mono" panose="02000009000000000000" pitchFamily="49" charset="0"/>
                 <a:ea typeface="JetBrains Mono" panose="02000009000000000000" pitchFamily="49" charset="0"/>
@@ -7988,35 +8037,13 @@
             <a:r>
               <a:rPr lang="en-GB" sz="1200" dirty="0">
                 <a:solidFill>
-                  <a:schemeClr val="bg1"/>
-                </a:solidFill>
-                <a:latin typeface="JetBrains Mono" panose="02000009000000000000" pitchFamily="49" charset="0"/>
-                <a:ea typeface="JetBrains Mono" panose="02000009000000000000" pitchFamily="49" charset="0"/>
-                <a:cs typeface="JetBrains Mono" panose="02000009000000000000" pitchFamily="49" charset="0"/>
-              </a:rPr>
-              <a:t>Benchmarks reach a peak </a:t>
-            </a:r>
-            <a:r>
-              <a:rPr lang="en-GB" sz="1200">
-                <a:solidFill>
-                  <a:schemeClr val="bg1"/>
-                </a:solidFill>
-                <a:latin typeface="JetBrains Mono" panose="02000009000000000000" pitchFamily="49" charset="0"/>
-                <a:ea typeface="JetBrains Mono" panose="02000009000000000000" pitchFamily="49" charset="0"/>
-                <a:cs typeface="JetBrains Mono" panose="02000009000000000000" pitchFamily="49" charset="0"/>
-              </a:rPr>
-              <a:t>of almost </a:t>
-            </a:r>
-            <a:r>
-              <a:rPr lang="en-GB" sz="1200" dirty="0">
-                <a:solidFill>
-                  <a:schemeClr val="bg1"/>
-                </a:solidFill>
-                <a:latin typeface="JetBrains Mono" panose="02000009000000000000" pitchFamily="49" charset="0"/>
-                <a:ea typeface="JetBrains Mono" panose="02000009000000000000" pitchFamily="49" charset="0"/>
-                <a:cs typeface="JetBrains Mono" panose="02000009000000000000" pitchFamily="49" charset="0"/>
-              </a:rPr>
-              <a:t>16x speedup at VLEN=512, due to processing 16 elements (VLEN / 32-bit) per iteration instead of just 1 in the scalar case.</a:t>
+                  <a:srgbClr val="CDD6F4"/>
+                </a:solidFill>
+                <a:latin typeface="JetBrains Mono" panose="02000009000000000000" pitchFamily="49" charset="0"/>
+                <a:ea typeface="JetBrains Mono" panose="02000009000000000000" pitchFamily="49" charset="0"/>
+                <a:cs typeface="JetBrains Mono" panose="02000009000000000000" pitchFamily="49" charset="0"/>
+              </a:rPr>
+              <a:t>Benchmarks reach a peak of almost 16x speedup at VLEN=512, due to processing 16 elements (VLEN / 32-bit) per iteration instead of just 1 in the scalar case.</a:t>
             </a:r>
           </a:p>
         </p:txBody>
